--- a/slides/speaker2.pptx
+++ b/slides/speaker2.pptx
@@ -1,20 +1,35 @@
 
 <file path=ppt/presentation.xml><?xml version="1.0" encoding="utf-8"?>
-<p:presentation xmlns:a="http://schemas.openxmlformats.org/drawingml/2006/main" xmlns:r="http://schemas.openxmlformats.org/officeDocument/2006/relationships" xmlns:p="http://schemas.openxmlformats.org/presentationml/2006/main" saveSubsetFonts="1">
+<p:presentation xmlns:a="http://schemas.openxmlformats.org/drawingml/2006/main" xmlns:r="http://schemas.openxmlformats.org/officeDocument/2006/relationships" xmlns:p="http://schemas.openxmlformats.org/presentationml/2006/main" saveSubsetFonts="1" autoCompressPictures="0">
   <p:sldMasterIdLst>
-    <p:sldMasterId id="2147483648" r:id="rId1"/>
+    <p:sldMasterId id="2147483791" r:id="rId1"/>
   </p:sldMasterIdLst>
+  <p:notesMasterIdLst>
+    <p:notesMasterId r:id="rId16"/>
+  </p:notesMasterIdLst>
   <p:sldIdLst>
     <p:sldId id="256" r:id="rId2"/>
     <p:sldId id="257" r:id="rId3"/>
+    <p:sldId id="258" r:id="rId4"/>
+    <p:sldId id="259" r:id="rId5"/>
+    <p:sldId id="269" r:id="rId6"/>
+    <p:sldId id="260" r:id="rId7"/>
+    <p:sldId id="261" r:id="rId8"/>
+    <p:sldId id="268" r:id="rId9"/>
+    <p:sldId id="263" r:id="rId10"/>
+    <p:sldId id="264" r:id="rId11"/>
+    <p:sldId id="265" r:id="rId12"/>
+    <p:sldId id="270" r:id="rId13"/>
+    <p:sldId id="266" r:id="rId14"/>
+    <p:sldId id="267" r:id="rId15"/>
   </p:sldIdLst>
-  <p:sldSz cx="12192000" cy="6858000"/>
+  <p:sldSz cx="9144000" cy="6858000" type="screen4x3"/>
   <p:notesSz cx="6858000" cy="9144000"/>
   <p:defaultTextStyle>
     <a:defPPr>
-      <a:defRPr lang="zh-TW"/>
+      <a:defRPr lang="en-US"/>
     </a:defPPr>
-    <a:lvl1pPr marL="0" algn="l" defTabSz="914400" rtl="0" eaLnBrk="1" latinLnBrk="0" hangingPunct="1">
+    <a:lvl1pPr marL="0" algn="l" defTabSz="457200" rtl="0" eaLnBrk="1" latinLnBrk="0" hangingPunct="1">
       <a:defRPr sz="1800" kern="1200">
         <a:solidFill>
           <a:schemeClr val="tx1"/>
@@ -24,7 +39,7 @@
         <a:cs typeface="+mn-cs"/>
       </a:defRPr>
     </a:lvl1pPr>
-    <a:lvl2pPr marL="457200" algn="l" defTabSz="914400" rtl="0" eaLnBrk="1" latinLnBrk="0" hangingPunct="1">
+    <a:lvl2pPr marL="457200" algn="l" defTabSz="457200" rtl="0" eaLnBrk="1" latinLnBrk="0" hangingPunct="1">
       <a:defRPr sz="1800" kern="1200">
         <a:solidFill>
           <a:schemeClr val="tx1"/>
@@ -34,7 +49,7 @@
         <a:cs typeface="+mn-cs"/>
       </a:defRPr>
     </a:lvl2pPr>
-    <a:lvl3pPr marL="914400" algn="l" defTabSz="914400" rtl="0" eaLnBrk="1" latinLnBrk="0" hangingPunct="1">
+    <a:lvl3pPr marL="914400" algn="l" defTabSz="457200" rtl="0" eaLnBrk="1" latinLnBrk="0" hangingPunct="1">
       <a:defRPr sz="1800" kern="1200">
         <a:solidFill>
           <a:schemeClr val="tx1"/>
@@ -44,7 +59,7 @@
         <a:cs typeface="+mn-cs"/>
       </a:defRPr>
     </a:lvl3pPr>
-    <a:lvl4pPr marL="1371600" algn="l" defTabSz="914400" rtl="0" eaLnBrk="1" latinLnBrk="0" hangingPunct="1">
+    <a:lvl4pPr marL="1371600" algn="l" defTabSz="457200" rtl="0" eaLnBrk="1" latinLnBrk="0" hangingPunct="1">
       <a:defRPr sz="1800" kern="1200">
         <a:solidFill>
           <a:schemeClr val="tx1"/>
@@ -54,7 +69,7 @@
         <a:cs typeface="+mn-cs"/>
       </a:defRPr>
     </a:lvl4pPr>
-    <a:lvl5pPr marL="1828800" algn="l" defTabSz="914400" rtl="0" eaLnBrk="1" latinLnBrk="0" hangingPunct="1">
+    <a:lvl5pPr marL="1828800" algn="l" defTabSz="457200" rtl="0" eaLnBrk="1" latinLnBrk="0" hangingPunct="1">
       <a:defRPr sz="1800" kern="1200">
         <a:solidFill>
           <a:schemeClr val="tx1"/>
@@ -64,7 +79,7 @@
         <a:cs typeface="+mn-cs"/>
       </a:defRPr>
     </a:lvl5pPr>
-    <a:lvl6pPr marL="2286000" algn="l" defTabSz="914400" rtl="0" eaLnBrk="1" latinLnBrk="0" hangingPunct="1">
+    <a:lvl6pPr marL="2286000" algn="l" defTabSz="457200" rtl="0" eaLnBrk="1" latinLnBrk="0" hangingPunct="1">
       <a:defRPr sz="1800" kern="1200">
         <a:solidFill>
           <a:schemeClr val="tx1"/>
@@ -74,7 +89,7 @@
         <a:cs typeface="+mn-cs"/>
       </a:defRPr>
     </a:lvl6pPr>
-    <a:lvl7pPr marL="2743200" algn="l" defTabSz="914400" rtl="0" eaLnBrk="1" latinLnBrk="0" hangingPunct="1">
+    <a:lvl7pPr marL="2743200" algn="l" defTabSz="457200" rtl="0" eaLnBrk="1" latinLnBrk="0" hangingPunct="1">
       <a:defRPr sz="1800" kern="1200">
         <a:solidFill>
           <a:schemeClr val="tx1"/>
@@ -84,7 +99,7 @@
         <a:cs typeface="+mn-cs"/>
       </a:defRPr>
     </a:lvl7pPr>
-    <a:lvl8pPr marL="3200400" algn="l" defTabSz="914400" rtl="0" eaLnBrk="1" latinLnBrk="0" hangingPunct="1">
+    <a:lvl8pPr marL="3200400" algn="l" defTabSz="457200" rtl="0" eaLnBrk="1" latinLnBrk="0" hangingPunct="1">
       <a:defRPr sz="1800" kern="1200">
         <a:solidFill>
           <a:schemeClr val="tx1"/>
@@ -94,7 +109,7 @@
         <a:cs typeface="+mn-cs"/>
       </a:defRPr>
     </a:lvl8pPr>
-    <a:lvl9pPr marL="3657600" algn="l" defTabSz="914400" rtl="0" eaLnBrk="1" latinLnBrk="0" hangingPunct="1">
+    <a:lvl9pPr marL="3657600" algn="l" defTabSz="457200" rtl="0" eaLnBrk="1" latinLnBrk="0" hangingPunct="1">
       <a:defRPr sz="1800" kern="1200">
         <a:solidFill>
           <a:schemeClr val="tx1"/>
@@ -107,10 +122,2530 @@
   </p:defaultTextStyle>
   <p:extLst>
     <p:ext uri="{EFAFB233-063F-42B5-8137-9DF3F51BA10A}">
-      <p15:sldGuideLst xmlns:p15="http://schemas.microsoft.com/office/powerpoint/2012/main"/>
+      <p15:sldGuideLst xmlns:p15="http://schemas.microsoft.com/office/powerpoint/2012/main">
+        <p15:guide id="1" orient="horz" pos="2160">
+          <p15:clr>
+            <a:srgbClr val="A4A3A4"/>
+          </p15:clr>
+        </p15:guide>
+        <p15:guide id="2" pos="2880">
+          <p15:clr>
+            <a:srgbClr val="A4A3A4"/>
+          </p15:clr>
+        </p15:guide>
+      </p15:sldGuideLst>
     </p:ext>
   </p:extLst>
 </p:presentation>
+</file>
+
+<file path=ppt/notesMasters/notesMaster1.xml><?xml version="1.0" encoding="utf-8"?>
+<p:notesMaster xmlns:a="http://schemas.openxmlformats.org/drawingml/2006/main" xmlns:r="http://schemas.openxmlformats.org/officeDocument/2006/relationships" xmlns:p="http://schemas.openxmlformats.org/presentationml/2006/main">
+  <p:cSld>
+    <p:bg>
+      <p:bgRef idx="1001">
+        <a:schemeClr val="bg1"/>
+      </p:bgRef>
+    </p:bg>
+    <p:spTree>
+      <p:nvGrpSpPr>
+        <p:cNvPr id="1" name=""/>
+        <p:cNvGrpSpPr/>
+        <p:nvPr/>
+      </p:nvGrpSpPr>
+      <p:grpSpPr>
+        <a:xfrm>
+          <a:off x="0" y="0"/>
+          <a:ext cx="0" cy="0"/>
+          <a:chOff x="0" y="0"/>
+          <a:chExt cx="0" cy="0"/>
+        </a:xfrm>
+      </p:grpSpPr>
+      <p:sp>
+        <p:nvSpPr>
+          <p:cNvPr id="2" name="頁首版面配置區 1"/>
+          <p:cNvSpPr>
+            <a:spLocks noGrp="1"/>
+          </p:cNvSpPr>
+          <p:nvPr>
+            <p:ph type="hdr" sz="quarter"/>
+          </p:nvPr>
+        </p:nvSpPr>
+        <p:spPr>
+          <a:xfrm>
+            <a:off x="0" y="0"/>
+            <a:ext cx="2971800" cy="458788"/>
+          </a:xfrm>
+          <a:prstGeom prst="rect">
+            <a:avLst/>
+          </a:prstGeom>
+        </p:spPr>
+        <p:txBody>
+          <a:bodyPr vert="horz" lIns="91440" tIns="45720" rIns="91440" bIns="45720" rtlCol="0"/>
+          <a:lstStyle>
+            <a:lvl1pPr algn="l">
+              <a:defRPr sz="1200"/>
+            </a:lvl1pPr>
+          </a:lstStyle>
+          <a:p>
+            <a:endParaRPr lang="zh-TW" altLang="en-US"/>
+          </a:p>
+        </p:txBody>
+      </p:sp>
+      <p:sp>
+        <p:nvSpPr>
+          <p:cNvPr id="3" name="日期版面配置區 2"/>
+          <p:cNvSpPr>
+            <a:spLocks noGrp="1"/>
+          </p:cNvSpPr>
+          <p:nvPr>
+            <p:ph type="dt" idx="1"/>
+          </p:nvPr>
+        </p:nvSpPr>
+        <p:spPr>
+          <a:xfrm>
+            <a:off x="3884613" y="0"/>
+            <a:ext cx="2971800" cy="458788"/>
+          </a:xfrm>
+          <a:prstGeom prst="rect">
+            <a:avLst/>
+          </a:prstGeom>
+        </p:spPr>
+        <p:txBody>
+          <a:bodyPr vert="horz" lIns="91440" tIns="45720" rIns="91440" bIns="45720" rtlCol="0"/>
+          <a:lstStyle>
+            <a:lvl1pPr algn="r">
+              <a:defRPr sz="1200"/>
+            </a:lvl1pPr>
+          </a:lstStyle>
+          <a:p>
+            <a:fld id="{1413806B-076E-41F8-8013-5FD802C59FD7}" type="datetimeFigureOut">
+              <a:rPr lang="zh-TW" altLang="en-US" smtClean="0"/>
+              <a:t>2025/12/8</a:t>
+            </a:fld>
+            <a:endParaRPr lang="zh-TW" altLang="en-US"/>
+          </a:p>
+        </p:txBody>
+      </p:sp>
+      <p:sp>
+        <p:nvSpPr>
+          <p:cNvPr id="4" name="投影片影像版面配置區 3"/>
+          <p:cNvSpPr>
+            <a:spLocks noGrp="1" noRot="1" noChangeAspect="1"/>
+          </p:cNvSpPr>
+          <p:nvPr>
+            <p:ph type="sldImg" idx="2"/>
+          </p:nvPr>
+        </p:nvSpPr>
+        <p:spPr>
+          <a:xfrm>
+            <a:off x="1371600" y="1143000"/>
+            <a:ext cx="4114800" cy="3086100"/>
+          </a:xfrm>
+          <a:prstGeom prst="rect">
+            <a:avLst/>
+          </a:prstGeom>
+          <a:noFill/>
+          <a:ln w="12700">
+            <a:solidFill>
+              <a:prstClr val="black"/>
+            </a:solidFill>
+          </a:ln>
+        </p:spPr>
+        <p:txBody>
+          <a:bodyPr vert="horz" lIns="91440" tIns="45720" rIns="91440" bIns="45720" rtlCol="0" anchor="ctr"/>
+          <a:lstStyle/>
+          <a:p>
+            <a:endParaRPr lang="zh-TW" altLang="en-US"/>
+          </a:p>
+        </p:txBody>
+      </p:sp>
+      <p:sp>
+        <p:nvSpPr>
+          <p:cNvPr id="5" name="備忘稿版面配置區 4"/>
+          <p:cNvSpPr>
+            <a:spLocks noGrp="1"/>
+          </p:cNvSpPr>
+          <p:nvPr>
+            <p:ph type="body" sz="quarter" idx="3"/>
+          </p:nvPr>
+        </p:nvSpPr>
+        <p:spPr>
+          <a:xfrm>
+            <a:off x="685800" y="4400550"/>
+            <a:ext cx="5486400" cy="3600450"/>
+          </a:xfrm>
+          <a:prstGeom prst="rect">
+            <a:avLst/>
+          </a:prstGeom>
+        </p:spPr>
+        <p:txBody>
+          <a:bodyPr vert="horz" lIns="91440" tIns="45720" rIns="91440" bIns="45720" rtlCol="0"/>
+          <a:lstStyle/>
+          <a:p>
+            <a:pPr lvl="0"/>
+            <a:r>
+              <a:rPr lang="zh-TW" altLang="en-US"/>
+              <a:t>按一下以編輯母片文字樣式</a:t>
+            </a:r>
+          </a:p>
+          <a:p>
+            <a:pPr lvl="1"/>
+            <a:r>
+              <a:rPr lang="zh-TW" altLang="en-US"/>
+              <a:t>第二層</a:t>
+            </a:r>
+          </a:p>
+          <a:p>
+            <a:pPr lvl="2"/>
+            <a:r>
+              <a:rPr lang="zh-TW" altLang="en-US"/>
+              <a:t>第三層</a:t>
+            </a:r>
+          </a:p>
+          <a:p>
+            <a:pPr lvl="3"/>
+            <a:r>
+              <a:rPr lang="zh-TW" altLang="en-US"/>
+              <a:t>第四層</a:t>
+            </a:r>
+          </a:p>
+          <a:p>
+            <a:pPr lvl="4"/>
+            <a:r>
+              <a:rPr lang="zh-TW" altLang="en-US"/>
+              <a:t>第五層</a:t>
+            </a:r>
+          </a:p>
+        </p:txBody>
+      </p:sp>
+      <p:sp>
+        <p:nvSpPr>
+          <p:cNvPr id="6" name="頁尾版面配置區 5"/>
+          <p:cNvSpPr>
+            <a:spLocks noGrp="1"/>
+          </p:cNvSpPr>
+          <p:nvPr>
+            <p:ph type="ftr" sz="quarter" idx="4"/>
+          </p:nvPr>
+        </p:nvSpPr>
+        <p:spPr>
+          <a:xfrm>
+            <a:off x="0" y="8685213"/>
+            <a:ext cx="2971800" cy="458787"/>
+          </a:xfrm>
+          <a:prstGeom prst="rect">
+            <a:avLst/>
+          </a:prstGeom>
+        </p:spPr>
+        <p:txBody>
+          <a:bodyPr vert="horz" lIns="91440" tIns="45720" rIns="91440" bIns="45720" rtlCol="0" anchor="b"/>
+          <a:lstStyle>
+            <a:lvl1pPr algn="l">
+              <a:defRPr sz="1200"/>
+            </a:lvl1pPr>
+          </a:lstStyle>
+          <a:p>
+            <a:endParaRPr lang="zh-TW" altLang="en-US"/>
+          </a:p>
+        </p:txBody>
+      </p:sp>
+      <p:sp>
+        <p:nvSpPr>
+          <p:cNvPr id="7" name="投影片編號版面配置區 6"/>
+          <p:cNvSpPr>
+            <a:spLocks noGrp="1"/>
+          </p:cNvSpPr>
+          <p:nvPr>
+            <p:ph type="sldNum" sz="quarter" idx="5"/>
+          </p:nvPr>
+        </p:nvSpPr>
+        <p:spPr>
+          <a:xfrm>
+            <a:off x="3884613" y="8685213"/>
+            <a:ext cx="2971800" cy="458787"/>
+          </a:xfrm>
+          <a:prstGeom prst="rect">
+            <a:avLst/>
+          </a:prstGeom>
+        </p:spPr>
+        <p:txBody>
+          <a:bodyPr vert="horz" lIns="91440" tIns="45720" rIns="91440" bIns="45720" rtlCol="0" anchor="b"/>
+          <a:lstStyle>
+            <a:lvl1pPr algn="r">
+              <a:defRPr sz="1200"/>
+            </a:lvl1pPr>
+          </a:lstStyle>
+          <a:p>
+            <a:fld id="{5EFAEFA6-D827-4D5D-86C2-61CF0414BCEE}" type="slidenum">
+              <a:rPr lang="zh-TW" altLang="en-US" smtClean="0"/>
+              <a:t>‹#›</a:t>
+            </a:fld>
+            <a:endParaRPr lang="zh-TW" altLang="en-US"/>
+          </a:p>
+        </p:txBody>
+      </p:sp>
+    </p:spTree>
+    <p:extLst>
+      <p:ext uri="{BB962C8B-B14F-4D97-AF65-F5344CB8AC3E}">
+        <p14:creationId xmlns:p14="http://schemas.microsoft.com/office/powerpoint/2010/main" val="606899955"/>
+      </p:ext>
+    </p:extLst>
+  </p:cSld>
+  <p:clrMap bg1="lt1" tx1="dk1" bg2="lt2" tx2="dk2" accent1="accent1" accent2="accent2" accent3="accent3" accent4="accent4" accent5="accent5" accent6="accent6" hlink="hlink" folHlink="folHlink"/>
+  <p:notesStyle>
+    <a:lvl1pPr marL="0" algn="l" defTabSz="914400" rtl="0" eaLnBrk="1" latinLnBrk="0" hangingPunct="1">
+      <a:defRPr sz="1200" kern="1200">
+        <a:solidFill>
+          <a:schemeClr val="tx1"/>
+        </a:solidFill>
+        <a:latin typeface="+mn-lt"/>
+        <a:ea typeface="+mn-ea"/>
+        <a:cs typeface="+mn-cs"/>
+      </a:defRPr>
+    </a:lvl1pPr>
+    <a:lvl2pPr marL="457200" algn="l" defTabSz="914400" rtl="0" eaLnBrk="1" latinLnBrk="0" hangingPunct="1">
+      <a:defRPr sz="1200" kern="1200">
+        <a:solidFill>
+          <a:schemeClr val="tx1"/>
+        </a:solidFill>
+        <a:latin typeface="+mn-lt"/>
+        <a:ea typeface="+mn-ea"/>
+        <a:cs typeface="+mn-cs"/>
+      </a:defRPr>
+    </a:lvl2pPr>
+    <a:lvl3pPr marL="914400" algn="l" defTabSz="914400" rtl="0" eaLnBrk="1" latinLnBrk="0" hangingPunct="1">
+      <a:defRPr sz="1200" kern="1200">
+        <a:solidFill>
+          <a:schemeClr val="tx1"/>
+        </a:solidFill>
+        <a:latin typeface="+mn-lt"/>
+        <a:ea typeface="+mn-ea"/>
+        <a:cs typeface="+mn-cs"/>
+      </a:defRPr>
+    </a:lvl3pPr>
+    <a:lvl4pPr marL="1371600" algn="l" defTabSz="914400" rtl="0" eaLnBrk="1" latinLnBrk="0" hangingPunct="1">
+      <a:defRPr sz="1200" kern="1200">
+        <a:solidFill>
+          <a:schemeClr val="tx1"/>
+        </a:solidFill>
+        <a:latin typeface="+mn-lt"/>
+        <a:ea typeface="+mn-ea"/>
+        <a:cs typeface="+mn-cs"/>
+      </a:defRPr>
+    </a:lvl4pPr>
+    <a:lvl5pPr marL="1828800" algn="l" defTabSz="914400" rtl="0" eaLnBrk="1" latinLnBrk="0" hangingPunct="1">
+      <a:defRPr sz="1200" kern="1200">
+        <a:solidFill>
+          <a:schemeClr val="tx1"/>
+        </a:solidFill>
+        <a:latin typeface="+mn-lt"/>
+        <a:ea typeface="+mn-ea"/>
+        <a:cs typeface="+mn-cs"/>
+      </a:defRPr>
+    </a:lvl5pPr>
+    <a:lvl6pPr marL="2286000" algn="l" defTabSz="914400" rtl="0" eaLnBrk="1" latinLnBrk="0" hangingPunct="1">
+      <a:defRPr sz="1200" kern="1200">
+        <a:solidFill>
+          <a:schemeClr val="tx1"/>
+        </a:solidFill>
+        <a:latin typeface="+mn-lt"/>
+        <a:ea typeface="+mn-ea"/>
+        <a:cs typeface="+mn-cs"/>
+      </a:defRPr>
+    </a:lvl6pPr>
+    <a:lvl7pPr marL="2743200" algn="l" defTabSz="914400" rtl="0" eaLnBrk="1" latinLnBrk="0" hangingPunct="1">
+      <a:defRPr sz="1200" kern="1200">
+        <a:solidFill>
+          <a:schemeClr val="tx1"/>
+        </a:solidFill>
+        <a:latin typeface="+mn-lt"/>
+        <a:ea typeface="+mn-ea"/>
+        <a:cs typeface="+mn-cs"/>
+      </a:defRPr>
+    </a:lvl7pPr>
+    <a:lvl8pPr marL="3200400" algn="l" defTabSz="914400" rtl="0" eaLnBrk="1" latinLnBrk="0" hangingPunct="1">
+      <a:defRPr sz="1200" kern="1200">
+        <a:solidFill>
+          <a:schemeClr val="tx1"/>
+        </a:solidFill>
+        <a:latin typeface="+mn-lt"/>
+        <a:ea typeface="+mn-ea"/>
+        <a:cs typeface="+mn-cs"/>
+      </a:defRPr>
+    </a:lvl8pPr>
+    <a:lvl9pPr marL="3657600" algn="l" defTabSz="914400" rtl="0" eaLnBrk="1" latinLnBrk="0" hangingPunct="1">
+      <a:defRPr sz="1200" kern="1200">
+        <a:solidFill>
+          <a:schemeClr val="tx1"/>
+        </a:solidFill>
+        <a:latin typeface="+mn-lt"/>
+        <a:ea typeface="+mn-ea"/>
+        <a:cs typeface="+mn-cs"/>
+      </a:defRPr>
+    </a:lvl9pPr>
+  </p:notesStyle>
+</p:notesMaster>
+</file>
+
+<file path=ppt/notesSlides/notesSlide1.xml><?xml version="1.0" encoding="utf-8"?>
+<p:notes xmlns:a="http://schemas.openxmlformats.org/drawingml/2006/main" xmlns:r="http://schemas.openxmlformats.org/officeDocument/2006/relationships" xmlns:p="http://schemas.openxmlformats.org/presentationml/2006/main">
+  <p:cSld>
+    <p:spTree>
+      <p:nvGrpSpPr>
+        <p:cNvPr id="1" name=""/>
+        <p:cNvGrpSpPr/>
+        <p:nvPr/>
+      </p:nvGrpSpPr>
+      <p:grpSpPr>
+        <a:xfrm>
+          <a:off x="0" y="0"/>
+          <a:ext cx="0" cy="0"/>
+          <a:chOff x="0" y="0"/>
+          <a:chExt cx="0" cy="0"/>
+        </a:xfrm>
+      </p:grpSpPr>
+      <p:sp>
+        <p:nvSpPr>
+          <p:cNvPr id="2" name="投影片影像版面配置區 1"/>
+          <p:cNvSpPr>
+            <a:spLocks noGrp="1" noRot="1" noChangeAspect="1"/>
+          </p:cNvSpPr>
+          <p:nvPr>
+            <p:ph type="sldImg"/>
+          </p:nvPr>
+        </p:nvSpPr>
+        <p:spPr/>
+      </p:sp>
+      <p:sp>
+        <p:nvSpPr>
+          <p:cNvPr id="3" name="備忘稿版面配置區 2"/>
+          <p:cNvSpPr>
+            <a:spLocks noGrp="1"/>
+          </p:cNvSpPr>
+          <p:nvPr>
+            <p:ph type="body" idx="1"/>
+          </p:nvPr>
+        </p:nvSpPr>
+        <p:spPr/>
+        <p:txBody>
+          <a:bodyPr/>
+          <a:lstStyle/>
+          <a:p>
+            <a:r>
+              <a:rPr lang="zh-TW" altLang="en-US" dirty="0"/>
+              <a:t>大家好，我是陳冠閔。</a:t>
+            </a:r>
+            <a:br>
+              <a:rPr lang="zh-TW" altLang="en-US" dirty="0"/>
+            </a:br>
+            <a:r>
+              <a:rPr lang="zh-TW" altLang="en-US" dirty="0"/>
+              <a:t>今天要分享的主題是 </a:t>
+            </a:r>
+            <a:r>
+              <a:rPr lang="en-US" altLang="zh-TW" dirty="0"/>
+              <a:t>GitHub Copilot </a:t>
+            </a:r>
+            <a:r>
+              <a:rPr lang="zh-TW" altLang="en-US" dirty="0"/>
+              <a:t>補全行為與開發者生產力之間的關係。</a:t>
+            </a:r>
+          </a:p>
+          <a:p>
+            <a:r>
+              <a:rPr lang="zh-TW" altLang="en-US" dirty="0"/>
+              <a:t>其實現在很多工程師都在用 </a:t>
+            </a:r>
+            <a:r>
+              <a:rPr lang="en-US" altLang="zh-TW" dirty="0"/>
+              <a:t>Copilot</a:t>
+            </a:r>
+            <a:r>
+              <a:rPr lang="zh-TW" altLang="en-US" dirty="0"/>
+              <a:t>，但它到底有沒有真的幫助我們寫程式？</a:t>
+            </a:r>
+            <a:br>
+              <a:rPr lang="zh-TW" altLang="en-US" dirty="0"/>
+            </a:br>
+            <a:r>
+              <a:rPr lang="zh-TW" altLang="en-US" dirty="0"/>
+              <a:t>什麼補全有用、什麼補全沒用、誰最受益、又在什麼情境下最有效？</a:t>
+            </a:r>
+          </a:p>
+          <a:p>
+            <a:r>
+              <a:rPr lang="zh-TW" altLang="en-US" dirty="0"/>
+              <a:t>這些問題一直都沒有很好的答案，因此今天就透過最新的實證研究來做分享。</a:t>
+            </a:r>
+          </a:p>
+          <a:p>
+            <a:endParaRPr lang="zh-TW" altLang="en-US" dirty="0"/>
+          </a:p>
+        </p:txBody>
+      </p:sp>
+      <p:sp>
+        <p:nvSpPr>
+          <p:cNvPr id="4" name="投影片編號版面配置區 3"/>
+          <p:cNvSpPr>
+            <a:spLocks noGrp="1"/>
+          </p:cNvSpPr>
+          <p:nvPr>
+            <p:ph type="sldNum" sz="quarter" idx="5"/>
+          </p:nvPr>
+        </p:nvSpPr>
+        <p:spPr/>
+        <p:txBody>
+          <a:bodyPr/>
+          <a:lstStyle/>
+          <a:p>
+            <a:fld id="{5EFAEFA6-D827-4D5D-86C2-61CF0414BCEE}" type="slidenum">
+              <a:rPr lang="zh-TW" altLang="en-US" smtClean="0"/>
+              <a:t>1</a:t>
+            </a:fld>
+            <a:endParaRPr lang="zh-TW" altLang="en-US"/>
+          </a:p>
+        </p:txBody>
+      </p:sp>
+    </p:spTree>
+    <p:extLst>
+      <p:ext uri="{BB962C8B-B14F-4D97-AF65-F5344CB8AC3E}">
+        <p14:creationId xmlns:p14="http://schemas.microsoft.com/office/powerpoint/2010/main" val="4083917989"/>
+      </p:ext>
+    </p:extLst>
+  </p:cSld>
+  <p:clrMapOvr>
+    <a:masterClrMapping/>
+  </p:clrMapOvr>
+</p:notes>
+</file>
+
+<file path=ppt/notesSlides/notesSlide10.xml><?xml version="1.0" encoding="utf-8"?>
+<p:notes xmlns:a="http://schemas.openxmlformats.org/drawingml/2006/main" xmlns:r="http://schemas.openxmlformats.org/officeDocument/2006/relationships" xmlns:p="http://schemas.openxmlformats.org/presentationml/2006/main">
+  <p:cSld>
+    <p:spTree>
+      <p:nvGrpSpPr>
+        <p:cNvPr id="1" name=""/>
+        <p:cNvGrpSpPr/>
+        <p:nvPr/>
+      </p:nvGrpSpPr>
+      <p:grpSpPr>
+        <a:xfrm>
+          <a:off x="0" y="0"/>
+          <a:ext cx="0" cy="0"/>
+          <a:chOff x="0" y="0"/>
+          <a:chExt cx="0" cy="0"/>
+        </a:xfrm>
+      </p:grpSpPr>
+      <p:sp>
+        <p:nvSpPr>
+          <p:cNvPr id="2" name="投影片影像版面配置區 1"/>
+          <p:cNvSpPr>
+            <a:spLocks noGrp="1" noRot="1" noChangeAspect="1"/>
+          </p:cNvSpPr>
+          <p:nvPr>
+            <p:ph type="sldImg"/>
+          </p:nvPr>
+        </p:nvSpPr>
+        <p:spPr/>
+      </p:sp>
+      <p:sp>
+        <p:nvSpPr>
+          <p:cNvPr id="3" name="備忘稿版面配置區 2"/>
+          <p:cNvSpPr>
+            <a:spLocks noGrp="1"/>
+          </p:cNvSpPr>
+          <p:nvPr>
+            <p:ph type="body" idx="1"/>
+          </p:nvPr>
+        </p:nvSpPr>
+        <p:spPr/>
+        <p:txBody>
+          <a:bodyPr/>
+          <a:lstStyle/>
+          <a:p>
+            <a:r>
+              <a:rPr lang="zh-TW" altLang="en-US" dirty="0"/>
+              <a:t>不同族群的使用者，其實受益程度也不太一樣。</a:t>
+            </a:r>
+          </a:p>
+          <a:p>
+            <a:r>
+              <a:rPr lang="zh-TW" altLang="en-US" dirty="0"/>
+              <a:t>例如：</a:t>
+            </a:r>
+          </a:p>
+          <a:p>
+            <a:r>
+              <a:rPr lang="zh-TW" altLang="en-US" b="1" dirty="0"/>
+              <a:t>新手工程師</a:t>
+            </a:r>
+            <a:r>
+              <a:rPr lang="zh-TW" altLang="en-US" dirty="0"/>
+              <a:t>：補全接受率高、生產力提升感也高</a:t>
+            </a:r>
+          </a:p>
+          <a:p>
+            <a:r>
+              <a:rPr lang="en-US" altLang="zh-TW" b="1" dirty="0"/>
+              <a:t>3–10 </a:t>
+            </a:r>
+            <a:r>
+              <a:rPr lang="zh-TW" altLang="en-US" b="1" dirty="0"/>
+              <a:t>年經驗的中階工程師</a:t>
+            </a:r>
+            <a:r>
+              <a:rPr lang="zh-TW" altLang="en-US" dirty="0"/>
+              <a:t>：是最受益的一群，因為熟悉語法但又要大量寫樣板</a:t>
+            </a:r>
+          </a:p>
+          <a:p>
+            <a:r>
+              <a:rPr lang="zh-TW" altLang="en-US" b="1" dirty="0"/>
+              <a:t>高年資工程師</a:t>
+            </a:r>
+            <a:r>
+              <a:rPr lang="zh-TW" altLang="en-US" dirty="0"/>
+              <a:t>：效果相對比較弱</a:t>
+            </a:r>
+          </a:p>
+          <a:p>
+            <a:r>
+              <a:rPr lang="zh-TW" altLang="en-US" b="1" dirty="0"/>
+              <a:t>語言面向：</a:t>
+            </a:r>
+            <a:r>
+              <a:rPr lang="en-US" altLang="zh-TW" b="1" dirty="0"/>
+              <a:t>JS </a:t>
+            </a:r>
+            <a:r>
+              <a:rPr lang="zh-TW" altLang="en-US" b="1" dirty="0"/>
+              <a:t>和 </a:t>
+            </a:r>
+            <a:r>
+              <a:rPr lang="en-US" altLang="zh-TW" b="1" dirty="0"/>
+              <a:t>TS </a:t>
+            </a:r>
+            <a:r>
+              <a:rPr lang="zh-TW" altLang="en-US" b="1" dirty="0"/>
+              <a:t>使用者提升最多</a:t>
+            </a:r>
+            <a:br>
+              <a:rPr lang="zh-TW" altLang="en-US" dirty="0"/>
+            </a:br>
+            <a:r>
+              <a:rPr lang="zh-TW" altLang="en-US" dirty="0"/>
+              <a:t>→ 可能因為前端開發樣板多，</a:t>
+            </a:r>
+            <a:r>
+              <a:rPr lang="en-US" altLang="zh-TW" dirty="0"/>
+              <a:t>Copilot </a:t>
+            </a:r>
+            <a:r>
+              <a:rPr lang="zh-TW" altLang="en-US" dirty="0"/>
+              <a:t>的補全容易命中需求</a:t>
+            </a:r>
+          </a:p>
+          <a:p>
+            <a:r>
+              <a:rPr lang="zh-TW" altLang="en-US" dirty="0"/>
+              <a:t>簡單來說，越常寫重複性語法的人，越容易從 </a:t>
+            </a:r>
+            <a:r>
+              <a:rPr lang="en-US" altLang="zh-TW" dirty="0"/>
+              <a:t>Copilot </a:t>
+            </a:r>
+            <a:r>
+              <a:rPr lang="zh-TW" altLang="en-US" dirty="0"/>
+              <a:t>中獲得幫助。</a:t>
+            </a:r>
+          </a:p>
+          <a:p>
+            <a:endParaRPr lang="zh-TW" altLang="en-US" dirty="0"/>
+          </a:p>
+        </p:txBody>
+      </p:sp>
+      <p:sp>
+        <p:nvSpPr>
+          <p:cNvPr id="4" name="投影片編號版面配置區 3"/>
+          <p:cNvSpPr>
+            <a:spLocks noGrp="1"/>
+          </p:cNvSpPr>
+          <p:nvPr>
+            <p:ph type="sldNum" sz="quarter" idx="5"/>
+          </p:nvPr>
+        </p:nvSpPr>
+        <p:spPr/>
+        <p:txBody>
+          <a:bodyPr/>
+          <a:lstStyle/>
+          <a:p>
+            <a:fld id="{5EFAEFA6-D827-4D5D-86C2-61CF0414BCEE}" type="slidenum">
+              <a:rPr lang="zh-TW" altLang="en-US" smtClean="0"/>
+              <a:t>10</a:t>
+            </a:fld>
+            <a:endParaRPr lang="zh-TW" altLang="en-US"/>
+          </a:p>
+        </p:txBody>
+      </p:sp>
+    </p:spTree>
+    <p:extLst>
+      <p:ext uri="{BB962C8B-B14F-4D97-AF65-F5344CB8AC3E}">
+        <p14:creationId xmlns:p14="http://schemas.microsoft.com/office/powerpoint/2010/main" val="3398585510"/>
+      </p:ext>
+    </p:extLst>
+  </p:cSld>
+  <p:clrMapOvr>
+    <a:masterClrMapping/>
+  </p:clrMapOvr>
+</p:notes>
+</file>
+
+<file path=ppt/notesSlides/notesSlide11.xml><?xml version="1.0" encoding="utf-8"?>
+<p:notes xmlns:a="http://schemas.openxmlformats.org/drawingml/2006/main" xmlns:r="http://schemas.openxmlformats.org/officeDocument/2006/relationships" xmlns:p="http://schemas.openxmlformats.org/presentationml/2006/main">
+  <p:cSld>
+    <p:spTree>
+      <p:nvGrpSpPr>
+        <p:cNvPr id="1" name=""/>
+        <p:cNvGrpSpPr/>
+        <p:nvPr/>
+      </p:nvGrpSpPr>
+      <p:grpSpPr>
+        <a:xfrm>
+          <a:off x="0" y="0"/>
+          <a:ext cx="0" cy="0"/>
+          <a:chOff x="0" y="0"/>
+          <a:chExt cx="0" cy="0"/>
+        </a:xfrm>
+      </p:grpSpPr>
+      <p:sp>
+        <p:nvSpPr>
+          <p:cNvPr id="2" name="投影片影像版面配置區 1"/>
+          <p:cNvSpPr>
+            <a:spLocks noGrp="1" noRot="1" noChangeAspect="1"/>
+          </p:cNvSpPr>
+          <p:nvPr>
+            <p:ph type="sldImg"/>
+          </p:nvPr>
+        </p:nvSpPr>
+        <p:spPr/>
+      </p:sp>
+      <p:sp>
+        <p:nvSpPr>
+          <p:cNvPr id="3" name="備忘稿版面配置區 2"/>
+          <p:cNvSpPr>
+            <a:spLocks noGrp="1"/>
+          </p:cNvSpPr>
+          <p:nvPr>
+            <p:ph type="body" idx="1"/>
+          </p:nvPr>
+        </p:nvSpPr>
+        <p:spPr/>
+        <p:txBody>
+          <a:bodyPr/>
+          <a:lstStyle/>
+          <a:p>
+            <a:r>
+              <a:rPr lang="en-US" altLang="zh-TW" dirty="0"/>
+              <a:t>Copilot </a:t>
+            </a:r>
+            <a:r>
+              <a:rPr lang="zh-TW" altLang="en-US" dirty="0"/>
+              <a:t>的補全行為也會受到「時間」影響。</a:t>
+            </a:r>
+          </a:p>
+          <a:p>
+            <a:r>
+              <a:rPr lang="zh-TW" altLang="en-US" dirty="0"/>
+              <a:t>研究發現：</a:t>
+            </a:r>
+          </a:p>
+          <a:p>
+            <a:r>
+              <a:rPr lang="zh-TW" altLang="en-US" b="1" dirty="0"/>
+              <a:t>週末的接受率最高</a:t>
+            </a:r>
+            <a:br>
+              <a:rPr lang="zh-TW" altLang="en-US" dirty="0"/>
+            </a:br>
+            <a:r>
+              <a:rPr lang="zh-TW" altLang="en-US" dirty="0"/>
+              <a:t>可能因為寫 </a:t>
+            </a:r>
+            <a:r>
+              <a:rPr lang="en-US" altLang="zh-TW" dirty="0"/>
+              <a:t>side project</a:t>
+            </a:r>
+            <a:r>
+              <a:rPr lang="zh-TW" altLang="en-US" dirty="0"/>
+              <a:t>，比較放鬆、比較願意採用 </a:t>
+            </a:r>
+            <a:r>
+              <a:rPr lang="en-US" altLang="zh-TW" dirty="0"/>
+              <a:t>AI </a:t>
+            </a:r>
+            <a:r>
+              <a:rPr lang="zh-TW" altLang="en-US" dirty="0"/>
+              <a:t>建議</a:t>
+            </a:r>
+          </a:p>
+          <a:p>
+            <a:r>
+              <a:rPr lang="zh-TW" altLang="en-US" b="1" dirty="0"/>
+              <a:t>下班時間（下午四點後）也偏高</a:t>
+            </a:r>
+            <a:br>
+              <a:rPr lang="zh-TW" altLang="en-US" dirty="0"/>
+            </a:br>
+            <a:r>
+              <a:rPr lang="zh-TW" altLang="en-US" dirty="0"/>
+              <a:t>開發者通常比較有彈性，接受補全的意願稍微增加</a:t>
+            </a:r>
+          </a:p>
+          <a:p>
+            <a:r>
+              <a:rPr lang="zh-TW" altLang="en-US" b="1" dirty="0"/>
+              <a:t>上班時間最低</a:t>
+            </a:r>
+            <a:br>
+              <a:rPr lang="zh-TW" altLang="en-US" dirty="0"/>
+            </a:br>
+            <a:r>
+              <a:rPr lang="zh-TW" altLang="en-US" dirty="0"/>
+              <a:t>可能因為正式開發情境比較要求精準，開發者採用補全會更謹慎</a:t>
+            </a:r>
+          </a:p>
+          <a:p>
+            <a:r>
+              <a:rPr lang="zh-TW" altLang="en-US" dirty="0"/>
+              <a:t>這顯示 </a:t>
+            </a:r>
+            <a:r>
+              <a:rPr lang="en-US" altLang="zh-TW" dirty="0"/>
+              <a:t>Copilot </a:t>
+            </a:r>
+            <a:r>
+              <a:rPr lang="zh-TW" altLang="en-US" dirty="0"/>
+              <a:t>是一個受情境影響很大的工具，也讓我們了解工程師的行為模式。</a:t>
+            </a:r>
+          </a:p>
+          <a:p>
+            <a:endParaRPr lang="zh-TW" altLang="en-US" dirty="0"/>
+          </a:p>
+        </p:txBody>
+      </p:sp>
+      <p:sp>
+        <p:nvSpPr>
+          <p:cNvPr id="4" name="投影片編號版面配置區 3"/>
+          <p:cNvSpPr>
+            <a:spLocks noGrp="1"/>
+          </p:cNvSpPr>
+          <p:nvPr>
+            <p:ph type="sldNum" sz="quarter" idx="5"/>
+          </p:nvPr>
+        </p:nvSpPr>
+        <p:spPr/>
+        <p:txBody>
+          <a:bodyPr/>
+          <a:lstStyle/>
+          <a:p>
+            <a:fld id="{5EFAEFA6-D827-4D5D-86C2-61CF0414BCEE}" type="slidenum">
+              <a:rPr lang="zh-TW" altLang="en-US" smtClean="0"/>
+              <a:t>11</a:t>
+            </a:fld>
+            <a:endParaRPr lang="zh-TW" altLang="en-US"/>
+          </a:p>
+        </p:txBody>
+      </p:sp>
+    </p:spTree>
+    <p:extLst>
+      <p:ext uri="{BB962C8B-B14F-4D97-AF65-F5344CB8AC3E}">
+        <p14:creationId xmlns:p14="http://schemas.microsoft.com/office/powerpoint/2010/main" val="2404290088"/>
+      </p:ext>
+    </p:extLst>
+  </p:cSld>
+  <p:clrMapOvr>
+    <a:masterClrMapping/>
+  </p:clrMapOvr>
+</p:notes>
+</file>
+
+<file path=ppt/notesSlides/notesSlide12.xml><?xml version="1.0" encoding="utf-8"?>
+<p:notes xmlns:a="http://schemas.openxmlformats.org/drawingml/2006/main" xmlns:r="http://schemas.openxmlformats.org/officeDocument/2006/relationships" xmlns:p="http://schemas.openxmlformats.org/presentationml/2006/main">
+  <p:cSld>
+    <p:spTree>
+      <p:nvGrpSpPr>
+        <p:cNvPr id="1" name=""/>
+        <p:cNvGrpSpPr/>
+        <p:nvPr/>
+      </p:nvGrpSpPr>
+      <p:grpSpPr>
+        <a:xfrm>
+          <a:off x="0" y="0"/>
+          <a:ext cx="0" cy="0"/>
+          <a:chOff x="0" y="0"/>
+          <a:chExt cx="0" cy="0"/>
+        </a:xfrm>
+      </p:grpSpPr>
+      <p:sp>
+        <p:nvSpPr>
+          <p:cNvPr id="2" name="投影片影像版面配置區 1"/>
+          <p:cNvSpPr>
+            <a:spLocks noGrp="1" noRot="1" noChangeAspect="1"/>
+          </p:cNvSpPr>
+          <p:nvPr>
+            <p:ph type="sldImg"/>
+          </p:nvPr>
+        </p:nvSpPr>
+        <p:spPr/>
+      </p:sp>
+      <p:sp>
+        <p:nvSpPr>
+          <p:cNvPr id="3" name="備忘稿版面配置區 2"/>
+          <p:cNvSpPr>
+            <a:spLocks noGrp="1"/>
+          </p:cNvSpPr>
+          <p:nvPr>
+            <p:ph type="body" idx="1"/>
+          </p:nvPr>
+        </p:nvSpPr>
+        <p:spPr/>
+        <p:txBody>
+          <a:bodyPr/>
+          <a:lstStyle/>
+          <a:p>
+            <a:r>
+              <a:rPr lang="zh-TW" altLang="en-US" dirty="0"/>
+              <a:t>基於上述分析，研究整理了三個重要討論點：</a:t>
+            </a:r>
+          </a:p>
+          <a:p>
+            <a:r>
+              <a:rPr lang="zh-TW" altLang="en-US" dirty="0"/>
+              <a:t>第一，</a:t>
+            </a:r>
+            <a:r>
+              <a:rPr lang="zh-TW" altLang="en-US" b="1" dirty="0"/>
+              <a:t>補全的品質比數量更重要。</a:t>
+            </a:r>
+            <a:br>
+              <a:rPr lang="zh-TW" altLang="en-US" dirty="0"/>
+            </a:br>
+            <a:r>
+              <a:rPr lang="zh-TW" altLang="en-US" dirty="0"/>
+              <a:t>重點不在於 </a:t>
+            </a:r>
+            <a:r>
+              <a:rPr lang="en-US" altLang="zh-TW" dirty="0"/>
+              <a:t>Copilot </a:t>
+            </a:r>
+            <a:r>
+              <a:rPr lang="zh-TW" altLang="en-US" dirty="0"/>
+              <a:t>能補多少，而是使用者願意採用多少。</a:t>
+            </a:r>
+          </a:p>
+          <a:p>
+            <a:r>
+              <a:rPr lang="zh-TW" altLang="en-US" dirty="0"/>
+              <a:t>第二，</a:t>
+            </a:r>
+            <a:r>
+              <a:rPr lang="zh-TW" altLang="en-US" b="1" dirty="0"/>
+              <a:t>效果因人而異。</a:t>
+            </a:r>
+            <a:br>
+              <a:rPr lang="zh-TW" altLang="en-US" dirty="0"/>
+            </a:br>
+            <a:r>
+              <a:rPr lang="zh-TW" altLang="en-US" dirty="0"/>
+              <a:t>尤其是新手與中階工程師，通常會感受到最大的生產力提升。</a:t>
+            </a:r>
+          </a:p>
+          <a:p>
+            <a:r>
+              <a:rPr lang="zh-TW" altLang="en-US" dirty="0"/>
+              <a:t>第三，</a:t>
+            </a:r>
+            <a:r>
+              <a:rPr lang="zh-TW" altLang="en-US" b="1" dirty="0"/>
+              <a:t>使用情境會影響效果。</a:t>
+            </a:r>
+            <a:br>
+              <a:rPr lang="zh-TW" altLang="en-US" dirty="0"/>
+            </a:br>
+            <a:r>
+              <a:rPr lang="zh-TW" altLang="en-US" dirty="0"/>
+              <a:t>例如非工作時段，使用者比較願意接受補全，代表 </a:t>
+            </a:r>
+            <a:r>
+              <a:rPr lang="en-US" altLang="zh-TW" dirty="0"/>
+              <a:t>Copilot </a:t>
+            </a:r>
+            <a:r>
+              <a:rPr lang="zh-TW" altLang="en-US" dirty="0"/>
+              <a:t>的設計可考慮更動態、情境化的建議方式。</a:t>
+            </a:r>
+          </a:p>
+          <a:p>
+            <a:endParaRPr lang="zh-TW" altLang="en-US" dirty="0"/>
+          </a:p>
+        </p:txBody>
+      </p:sp>
+      <p:sp>
+        <p:nvSpPr>
+          <p:cNvPr id="4" name="投影片編號版面配置區 3"/>
+          <p:cNvSpPr>
+            <a:spLocks noGrp="1"/>
+          </p:cNvSpPr>
+          <p:nvPr>
+            <p:ph type="sldNum" sz="quarter" idx="5"/>
+          </p:nvPr>
+        </p:nvSpPr>
+        <p:spPr/>
+        <p:txBody>
+          <a:bodyPr/>
+          <a:lstStyle/>
+          <a:p>
+            <a:fld id="{5EFAEFA6-D827-4D5D-86C2-61CF0414BCEE}" type="slidenum">
+              <a:rPr lang="zh-TW" altLang="en-US" smtClean="0"/>
+              <a:t>12</a:t>
+            </a:fld>
+            <a:endParaRPr lang="zh-TW" altLang="en-US"/>
+          </a:p>
+        </p:txBody>
+      </p:sp>
+    </p:spTree>
+    <p:extLst>
+      <p:ext uri="{BB962C8B-B14F-4D97-AF65-F5344CB8AC3E}">
+        <p14:creationId xmlns:p14="http://schemas.microsoft.com/office/powerpoint/2010/main" val="610624495"/>
+      </p:ext>
+    </p:extLst>
+  </p:cSld>
+  <p:clrMapOvr>
+    <a:masterClrMapping/>
+  </p:clrMapOvr>
+</p:notes>
+</file>
+
+<file path=ppt/notesSlides/notesSlide13.xml><?xml version="1.0" encoding="utf-8"?>
+<p:notes xmlns:a="http://schemas.openxmlformats.org/drawingml/2006/main" xmlns:r="http://schemas.openxmlformats.org/officeDocument/2006/relationships" xmlns:p="http://schemas.openxmlformats.org/presentationml/2006/main">
+  <p:cSld>
+    <p:spTree>
+      <p:nvGrpSpPr>
+        <p:cNvPr id="1" name=""/>
+        <p:cNvGrpSpPr/>
+        <p:nvPr/>
+      </p:nvGrpSpPr>
+      <p:grpSpPr>
+        <a:xfrm>
+          <a:off x="0" y="0"/>
+          <a:ext cx="0" cy="0"/>
+          <a:chOff x="0" y="0"/>
+          <a:chExt cx="0" cy="0"/>
+        </a:xfrm>
+      </p:grpSpPr>
+      <p:sp>
+        <p:nvSpPr>
+          <p:cNvPr id="2" name="投影片影像版面配置區 1"/>
+          <p:cNvSpPr>
+            <a:spLocks noGrp="1" noRot="1" noChangeAspect="1"/>
+          </p:cNvSpPr>
+          <p:nvPr>
+            <p:ph type="sldImg"/>
+          </p:nvPr>
+        </p:nvSpPr>
+        <p:spPr/>
+      </p:sp>
+      <p:sp>
+        <p:nvSpPr>
+          <p:cNvPr id="3" name="備忘稿版面配置區 2"/>
+          <p:cNvSpPr>
+            <a:spLocks noGrp="1"/>
+          </p:cNvSpPr>
+          <p:nvPr>
+            <p:ph type="body" idx="1"/>
+          </p:nvPr>
+        </p:nvSpPr>
+        <p:spPr/>
+        <p:txBody>
+          <a:bodyPr/>
+          <a:lstStyle/>
+          <a:p>
+            <a:r>
+              <a:rPr lang="zh-TW" altLang="en-US" dirty="0"/>
+              <a:t>這篇研究的貢獻有三個：</a:t>
+            </a:r>
+          </a:p>
+          <a:p>
+            <a:r>
+              <a:rPr lang="zh-TW" altLang="en-US" dirty="0"/>
+              <a:t>第一，</a:t>
+            </a:r>
+            <a:r>
+              <a:rPr lang="zh-TW" altLang="en-US" b="1" dirty="0"/>
+              <a:t>首次建立「補全行為 → 生產力感受」的量化連結。</a:t>
+            </a:r>
+            <a:br>
+              <a:rPr lang="zh-TW" altLang="en-US" dirty="0"/>
+            </a:br>
+            <a:r>
+              <a:rPr lang="zh-TW" altLang="en-US" dirty="0"/>
+              <a:t>這讓 </a:t>
+            </a:r>
+            <a:r>
+              <a:rPr lang="en-US" altLang="zh-TW" dirty="0"/>
+              <a:t>Copilot </a:t>
+            </a:r>
+            <a:r>
+              <a:rPr lang="zh-TW" altLang="en-US" dirty="0"/>
+              <a:t>的效益不再只是主觀感覺，而是可被量化。</a:t>
+            </a:r>
+          </a:p>
+          <a:p>
+            <a:r>
+              <a:rPr lang="zh-TW" altLang="en-US" dirty="0"/>
+              <a:t>第二，</a:t>
+            </a:r>
+            <a:r>
+              <a:rPr lang="zh-TW" altLang="en-US" b="1" dirty="0"/>
+              <a:t>提出一個新的補全設計觀點：可採用性比正確性更重要。</a:t>
+            </a:r>
+            <a:br>
+              <a:rPr lang="zh-TW" altLang="en-US" dirty="0"/>
+            </a:br>
+            <a:r>
+              <a:rPr lang="zh-TW" altLang="en-US" dirty="0"/>
+              <a:t>這對未來 </a:t>
+            </a:r>
+            <a:r>
+              <a:rPr lang="en-US" altLang="zh-TW" dirty="0"/>
+              <a:t>AI </a:t>
+            </a:r>
+            <a:r>
+              <a:rPr lang="zh-TW" altLang="en-US" dirty="0"/>
+              <a:t>開發工具的設計非常有意義。</a:t>
+            </a:r>
+          </a:p>
+          <a:p>
+            <a:r>
+              <a:rPr lang="zh-TW" altLang="en-US" dirty="0"/>
+              <a:t>第三，</a:t>
+            </a:r>
+            <a:r>
+              <a:rPr lang="zh-TW" altLang="en-US" b="1" dirty="0"/>
+              <a:t>揭示族群、語言與時間的差異。</a:t>
+            </a:r>
+            <a:br>
+              <a:rPr lang="zh-TW" altLang="en-US" dirty="0"/>
+            </a:br>
+            <a:r>
+              <a:rPr lang="zh-TW" altLang="en-US" dirty="0"/>
+              <a:t>這讓我們知道補全工具應該更個人化，不能所有使用者一視同仁。</a:t>
+            </a:r>
+          </a:p>
+          <a:p>
+            <a:endParaRPr lang="zh-TW" altLang="en-US" dirty="0"/>
+          </a:p>
+        </p:txBody>
+      </p:sp>
+      <p:sp>
+        <p:nvSpPr>
+          <p:cNvPr id="4" name="投影片編號版面配置區 3"/>
+          <p:cNvSpPr>
+            <a:spLocks noGrp="1"/>
+          </p:cNvSpPr>
+          <p:nvPr>
+            <p:ph type="sldNum" sz="quarter" idx="5"/>
+          </p:nvPr>
+        </p:nvSpPr>
+        <p:spPr/>
+        <p:txBody>
+          <a:bodyPr/>
+          <a:lstStyle/>
+          <a:p>
+            <a:fld id="{5EFAEFA6-D827-4D5D-86C2-61CF0414BCEE}" type="slidenum">
+              <a:rPr lang="zh-TW" altLang="en-US" smtClean="0"/>
+              <a:t>13</a:t>
+            </a:fld>
+            <a:endParaRPr lang="zh-TW" altLang="en-US"/>
+          </a:p>
+        </p:txBody>
+      </p:sp>
+    </p:spTree>
+    <p:extLst>
+      <p:ext uri="{BB962C8B-B14F-4D97-AF65-F5344CB8AC3E}">
+        <p14:creationId xmlns:p14="http://schemas.microsoft.com/office/powerpoint/2010/main" val="3473705362"/>
+      </p:ext>
+    </p:extLst>
+  </p:cSld>
+  <p:clrMapOvr>
+    <a:masterClrMapping/>
+  </p:clrMapOvr>
+</p:notes>
+</file>
+
+<file path=ppt/notesSlides/notesSlide14.xml><?xml version="1.0" encoding="utf-8"?>
+<p:notes xmlns:a="http://schemas.openxmlformats.org/drawingml/2006/main" xmlns:r="http://schemas.openxmlformats.org/officeDocument/2006/relationships" xmlns:p="http://schemas.openxmlformats.org/presentationml/2006/main">
+  <p:cSld>
+    <p:spTree>
+      <p:nvGrpSpPr>
+        <p:cNvPr id="1" name=""/>
+        <p:cNvGrpSpPr/>
+        <p:nvPr/>
+      </p:nvGrpSpPr>
+      <p:grpSpPr>
+        <a:xfrm>
+          <a:off x="0" y="0"/>
+          <a:ext cx="0" cy="0"/>
+          <a:chOff x="0" y="0"/>
+          <a:chExt cx="0" cy="0"/>
+        </a:xfrm>
+      </p:grpSpPr>
+      <p:sp>
+        <p:nvSpPr>
+          <p:cNvPr id="2" name="投影片影像版面配置區 1"/>
+          <p:cNvSpPr>
+            <a:spLocks noGrp="1" noRot="1" noChangeAspect="1"/>
+          </p:cNvSpPr>
+          <p:nvPr>
+            <p:ph type="sldImg"/>
+          </p:nvPr>
+        </p:nvSpPr>
+        <p:spPr/>
+      </p:sp>
+      <p:sp>
+        <p:nvSpPr>
+          <p:cNvPr id="3" name="備忘稿版面配置區 2"/>
+          <p:cNvSpPr>
+            <a:spLocks noGrp="1"/>
+          </p:cNvSpPr>
+          <p:nvPr>
+            <p:ph type="body" idx="1"/>
+          </p:nvPr>
+        </p:nvSpPr>
+        <p:spPr/>
+        <p:txBody>
+          <a:bodyPr/>
+          <a:lstStyle/>
+          <a:p>
+            <a:r>
+              <a:rPr lang="zh-TW" altLang="en-US" dirty="0"/>
+              <a:t>最後做個總結：</a:t>
+            </a:r>
+          </a:p>
+          <a:p>
+            <a:r>
+              <a:rPr lang="zh-TW" altLang="en-US" dirty="0"/>
+              <a:t>整體來說，</a:t>
+            </a:r>
+            <a:r>
+              <a:rPr lang="en-US" altLang="zh-TW" dirty="0"/>
+              <a:t>Copilot </a:t>
+            </a:r>
+            <a:r>
+              <a:rPr lang="zh-TW" altLang="en-US" dirty="0"/>
+              <a:t>能為開發者帶來「小但穩定」的生產力提升。</a:t>
+            </a:r>
+            <a:br>
+              <a:rPr lang="zh-TW" altLang="en-US" dirty="0"/>
+            </a:br>
+            <a:r>
+              <a:rPr lang="zh-TW" altLang="en-US" dirty="0"/>
+              <a:t>真正有價值的不是補全的數量，而是那些能被接受、能減少思考負擔的補全。</a:t>
+            </a:r>
+          </a:p>
+          <a:p>
+            <a:r>
+              <a:rPr lang="zh-TW" altLang="en-US" dirty="0"/>
+              <a:t>研究也發現，中階工程師、</a:t>
+            </a:r>
+            <a:r>
+              <a:rPr lang="en-US" altLang="zh-TW" dirty="0"/>
+              <a:t>JS/TS </a:t>
+            </a:r>
+            <a:r>
+              <a:rPr lang="zh-TW" altLang="en-US" dirty="0"/>
+              <a:t>使用者是最明顯的受益族群。</a:t>
+            </a:r>
+            <a:br>
+              <a:rPr lang="zh-TW" altLang="en-US" dirty="0"/>
+            </a:br>
+            <a:r>
+              <a:rPr lang="zh-TW" altLang="en-US" dirty="0"/>
+              <a:t>而補全的效果會隨使用情境而改變，這也是未來工具開發時值得考慮的方向。</a:t>
+            </a:r>
+          </a:p>
+          <a:p>
+            <a:r>
+              <a:rPr lang="zh-TW" altLang="en-US" dirty="0"/>
+              <a:t>以上就是我的報告，謝謝大家。</a:t>
+            </a:r>
+          </a:p>
+          <a:p>
+            <a:endParaRPr lang="zh-TW" altLang="en-US" dirty="0"/>
+          </a:p>
+        </p:txBody>
+      </p:sp>
+      <p:sp>
+        <p:nvSpPr>
+          <p:cNvPr id="4" name="投影片編號版面配置區 3"/>
+          <p:cNvSpPr>
+            <a:spLocks noGrp="1"/>
+          </p:cNvSpPr>
+          <p:nvPr>
+            <p:ph type="sldNum" sz="quarter" idx="5"/>
+          </p:nvPr>
+        </p:nvSpPr>
+        <p:spPr/>
+        <p:txBody>
+          <a:bodyPr/>
+          <a:lstStyle/>
+          <a:p>
+            <a:fld id="{5EFAEFA6-D827-4D5D-86C2-61CF0414BCEE}" type="slidenum">
+              <a:rPr lang="zh-TW" altLang="en-US" smtClean="0"/>
+              <a:t>14</a:t>
+            </a:fld>
+            <a:endParaRPr lang="zh-TW" altLang="en-US"/>
+          </a:p>
+        </p:txBody>
+      </p:sp>
+    </p:spTree>
+    <p:extLst>
+      <p:ext uri="{BB962C8B-B14F-4D97-AF65-F5344CB8AC3E}">
+        <p14:creationId xmlns:p14="http://schemas.microsoft.com/office/powerpoint/2010/main" val="1722518947"/>
+      </p:ext>
+    </p:extLst>
+  </p:cSld>
+  <p:clrMapOvr>
+    <a:masterClrMapping/>
+  </p:clrMapOvr>
+</p:notes>
+</file>
+
+<file path=ppt/notesSlides/notesSlide2.xml><?xml version="1.0" encoding="utf-8"?>
+<p:notes xmlns:a="http://schemas.openxmlformats.org/drawingml/2006/main" xmlns:r="http://schemas.openxmlformats.org/officeDocument/2006/relationships" xmlns:p="http://schemas.openxmlformats.org/presentationml/2006/main">
+  <p:cSld>
+    <p:spTree>
+      <p:nvGrpSpPr>
+        <p:cNvPr id="1" name=""/>
+        <p:cNvGrpSpPr/>
+        <p:nvPr/>
+      </p:nvGrpSpPr>
+      <p:grpSpPr>
+        <a:xfrm>
+          <a:off x="0" y="0"/>
+          <a:ext cx="0" cy="0"/>
+          <a:chOff x="0" y="0"/>
+          <a:chExt cx="0" cy="0"/>
+        </a:xfrm>
+      </p:grpSpPr>
+      <p:sp>
+        <p:nvSpPr>
+          <p:cNvPr id="2" name="投影片影像版面配置區 1"/>
+          <p:cNvSpPr>
+            <a:spLocks noGrp="1" noRot="1" noChangeAspect="1"/>
+          </p:cNvSpPr>
+          <p:nvPr>
+            <p:ph type="sldImg"/>
+          </p:nvPr>
+        </p:nvSpPr>
+        <p:spPr/>
+      </p:sp>
+      <p:sp>
+        <p:nvSpPr>
+          <p:cNvPr id="3" name="備忘稿版面配置區 2"/>
+          <p:cNvSpPr>
+            <a:spLocks noGrp="1"/>
+          </p:cNvSpPr>
+          <p:nvPr>
+            <p:ph type="body" idx="1"/>
+          </p:nvPr>
+        </p:nvSpPr>
+        <p:spPr/>
+        <p:txBody>
+          <a:bodyPr/>
+          <a:lstStyle/>
+          <a:p>
+            <a:r>
+              <a:rPr lang="zh-TW" altLang="en-US" dirty="0"/>
+              <a:t>接下來是研究背景與動機。</a:t>
+            </a:r>
+          </a:p>
+          <a:p>
+            <a:r>
+              <a:rPr lang="zh-TW" altLang="en-US" dirty="0"/>
+              <a:t>主要是因為現在 </a:t>
+            </a:r>
+            <a:r>
+              <a:rPr lang="en-US" altLang="zh-TW" dirty="0"/>
+              <a:t>AI </a:t>
+            </a:r>
+            <a:r>
+              <a:rPr lang="zh-TW" altLang="en-US" dirty="0"/>
+              <a:t>技術發展非常快，</a:t>
+            </a:r>
+            <a:r>
+              <a:rPr lang="en-US" altLang="zh-TW" dirty="0"/>
+              <a:t>Copilot </a:t>
+            </a:r>
+            <a:r>
+              <a:rPr lang="zh-TW" altLang="en-US" dirty="0"/>
+              <a:t>基本上已經變成很多工程師寫程式時的日常工具。</a:t>
+            </a:r>
+            <a:br>
+              <a:rPr lang="zh-TW" altLang="en-US" dirty="0"/>
+            </a:br>
+            <a:r>
+              <a:rPr lang="zh-TW" altLang="en-US" dirty="0"/>
+              <a:t>不管你是寫前端、後端、資料科學，甚至寫文件，都會看到它跳出來給你建議。</a:t>
+            </a:r>
+          </a:p>
+          <a:p>
+            <a:r>
+              <a:rPr lang="zh-TW" altLang="en-US" dirty="0"/>
+              <a:t>但主要的核心問題是</a:t>
+            </a:r>
+            <a:br>
+              <a:rPr lang="en-US" altLang="zh-TW" dirty="0"/>
+            </a:br>
+            <a:r>
+              <a:rPr lang="zh-TW" altLang="en-US" dirty="0"/>
+              <a:t>「這些補全真的有提升生產力嗎？」</a:t>
+            </a:r>
+            <a:br>
+              <a:rPr lang="zh-TW" altLang="en-US" dirty="0"/>
+            </a:br>
+            <a:r>
+              <a:rPr lang="zh-TW" altLang="en-US" dirty="0"/>
+              <a:t>「那我們覺得有這些補全讓我們的速度更快，這是心理作用，還是真的更快？」</a:t>
+            </a:r>
+          </a:p>
+          <a:p>
+            <a:r>
+              <a:rPr lang="zh-TW" altLang="en-US" dirty="0"/>
+              <a:t>其實過去的研究很少把「補全行為」跟「開發者自己感受到的生產力」做連結。</a:t>
+            </a:r>
+            <a:br>
+              <a:rPr lang="zh-TW" altLang="en-US" dirty="0"/>
+            </a:br>
+            <a:r>
+              <a:rPr lang="zh-TW" altLang="en-US" dirty="0"/>
+              <a:t>因此這篇研究就想用大量 </a:t>
+            </a:r>
+            <a:r>
+              <a:rPr lang="en-US" altLang="zh-TW" dirty="0"/>
+              <a:t>IDE </a:t>
+            </a:r>
+            <a:r>
+              <a:rPr lang="zh-TW" altLang="en-US" dirty="0"/>
+              <a:t>數據加上問卷，來真正回答這件事情。</a:t>
+            </a:r>
+          </a:p>
+          <a:p>
+            <a:endParaRPr lang="zh-TW" altLang="en-US" dirty="0"/>
+          </a:p>
+        </p:txBody>
+      </p:sp>
+      <p:sp>
+        <p:nvSpPr>
+          <p:cNvPr id="4" name="投影片編號版面配置區 3"/>
+          <p:cNvSpPr>
+            <a:spLocks noGrp="1"/>
+          </p:cNvSpPr>
+          <p:nvPr>
+            <p:ph type="sldNum" sz="quarter" idx="5"/>
+          </p:nvPr>
+        </p:nvSpPr>
+        <p:spPr/>
+        <p:txBody>
+          <a:bodyPr/>
+          <a:lstStyle/>
+          <a:p>
+            <a:fld id="{5EFAEFA6-D827-4D5D-86C2-61CF0414BCEE}" type="slidenum">
+              <a:rPr lang="zh-TW" altLang="en-US" smtClean="0"/>
+              <a:t>2</a:t>
+            </a:fld>
+            <a:endParaRPr lang="zh-TW" altLang="en-US"/>
+          </a:p>
+        </p:txBody>
+      </p:sp>
+    </p:spTree>
+    <p:extLst>
+      <p:ext uri="{BB962C8B-B14F-4D97-AF65-F5344CB8AC3E}">
+        <p14:creationId xmlns:p14="http://schemas.microsoft.com/office/powerpoint/2010/main" val="1537844355"/>
+      </p:ext>
+    </p:extLst>
+  </p:cSld>
+  <p:clrMapOvr>
+    <a:masterClrMapping/>
+  </p:clrMapOvr>
+</p:notes>
+</file>
+
+<file path=ppt/notesSlides/notesSlide3.xml><?xml version="1.0" encoding="utf-8"?>
+<p:notes xmlns:a="http://schemas.openxmlformats.org/drawingml/2006/main" xmlns:r="http://schemas.openxmlformats.org/officeDocument/2006/relationships" xmlns:p="http://schemas.openxmlformats.org/presentationml/2006/main">
+  <p:cSld>
+    <p:spTree>
+      <p:nvGrpSpPr>
+        <p:cNvPr id="1" name=""/>
+        <p:cNvGrpSpPr/>
+        <p:nvPr/>
+      </p:nvGrpSpPr>
+      <p:grpSpPr>
+        <a:xfrm>
+          <a:off x="0" y="0"/>
+          <a:ext cx="0" cy="0"/>
+          <a:chOff x="0" y="0"/>
+          <a:chExt cx="0" cy="0"/>
+        </a:xfrm>
+      </p:grpSpPr>
+      <p:sp>
+        <p:nvSpPr>
+          <p:cNvPr id="2" name="投影片影像版面配置區 1"/>
+          <p:cNvSpPr>
+            <a:spLocks noGrp="1" noRot="1" noChangeAspect="1"/>
+          </p:cNvSpPr>
+          <p:nvPr>
+            <p:ph type="sldImg"/>
+          </p:nvPr>
+        </p:nvSpPr>
+        <p:spPr/>
+      </p:sp>
+      <p:sp>
+        <p:nvSpPr>
+          <p:cNvPr id="3" name="備忘稿版面配置區 2"/>
+          <p:cNvSpPr>
+            <a:spLocks noGrp="1"/>
+          </p:cNvSpPr>
+          <p:nvPr>
+            <p:ph type="body" idx="1"/>
+          </p:nvPr>
+        </p:nvSpPr>
+        <p:spPr/>
+        <p:txBody>
+          <a:bodyPr/>
+          <a:lstStyle/>
+          <a:p>
+            <a:r>
+              <a:rPr lang="zh-TW" altLang="en-US" dirty="0"/>
+              <a:t>這篇研究主要想回答四個問題：</a:t>
+            </a:r>
+          </a:p>
+          <a:p>
+            <a:r>
+              <a:rPr lang="zh-TW" altLang="en-US" dirty="0"/>
+              <a:t>第一，什麼樣的補全會提升開發者的生產力？</a:t>
+            </a:r>
+            <a:br>
+              <a:rPr lang="zh-TW" altLang="en-US" dirty="0"/>
+            </a:br>
+            <a:r>
+              <a:rPr lang="zh-TW" altLang="en-US" dirty="0"/>
+              <a:t>第二，補全越多是不是代表效率越高？</a:t>
+            </a:r>
+            <a:br>
+              <a:rPr lang="zh-TW" altLang="en-US" dirty="0"/>
+            </a:br>
+            <a:r>
+              <a:rPr lang="zh-TW" altLang="en-US" dirty="0"/>
+              <a:t>第三，哪些族群最能受益？新手？老手？還是某些語言使用者？</a:t>
+            </a:r>
+            <a:br>
+              <a:rPr lang="zh-TW" altLang="en-US" dirty="0"/>
+            </a:br>
+            <a:r>
+              <a:rPr lang="zh-TW" altLang="en-US" dirty="0"/>
+              <a:t>第四，補全效果會不會因為「使用情境」不同而改變，例如上班或下班？</a:t>
+            </a:r>
+          </a:p>
+          <a:p>
+            <a:r>
+              <a:rPr lang="zh-TW" altLang="en-US" dirty="0"/>
+              <a:t>這四個問題基本上涵蓋了 </a:t>
+            </a:r>
+            <a:r>
+              <a:rPr lang="en-US" altLang="zh-TW" dirty="0"/>
+              <a:t>Copilot </a:t>
+            </a:r>
+            <a:r>
+              <a:rPr lang="zh-TW" altLang="en-US" dirty="0"/>
+              <a:t>真實使用的不同面向。</a:t>
+            </a:r>
+          </a:p>
+          <a:p>
+            <a:endParaRPr lang="zh-TW" altLang="en-US" dirty="0"/>
+          </a:p>
+        </p:txBody>
+      </p:sp>
+      <p:sp>
+        <p:nvSpPr>
+          <p:cNvPr id="4" name="投影片編號版面配置區 3"/>
+          <p:cNvSpPr>
+            <a:spLocks noGrp="1"/>
+          </p:cNvSpPr>
+          <p:nvPr>
+            <p:ph type="sldNum" sz="quarter" idx="5"/>
+          </p:nvPr>
+        </p:nvSpPr>
+        <p:spPr/>
+        <p:txBody>
+          <a:bodyPr/>
+          <a:lstStyle/>
+          <a:p>
+            <a:fld id="{5EFAEFA6-D827-4D5D-86C2-61CF0414BCEE}" type="slidenum">
+              <a:rPr lang="zh-TW" altLang="en-US" smtClean="0"/>
+              <a:t>3</a:t>
+            </a:fld>
+            <a:endParaRPr lang="zh-TW" altLang="en-US"/>
+          </a:p>
+        </p:txBody>
+      </p:sp>
+    </p:spTree>
+    <p:extLst>
+      <p:ext uri="{BB962C8B-B14F-4D97-AF65-F5344CB8AC3E}">
+        <p14:creationId xmlns:p14="http://schemas.microsoft.com/office/powerpoint/2010/main" val="3098996316"/>
+      </p:ext>
+    </p:extLst>
+  </p:cSld>
+  <p:clrMapOvr>
+    <a:masterClrMapping/>
+  </p:clrMapOvr>
+</p:notes>
+</file>
+
+<file path=ppt/notesSlides/notesSlide4.xml><?xml version="1.0" encoding="utf-8"?>
+<p:notes xmlns:a="http://schemas.openxmlformats.org/drawingml/2006/main" xmlns:r="http://schemas.openxmlformats.org/officeDocument/2006/relationships" xmlns:p="http://schemas.openxmlformats.org/presentationml/2006/main">
+  <p:cSld>
+    <p:spTree>
+      <p:nvGrpSpPr>
+        <p:cNvPr id="1" name=""/>
+        <p:cNvGrpSpPr/>
+        <p:nvPr/>
+      </p:nvGrpSpPr>
+      <p:grpSpPr>
+        <a:xfrm>
+          <a:off x="0" y="0"/>
+          <a:ext cx="0" cy="0"/>
+          <a:chOff x="0" y="0"/>
+          <a:chExt cx="0" cy="0"/>
+        </a:xfrm>
+      </p:grpSpPr>
+      <p:sp>
+        <p:nvSpPr>
+          <p:cNvPr id="2" name="投影片影像版面配置區 1"/>
+          <p:cNvSpPr>
+            <a:spLocks noGrp="1" noRot="1" noChangeAspect="1"/>
+          </p:cNvSpPr>
+          <p:nvPr>
+            <p:ph type="sldImg"/>
+          </p:nvPr>
+        </p:nvSpPr>
+        <p:spPr/>
+      </p:sp>
+      <p:sp>
+        <p:nvSpPr>
+          <p:cNvPr id="3" name="備忘稿版面配置區 2"/>
+          <p:cNvSpPr>
+            <a:spLocks noGrp="1"/>
+          </p:cNvSpPr>
+          <p:nvPr>
+            <p:ph type="body" idx="1"/>
+          </p:nvPr>
+        </p:nvSpPr>
+        <p:spPr/>
+        <p:txBody>
+          <a:bodyPr/>
+          <a:lstStyle/>
+          <a:p>
+            <a:r>
+              <a:rPr lang="zh-TW" altLang="en-US" dirty="0"/>
+              <a:t>「這篇研究的研究方法主要分成兩個部分。</a:t>
+            </a:r>
+          </a:p>
+          <a:p>
+            <a:r>
+              <a:rPr lang="zh-TW" altLang="en-US" dirty="0"/>
+              <a:t>第一部分是 </a:t>
+            </a:r>
+            <a:r>
+              <a:rPr lang="zh-TW" altLang="en-US" b="1" dirty="0"/>
+              <a:t>從開發環境收集到的行為數據</a:t>
+            </a:r>
+            <a:r>
+              <a:rPr lang="zh-TW" altLang="en-US" dirty="0"/>
+              <a:t>。</a:t>
+            </a:r>
+            <a:br>
+              <a:rPr lang="zh-TW" altLang="en-US" dirty="0"/>
+            </a:br>
+            <a:r>
+              <a:rPr lang="zh-TW" altLang="en-US" dirty="0"/>
+              <a:t>也就是使用者在寫程式時，</a:t>
+            </a:r>
+            <a:r>
+              <a:rPr lang="en-US" altLang="zh-TW" dirty="0"/>
+              <a:t>Copilot </a:t>
+            </a:r>
+            <a:r>
+              <a:rPr lang="zh-TW" altLang="en-US" dirty="0"/>
+              <a:t>出現了哪些補全、哪些被顯示出來、哪些被使用者採用，以及哪些在後續的程式碼編輯中被保留下來。</a:t>
+            </a:r>
+            <a:br>
+              <a:rPr lang="zh-TW" altLang="en-US" dirty="0"/>
+            </a:br>
+            <a:r>
+              <a:rPr lang="zh-TW" altLang="en-US" dirty="0"/>
+              <a:t>這一部分可以讓我們客觀地觀察使用者實際的開發行為。</a:t>
+            </a:r>
+          </a:p>
+          <a:p>
+            <a:r>
+              <a:rPr lang="zh-TW" altLang="en-US" dirty="0"/>
+              <a:t>第二部分是 </a:t>
+            </a:r>
+            <a:r>
+              <a:rPr lang="zh-TW" altLang="en-US" b="1" dirty="0"/>
+              <a:t>使用者問卷資料</a:t>
+            </a:r>
+            <a:r>
+              <a:rPr lang="zh-TW" altLang="en-US" dirty="0"/>
+              <a:t>。</a:t>
+            </a:r>
+            <a:br>
+              <a:rPr lang="zh-TW" altLang="en-US" dirty="0"/>
+            </a:br>
+            <a:r>
+              <a:rPr lang="zh-TW" altLang="en-US" dirty="0"/>
+              <a:t>問卷的設計是參考 </a:t>
+            </a:r>
+            <a:r>
+              <a:rPr lang="en-US" altLang="zh-TW" dirty="0"/>
+              <a:t>SPACE </a:t>
+            </a:r>
+            <a:r>
+              <a:rPr lang="zh-TW" altLang="en-US" dirty="0"/>
+              <a:t>框架，主要分成滿意度、效率、協作、效能等面向，讓我們能夠量化開發者主觀的使用感受。</a:t>
+            </a:r>
+            <a:endParaRPr lang="en-US" altLang="zh-TW" dirty="0"/>
+          </a:p>
+          <a:p>
+            <a:r>
+              <a:rPr lang="zh-TW" altLang="en-US" dirty="0"/>
+              <a:t>用到的主要指標有 顯示率 接受率 持久率 以及 貢獻度。</a:t>
+            </a:r>
+          </a:p>
+          <a:p>
+            <a:r>
+              <a:rPr lang="zh-TW" altLang="en-US" dirty="0"/>
+              <a:t>在分析方法的部分，研究使用了相關分析、降維分析、回歸分析，同時也比較了不同時間週期的使用行為，去觀察開發者在長期使用 </a:t>
+            </a:r>
+            <a:r>
+              <a:rPr lang="en-US" altLang="zh-TW" dirty="0"/>
+              <a:t>Copilot </a:t>
+            </a:r>
+            <a:r>
+              <a:rPr lang="zh-TW" altLang="en-US" dirty="0"/>
+              <a:t>時是否有行為上的變化。」</a:t>
+            </a:r>
+          </a:p>
+        </p:txBody>
+      </p:sp>
+      <p:sp>
+        <p:nvSpPr>
+          <p:cNvPr id="4" name="投影片編號版面配置區 3"/>
+          <p:cNvSpPr>
+            <a:spLocks noGrp="1"/>
+          </p:cNvSpPr>
+          <p:nvPr>
+            <p:ph type="sldNum" sz="quarter" idx="5"/>
+          </p:nvPr>
+        </p:nvSpPr>
+        <p:spPr/>
+        <p:txBody>
+          <a:bodyPr/>
+          <a:lstStyle/>
+          <a:p>
+            <a:fld id="{5EFAEFA6-D827-4D5D-86C2-61CF0414BCEE}" type="slidenum">
+              <a:rPr lang="zh-TW" altLang="en-US" smtClean="0"/>
+              <a:t>4</a:t>
+            </a:fld>
+            <a:endParaRPr lang="zh-TW" altLang="en-US"/>
+          </a:p>
+        </p:txBody>
+      </p:sp>
+    </p:spTree>
+    <p:extLst>
+      <p:ext uri="{BB962C8B-B14F-4D97-AF65-F5344CB8AC3E}">
+        <p14:creationId xmlns:p14="http://schemas.microsoft.com/office/powerpoint/2010/main" val="309072682"/>
+      </p:ext>
+    </p:extLst>
+  </p:cSld>
+  <p:clrMapOvr>
+    <a:masterClrMapping/>
+  </p:clrMapOvr>
+</p:notes>
+</file>
+
+<file path=ppt/notesSlides/notesSlide5.xml><?xml version="1.0" encoding="utf-8"?>
+<p:notes xmlns:a="http://schemas.openxmlformats.org/drawingml/2006/main" xmlns:r="http://schemas.openxmlformats.org/officeDocument/2006/relationships" xmlns:p="http://schemas.openxmlformats.org/presentationml/2006/main">
+  <p:cSld>
+    <p:spTree>
+      <p:nvGrpSpPr>
+        <p:cNvPr id="1" name=""/>
+        <p:cNvGrpSpPr/>
+        <p:nvPr/>
+      </p:nvGrpSpPr>
+      <p:grpSpPr>
+        <a:xfrm>
+          <a:off x="0" y="0"/>
+          <a:ext cx="0" cy="0"/>
+          <a:chOff x="0" y="0"/>
+          <a:chExt cx="0" cy="0"/>
+        </a:xfrm>
+      </p:grpSpPr>
+      <p:sp>
+        <p:nvSpPr>
+          <p:cNvPr id="2" name="投影片影像版面配置區 1"/>
+          <p:cNvSpPr>
+            <a:spLocks noGrp="1" noRot="1" noChangeAspect="1"/>
+          </p:cNvSpPr>
+          <p:nvPr>
+            <p:ph type="sldImg"/>
+          </p:nvPr>
+        </p:nvSpPr>
+        <p:spPr/>
+      </p:sp>
+      <p:sp>
+        <p:nvSpPr>
+          <p:cNvPr id="3" name="備忘稿版面配置區 2"/>
+          <p:cNvSpPr>
+            <a:spLocks noGrp="1"/>
+          </p:cNvSpPr>
+          <p:nvPr>
+            <p:ph type="body" idx="1"/>
+          </p:nvPr>
+        </p:nvSpPr>
+        <p:spPr/>
+        <p:txBody>
+          <a:bodyPr/>
+          <a:lstStyle/>
+          <a:p>
+            <a:r>
+              <a:rPr lang="zh-TW" altLang="en-US" dirty="0"/>
+              <a:t>那這一張圖就是根據族群去區分的人數比例圖，整體的</a:t>
+            </a:r>
+          </a:p>
+        </p:txBody>
+      </p:sp>
+      <p:sp>
+        <p:nvSpPr>
+          <p:cNvPr id="4" name="投影片編號版面配置區 3"/>
+          <p:cNvSpPr>
+            <a:spLocks noGrp="1"/>
+          </p:cNvSpPr>
+          <p:nvPr>
+            <p:ph type="sldNum" sz="quarter" idx="5"/>
+          </p:nvPr>
+        </p:nvSpPr>
+        <p:spPr/>
+        <p:txBody>
+          <a:bodyPr/>
+          <a:lstStyle/>
+          <a:p>
+            <a:fld id="{5EFAEFA6-D827-4D5D-86C2-61CF0414BCEE}" type="slidenum">
+              <a:rPr lang="zh-TW" altLang="en-US" smtClean="0"/>
+              <a:t>5</a:t>
+            </a:fld>
+            <a:endParaRPr lang="zh-TW" altLang="en-US"/>
+          </a:p>
+        </p:txBody>
+      </p:sp>
+    </p:spTree>
+    <p:extLst>
+      <p:ext uri="{BB962C8B-B14F-4D97-AF65-F5344CB8AC3E}">
+        <p14:creationId xmlns:p14="http://schemas.microsoft.com/office/powerpoint/2010/main" val="2065705895"/>
+      </p:ext>
+    </p:extLst>
+  </p:cSld>
+  <p:clrMapOvr>
+    <a:masterClrMapping/>
+  </p:clrMapOvr>
+</p:notes>
+</file>
+
+<file path=ppt/notesSlides/notesSlide6.xml><?xml version="1.0" encoding="utf-8"?>
+<p:notes xmlns:a="http://schemas.openxmlformats.org/drawingml/2006/main" xmlns:r="http://schemas.openxmlformats.org/officeDocument/2006/relationships" xmlns:p="http://schemas.openxmlformats.org/presentationml/2006/main">
+  <p:cSld>
+    <p:spTree>
+      <p:nvGrpSpPr>
+        <p:cNvPr id="1" name=""/>
+        <p:cNvGrpSpPr/>
+        <p:nvPr/>
+      </p:nvGrpSpPr>
+      <p:grpSpPr>
+        <a:xfrm>
+          <a:off x="0" y="0"/>
+          <a:ext cx="0" cy="0"/>
+          <a:chOff x="0" y="0"/>
+          <a:chExt cx="0" cy="0"/>
+        </a:xfrm>
+      </p:grpSpPr>
+      <p:sp>
+        <p:nvSpPr>
+          <p:cNvPr id="2" name="投影片影像版面配置區 1"/>
+          <p:cNvSpPr>
+            <a:spLocks noGrp="1" noRot="1" noChangeAspect="1"/>
+          </p:cNvSpPr>
+          <p:nvPr>
+            <p:ph type="sldImg"/>
+          </p:nvPr>
+        </p:nvSpPr>
+        <p:spPr/>
+      </p:sp>
+      <p:sp>
+        <p:nvSpPr>
+          <p:cNvPr id="3" name="備忘稿版面配置區 2"/>
+          <p:cNvSpPr>
+            <a:spLocks noGrp="1"/>
+          </p:cNvSpPr>
+          <p:nvPr>
+            <p:ph type="body" idx="1"/>
+          </p:nvPr>
+        </p:nvSpPr>
+        <p:spPr/>
+        <p:txBody>
+          <a:bodyPr/>
+          <a:lstStyle/>
+          <a:p>
+            <a:r>
+              <a:rPr lang="zh-TW" altLang="en-US" dirty="0"/>
+              <a:t>這張圖非常重要，他是程式碼補全流程階梯圖，它顯示出補全從「有機會補」到「被展示」到「被接受」的整個流程。</a:t>
+            </a:r>
+            <a:endParaRPr lang="en-US" altLang="zh-TW" dirty="0"/>
+          </a:p>
+          <a:p>
+            <a:r>
+              <a:rPr lang="zh-TW" altLang="en-US" dirty="0"/>
+              <a:t>首先，補全機會這邊意思是說，只要你在編輯器打了一些程式，不一定要很長，那</a:t>
+            </a:r>
+            <a:r>
+              <a:rPr lang="en-US" altLang="zh-TW" dirty="0"/>
+              <a:t>AI</a:t>
+            </a:r>
+            <a:r>
+              <a:rPr lang="zh-TW" altLang="en-US" dirty="0"/>
+              <a:t>就會去觀察你的上下文邏輯，然後去試圖生成一個對你來說可能可用的補全，那每當他出現了一次這種想法，在這邊就算一次的補全機會，所以可以看到這張表格，幾乎每分鐘出現</a:t>
+            </a:r>
+            <a:r>
+              <a:rPr lang="en-US" altLang="zh-TW" dirty="0"/>
+              <a:t>2~3</a:t>
+            </a:r>
+            <a:r>
+              <a:rPr lang="zh-TW" altLang="en-US" dirty="0"/>
+              <a:t>個程式碼補全，由此可知</a:t>
+            </a:r>
+            <a:r>
+              <a:rPr lang="en-US" altLang="zh-TW" dirty="0"/>
+              <a:t>AI</a:t>
+            </a:r>
+            <a:r>
+              <a:rPr lang="zh-TW" altLang="en-US" dirty="0"/>
+              <a:t>是真的無時無刻在替你思考，但最終能不能真正顯示出來，還是需要當時的情境來判斷。</a:t>
+            </a:r>
+          </a:p>
+          <a:p>
+            <a:r>
+              <a:rPr lang="zh-TW" altLang="en-US" dirty="0"/>
+              <a:t>再往後看我們其實可以看到也不是顯示出來的補全都會被採用，平均下來，採用率大概是 </a:t>
+            </a:r>
+            <a:r>
+              <a:rPr lang="en-US" altLang="zh-TW" dirty="0"/>
+              <a:t>27%</a:t>
+            </a:r>
+            <a:r>
+              <a:rPr lang="zh-TW" altLang="en-US" dirty="0"/>
+              <a:t>，也就是說每四個補全只有一個會被真正用到。</a:t>
+            </a:r>
+            <a:br>
+              <a:rPr lang="zh-TW" altLang="en-US" dirty="0"/>
+            </a:br>
+            <a:r>
+              <a:rPr lang="zh-TW" altLang="en-US" dirty="0"/>
+              <a:t>所以這邊可以觀察到的是補得多不代表有效，重點是「被採用的補全」。</a:t>
+            </a:r>
+          </a:p>
+          <a:p>
+            <a:endParaRPr lang="zh-TW" altLang="en-US" dirty="0"/>
+          </a:p>
+        </p:txBody>
+      </p:sp>
+      <p:sp>
+        <p:nvSpPr>
+          <p:cNvPr id="4" name="投影片編號版面配置區 3"/>
+          <p:cNvSpPr>
+            <a:spLocks noGrp="1"/>
+          </p:cNvSpPr>
+          <p:nvPr>
+            <p:ph type="sldNum" sz="quarter" idx="5"/>
+          </p:nvPr>
+        </p:nvSpPr>
+        <p:spPr/>
+        <p:txBody>
+          <a:bodyPr/>
+          <a:lstStyle/>
+          <a:p>
+            <a:fld id="{5EFAEFA6-D827-4D5D-86C2-61CF0414BCEE}" type="slidenum">
+              <a:rPr lang="zh-TW" altLang="en-US" smtClean="0"/>
+              <a:t>6</a:t>
+            </a:fld>
+            <a:endParaRPr lang="zh-TW" altLang="en-US"/>
+          </a:p>
+        </p:txBody>
+      </p:sp>
+    </p:spTree>
+    <p:extLst>
+      <p:ext uri="{BB962C8B-B14F-4D97-AF65-F5344CB8AC3E}">
+        <p14:creationId xmlns:p14="http://schemas.microsoft.com/office/powerpoint/2010/main" val="2708874292"/>
+      </p:ext>
+    </p:extLst>
+  </p:cSld>
+  <p:clrMapOvr>
+    <a:masterClrMapping/>
+  </p:clrMapOvr>
+</p:notes>
+</file>
+
+<file path=ppt/notesSlides/notesSlide7.xml><?xml version="1.0" encoding="utf-8"?>
+<p:notes xmlns:a="http://schemas.openxmlformats.org/drawingml/2006/main" xmlns:r="http://schemas.openxmlformats.org/officeDocument/2006/relationships" xmlns:p="http://schemas.openxmlformats.org/presentationml/2006/main">
+  <p:cSld>
+    <p:spTree>
+      <p:nvGrpSpPr>
+        <p:cNvPr id="1" name=""/>
+        <p:cNvGrpSpPr/>
+        <p:nvPr/>
+      </p:nvGrpSpPr>
+      <p:grpSpPr>
+        <a:xfrm>
+          <a:off x="0" y="0"/>
+          <a:ext cx="0" cy="0"/>
+          <a:chOff x="0" y="0"/>
+          <a:chExt cx="0" cy="0"/>
+        </a:xfrm>
+      </p:grpSpPr>
+      <p:sp>
+        <p:nvSpPr>
+          <p:cNvPr id="2" name="投影片影像版面配置區 1"/>
+          <p:cNvSpPr>
+            <a:spLocks noGrp="1" noRot="1" noChangeAspect="1"/>
+          </p:cNvSpPr>
+          <p:nvPr>
+            <p:ph type="sldImg"/>
+          </p:nvPr>
+        </p:nvSpPr>
+        <p:spPr/>
+      </p:sp>
+      <p:sp>
+        <p:nvSpPr>
+          <p:cNvPr id="3" name="備忘稿版面配置區 2"/>
+          <p:cNvSpPr>
+            <a:spLocks noGrp="1"/>
+          </p:cNvSpPr>
+          <p:nvPr>
+            <p:ph type="body" idx="1"/>
+          </p:nvPr>
+        </p:nvSpPr>
+        <p:spPr/>
+        <p:txBody>
+          <a:bodyPr/>
+          <a:lstStyle/>
+          <a:p>
+            <a:r>
+              <a:rPr lang="zh-TW" altLang="en-US" dirty="0"/>
+              <a:t>那這項研究設計了幾個非常關鍵的主要指標，紅色標示處是這篇論文的主軸：</a:t>
+            </a:r>
+          </a:p>
+          <a:p>
+            <a:r>
+              <a:rPr lang="zh-TW" altLang="en-US" b="1" dirty="0"/>
+              <a:t>第一個是顯示率</a:t>
+            </a:r>
+            <a:r>
+              <a:rPr lang="zh-TW" altLang="en-US" dirty="0"/>
+              <a:t>：</a:t>
+            </a:r>
+            <a:r>
+              <a:rPr lang="en-US" altLang="zh-TW" dirty="0"/>
+              <a:t>Copilot </a:t>
+            </a:r>
+            <a:r>
+              <a:rPr lang="zh-TW" altLang="en-US" dirty="0"/>
+              <a:t>顯示了多少補全</a:t>
+            </a:r>
+          </a:p>
+          <a:p>
+            <a:r>
+              <a:rPr lang="zh-TW" altLang="en-US" b="1" dirty="0"/>
+              <a:t>第二個是接受率</a:t>
+            </a:r>
+            <a:r>
+              <a:rPr lang="zh-TW" altLang="en-US" dirty="0"/>
+              <a:t>：使用者接受了多少</a:t>
+            </a:r>
+          </a:p>
+          <a:p>
+            <a:r>
+              <a:rPr lang="zh-TW" altLang="en-US" b="1" dirty="0"/>
+              <a:t>第三個是持久率</a:t>
+            </a:r>
+            <a:r>
+              <a:rPr lang="zh-TW" altLang="en-US" dirty="0"/>
+              <a:t>：接受後的補全，有多久留在程式碼裡沒有被刪掉或改掉</a:t>
+            </a:r>
+          </a:p>
+          <a:p>
+            <a:r>
+              <a:rPr lang="zh-TW" altLang="en-US" dirty="0"/>
+              <a:t>那持久率</a:t>
+            </a:r>
+            <a:r>
+              <a:rPr lang="en-US" altLang="zh-TW" dirty="0"/>
+              <a:t> </a:t>
+            </a:r>
+            <a:r>
+              <a:rPr lang="zh-TW" altLang="en-US" dirty="0"/>
+              <a:t>是一個很有趣的概念，如果使用者接受補全但馬上刪掉，代表那個補全其實沒有價值，</a:t>
+            </a:r>
+            <a:br>
+              <a:rPr lang="zh-TW" altLang="en-US" dirty="0"/>
+            </a:br>
+            <a:r>
+              <a:rPr lang="zh-TW" altLang="en-US" dirty="0"/>
+              <a:t>但如果補全能存在 </a:t>
+            </a:r>
+            <a:r>
+              <a:rPr lang="en-US" altLang="zh-TW" dirty="0"/>
+              <a:t>30 </a:t>
+            </a:r>
+            <a:r>
+              <a:rPr lang="zh-TW" altLang="en-US" dirty="0"/>
+              <a:t>秒、甚至 </a:t>
+            </a:r>
+            <a:r>
+              <a:rPr lang="en-US" altLang="zh-TW" dirty="0"/>
+              <a:t>5 </a:t>
+            </a:r>
+            <a:r>
+              <a:rPr lang="zh-TW" altLang="en-US" dirty="0"/>
+              <a:t>分鐘或更久，代表確實減少了工作量。</a:t>
+            </a:r>
+          </a:p>
+          <a:p>
+            <a:endParaRPr lang="zh-TW" altLang="en-US" dirty="0"/>
+          </a:p>
+        </p:txBody>
+      </p:sp>
+      <p:sp>
+        <p:nvSpPr>
+          <p:cNvPr id="4" name="投影片編號版面配置區 3"/>
+          <p:cNvSpPr>
+            <a:spLocks noGrp="1"/>
+          </p:cNvSpPr>
+          <p:nvPr>
+            <p:ph type="sldNum" sz="quarter" idx="5"/>
+          </p:nvPr>
+        </p:nvSpPr>
+        <p:spPr/>
+        <p:txBody>
+          <a:bodyPr/>
+          <a:lstStyle/>
+          <a:p>
+            <a:fld id="{5EFAEFA6-D827-4D5D-86C2-61CF0414BCEE}" type="slidenum">
+              <a:rPr lang="zh-TW" altLang="en-US" smtClean="0"/>
+              <a:t>7</a:t>
+            </a:fld>
+            <a:endParaRPr lang="zh-TW" altLang="en-US"/>
+          </a:p>
+        </p:txBody>
+      </p:sp>
+    </p:spTree>
+    <p:extLst>
+      <p:ext uri="{BB962C8B-B14F-4D97-AF65-F5344CB8AC3E}">
+        <p14:creationId xmlns:p14="http://schemas.microsoft.com/office/powerpoint/2010/main" val="704507610"/>
+      </p:ext>
+    </p:extLst>
+  </p:cSld>
+  <p:clrMapOvr>
+    <a:masterClrMapping/>
+  </p:clrMapOvr>
+</p:notes>
+</file>
+
+<file path=ppt/notesSlides/notesSlide8.xml><?xml version="1.0" encoding="utf-8"?>
+<p:notes xmlns:a="http://schemas.openxmlformats.org/drawingml/2006/main" xmlns:r="http://schemas.openxmlformats.org/officeDocument/2006/relationships" xmlns:p="http://schemas.openxmlformats.org/presentationml/2006/main">
+  <p:cSld>
+    <p:spTree>
+      <p:nvGrpSpPr>
+        <p:cNvPr id="1" name=""/>
+        <p:cNvGrpSpPr/>
+        <p:nvPr/>
+      </p:nvGrpSpPr>
+      <p:grpSpPr>
+        <a:xfrm>
+          <a:off x="0" y="0"/>
+          <a:ext cx="0" cy="0"/>
+          <a:chOff x="0" y="0"/>
+          <a:chExt cx="0" cy="0"/>
+        </a:xfrm>
+      </p:grpSpPr>
+      <p:sp>
+        <p:nvSpPr>
+          <p:cNvPr id="2" name="投影片影像版面配置區 1"/>
+          <p:cNvSpPr>
+            <a:spLocks noGrp="1" noRot="1" noChangeAspect="1"/>
+          </p:cNvSpPr>
+          <p:nvPr>
+            <p:ph type="sldImg"/>
+          </p:nvPr>
+        </p:nvSpPr>
+        <p:spPr/>
+      </p:sp>
+      <p:sp>
+        <p:nvSpPr>
+          <p:cNvPr id="3" name="備忘稿版面配置區 2"/>
+          <p:cNvSpPr>
+            <a:spLocks noGrp="1"/>
+          </p:cNvSpPr>
+          <p:nvPr>
+            <p:ph type="body" idx="1"/>
+          </p:nvPr>
+        </p:nvSpPr>
+        <p:spPr/>
+        <p:txBody>
+          <a:bodyPr/>
+          <a:lstStyle/>
+          <a:p>
+            <a:r>
+              <a:rPr lang="zh-TW" altLang="en-US" dirty="0"/>
+              <a:t>這張相關矩陣主要想看的是：</a:t>
+            </a:r>
+            <a:br>
+              <a:rPr lang="zh-TW" altLang="en-US" dirty="0"/>
+            </a:br>
+            <a:r>
+              <a:rPr lang="en-US" altLang="zh-TW" b="1" dirty="0"/>
+              <a:t>Copilot </a:t>
+            </a:r>
+            <a:r>
+              <a:rPr lang="zh-TW" altLang="en-US" b="1" dirty="0"/>
+              <a:t>的哪些行為指標，和開發者的生產力感受最有關聯。</a:t>
+            </a:r>
+            <a:endParaRPr lang="zh-TW" altLang="en-US" dirty="0"/>
+          </a:p>
+          <a:p>
+            <a:r>
+              <a:rPr lang="zh-TW" altLang="en-US" dirty="0"/>
+              <a:t>從這張圖我們可以看到：</a:t>
+            </a:r>
+          </a:p>
+          <a:p>
+            <a:r>
+              <a:rPr lang="zh-TW" altLang="en-US" dirty="0"/>
+              <a:t>第一，</a:t>
+            </a:r>
+            <a:r>
+              <a:rPr lang="en-US" altLang="zh-TW" b="1" dirty="0"/>
+              <a:t>acceptance rate</a:t>
+            </a:r>
+            <a:r>
+              <a:rPr lang="zh-TW" altLang="en-US" b="1" dirty="0"/>
+              <a:t>（</a:t>
+            </a:r>
+            <a:r>
+              <a:rPr lang="en-US" altLang="zh-TW" b="1" dirty="0" err="1"/>
+              <a:t>accepted_per_shown</a:t>
+            </a:r>
+            <a:r>
+              <a:rPr lang="zh-TW" altLang="en-US" b="1" dirty="0"/>
+              <a:t>）跟大多數 </a:t>
+            </a:r>
+            <a:r>
+              <a:rPr lang="en-US" altLang="zh-TW" b="1" dirty="0"/>
+              <a:t>productivity </a:t>
+            </a:r>
+            <a:r>
+              <a:rPr lang="zh-TW" altLang="en-US" b="1" dirty="0"/>
+              <a:t>問項呈現最強正相關。</a:t>
+            </a:r>
+            <a:br>
+              <a:rPr lang="zh-TW" altLang="en-US" dirty="0"/>
+            </a:br>
+            <a:r>
+              <a:rPr lang="zh-TW" altLang="en-US" dirty="0"/>
+              <a:t>包含完成任務速度、減少搜尋時間、降低挫折感等。</a:t>
+            </a:r>
+          </a:p>
+          <a:p>
+            <a:r>
+              <a:rPr lang="zh-TW" altLang="en-US" dirty="0"/>
+              <a:t>第二，</a:t>
+            </a:r>
+            <a:r>
+              <a:rPr lang="en-US" altLang="zh-TW" b="1" dirty="0"/>
+              <a:t>shown</a:t>
+            </a:r>
+            <a:r>
+              <a:rPr lang="zh-TW" altLang="en-US" b="1" dirty="0"/>
+              <a:t>（也就是補全被展示的次數）本身的相關度很低。</a:t>
+            </a:r>
+            <a:br>
+              <a:rPr lang="zh-TW" altLang="en-US" dirty="0"/>
+            </a:br>
+            <a:r>
+              <a:rPr lang="zh-TW" altLang="en-US" dirty="0"/>
+              <a:t>表示補得多不等於有用，重點在於「補全有沒有被採用」。</a:t>
+            </a:r>
+          </a:p>
+          <a:p>
+            <a:r>
+              <a:rPr lang="zh-TW" altLang="en-US" dirty="0"/>
+              <a:t>第三，能看到 </a:t>
+            </a:r>
+            <a:r>
+              <a:rPr lang="en-US" altLang="zh-TW" dirty="0"/>
+              <a:t>productivity </a:t>
+            </a:r>
+            <a:r>
+              <a:rPr lang="zh-TW" altLang="en-US" dirty="0"/>
+              <a:t>問項彼此之間高度相關。</a:t>
+            </a:r>
+            <a:br>
+              <a:rPr lang="zh-TW" altLang="en-US" dirty="0"/>
+            </a:br>
+            <a:r>
+              <a:rPr lang="zh-TW" altLang="en-US" dirty="0"/>
+              <a:t>這代表生產力其實是一個整體心流體驗，而不是單一行為可以解釋。</a:t>
+            </a:r>
+          </a:p>
+          <a:p>
+            <a:r>
+              <a:rPr lang="zh-TW" altLang="en-US" dirty="0"/>
+              <a:t>這一頁的核心 </a:t>
+            </a:r>
+            <a:r>
+              <a:rPr lang="en-US" altLang="zh-TW" dirty="0"/>
+              <a:t>takeaway </a:t>
+            </a:r>
+            <a:r>
+              <a:rPr lang="zh-TW" altLang="en-US" dirty="0"/>
+              <a:t>就是：</a:t>
+            </a:r>
+            <a:br>
+              <a:rPr lang="zh-TW" altLang="en-US" dirty="0"/>
+            </a:br>
+            <a:r>
+              <a:rPr lang="zh-TW" altLang="en-US" b="1" dirty="0"/>
+              <a:t>補全的數量不是關鍵，補全被採用的比例才是最能反映生產力的指標。</a:t>
+            </a:r>
+            <a:endParaRPr lang="zh-TW" altLang="en-US" dirty="0"/>
+          </a:p>
+          <a:p>
+            <a:endParaRPr lang="zh-TW" altLang="en-US" dirty="0"/>
+          </a:p>
+        </p:txBody>
+      </p:sp>
+      <p:sp>
+        <p:nvSpPr>
+          <p:cNvPr id="4" name="投影片編號版面配置區 3"/>
+          <p:cNvSpPr>
+            <a:spLocks noGrp="1"/>
+          </p:cNvSpPr>
+          <p:nvPr>
+            <p:ph type="sldNum" sz="quarter" idx="5"/>
+          </p:nvPr>
+        </p:nvSpPr>
+        <p:spPr/>
+        <p:txBody>
+          <a:bodyPr/>
+          <a:lstStyle/>
+          <a:p>
+            <a:fld id="{5EFAEFA6-D827-4D5D-86C2-61CF0414BCEE}" type="slidenum">
+              <a:rPr lang="zh-TW" altLang="en-US" smtClean="0"/>
+              <a:t>8</a:t>
+            </a:fld>
+            <a:endParaRPr lang="zh-TW" altLang="en-US"/>
+          </a:p>
+        </p:txBody>
+      </p:sp>
+    </p:spTree>
+    <p:extLst>
+      <p:ext uri="{BB962C8B-B14F-4D97-AF65-F5344CB8AC3E}">
+        <p14:creationId xmlns:p14="http://schemas.microsoft.com/office/powerpoint/2010/main" val="4177171905"/>
+      </p:ext>
+    </p:extLst>
+  </p:cSld>
+  <p:clrMapOvr>
+    <a:masterClrMapping/>
+  </p:clrMapOvr>
+</p:notes>
+</file>
+
+<file path=ppt/notesSlides/notesSlide9.xml><?xml version="1.0" encoding="utf-8"?>
+<p:notes xmlns:a="http://schemas.openxmlformats.org/drawingml/2006/main" xmlns:r="http://schemas.openxmlformats.org/officeDocument/2006/relationships" xmlns:p="http://schemas.openxmlformats.org/presentationml/2006/main">
+  <p:cSld>
+    <p:spTree>
+      <p:nvGrpSpPr>
+        <p:cNvPr id="1" name=""/>
+        <p:cNvGrpSpPr/>
+        <p:nvPr/>
+      </p:nvGrpSpPr>
+      <p:grpSpPr>
+        <a:xfrm>
+          <a:off x="0" y="0"/>
+          <a:ext cx="0" cy="0"/>
+          <a:chOff x="0" y="0"/>
+          <a:chExt cx="0" cy="0"/>
+        </a:xfrm>
+      </p:grpSpPr>
+      <p:sp>
+        <p:nvSpPr>
+          <p:cNvPr id="2" name="投影片影像版面配置區 1"/>
+          <p:cNvSpPr>
+            <a:spLocks noGrp="1" noRot="1" noChangeAspect="1"/>
+          </p:cNvSpPr>
+          <p:nvPr>
+            <p:ph type="sldImg"/>
+          </p:nvPr>
+        </p:nvSpPr>
+        <p:spPr/>
+      </p:sp>
+      <p:sp>
+        <p:nvSpPr>
+          <p:cNvPr id="3" name="備忘稿版面配置區 2"/>
+          <p:cNvSpPr>
+            <a:spLocks noGrp="1"/>
+          </p:cNvSpPr>
+          <p:nvPr>
+            <p:ph type="body" idx="1"/>
+          </p:nvPr>
+        </p:nvSpPr>
+        <p:spPr/>
+        <p:txBody>
+          <a:bodyPr/>
+          <a:lstStyle/>
+          <a:p>
+            <a:r>
+              <a:rPr lang="zh-TW" altLang="en-US" dirty="0"/>
+              <a:t>透過 </a:t>
+            </a:r>
+            <a:r>
+              <a:rPr lang="en-US" altLang="zh-TW" dirty="0"/>
+              <a:t>PLS </a:t>
+            </a:r>
+            <a:r>
+              <a:rPr lang="zh-TW" altLang="en-US" dirty="0"/>
+              <a:t>的降維結果，我們可以更清楚看到哪些指標真正主導開發者的生產力。</a:t>
+            </a:r>
+          </a:p>
+          <a:p>
+            <a:r>
+              <a:rPr lang="zh-TW" altLang="en-US" dirty="0"/>
+              <a:t>結果非常明顯：</a:t>
+            </a:r>
+            <a:br>
+              <a:rPr lang="zh-TW" altLang="en-US" dirty="0"/>
+            </a:br>
+            <a:r>
+              <a:rPr lang="zh-TW" altLang="en-US" b="1" dirty="0"/>
+              <a:t>接受率在第一主成分中權重最高。</a:t>
+            </a:r>
+            <a:endParaRPr lang="zh-TW" altLang="en-US" dirty="0"/>
+          </a:p>
+          <a:p>
+            <a:r>
+              <a:rPr lang="zh-TW" altLang="en-US" dirty="0"/>
+              <a:t>其他指標像 </a:t>
+            </a:r>
+            <a:r>
+              <a:rPr lang="en-US" altLang="zh-TW" dirty="0"/>
+              <a:t>persistence </a:t>
+            </a:r>
+            <a:r>
+              <a:rPr lang="zh-TW" altLang="en-US" dirty="0"/>
+              <a:t>或補全的字數貢獻，都只是次要角色。</a:t>
+            </a:r>
+          </a:p>
+          <a:p>
+            <a:r>
+              <a:rPr lang="zh-TW" altLang="en-US" dirty="0"/>
+              <a:t>這再次驗證了研究想傳達的核心觀念</a:t>
+            </a:r>
+            <a:r>
+              <a:rPr lang="en-US" altLang="zh-TW" dirty="0"/>
+              <a:t>——</a:t>
+            </a:r>
+            <a:br>
+              <a:rPr lang="en-US" altLang="zh-TW" dirty="0"/>
+            </a:br>
+            <a:r>
+              <a:rPr lang="zh-TW" altLang="en-US" dirty="0"/>
+              <a:t>「補全不是越多越好，而是越</a:t>
+            </a:r>
+            <a:r>
+              <a:rPr lang="en-US" altLang="zh-TW" dirty="0"/>
+              <a:t>『</a:t>
+            </a:r>
+            <a:r>
+              <a:rPr lang="zh-TW" altLang="en-US" dirty="0"/>
+              <a:t>可採用</a:t>
+            </a:r>
+            <a:r>
+              <a:rPr lang="en-US" altLang="zh-TW" dirty="0"/>
+              <a:t>』</a:t>
+            </a:r>
+            <a:r>
+              <a:rPr lang="zh-TW" altLang="en-US" dirty="0"/>
+              <a:t>越好。」</a:t>
+            </a:r>
+          </a:p>
+          <a:p>
+            <a:endParaRPr lang="zh-TW" altLang="en-US" dirty="0"/>
+          </a:p>
+        </p:txBody>
+      </p:sp>
+      <p:sp>
+        <p:nvSpPr>
+          <p:cNvPr id="4" name="投影片編號版面配置區 3"/>
+          <p:cNvSpPr>
+            <a:spLocks noGrp="1"/>
+          </p:cNvSpPr>
+          <p:nvPr>
+            <p:ph type="sldNum" sz="quarter" idx="5"/>
+          </p:nvPr>
+        </p:nvSpPr>
+        <p:spPr/>
+        <p:txBody>
+          <a:bodyPr/>
+          <a:lstStyle/>
+          <a:p>
+            <a:fld id="{5EFAEFA6-D827-4D5D-86C2-61CF0414BCEE}" type="slidenum">
+              <a:rPr lang="zh-TW" altLang="en-US" smtClean="0"/>
+              <a:t>9</a:t>
+            </a:fld>
+            <a:endParaRPr lang="zh-TW" altLang="en-US"/>
+          </a:p>
+        </p:txBody>
+      </p:sp>
+    </p:spTree>
+    <p:extLst>
+      <p:ext uri="{BB962C8B-B14F-4D97-AF65-F5344CB8AC3E}">
+        <p14:creationId xmlns:p14="http://schemas.microsoft.com/office/powerpoint/2010/main" val="3488521370"/>
+      </p:ext>
+    </p:extLst>
+  </p:cSld>
+  <p:clrMapOvr>
+    <a:masterClrMapping/>
+  </p:clrMapOvr>
+</p:notes>
 </file>
 
 <file path=ppt/slideLayouts/slideLayout1.xml><?xml version="1.0" encoding="utf-8"?>
@@ -132,13 +2667,7 @@
       </p:grpSpPr>
       <p:sp>
         <p:nvSpPr>
-          <p:cNvPr id="2" name="標題 1">
-            <a:extLst>
-              <a:ext uri="{FF2B5EF4-FFF2-40B4-BE49-F238E27FC236}">
-                <a16:creationId xmlns:a16="http://schemas.microsoft.com/office/drawing/2014/main" id="{AB99A30F-62D5-0D17-AFB9-E330E8A7D0B8}"/>
-              </a:ext>
-            </a:extLst>
-          </p:cNvPr>
+          <p:cNvPr id="2" name="Title 1"/>
           <p:cNvSpPr>
             <a:spLocks noGrp="1"/>
           </p:cNvSpPr>
@@ -148,15 +2677,17 @@
         </p:nvSpPr>
         <p:spPr>
           <a:xfrm>
-            <a:off x="1524000" y="1122363"/>
-            <a:ext cx="9144000" cy="2387600"/>
+            <a:off x="2396319" y="802299"/>
+            <a:ext cx="5618515" cy="2541431"/>
           </a:xfrm>
         </p:spPr>
         <p:txBody>
-          <a:bodyPr anchor="b"/>
+          <a:bodyPr bIns="0" anchor="b">
+            <a:normAutofit/>
+          </a:bodyPr>
           <a:lstStyle>
-            <a:lvl1pPr algn="ctr">
-              <a:defRPr sz="6000"/>
+            <a:lvl1pPr algn="l">
+              <a:defRPr sz="5400"/>
             </a:lvl1pPr>
           </a:lstStyle>
           <a:p>
@@ -164,18 +2695,13 @@
               <a:rPr lang="zh-TW" altLang="en-US"/>
               <a:t>按一下以編輯母片標題樣式</a:t>
             </a:r>
-          </a:p>
-        </p:txBody>
-      </p:sp>
-      <p:sp>
-        <p:nvSpPr>
-          <p:cNvPr id="3" name="副標題 2">
-            <a:extLst>
-              <a:ext uri="{FF2B5EF4-FFF2-40B4-BE49-F238E27FC236}">
-                <a16:creationId xmlns:a16="http://schemas.microsoft.com/office/drawing/2014/main" id="{940604FA-BEB5-FBF4-58D6-0AE95B456FE6}"/>
-              </a:ext>
-            </a:extLst>
-          </p:cNvPr>
+            <a:endParaRPr lang="en-US" dirty="0"/>
+          </a:p>
+        </p:txBody>
+      </p:sp>
+      <p:sp>
+        <p:nvSpPr>
+          <p:cNvPr id="3" name="Subtitle 2"/>
           <p:cNvSpPr>
             <a:spLocks noGrp="1"/>
           </p:cNvSpPr>
@@ -185,48 +2711,54 @@
         </p:nvSpPr>
         <p:spPr>
           <a:xfrm>
-            <a:off x="1524000" y="3602038"/>
-            <a:ext cx="9144000" cy="1655762"/>
+            <a:off x="2396319" y="3531205"/>
+            <a:ext cx="5618515" cy="977621"/>
           </a:xfrm>
         </p:spPr>
         <p:txBody>
-          <a:bodyPr/>
+          <a:bodyPr tIns="91440" bIns="91440">
+            <a:normAutofit/>
+          </a:bodyPr>
           <a:lstStyle>
-            <a:lvl1pPr marL="0" indent="0" algn="ctr">
+            <a:lvl1pPr marL="0" indent="0" algn="l">
               <a:buNone/>
-              <a:defRPr sz="2400"/>
+              <a:defRPr sz="1600" b="0" cap="all" baseline="0">
+                <a:solidFill>
+                  <a:schemeClr val="tx1"/>
+                </a:solidFill>
+              </a:defRPr>
             </a:lvl1pPr>
-            <a:lvl2pPr marL="457200" indent="0" algn="ctr">
+            <a:lvl2pPr marL="342900" indent="0" algn="ctr">
               <a:buNone/>
-              <a:defRPr sz="2000"/>
+              <a:defRPr sz="1500"/>
             </a:lvl2pPr>
-            <a:lvl3pPr marL="914400" indent="0" algn="ctr">
+            <a:lvl3pPr marL="685800" indent="0" algn="ctr">
               <a:buNone/>
-              <a:defRPr sz="1800"/>
+              <a:defRPr sz="1350"/>
             </a:lvl3pPr>
-            <a:lvl4pPr marL="1371600" indent="0" algn="ctr">
+            <a:lvl4pPr marL="1028700" indent="0" algn="ctr">
               <a:buNone/>
-              <a:defRPr sz="1600"/>
+              <a:defRPr sz="1200"/>
             </a:lvl4pPr>
-            <a:lvl5pPr marL="1828800" indent="0" algn="ctr">
+            <a:lvl5pPr marL="1371600" indent="0" algn="ctr">
               <a:buNone/>
-              <a:defRPr sz="1600"/>
+              <a:defRPr sz="1200"/>
             </a:lvl5pPr>
-            <a:lvl6pPr marL="2286000" indent="0" algn="ctr">
+            <a:lvl6pPr marL="1714500" indent="0" algn="ctr">
               <a:buNone/>
-              <a:defRPr sz="1600"/>
+              <a:defRPr sz="1200"/>
             </a:lvl6pPr>
-            <a:lvl7pPr marL="2743200" indent="0" algn="ctr">
+            <a:lvl7pPr marL="2057400" indent="0" algn="ctr">
               <a:buNone/>
-              <a:defRPr sz="1600"/>
+              <a:defRPr sz="1200"/>
             </a:lvl7pPr>
-            <a:lvl8pPr marL="3200400" indent="0" algn="ctr">
+            <a:lvl8pPr marL="2400300" indent="0" algn="ctr">
               <a:buNone/>
-              <a:defRPr sz="1600"/>
+              <a:defRPr sz="1200"/>
             </a:lvl8pPr>
-            <a:lvl9pPr marL="3657600" indent="0" algn="ctr">
+            <a:lvl9pPr marL="2743200" indent="0" algn="ctr">
               <a:buNone/>
-              <a:defRPr sz="1600"/>
+              <a:defRPr sz="1200"/>
             </a:lvl9pPr>
           </a:lstStyle>
           <a:p>
@@ -234,18 +2766,13 @@
               <a:rPr lang="zh-TW" altLang="en-US"/>
               <a:t>按一下以編輯母片子標題樣式</a:t>
             </a:r>
-          </a:p>
-        </p:txBody>
-      </p:sp>
-      <p:sp>
-        <p:nvSpPr>
-          <p:cNvPr id="4" name="日期版面配置區 3">
-            <a:extLst>
-              <a:ext uri="{FF2B5EF4-FFF2-40B4-BE49-F238E27FC236}">
-                <a16:creationId xmlns:a16="http://schemas.microsoft.com/office/drawing/2014/main" id="{0273DF18-F262-CFF3-14D7-3C2B0E61340E}"/>
-              </a:ext>
-            </a:extLst>
-          </p:cNvPr>
+            <a:endParaRPr lang="en-US" dirty="0"/>
+          </a:p>
+        </p:txBody>
+      </p:sp>
+      <p:sp>
+        <p:nvSpPr>
+          <p:cNvPr id="4" name="Date Placeholder 3"/>
           <p:cNvSpPr>
             <a:spLocks noGrp="1"/>
           </p:cNvSpPr>
@@ -258,23 +2785,17 @@
           <a:bodyPr/>
           <a:lstStyle/>
           <a:p>
-            <a:fld id="{2BB06109-5618-412E-B2EE-D2F35E34DA82}" type="datetimeFigureOut">
-              <a:rPr lang="zh-TW" altLang="en-US" smtClean="0"/>
-              <a:t>2025/11/17</a:t>
+            <a:fld id="{5BCAD085-E8A6-8845-BD4E-CB4CCA059FC4}" type="datetimeFigureOut">
+              <a:rPr lang="en-US" smtClean="0"/>
+              <a:t>12/8/2025</a:t>
             </a:fld>
-            <a:endParaRPr lang="zh-TW" altLang="en-US"/>
-          </a:p>
-        </p:txBody>
-      </p:sp>
-      <p:sp>
-        <p:nvSpPr>
-          <p:cNvPr id="5" name="頁尾版面配置區 4">
-            <a:extLst>
-              <a:ext uri="{FF2B5EF4-FFF2-40B4-BE49-F238E27FC236}">
-                <a16:creationId xmlns:a16="http://schemas.microsoft.com/office/drawing/2014/main" id="{AFD033FC-9B86-5C9A-15F6-4F32FC5EB759}"/>
-              </a:ext>
-            </a:extLst>
-          </p:cNvPr>
+            <a:endParaRPr lang="en-US"/>
+          </a:p>
+        </p:txBody>
+      </p:sp>
+      <p:sp>
+        <p:nvSpPr>
+          <p:cNvPr id="5" name="Footer Placeholder 4"/>
           <p:cNvSpPr>
             <a:spLocks noGrp="1"/>
           </p:cNvSpPr>
@@ -282,24 +2803,23 @@
             <p:ph type="ftr" sz="quarter" idx="11"/>
           </p:nvPr>
         </p:nvSpPr>
-        <p:spPr/>
+        <p:spPr>
+          <a:xfrm>
+            <a:off x="2396319" y="329308"/>
+            <a:ext cx="3086292" cy="309201"/>
+          </a:xfrm>
+        </p:spPr>
         <p:txBody>
           <a:bodyPr/>
           <a:lstStyle/>
           <a:p>
-            <a:endParaRPr lang="zh-TW" altLang="en-US"/>
-          </a:p>
-        </p:txBody>
-      </p:sp>
-      <p:sp>
-        <p:nvSpPr>
-          <p:cNvPr id="6" name="投影片編號版面配置區 5">
-            <a:extLst>
-              <a:ext uri="{FF2B5EF4-FFF2-40B4-BE49-F238E27FC236}">
-                <a16:creationId xmlns:a16="http://schemas.microsoft.com/office/drawing/2014/main" id="{4FDDFDBB-AFA2-C22F-7BD2-20FA506B8103}"/>
-              </a:ext>
-            </a:extLst>
-          </p:cNvPr>
+            <a:endParaRPr lang="en-US"/>
+          </a:p>
+        </p:txBody>
+      </p:sp>
+      <p:sp>
+        <p:nvSpPr>
+          <p:cNvPr id="6" name="Slide Number Placeholder 5"/>
           <p:cNvSpPr>
             <a:spLocks noGrp="1"/>
           </p:cNvSpPr>
@@ -307,23 +2827,59 @@
             <p:ph type="sldNum" sz="quarter" idx="12"/>
           </p:nvPr>
         </p:nvSpPr>
-        <p:spPr/>
+        <p:spPr>
+          <a:xfrm>
+            <a:off x="1434703" y="798973"/>
+            <a:ext cx="802005" cy="503578"/>
+          </a:xfrm>
+        </p:spPr>
         <p:txBody>
           <a:bodyPr/>
           <a:lstStyle/>
           <a:p>
-            <a:fld id="{DC9A25D7-4362-44B0-A555-D90F9CDD7899}" type="slidenum">
-              <a:rPr lang="zh-TW" altLang="en-US" smtClean="0"/>
+            <a:fld id="{C1FF6DA9-008F-8B48-92A6-B652298478BF}" type="slidenum">
+              <a:rPr lang="en-US" smtClean="0"/>
               <a:t>‹#›</a:t>
             </a:fld>
-            <a:endParaRPr lang="zh-TW" altLang="en-US"/>
-          </a:p>
-        </p:txBody>
-      </p:sp>
+            <a:endParaRPr lang="en-US"/>
+          </a:p>
+        </p:txBody>
+      </p:sp>
+      <p:cxnSp>
+        <p:nvCxnSpPr>
+          <p:cNvPr id="15" name="Straight Connector 14"/>
+          <p:cNvCxnSpPr/>
+          <p:nvPr/>
+        </p:nvCxnSpPr>
+        <p:spPr>
+          <a:xfrm>
+            <a:off x="2396319" y="3528542"/>
+            <a:ext cx="5618515" cy="0"/>
+          </a:xfrm>
+          <a:prstGeom prst="line">
+            <a:avLst/>
+          </a:prstGeom>
+          <a:ln w="31750"/>
+        </p:spPr>
+        <p:style>
+          <a:lnRef idx="3">
+            <a:schemeClr val="accent1"/>
+          </a:lnRef>
+          <a:fillRef idx="0">
+            <a:schemeClr val="accent1"/>
+          </a:fillRef>
+          <a:effectRef idx="2">
+            <a:schemeClr val="accent1"/>
+          </a:effectRef>
+          <a:fontRef idx="minor">
+            <a:schemeClr val="tx1"/>
+          </a:fontRef>
+        </p:style>
+      </p:cxnSp>
     </p:spTree>
     <p:extLst>
       <p:ext uri="{BB962C8B-B14F-4D97-AF65-F5344CB8AC3E}">
-        <p14:creationId xmlns:p14="http://schemas.microsoft.com/office/powerpoint/2010/main" val="3424143058"/>
+        <p14:creationId xmlns:p14="http://schemas.microsoft.com/office/powerpoint/2010/main" val="367402034"/>
       </p:ext>
     </p:extLst>
   </p:cSld>
@@ -350,15 +2906,40 @@
           <a:chExt cx="0" cy="0"/>
         </a:xfrm>
       </p:grpSpPr>
-      <p:sp>
-        <p:nvSpPr>
-          <p:cNvPr id="2" name="標題 1">
-            <a:extLst>
-              <a:ext uri="{FF2B5EF4-FFF2-40B4-BE49-F238E27FC236}">
-                <a16:creationId xmlns:a16="http://schemas.microsoft.com/office/drawing/2014/main" id="{90F7E2A3-036E-FBF1-822A-9EC42BBA665D}"/>
-              </a:ext>
-            </a:extLst>
-          </p:cNvPr>
+      <p:cxnSp>
+        <p:nvCxnSpPr>
+          <p:cNvPr id="33" name="Straight Connector 32"/>
+          <p:cNvCxnSpPr/>
+          <p:nvPr/>
+        </p:nvCxnSpPr>
+        <p:spPr>
+          <a:xfrm>
+            <a:off x="1443491" y="1847088"/>
+            <a:ext cx="6571343" cy="0"/>
+          </a:xfrm>
+          <a:prstGeom prst="line">
+            <a:avLst/>
+          </a:prstGeom>
+          <a:ln w="31750"/>
+        </p:spPr>
+        <p:style>
+          <a:lnRef idx="3">
+            <a:schemeClr val="accent1"/>
+          </a:lnRef>
+          <a:fillRef idx="0">
+            <a:schemeClr val="accent1"/>
+          </a:fillRef>
+          <a:effectRef idx="2">
+            <a:schemeClr val="accent1"/>
+          </a:effectRef>
+          <a:fontRef idx="minor">
+            <a:schemeClr val="tx1"/>
+          </a:fontRef>
+        </p:style>
+      </p:cxnSp>
+      <p:sp>
+        <p:nvSpPr>
+          <p:cNvPr id="2" name="Title 1"/>
           <p:cNvSpPr>
             <a:spLocks noGrp="1"/>
           </p:cNvSpPr>
@@ -375,18 +2956,13 @@
               <a:rPr lang="zh-TW" altLang="en-US"/>
               <a:t>按一下以編輯母片標題樣式</a:t>
             </a:r>
-          </a:p>
-        </p:txBody>
-      </p:sp>
-      <p:sp>
-        <p:nvSpPr>
-          <p:cNvPr id="3" name="直排文字版面配置區 2">
-            <a:extLst>
-              <a:ext uri="{FF2B5EF4-FFF2-40B4-BE49-F238E27FC236}">
-                <a16:creationId xmlns:a16="http://schemas.microsoft.com/office/drawing/2014/main" id="{423B6B72-776C-8E19-39D2-C7D43995872B}"/>
-              </a:ext>
-            </a:extLst>
-          </p:cNvPr>
+            <a:endParaRPr lang="en-US" dirty="0"/>
+          </a:p>
+        </p:txBody>
+      </p:sp>
+      <p:sp>
+        <p:nvSpPr>
+          <p:cNvPr id="3" name="Vertical Text Placeholder 2"/>
           <p:cNvSpPr>
             <a:spLocks noGrp="1"/>
           </p:cNvSpPr>
@@ -432,18 +3008,13 @@
               <a:rPr lang="zh-TW" altLang="en-US"/>
               <a:t>第五層</a:t>
             </a:r>
-          </a:p>
-        </p:txBody>
-      </p:sp>
-      <p:sp>
-        <p:nvSpPr>
-          <p:cNvPr id="4" name="日期版面配置區 3">
-            <a:extLst>
-              <a:ext uri="{FF2B5EF4-FFF2-40B4-BE49-F238E27FC236}">
-                <a16:creationId xmlns:a16="http://schemas.microsoft.com/office/drawing/2014/main" id="{53CAE83F-AD5C-42F5-29E9-75C1D4831374}"/>
-              </a:ext>
-            </a:extLst>
-          </p:cNvPr>
+            <a:endParaRPr lang="en-US" dirty="0"/>
+          </a:p>
+        </p:txBody>
+      </p:sp>
+      <p:sp>
+        <p:nvSpPr>
+          <p:cNvPr id="4" name="Date Placeholder 3"/>
           <p:cNvSpPr>
             <a:spLocks noGrp="1"/>
           </p:cNvSpPr>
@@ -456,23 +3027,17 @@
           <a:bodyPr/>
           <a:lstStyle/>
           <a:p>
-            <a:fld id="{2BB06109-5618-412E-B2EE-D2F35E34DA82}" type="datetimeFigureOut">
-              <a:rPr lang="zh-TW" altLang="en-US" smtClean="0"/>
-              <a:t>2025/11/17</a:t>
+            <a:fld id="{5BCAD085-E8A6-8845-BD4E-CB4CCA059FC4}" type="datetimeFigureOut">
+              <a:rPr lang="en-US" smtClean="0"/>
+              <a:t>12/8/2025</a:t>
             </a:fld>
-            <a:endParaRPr lang="zh-TW" altLang="en-US"/>
-          </a:p>
-        </p:txBody>
-      </p:sp>
-      <p:sp>
-        <p:nvSpPr>
-          <p:cNvPr id="5" name="頁尾版面配置區 4">
-            <a:extLst>
-              <a:ext uri="{FF2B5EF4-FFF2-40B4-BE49-F238E27FC236}">
-                <a16:creationId xmlns:a16="http://schemas.microsoft.com/office/drawing/2014/main" id="{0D9AC2E4-A88B-1601-CF55-7241DF40DFCB}"/>
-              </a:ext>
-            </a:extLst>
-          </p:cNvPr>
+            <a:endParaRPr lang="en-US"/>
+          </a:p>
+        </p:txBody>
+      </p:sp>
+      <p:sp>
+        <p:nvSpPr>
+          <p:cNvPr id="5" name="Footer Placeholder 4"/>
           <p:cNvSpPr>
             <a:spLocks noGrp="1"/>
           </p:cNvSpPr>
@@ -485,19 +3050,13 @@
           <a:bodyPr/>
           <a:lstStyle/>
           <a:p>
-            <a:endParaRPr lang="zh-TW" altLang="en-US"/>
-          </a:p>
-        </p:txBody>
-      </p:sp>
-      <p:sp>
-        <p:nvSpPr>
-          <p:cNvPr id="6" name="投影片編號版面配置區 5">
-            <a:extLst>
-              <a:ext uri="{FF2B5EF4-FFF2-40B4-BE49-F238E27FC236}">
-                <a16:creationId xmlns:a16="http://schemas.microsoft.com/office/drawing/2014/main" id="{15F7CC6F-BCDC-736C-4712-08ACE4E700FE}"/>
-              </a:ext>
-            </a:extLst>
-          </p:cNvPr>
+            <a:endParaRPr lang="en-US"/>
+          </a:p>
+        </p:txBody>
+      </p:sp>
+      <p:sp>
+        <p:nvSpPr>
+          <p:cNvPr id="6" name="Slide Number Placeholder 5"/>
           <p:cNvSpPr>
             <a:spLocks noGrp="1"/>
           </p:cNvSpPr>
@@ -510,18 +3069,18 @@
           <a:bodyPr/>
           <a:lstStyle/>
           <a:p>
-            <a:fld id="{DC9A25D7-4362-44B0-A555-D90F9CDD7899}" type="slidenum">
-              <a:rPr lang="zh-TW" altLang="en-US" smtClean="0"/>
+            <a:fld id="{C1FF6DA9-008F-8B48-92A6-B652298478BF}" type="slidenum">
+              <a:rPr lang="en-US" smtClean="0"/>
               <a:t>‹#›</a:t>
             </a:fld>
-            <a:endParaRPr lang="zh-TW" altLang="en-US"/>
+            <a:endParaRPr lang="en-US"/>
           </a:p>
         </p:txBody>
       </p:sp>
     </p:spTree>
     <p:extLst>
       <p:ext uri="{BB962C8B-B14F-4D97-AF65-F5344CB8AC3E}">
-        <p14:creationId xmlns:p14="http://schemas.microsoft.com/office/powerpoint/2010/main" val="2879476598"/>
+        <p14:creationId xmlns:p14="http://schemas.microsoft.com/office/powerpoint/2010/main" val="1294772942"/>
       </p:ext>
     </p:extLst>
   </p:cSld>
@@ -550,13 +3109,7 @@
       </p:grpSpPr>
       <p:sp>
         <p:nvSpPr>
-          <p:cNvPr id="2" name="直排標題 1">
-            <a:extLst>
-              <a:ext uri="{FF2B5EF4-FFF2-40B4-BE49-F238E27FC236}">
-                <a16:creationId xmlns:a16="http://schemas.microsoft.com/office/drawing/2014/main" id="{A1481422-619E-EAC5-9026-4D1B1F0A5D54}"/>
-              </a:ext>
-            </a:extLst>
-          </p:cNvPr>
+          <p:cNvPr id="2" name="Vertical Title 1"/>
           <p:cNvSpPr>
             <a:spLocks noGrp="1"/>
           </p:cNvSpPr>
@@ -566,30 +3119,29 @@
         </p:nvSpPr>
         <p:spPr>
           <a:xfrm>
-            <a:off x="8724900" y="365125"/>
-            <a:ext cx="2628900" cy="5811838"/>
+            <a:off x="6918028" y="798974"/>
+            <a:ext cx="1103027" cy="4659889"/>
           </a:xfrm>
         </p:spPr>
         <p:txBody>
           <a:bodyPr vert="eaVert"/>
-          <a:lstStyle/>
+          <a:lstStyle>
+            <a:lvl1pPr algn="l">
+              <a:defRPr/>
+            </a:lvl1pPr>
+          </a:lstStyle>
           <a:p>
             <a:r>
               <a:rPr lang="zh-TW" altLang="en-US"/>
               <a:t>按一下以編輯母片標題樣式</a:t>
             </a:r>
-          </a:p>
-        </p:txBody>
-      </p:sp>
-      <p:sp>
-        <p:nvSpPr>
-          <p:cNvPr id="3" name="直排文字版面配置區 2">
-            <a:extLst>
-              <a:ext uri="{FF2B5EF4-FFF2-40B4-BE49-F238E27FC236}">
-                <a16:creationId xmlns:a16="http://schemas.microsoft.com/office/drawing/2014/main" id="{6EDEE783-2641-E838-D7C9-0986ED9A9DBD}"/>
-              </a:ext>
-            </a:extLst>
-          </p:cNvPr>
+            <a:endParaRPr lang="en-US" dirty="0"/>
+          </a:p>
+        </p:txBody>
+      </p:sp>
+      <p:sp>
+        <p:nvSpPr>
+          <p:cNvPr id="3" name="Vertical Text Placeholder 2"/>
           <p:cNvSpPr>
             <a:spLocks noGrp="1"/>
           </p:cNvSpPr>
@@ -599,8 +3151,8 @@
         </p:nvSpPr>
         <p:spPr>
           <a:xfrm>
-            <a:off x="838200" y="365125"/>
-            <a:ext cx="7734300" cy="5811838"/>
+            <a:off x="1443491" y="798974"/>
+            <a:ext cx="5301095" cy="4659889"/>
           </a:xfrm>
         </p:spPr>
         <p:txBody>
@@ -640,18 +3192,13 @@
               <a:rPr lang="zh-TW" altLang="en-US"/>
               <a:t>第五層</a:t>
             </a:r>
-          </a:p>
-        </p:txBody>
-      </p:sp>
-      <p:sp>
-        <p:nvSpPr>
-          <p:cNvPr id="4" name="日期版面配置區 3">
-            <a:extLst>
-              <a:ext uri="{FF2B5EF4-FFF2-40B4-BE49-F238E27FC236}">
-                <a16:creationId xmlns:a16="http://schemas.microsoft.com/office/drawing/2014/main" id="{D2E77CAD-3312-9AC9-58E4-50CB01714884}"/>
-              </a:ext>
-            </a:extLst>
-          </p:cNvPr>
+            <a:endParaRPr lang="en-US" dirty="0"/>
+          </a:p>
+        </p:txBody>
+      </p:sp>
+      <p:sp>
+        <p:nvSpPr>
+          <p:cNvPr id="4" name="Date Placeholder 3"/>
           <p:cNvSpPr>
             <a:spLocks noGrp="1"/>
           </p:cNvSpPr>
@@ -664,23 +3211,17 @@
           <a:bodyPr/>
           <a:lstStyle/>
           <a:p>
-            <a:fld id="{2BB06109-5618-412E-B2EE-D2F35E34DA82}" type="datetimeFigureOut">
-              <a:rPr lang="zh-TW" altLang="en-US" smtClean="0"/>
-              <a:t>2025/11/17</a:t>
+            <a:fld id="{5BCAD085-E8A6-8845-BD4E-CB4CCA059FC4}" type="datetimeFigureOut">
+              <a:rPr lang="en-US" smtClean="0"/>
+              <a:t>12/8/2025</a:t>
             </a:fld>
-            <a:endParaRPr lang="zh-TW" altLang="en-US"/>
-          </a:p>
-        </p:txBody>
-      </p:sp>
-      <p:sp>
-        <p:nvSpPr>
-          <p:cNvPr id="5" name="頁尾版面配置區 4">
-            <a:extLst>
-              <a:ext uri="{FF2B5EF4-FFF2-40B4-BE49-F238E27FC236}">
-                <a16:creationId xmlns:a16="http://schemas.microsoft.com/office/drawing/2014/main" id="{617514D7-E7DA-786D-335C-F942775AED15}"/>
-              </a:ext>
-            </a:extLst>
-          </p:cNvPr>
+            <a:endParaRPr lang="en-US"/>
+          </a:p>
+        </p:txBody>
+      </p:sp>
+      <p:sp>
+        <p:nvSpPr>
+          <p:cNvPr id="5" name="Footer Placeholder 4"/>
           <p:cNvSpPr>
             <a:spLocks noGrp="1"/>
           </p:cNvSpPr>
@@ -693,19 +3234,13 @@
           <a:bodyPr/>
           <a:lstStyle/>
           <a:p>
-            <a:endParaRPr lang="zh-TW" altLang="en-US"/>
-          </a:p>
-        </p:txBody>
-      </p:sp>
-      <p:sp>
-        <p:nvSpPr>
-          <p:cNvPr id="6" name="投影片編號版面配置區 5">
-            <a:extLst>
-              <a:ext uri="{FF2B5EF4-FFF2-40B4-BE49-F238E27FC236}">
-                <a16:creationId xmlns:a16="http://schemas.microsoft.com/office/drawing/2014/main" id="{47F40285-5E03-A0A4-0D2D-9BD722979D16}"/>
-              </a:ext>
-            </a:extLst>
-          </p:cNvPr>
+            <a:endParaRPr lang="en-US"/>
+          </a:p>
+        </p:txBody>
+      </p:sp>
+      <p:sp>
+        <p:nvSpPr>
+          <p:cNvPr id="6" name="Slide Number Placeholder 5"/>
           <p:cNvSpPr>
             <a:spLocks noGrp="1"/>
           </p:cNvSpPr>
@@ -718,18 +3253,49 @@
           <a:bodyPr/>
           <a:lstStyle/>
           <a:p>
-            <a:fld id="{DC9A25D7-4362-44B0-A555-D90F9CDD7899}" type="slidenum">
-              <a:rPr lang="zh-TW" altLang="en-US" smtClean="0"/>
+            <a:fld id="{C1FF6DA9-008F-8B48-92A6-B652298478BF}" type="slidenum">
+              <a:rPr lang="en-US" smtClean="0"/>
               <a:t>‹#›</a:t>
             </a:fld>
-            <a:endParaRPr lang="zh-TW" altLang="en-US"/>
-          </a:p>
-        </p:txBody>
-      </p:sp>
+            <a:endParaRPr lang="en-US"/>
+          </a:p>
+        </p:txBody>
+      </p:sp>
+      <p:cxnSp>
+        <p:nvCxnSpPr>
+          <p:cNvPr id="15" name="Straight Connector 14"/>
+          <p:cNvCxnSpPr/>
+          <p:nvPr/>
+        </p:nvCxnSpPr>
+        <p:spPr>
+          <a:xfrm>
+            <a:off x="6918028" y="798974"/>
+            <a:ext cx="0" cy="4659889"/>
+          </a:xfrm>
+          <a:prstGeom prst="line">
+            <a:avLst/>
+          </a:prstGeom>
+          <a:ln w="31750"/>
+        </p:spPr>
+        <p:style>
+          <a:lnRef idx="3">
+            <a:schemeClr val="accent1"/>
+          </a:lnRef>
+          <a:fillRef idx="0">
+            <a:schemeClr val="accent1"/>
+          </a:fillRef>
+          <a:effectRef idx="2">
+            <a:schemeClr val="accent1"/>
+          </a:effectRef>
+          <a:fontRef idx="minor">
+            <a:schemeClr val="tx1"/>
+          </a:fontRef>
+        </p:style>
+      </p:cxnSp>
     </p:spTree>
     <p:extLst>
       <p:ext uri="{BB962C8B-B14F-4D97-AF65-F5344CB8AC3E}">
-        <p14:creationId xmlns:p14="http://schemas.microsoft.com/office/powerpoint/2010/main" val="3082755362"/>
+        <p14:creationId xmlns:p14="http://schemas.microsoft.com/office/powerpoint/2010/main" val="128894564"/>
       </p:ext>
     </p:extLst>
   </p:cSld>
@@ -758,13 +3324,7 @@
       </p:grpSpPr>
       <p:sp>
         <p:nvSpPr>
-          <p:cNvPr id="2" name="標題 1">
-            <a:extLst>
-              <a:ext uri="{FF2B5EF4-FFF2-40B4-BE49-F238E27FC236}">
-                <a16:creationId xmlns:a16="http://schemas.microsoft.com/office/drawing/2014/main" id="{A99A2A3B-DFD4-039A-E35C-2ABE29EEF300}"/>
-              </a:ext>
-            </a:extLst>
-          </p:cNvPr>
+          <p:cNvPr id="2" name="Title 1"/>
           <p:cNvSpPr>
             <a:spLocks noGrp="1"/>
           </p:cNvSpPr>
@@ -781,18 +3341,13 @@
               <a:rPr lang="zh-TW" altLang="en-US"/>
               <a:t>按一下以編輯母片標題樣式</a:t>
             </a:r>
-          </a:p>
-        </p:txBody>
-      </p:sp>
-      <p:sp>
-        <p:nvSpPr>
-          <p:cNvPr id="3" name="內容版面配置區 2">
-            <a:extLst>
-              <a:ext uri="{FF2B5EF4-FFF2-40B4-BE49-F238E27FC236}">
-                <a16:creationId xmlns:a16="http://schemas.microsoft.com/office/drawing/2014/main" id="{AFD4F479-CBD1-E6A7-66B6-990A602E4D1E}"/>
-              </a:ext>
-            </a:extLst>
-          </p:cNvPr>
+            <a:endParaRPr lang="en-US" dirty="0"/>
+          </a:p>
+        </p:txBody>
+      </p:sp>
+      <p:sp>
+        <p:nvSpPr>
+          <p:cNvPr id="3" name="Content Placeholder 2"/>
           <p:cNvSpPr>
             <a:spLocks noGrp="1"/>
           </p:cNvSpPr>
@@ -802,7 +3357,7 @@
         </p:nvSpPr>
         <p:spPr/>
         <p:txBody>
-          <a:bodyPr/>
+          <a:bodyPr anchor="t"/>
           <a:lstStyle/>
           <a:p>
             <a:pPr lvl="0"/>
@@ -838,18 +3393,13 @@
               <a:rPr lang="zh-TW" altLang="en-US"/>
               <a:t>第五層</a:t>
             </a:r>
-          </a:p>
-        </p:txBody>
-      </p:sp>
-      <p:sp>
-        <p:nvSpPr>
-          <p:cNvPr id="4" name="日期版面配置區 3">
-            <a:extLst>
-              <a:ext uri="{FF2B5EF4-FFF2-40B4-BE49-F238E27FC236}">
-                <a16:creationId xmlns:a16="http://schemas.microsoft.com/office/drawing/2014/main" id="{976CA403-1566-0116-8C04-D2A992792C02}"/>
-              </a:ext>
-            </a:extLst>
-          </p:cNvPr>
+            <a:endParaRPr lang="en-US" dirty="0"/>
+          </a:p>
+        </p:txBody>
+      </p:sp>
+      <p:sp>
+        <p:nvSpPr>
+          <p:cNvPr id="4" name="Date Placeholder 3"/>
           <p:cNvSpPr>
             <a:spLocks noGrp="1"/>
           </p:cNvSpPr>
@@ -862,23 +3412,17 @@
           <a:bodyPr/>
           <a:lstStyle/>
           <a:p>
-            <a:fld id="{2BB06109-5618-412E-B2EE-D2F35E34DA82}" type="datetimeFigureOut">
-              <a:rPr lang="zh-TW" altLang="en-US" smtClean="0"/>
-              <a:t>2025/11/17</a:t>
+            <a:fld id="{5BCAD085-E8A6-8845-BD4E-CB4CCA059FC4}" type="datetimeFigureOut">
+              <a:rPr lang="en-US" smtClean="0"/>
+              <a:t>12/8/2025</a:t>
             </a:fld>
-            <a:endParaRPr lang="zh-TW" altLang="en-US"/>
-          </a:p>
-        </p:txBody>
-      </p:sp>
-      <p:sp>
-        <p:nvSpPr>
-          <p:cNvPr id="5" name="頁尾版面配置區 4">
-            <a:extLst>
-              <a:ext uri="{FF2B5EF4-FFF2-40B4-BE49-F238E27FC236}">
-                <a16:creationId xmlns:a16="http://schemas.microsoft.com/office/drawing/2014/main" id="{3D0CE561-1FE3-7111-59C5-4438B5D5F954}"/>
-              </a:ext>
-            </a:extLst>
-          </p:cNvPr>
+            <a:endParaRPr lang="en-US"/>
+          </a:p>
+        </p:txBody>
+      </p:sp>
+      <p:sp>
+        <p:nvSpPr>
+          <p:cNvPr id="5" name="Footer Placeholder 4"/>
           <p:cNvSpPr>
             <a:spLocks noGrp="1"/>
           </p:cNvSpPr>
@@ -891,19 +3435,13 @@
           <a:bodyPr/>
           <a:lstStyle/>
           <a:p>
-            <a:endParaRPr lang="zh-TW" altLang="en-US"/>
-          </a:p>
-        </p:txBody>
-      </p:sp>
-      <p:sp>
-        <p:nvSpPr>
-          <p:cNvPr id="6" name="投影片編號版面配置區 5">
-            <a:extLst>
-              <a:ext uri="{FF2B5EF4-FFF2-40B4-BE49-F238E27FC236}">
-                <a16:creationId xmlns:a16="http://schemas.microsoft.com/office/drawing/2014/main" id="{89E719A1-7ECF-F0AB-7A7A-97581E3DB8E4}"/>
-              </a:ext>
-            </a:extLst>
-          </p:cNvPr>
+            <a:endParaRPr lang="en-US"/>
+          </a:p>
+        </p:txBody>
+      </p:sp>
+      <p:sp>
+        <p:nvSpPr>
+          <p:cNvPr id="6" name="Slide Number Placeholder 5"/>
           <p:cNvSpPr>
             <a:spLocks noGrp="1"/>
           </p:cNvSpPr>
@@ -916,18 +3454,49 @@
           <a:bodyPr/>
           <a:lstStyle/>
           <a:p>
-            <a:fld id="{DC9A25D7-4362-44B0-A555-D90F9CDD7899}" type="slidenum">
-              <a:rPr lang="zh-TW" altLang="en-US" smtClean="0"/>
+            <a:fld id="{C1FF6DA9-008F-8B48-92A6-B652298478BF}" type="slidenum">
+              <a:rPr lang="en-US" smtClean="0"/>
               <a:t>‹#›</a:t>
             </a:fld>
-            <a:endParaRPr lang="zh-TW" altLang="en-US"/>
-          </a:p>
-        </p:txBody>
-      </p:sp>
+            <a:endParaRPr lang="en-US"/>
+          </a:p>
+        </p:txBody>
+      </p:sp>
+      <p:cxnSp>
+        <p:nvCxnSpPr>
+          <p:cNvPr id="33" name="Straight Connector 32"/>
+          <p:cNvCxnSpPr/>
+          <p:nvPr/>
+        </p:nvCxnSpPr>
+        <p:spPr>
+          <a:xfrm>
+            <a:off x="1443491" y="1847088"/>
+            <a:ext cx="6571343" cy="0"/>
+          </a:xfrm>
+          <a:prstGeom prst="line">
+            <a:avLst/>
+          </a:prstGeom>
+          <a:ln w="31750"/>
+        </p:spPr>
+        <p:style>
+          <a:lnRef idx="3">
+            <a:schemeClr val="accent1"/>
+          </a:lnRef>
+          <a:fillRef idx="0">
+            <a:schemeClr val="accent1"/>
+          </a:fillRef>
+          <a:effectRef idx="2">
+            <a:schemeClr val="accent1"/>
+          </a:effectRef>
+          <a:fontRef idx="minor">
+            <a:schemeClr val="tx1"/>
+          </a:fontRef>
+        </p:style>
+      </p:cxnSp>
     </p:spTree>
     <p:extLst>
       <p:ext uri="{BB962C8B-B14F-4D97-AF65-F5344CB8AC3E}">
-        <p14:creationId xmlns:p14="http://schemas.microsoft.com/office/powerpoint/2010/main" val="908939162"/>
+        <p14:creationId xmlns:p14="http://schemas.microsoft.com/office/powerpoint/2010/main" val="1054828684"/>
       </p:ext>
     </p:extLst>
   </p:cSld>
@@ -956,13 +3525,7 @@
       </p:grpSpPr>
       <p:sp>
         <p:nvSpPr>
-          <p:cNvPr id="2" name="標題 1">
-            <a:extLst>
-              <a:ext uri="{FF2B5EF4-FFF2-40B4-BE49-F238E27FC236}">
-                <a16:creationId xmlns:a16="http://schemas.microsoft.com/office/drawing/2014/main" id="{1CC6DCEE-0470-FA5B-014D-B5CAAE1BFA07}"/>
-              </a:ext>
-            </a:extLst>
-          </p:cNvPr>
+          <p:cNvPr id="2" name="Title 1"/>
           <p:cNvSpPr>
             <a:spLocks noGrp="1"/>
           </p:cNvSpPr>
@@ -972,15 +3535,17 @@
         </p:nvSpPr>
         <p:spPr>
           <a:xfrm>
-            <a:off x="831850" y="1709738"/>
-            <a:ext cx="10515600" cy="2852737"/>
+            <a:off x="1443491" y="1756130"/>
+            <a:ext cx="5617002" cy="1887950"/>
           </a:xfrm>
         </p:spPr>
         <p:txBody>
-          <a:bodyPr anchor="b"/>
+          <a:bodyPr anchor="b">
+            <a:normAutofit/>
+          </a:bodyPr>
           <a:lstStyle>
-            <a:lvl1pPr>
-              <a:defRPr sz="6000"/>
+            <a:lvl1pPr algn="l">
+              <a:defRPr sz="3200"/>
             </a:lvl1pPr>
           </a:lstStyle>
           <a:p>
@@ -988,18 +3553,13 @@
               <a:rPr lang="zh-TW" altLang="en-US"/>
               <a:t>按一下以編輯母片標題樣式</a:t>
             </a:r>
-          </a:p>
-        </p:txBody>
-      </p:sp>
-      <p:sp>
-        <p:nvSpPr>
-          <p:cNvPr id="3" name="文字版面配置區 2">
-            <a:extLst>
-              <a:ext uri="{FF2B5EF4-FFF2-40B4-BE49-F238E27FC236}">
-                <a16:creationId xmlns:a16="http://schemas.microsoft.com/office/drawing/2014/main" id="{EF0354CE-F245-13E1-8619-3507ADC9FF37}"/>
-              </a:ext>
-            </a:extLst>
-          </p:cNvPr>
+            <a:endParaRPr lang="en-US" dirty="0"/>
+          </a:p>
+        </p:txBody>
+      </p:sp>
+      <p:sp>
+        <p:nvSpPr>
+          <p:cNvPr id="3" name="Text Placeholder 2"/>
           <p:cNvSpPr>
             <a:spLocks noGrp="1"/>
           </p:cNvSpPr>
@@ -1009,99 +3569,99 @@
         </p:nvSpPr>
         <p:spPr>
           <a:xfrm>
-            <a:off x="831850" y="4589463"/>
-            <a:ext cx="10515600" cy="1500187"/>
+            <a:off x="1443492" y="3806196"/>
+            <a:ext cx="5617002" cy="1012929"/>
           </a:xfrm>
         </p:spPr>
         <p:txBody>
-          <a:bodyPr/>
+          <a:bodyPr tIns="91440">
+            <a:normAutofit/>
+          </a:bodyPr>
           <a:lstStyle>
-            <a:lvl1pPr marL="0" indent="0">
+            <a:lvl1pPr marL="0" indent="0" algn="l">
               <a:buNone/>
-              <a:defRPr sz="2400">
+              <a:defRPr sz="1800">
                 <a:solidFill>
-                  <a:schemeClr val="tx1">
-                    <a:tint val="82000"/>
-                  </a:schemeClr>
+                  <a:schemeClr val="tx1"/>
                 </a:solidFill>
               </a:defRPr>
             </a:lvl1pPr>
-            <a:lvl2pPr marL="457200" indent="0">
+            <a:lvl2pPr marL="342900" indent="0">
               <a:buNone/>
-              <a:defRPr sz="2000">
+              <a:defRPr sz="1500">
                 <a:solidFill>
                   <a:schemeClr val="tx1">
-                    <a:tint val="82000"/>
+                    <a:tint val="75000"/>
                   </a:schemeClr>
                 </a:solidFill>
               </a:defRPr>
             </a:lvl2pPr>
-            <a:lvl3pPr marL="914400" indent="0">
+            <a:lvl3pPr marL="685800" indent="0">
               <a:buNone/>
-              <a:defRPr sz="1800">
+              <a:defRPr sz="1350">
                 <a:solidFill>
                   <a:schemeClr val="tx1">
-                    <a:tint val="82000"/>
+                    <a:tint val="75000"/>
                   </a:schemeClr>
                 </a:solidFill>
               </a:defRPr>
             </a:lvl3pPr>
-            <a:lvl4pPr marL="1371600" indent="0">
+            <a:lvl4pPr marL="1028700" indent="0">
               <a:buNone/>
-              <a:defRPr sz="1600">
+              <a:defRPr sz="1200">
                 <a:solidFill>
                   <a:schemeClr val="tx1">
-                    <a:tint val="82000"/>
+                    <a:tint val="75000"/>
                   </a:schemeClr>
                 </a:solidFill>
               </a:defRPr>
             </a:lvl4pPr>
-            <a:lvl5pPr marL="1828800" indent="0">
+            <a:lvl5pPr marL="1371600" indent="0">
               <a:buNone/>
-              <a:defRPr sz="1600">
+              <a:defRPr sz="1200">
                 <a:solidFill>
                   <a:schemeClr val="tx1">
-                    <a:tint val="82000"/>
+                    <a:tint val="75000"/>
                   </a:schemeClr>
                 </a:solidFill>
               </a:defRPr>
             </a:lvl5pPr>
-            <a:lvl6pPr marL="2286000" indent="0">
+            <a:lvl6pPr marL="1714500" indent="0">
               <a:buNone/>
-              <a:defRPr sz="1600">
+              <a:defRPr sz="1200">
                 <a:solidFill>
                   <a:schemeClr val="tx1">
-                    <a:tint val="82000"/>
+                    <a:tint val="75000"/>
                   </a:schemeClr>
                 </a:solidFill>
               </a:defRPr>
             </a:lvl6pPr>
-            <a:lvl7pPr marL="2743200" indent="0">
+            <a:lvl7pPr marL="2057400" indent="0">
               <a:buNone/>
-              <a:defRPr sz="1600">
+              <a:defRPr sz="1200">
                 <a:solidFill>
                   <a:schemeClr val="tx1">
-                    <a:tint val="82000"/>
+                    <a:tint val="75000"/>
                   </a:schemeClr>
                 </a:solidFill>
               </a:defRPr>
             </a:lvl7pPr>
-            <a:lvl8pPr marL="3200400" indent="0">
+            <a:lvl8pPr marL="2400300" indent="0">
               <a:buNone/>
-              <a:defRPr sz="1600">
+              <a:defRPr sz="1200">
                 <a:solidFill>
                   <a:schemeClr val="tx1">
-                    <a:tint val="82000"/>
+                    <a:tint val="75000"/>
                   </a:schemeClr>
                 </a:solidFill>
               </a:defRPr>
             </a:lvl8pPr>
-            <a:lvl9pPr marL="3657600" indent="0">
+            <a:lvl9pPr marL="2743200" indent="0">
               <a:buNone/>
-              <a:defRPr sz="1600">
+              <a:defRPr sz="1200">
                 <a:solidFill>
                   <a:schemeClr val="tx1">
-                    <a:tint val="82000"/>
+                    <a:tint val="75000"/>
                   </a:schemeClr>
                 </a:solidFill>
               </a:defRPr>
@@ -1118,13 +3678,7 @@
       </p:sp>
       <p:sp>
         <p:nvSpPr>
-          <p:cNvPr id="4" name="日期版面配置區 3">
-            <a:extLst>
-              <a:ext uri="{FF2B5EF4-FFF2-40B4-BE49-F238E27FC236}">
-                <a16:creationId xmlns:a16="http://schemas.microsoft.com/office/drawing/2014/main" id="{F7A254B5-651C-176D-613E-5EB7E9FBF8C2}"/>
-              </a:ext>
-            </a:extLst>
-          </p:cNvPr>
+          <p:cNvPr id="4" name="Date Placeholder 3"/>
           <p:cNvSpPr>
             <a:spLocks noGrp="1"/>
           </p:cNvSpPr>
@@ -1137,23 +3691,17 @@
           <a:bodyPr/>
           <a:lstStyle/>
           <a:p>
-            <a:fld id="{2BB06109-5618-412E-B2EE-D2F35E34DA82}" type="datetimeFigureOut">
-              <a:rPr lang="zh-TW" altLang="en-US" smtClean="0"/>
-              <a:t>2025/11/17</a:t>
+            <a:fld id="{5BCAD085-E8A6-8845-BD4E-CB4CCA059FC4}" type="datetimeFigureOut">
+              <a:rPr lang="en-US" smtClean="0"/>
+              <a:t>12/8/2025</a:t>
             </a:fld>
-            <a:endParaRPr lang="zh-TW" altLang="en-US"/>
-          </a:p>
-        </p:txBody>
-      </p:sp>
-      <p:sp>
-        <p:nvSpPr>
-          <p:cNvPr id="5" name="頁尾版面配置區 4">
-            <a:extLst>
-              <a:ext uri="{FF2B5EF4-FFF2-40B4-BE49-F238E27FC236}">
-                <a16:creationId xmlns:a16="http://schemas.microsoft.com/office/drawing/2014/main" id="{6465A4BF-B2FC-A59C-7E2C-33A942B126E6}"/>
-              </a:ext>
-            </a:extLst>
-          </p:cNvPr>
+            <a:endParaRPr lang="en-US"/>
+          </a:p>
+        </p:txBody>
+      </p:sp>
+      <p:sp>
+        <p:nvSpPr>
+          <p:cNvPr id="5" name="Footer Placeholder 4"/>
           <p:cNvSpPr>
             <a:spLocks noGrp="1"/>
           </p:cNvSpPr>
@@ -1166,19 +3714,13 @@
           <a:bodyPr/>
           <a:lstStyle/>
           <a:p>
-            <a:endParaRPr lang="zh-TW" altLang="en-US"/>
-          </a:p>
-        </p:txBody>
-      </p:sp>
-      <p:sp>
-        <p:nvSpPr>
-          <p:cNvPr id="6" name="投影片編號版面配置區 5">
-            <a:extLst>
-              <a:ext uri="{FF2B5EF4-FFF2-40B4-BE49-F238E27FC236}">
-                <a16:creationId xmlns:a16="http://schemas.microsoft.com/office/drawing/2014/main" id="{F39D5AF3-82C8-B489-14BC-2EDB07DB700A}"/>
-              </a:ext>
-            </a:extLst>
-          </p:cNvPr>
+            <a:endParaRPr lang="en-US"/>
+          </a:p>
+        </p:txBody>
+      </p:sp>
+      <p:sp>
+        <p:nvSpPr>
+          <p:cNvPr id="6" name="Slide Number Placeholder 5"/>
           <p:cNvSpPr>
             <a:spLocks noGrp="1"/>
           </p:cNvSpPr>
@@ -1191,18 +3733,49 @@
           <a:bodyPr/>
           <a:lstStyle/>
           <a:p>
-            <a:fld id="{DC9A25D7-4362-44B0-A555-D90F9CDD7899}" type="slidenum">
-              <a:rPr lang="zh-TW" altLang="en-US" smtClean="0"/>
+            <a:fld id="{C1FF6DA9-008F-8B48-92A6-B652298478BF}" type="slidenum">
+              <a:rPr lang="en-US" smtClean="0"/>
               <a:t>‹#›</a:t>
             </a:fld>
-            <a:endParaRPr lang="zh-TW" altLang="en-US"/>
-          </a:p>
-        </p:txBody>
-      </p:sp>
+            <a:endParaRPr lang="en-US"/>
+          </a:p>
+        </p:txBody>
+      </p:sp>
+      <p:cxnSp>
+        <p:nvCxnSpPr>
+          <p:cNvPr id="15" name="Straight Connector 14"/>
+          <p:cNvCxnSpPr/>
+          <p:nvPr/>
+        </p:nvCxnSpPr>
+        <p:spPr>
+          <a:xfrm>
+            <a:off x="1443491" y="3804985"/>
+            <a:ext cx="5617002" cy="0"/>
+          </a:xfrm>
+          <a:prstGeom prst="line">
+            <a:avLst/>
+          </a:prstGeom>
+          <a:ln w="31750"/>
+        </p:spPr>
+        <p:style>
+          <a:lnRef idx="3">
+            <a:schemeClr val="accent1"/>
+          </a:lnRef>
+          <a:fillRef idx="0">
+            <a:schemeClr val="accent1"/>
+          </a:fillRef>
+          <a:effectRef idx="2">
+            <a:schemeClr val="accent1"/>
+          </a:effectRef>
+          <a:fontRef idx="minor">
+            <a:schemeClr val="tx1"/>
+          </a:fontRef>
+        </p:style>
+      </p:cxnSp>
     </p:spTree>
     <p:extLst>
       <p:ext uri="{BB962C8B-B14F-4D97-AF65-F5344CB8AC3E}">
-        <p14:creationId xmlns:p14="http://schemas.microsoft.com/office/powerpoint/2010/main" val="1197407230"/>
+        <p14:creationId xmlns:p14="http://schemas.microsoft.com/office/powerpoint/2010/main" val="3987324617"/>
       </p:ext>
     </p:extLst>
   </p:cSld>
@@ -1231,13 +3804,7 @@
       </p:grpSpPr>
       <p:sp>
         <p:nvSpPr>
-          <p:cNvPr id="2" name="標題 1">
-            <a:extLst>
-              <a:ext uri="{FF2B5EF4-FFF2-40B4-BE49-F238E27FC236}">
-                <a16:creationId xmlns:a16="http://schemas.microsoft.com/office/drawing/2014/main" id="{E1BC274D-7B9C-25B3-1D86-0404A1A99C6B}"/>
-              </a:ext>
-            </a:extLst>
-          </p:cNvPr>
+          <p:cNvPr id="2" name="Title 1"/>
           <p:cNvSpPr>
             <a:spLocks noGrp="1"/>
           </p:cNvSpPr>
@@ -1245,7 +3812,12 @@
             <p:ph type="title"/>
           </p:nvPr>
         </p:nvSpPr>
-        <p:spPr/>
+        <p:spPr>
+          <a:xfrm>
+            <a:off x="1443491" y="804890"/>
+            <a:ext cx="6571343" cy="1059305"/>
+          </a:xfrm>
+        </p:spPr>
         <p:txBody>
           <a:bodyPr/>
           <a:lstStyle/>
@@ -1254,18 +3826,13 @@
               <a:rPr lang="zh-TW" altLang="en-US"/>
               <a:t>按一下以編輯母片標題樣式</a:t>
             </a:r>
-          </a:p>
-        </p:txBody>
-      </p:sp>
-      <p:sp>
-        <p:nvSpPr>
-          <p:cNvPr id="3" name="內容版面配置區 2">
-            <a:extLst>
-              <a:ext uri="{FF2B5EF4-FFF2-40B4-BE49-F238E27FC236}">
-                <a16:creationId xmlns:a16="http://schemas.microsoft.com/office/drawing/2014/main" id="{1BE330AC-8A77-7AD1-CA2A-69ED4957B55D}"/>
-              </a:ext>
-            </a:extLst>
-          </p:cNvPr>
+            <a:endParaRPr lang="en-US" dirty="0"/>
+          </a:p>
+        </p:txBody>
+      </p:sp>
+      <p:sp>
+        <p:nvSpPr>
+          <p:cNvPr id="3" name="Content Placeholder 2"/>
           <p:cNvSpPr>
             <a:spLocks noGrp="1"/>
           </p:cNvSpPr>
@@ -1275,8 +3842,8 @@
         </p:nvSpPr>
         <p:spPr>
           <a:xfrm>
-            <a:off x="838200" y="1825625"/>
-            <a:ext cx="5181600" cy="4351338"/>
+            <a:off x="1443490" y="2013936"/>
+            <a:ext cx="3125871" cy="3437560"/>
           </a:xfrm>
         </p:spPr>
         <p:txBody>
@@ -1316,18 +3883,13 @@
               <a:rPr lang="zh-TW" altLang="en-US"/>
               <a:t>第五層</a:t>
             </a:r>
-          </a:p>
-        </p:txBody>
-      </p:sp>
-      <p:sp>
-        <p:nvSpPr>
-          <p:cNvPr id="4" name="內容版面配置區 3">
-            <a:extLst>
-              <a:ext uri="{FF2B5EF4-FFF2-40B4-BE49-F238E27FC236}">
-                <a16:creationId xmlns:a16="http://schemas.microsoft.com/office/drawing/2014/main" id="{5671B6EB-6066-4BB3-0820-EA74782CE8E4}"/>
-              </a:ext>
-            </a:extLst>
-          </p:cNvPr>
+            <a:endParaRPr lang="en-US" dirty="0"/>
+          </a:p>
+        </p:txBody>
+      </p:sp>
+      <p:sp>
+        <p:nvSpPr>
+          <p:cNvPr id="4" name="Content Placeholder 3"/>
           <p:cNvSpPr>
             <a:spLocks noGrp="1"/>
           </p:cNvSpPr>
@@ -1337,8 +3899,8 @@
         </p:nvSpPr>
         <p:spPr>
           <a:xfrm>
-            <a:off x="6172200" y="1825625"/>
-            <a:ext cx="5181600" cy="4351338"/>
+            <a:off x="4889182" y="2013936"/>
+            <a:ext cx="3125652" cy="3437559"/>
           </a:xfrm>
         </p:spPr>
         <p:txBody>
@@ -1378,18 +3940,13 @@
               <a:rPr lang="zh-TW" altLang="en-US"/>
               <a:t>第五層</a:t>
             </a:r>
-          </a:p>
-        </p:txBody>
-      </p:sp>
-      <p:sp>
-        <p:nvSpPr>
-          <p:cNvPr id="5" name="日期版面配置區 4">
-            <a:extLst>
-              <a:ext uri="{FF2B5EF4-FFF2-40B4-BE49-F238E27FC236}">
-                <a16:creationId xmlns:a16="http://schemas.microsoft.com/office/drawing/2014/main" id="{DF4FA542-BD26-3BE3-DEE5-0120416C61BD}"/>
-              </a:ext>
-            </a:extLst>
-          </p:cNvPr>
+            <a:endParaRPr lang="en-US" dirty="0"/>
+          </a:p>
+        </p:txBody>
+      </p:sp>
+      <p:sp>
+        <p:nvSpPr>
+          <p:cNvPr id="5" name="Date Placeholder 4"/>
           <p:cNvSpPr>
             <a:spLocks noGrp="1"/>
           </p:cNvSpPr>
@@ -1402,23 +3959,17 @@
           <a:bodyPr/>
           <a:lstStyle/>
           <a:p>
-            <a:fld id="{2BB06109-5618-412E-B2EE-D2F35E34DA82}" type="datetimeFigureOut">
-              <a:rPr lang="zh-TW" altLang="en-US" smtClean="0"/>
-              <a:t>2025/11/17</a:t>
+            <a:fld id="{5BCAD085-E8A6-8845-BD4E-CB4CCA059FC4}" type="datetimeFigureOut">
+              <a:rPr lang="en-US" smtClean="0"/>
+              <a:t>12/8/2025</a:t>
             </a:fld>
-            <a:endParaRPr lang="zh-TW" altLang="en-US"/>
-          </a:p>
-        </p:txBody>
-      </p:sp>
-      <p:sp>
-        <p:nvSpPr>
-          <p:cNvPr id="6" name="頁尾版面配置區 5">
-            <a:extLst>
-              <a:ext uri="{FF2B5EF4-FFF2-40B4-BE49-F238E27FC236}">
-                <a16:creationId xmlns:a16="http://schemas.microsoft.com/office/drawing/2014/main" id="{EF87C596-6C68-4FA7-64DE-5C0FB2703680}"/>
-              </a:ext>
-            </a:extLst>
-          </p:cNvPr>
+            <a:endParaRPr lang="en-US"/>
+          </a:p>
+        </p:txBody>
+      </p:sp>
+      <p:sp>
+        <p:nvSpPr>
+          <p:cNvPr id="6" name="Footer Placeholder 5"/>
           <p:cNvSpPr>
             <a:spLocks noGrp="1"/>
           </p:cNvSpPr>
@@ -1431,19 +3982,13 @@
           <a:bodyPr/>
           <a:lstStyle/>
           <a:p>
-            <a:endParaRPr lang="zh-TW" altLang="en-US"/>
-          </a:p>
-        </p:txBody>
-      </p:sp>
-      <p:sp>
-        <p:nvSpPr>
-          <p:cNvPr id="7" name="投影片編號版面配置區 6">
-            <a:extLst>
-              <a:ext uri="{FF2B5EF4-FFF2-40B4-BE49-F238E27FC236}">
-                <a16:creationId xmlns:a16="http://schemas.microsoft.com/office/drawing/2014/main" id="{357F54A6-8FE1-26C7-935C-E882FA856C2C}"/>
-              </a:ext>
-            </a:extLst>
-          </p:cNvPr>
+            <a:endParaRPr lang="en-US"/>
+          </a:p>
+        </p:txBody>
+      </p:sp>
+      <p:sp>
+        <p:nvSpPr>
+          <p:cNvPr id="7" name="Slide Number Placeholder 6"/>
           <p:cNvSpPr>
             <a:spLocks noGrp="1"/>
           </p:cNvSpPr>
@@ -1456,18 +4001,49 @@
           <a:bodyPr/>
           <a:lstStyle/>
           <a:p>
-            <a:fld id="{DC9A25D7-4362-44B0-A555-D90F9CDD7899}" type="slidenum">
-              <a:rPr lang="zh-TW" altLang="en-US" smtClean="0"/>
+            <a:fld id="{C1FF6DA9-008F-8B48-92A6-B652298478BF}" type="slidenum">
+              <a:rPr lang="en-US" smtClean="0"/>
               <a:t>‹#›</a:t>
             </a:fld>
-            <a:endParaRPr lang="zh-TW" altLang="en-US"/>
-          </a:p>
-        </p:txBody>
-      </p:sp>
+            <a:endParaRPr lang="en-US"/>
+          </a:p>
+        </p:txBody>
+      </p:sp>
+      <p:cxnSp>
+        <p:nvCxnSpPr>
+          <p:cNvPr id="33" name="Straight Connector 32"/>
+          <p:cNvCxnSpPr/>
+          <p:nvPr/>
+        </p:nvCxnSpPr>
+        <p:spPr>
+          <a:xfrm>
+            <a:off x="1443491" y="1847088"/>
+            <a:ext cx="6571343" cy="0"/>
+          </a:xfrm>
+          <a:prstGeom prst="line">
+            <a:avLst/>
+          </a:prstGeom>
+          <a:ln w="31750"/>
+        </p:spPr>
+        <p:style>
+          <a:lnRef idx="3">
+            <a:schemeClr val="accent1"/>
+          </a:lnRef>
+          <a:fillRef idx="0">
+            <a:schemeClr val="accent1"/>
+          </a:fillRef>
+          <a:effectRef idx="2">
+            <a:schemeClr val="accent1"/>
+          </a:effectRef>
+          <a:fontRef idx="minor">
+            <a:schemeClr val="tx1"/>
+          </a:fontRef>
+        </p:style>
+      </p:cxnSp>
     </p:spTree>
     <p:extLst>
       <p:ext uri="{BB962C8B-B14F-4D97-AF65-F5344CB8AC3E}">
-        <p14:creationId xmlns:p14="http://schemas.microsoft.com/office/powerpoint/2010/main" val="604955738"/>
+        <p14:creationId xmlns:p14="http://schemas.microsoft.com/office/powerpoint/2010/main" val="1709522900"/>
       </p:ext>
     </p:extLst>
   </p:cSld>
@@ -1494,26 +4070,51 @@
           <a:chExt cx="0" cy="0"/>
         </a:xfrm>
       </p:grpSpPr>
-      <p:sp>
-        <p:nvSpPr>
-          <p:cNvPr id="2" name="標題 1">
-            <a:extLst>
-              <a:ext uri="{FF2B5EF4-FFF2-40B4-BE49-F238E27FC236}">
-                <a16:creationId xmlns:a16="http://schemas.microsoft.com/office/drawing/2014/main" id="{EB57E38D-C808-BAAF-0815-7960A79B8F03}"/>
-              </a:ext>
-            </a:extLst>
-          </p:cNvPr>
-          <p:cNvSpPr>
-            <a:spLocks noGrp="1"/>
-          </p:cNvSpPr>
-          <p:nvPr>
-            <p:ph type="title"/>
-          </p:nvPr>
-        </p:nvSpPr>
+      <p:cxnSp>
+        <p:nvCxnSpPr>
+          <p:cNvPr id="36" name="Straight Connector 35"/>
+          <p:cNvCxnSpPr/>
+          <p:nvPr/>
+        </p:nvCxnSpPr>
         <p:spPr>
           <a:xfrm>
-            <a:off x="839788" y="365125"/>
-            <a:ext cx="10515600" cy="1325563"/>
+            <a:off x="1443491" y="1847088"/>
+            <a:ext cx="6571343" cy="0"/>
+          </a:xfrm>
+          <a:prstGeom prst="line">
+            <a:avLst/>
+          </a:prstGeom>
+          <a:ln w="31750"/>
+        </p:spPr>
+        <p:style>
+          <a:lnRef idx="3">
+            <a:schemeClr val="accent1"/>
+          </a:lnRef>
+          <a:fillRef idx="0">
+            <a:schemeClr val="accent1"/>
+          </a:fillRef>
+          <a:effectRef idx="2">
+            <a:schemeClr val="accent1"/>
+          </a:effectRef>
+          <a:fontRef idx="minor">
+            <a:schemeClr val="tx1"/>
+          </a:fontRef>
+        </p:style>
+      </p:cxnSp>
+      <p:sp>
+        <p:nvSpPr>
+          <p:cNvPr id="2" name="Title 1"/>
+          <p:cNvSpPr>
+            <a:spLocks noGrp="1"/>
+          </p:cNvSpPr>
+          <p:nvPr>
+            <p:ph type="title"/>
+          </p:nvPr>
+        </p:nvSpPr>
+        <p:spPr>
+          <a:xfrm>
+            <a:off x="1443491" y="804164"/>
+            <a:ext cx="6571344" cy="1056319"/>
           </a:xfrm>
         </p:spPr>
         <p:txBody>
@@ -1524,18 +4125,13 @@
               <a:rPr lang="zh-TW" altLang="en-US"/>
               <a:t>按一下以編輯母片標題樣式</a:t>
             </a:r>
-          </a:p>
-        </p:txBody>
-      </p:sp>
-      <p:sp>
-        <p:nvSpPr>
-          <p:cNvPr id="3" name="文字版面配置區 2">
-            <a:extLst>
-              <a:ext uri="{FF2B5EF4-FFF2-40B4-BE49-F238E27FC236}">
-                <a16:creationId xmlns:a16="http://schemas.microsoft.com/office/drawing/2014/main" id="{B94FE847-8653-5234-4094-8922331B215A}"/>
-              </a:ext>
-            </a:extLst>
-          </p:cNvPr>
+            <a:endParaRPr lang="en-US" dirty="0"/>
+          </a:p>
+        </p:txBody>
+      </p:sp>
+      <p:sp>
+        <p:nvSpPr>
+          <p:cNvPr id="3" name="Text Placeholder 2"/>
           <p:cNvSpPr>
             <a:spLocks noGrp="1"/>
           </p:cNvSpPr>
@@ -1545,48 +4141,57 @@
         </p:nvSpPr>
         <p:spPr>
           <a:xfrm>
-            <a:off x="839788" y="1681163"/>
-            <a:ext cx="5157787" cy="823912"/>
+            <a:off x="1443491" y="2019550"/>
+            <a:ext cx="3125766" cy="801943"/>
           </a:xfrm>
         </p:spPr>
         <p:txBody>
-          <a:bodyPr anchor="b"/>
+          <a:bodyPr anchor="b">
+            <a:normAutofit/>
+          </a:bodyPr>
           <a:lstStyle>
             <a:lvl1pPr marL="0" indent="0">
+              <a:lnSpc>
+                <a:spcPct val="100000"/>
+              </a:lnSpc>
               <a:buNone/>
-              <a:defRPr sz="2400" b="1"/>
+              <a:defRPr sz="2200" b="0" cap="all" baseline="0">
+                <a:solidFill>
+                  <a:schemeClr val="accent1"/>
+                </a:solidFill>
+              </a:defRPr>
             </a:lvl1pPr>
-            <a:lvl2pPr marL="457200" indent="0">
+            <a:lvl2pPr marL="342900" indent="0">
               <a:buNone/>
-              <a:defRPr sz="2000" b="1"/>
+              <a:defRPr sz="1500" b="1"/>
             </a:lvl2pPr>
-            <a:lvl3pPr marL="914400" indent="0">
+            <a:lvl3pPr marL="685800" indent="0">
               <a:buNone/>
-              <a:defRPr sz="1800" b="1"/>
+              <a:defRPr sz="1350" b="1"/>
             </a:lvl3pPr>
-            <a:lvl4pPr marL="1371600" indent="0">
+            <a:lvl4pPr marL="1028700" indent="0">
               <a:buNone/>
-              <a:defRPr sz="1600" b="1"/>
+              <a:defRPr sz="1200" b="1"/>
             </a:lvl4pPr>
-            <a:lvl5pPr marL="1828800" indent="0">
+            <a:lvl5pPr marL="1371600" indent="0">
               <a:buNone/>
-              <a:defRPr sz="1600" b="1"/>
+              <a:defRPr sz="1200" b="1"/>
             </a:lvl5pPr>
-            <a:lvl6pPr marL="2286000" indent="0">
+            <a:lvl6pPr marL="1714500" indent="0">
               <a:buNone/>
-              <a:defRPr sz="1600" b="1"/>
+              <a:defRPr sz="1200" b="1"/>
             </a:lvl6pPr>
-            <a:lvl7pPr marL="2743200" indent="0">
+            <a:lvl7pPr marL="2057400" indent="0">
               <a:buNone/>
-              <a:defRPr sz="1600" b="1"/>
+              <a:defRPr sz="1200" b="1"/>
             </a:lvl7pPr>
-            <a:lvl8pPr marL="3200400" indent="0">
+            <a:lvl8pPr marL="2400300" indent="0">
               <a:buNone/>
-              <a:defRPr sz="1600" b="1"/>
+              <a:defRPr sz="1200" b="1"/>
             </a:lvl8pPr>
-            <a:lvl9pPr marL="3657600" indent="0">
+            <a:lvl9pPr marL="2743200" indent="0">
               <a:buNone/>
-              <a:defRPr sz="1600" b="1"/>
+              <a:defRPr sz="1200" b="1"/>
             </a:lvl9pPr>
           </a:lstStyle>
           <a:p>
@@ -1600,13 +4205,7 @@
       </p:sp>
       <p:sp>
         <p:nvSpPr>
-          <p:cNvPr id="4" name="內容版面配置區 3">
-            <a:extLst>
-              <a:ext uri="{FF2B5EF4-FFF2-40B4-BE49-F238E27FC236}">
-                <a16:creationId xmlns:a16="http://schemas.microsoft.com/office/drawing/2014/main" id="{AE580F4C-FE97-460F-8079-0C67C28C5433}"/>
-              </a:ext>
-            </a:extLst>
-          </p:cNvPr>
+          <p:cNvPr id="4" name="Content Placeholder 3"/>
           <p:cNvSpPr>
             <a:spLocks noGrp="1"/>
           </p:cNvSpPr>
@@ -1616,8 +4215,8 @@
         </p:nvSpPr>
         <p:spPr>
           <a:xfrm>
-            <a:off x="839788" y="2505075"/>
-            <a:ext cx="5157787" cy="3684588"/>
+            <a:off x="1443491" y="2824270"/>
+            <a:ext cx="3125766" cy="2644457"/>
           </a:xfrm>
         </p:spPr>
         <p:txBody>
@@ -1657,18 +4256,13 @@
               <a:rPr lang="zh-TW" altLang="en-US"/>
               <a:t>第五層</a:t>
             </a:r>
-          </a:p>
-        </p:txBody>
-      </p:sp>
-      <p:sp>
-        <p:nvSpPr>
-          <p:cNvPr id="5" name="文字版面配置區 4">
-            <a:extLst>
-              <a:ext uri="{FF2B5EF4-FFF2-40B4-BE49-F238E27FC236}">
-                <a16:creationId xmlns:a16="http://schemas.microsoft.com/office/drawing/2014/main" id="{9BD8E20D-2E69-35B0-D70F-ACB5DF32960A}"/>
-              </a:ext>
-            </a:extLst>
-          </p:cNvPr>
+            <a:endParaRPr lang="en-US" dirty="0"/>
+          </a:p>
+        </p:txBody>
+      </p:sp>
+      <p:sp>
+        <p:nvSpPr>
+          <p:cNvPr id="5" name="Text Placeholder 4"/>
           <p:cNvSpPr>
             <a:spLocks noGrp="1"/>
           </p:cNvSpPr>
@@ -1678,48 +4272,57 @@
         </p:nvSpPr>
         <p:spPr>
           <a:xfrm>
-            <a:off x="6172200" y="1681163"/>
-            <a:ext cx="5183188" cy="823912"/>
+            <a:off x="4889182" y="2023004"/>
+            <a:ext cx="3125652" cy="802237"/>
           </a:xfrm>
         </p:spPr>
         <p:txBody>
-          <a:bodyPr anchor="b"/>
+          <a:bodyPr anchor="b">
+            <a:normAutofit/>
+          </a:bodyPr>
           <a:lstStyle>
             <a:lvl1pPr marL="0" indent="0">
+              <a:lnSpc>
+                <a:spcPct val="100000"/>
+              </a:lnSpc>
               <a:buNone/>
-              <a:defRPr sz="2400" b="1"/>
+              <a:defRPr sz="2200" b="0" cap="all" baseline="0">
+                <a:solidFill>
+                  <a:schemeClr val="accent1"/>
+                </a:solidFill>
+              </a:defRPr>
             </a:lvl1pPr>
-            <a:lvl2pPr marL="457200" indent="0">
+            <a:lvl2pPr marL="342900" indent="0">
               <a:buNone/>
-              <a:defRPr sz="2000" b="1"/>
+              <a:defRPr sz="1500" b="1"/>
             </a:lvl2pPr>
-            <a:lvl3pPr marL="914400" indent="0">
+            <a:lvl3pPr marL="685800" indent="0">
               <a:buNone/>
-              <a:defRPr sz="1800" b="1"/>
+              <a:defRPr sz="1350" b="1"/>
             </a:lvl3pPr>
-            <a:lvl4pPr marL="1371600" indent="0">
+            <a:lvl4pPr marL="1028700" indent="0">
               <a:buNone/>
-              <a:defRPr sz="1600" b="1"/>
+              <a:defRPr sz="1200" b="1"/>
             </a:lvl4pPr>
-            <a:lvl5pPr marL="1828800" indent="0">
+            <a:lvl5pPr marL="1371600" indent="0">
               <a:buNone/>
-              <a:defRPr sz="1600" b="1"/>
+              <a:defRPr sz="1200" b="1"/>
             </a:lvl5pPr>
-            <a:lvl6pPr marL="2286000" indent="0">
+            <a:lvl6pPr marL="1714500" indent="0">
               <a:buNone/>
-              <a:defRPr sz="1600" b="1"/>
+              <a:defRPr sz="1200" b="1"/>
             </a:lvl6pPr>
-            <a:lvl7pPr marL="2743200" indent="0">
+            <a:lvl7pPr marL="2057400" indent="0">
               <a:buNone/>
-              <a:defRPr sz="1600" b="1"/>
+              <a:defRPr sz="1200" b="1"/>
             </a:lvl7pPr>
-            <a:lvl8pPr marL="3200400" indent="0">
+            <a:lvl8pPr marL="2400300" indent="0">
               <a:buNone/>
-              <a:defRPr sz="1600" b="1"/>
+              <a:defRPr sz="1200" b="1"/>
             </a:lvl8pPr>
-            <a:lvl9pPr marL="3657600" indent="0">
+            <a:lvl9pPr marL="2743200" indent="0">
               <a:buNone/>
-              <a:defRPr sz="1600" b="1"/>
+              <a:defRPr sz="1200" b="1"/>
             </a:lvl9pPr>
           </a:lstStyle>
           <a:p>
@@ -1733,13 +4336,7 @@
       </p:sp>
       <p:sp>
         <p:nvSpPr>
-          <p:cNvPr id="6" name="內容版面配置區 5">
-            <a:extLst>
-              <a:ext uri="{FF2B5EF4-FFF2-40B4-BE49-F238E27FC236}">
-                <a16:creationId xmlns:a16="http://schemas.microsoft.com/office/drawing/2014/main" id="{814552DD-5A05-11B7-5519-546E4D4962AD}"/>
-              </a:ext>
-            </a:extLst>
-          </p:cNvPr>
+          <p:cNvPr id="6" name="Content Placeholder 5"/>
           <p:cNvSpPr>
             <a:spLocks noGrp="1"/>
           </p:cNvSpPr>
@@ -1749,8 +4346,8 @@
         </p:nvSpPr>
         <p:spPr>
           <a:xfrm>
-            <a:off x="6172200" y="2505075"/>
-            <a:ext cx="5183188" cy="3684588"/>
+            <a:off x="4889182" y="2821491"/>
+            <a:ext cx="3125652" cy="2637371"/>
           </a:xfrm>
         </p:spPr>
         <p:txBody>
@@ -1790,18 +4387,13 @@
               <a:rPr lang="zh-TW" altLang="en-US"/>
               <a:t>第五層</a:t>
             </a:r>
-          </a:p>
-        </p:txBody>
-      </p:sp>
-      <p:sp>
-        <p:nvSpPr>
-          <p:cNvPr id="7" name="日期版面配置區 6">
-            <a:extLst>
-              <a:ext uri="{FF2B5EF4-FFF2-40B4-BE49-F238E27FC236}">
-                <a16:creationId xmlns:a16="http://schemas.microsoft.com/office/drawing/2014/main" id="{03857B82-121F-B8E3-4A07-402F90641464}"/>
-              </a:ext>
-            </a:extLst>
-          </p:cNvPr>
+            <a:endParaRPr lang="en-US" dirty="0"/>
+          </a:p>
+        </p:txBody>
+      </p:sp>
+      <p:sp>
+        <p:nvSpPr>
+          <p:cNvPr id="7" name="Date Placeholder 6"/>
           <p:cNvSpPr>
             <a:spLocks noGrp="1"/>
           </p:cNvSpPr>
@@ -1814,23 +4406,17 @@
           <a:bodyPr/>
           <a:lstStyle/>
           <a:p>
-            <a:fld id="{2BB06109-5618-412E-B2EE-D2F35E34DA82}" type="datetimeFigureOut">
-              <a:rPr lang="zh-TW" altLang="en-US" smtClean="0"/>
-              <a:t>2025/11/17</a:t>
+            <a:fld id="{5BCAD085-E8A6-8845-BD4E-CB4CCA059FC4}" type="datetimeFigureOut">
+              <a:rPr lang="en-US" smtClean="0"/>
+              <a:t>12/8/2025</a:t>
             </a:fld>
-            <a:endParaRPr lang="zh-TW" altLang="en-US"/>
-          </a:p>
-        </p:txBody>
-      </p:sp>
-      <p:sp>
-        <p:nvSpPr>
-          <p:cNvPr id="8" name="頁尾版面配置區 7">
-            <a:extLst>
-              <a:ext uri="{FF2B5EF4-FFF2-40B4-BE49-F238E27FC236}">
-                <a16:creationId xmlns:a16="http://schemas.microsoft.com/office/drawing/2014/main" id="{32D46306-9A3B-F902-DE9E-F0AE71C3BBA6}"/>
-              </a:ext>
-            </a:extLst>
-          </p:cNvPr>
+            <a:endParaRPr lang="en-US"/>
+          </a:p>
+        </p:txBody>
+      </p:sp>
+      <p:sp>
+        <p:nvSpPr>
+          <p:cNvPr id="8" name="Footer Placeholder 7"/>
           <p:cNvSpPr>
             <a:spLocks noGrp="1"/>
           </p:cNvSpPr>
@@ -1843,19 +4429,13 @@
           <a:bodyPr/>
           <a:lstStyle/>
           <a:p>
-            <a:endParaRPr lang="zh-TW" altLang="en-US"/>
-          </a:p>
-        </p:txBody>
-      </p:sp>
-      <p:sp>
-        <p:nvSpPr>
-          <p:cNvPr id="9" name="投影片編號版面配置區 8">
-            <a:extLst>
-              <a:ext uri="{FF2B5EF4-FFF2-40B4-BE49-F238E27FC236}">
-                <a16:creationId xmlns:a16="http://schemas.microsoft.com/office/drawing/2014/main" id="{41989F30-5DBB-7C52-E184-AFA5AC6A3C19}"/>
-              </a:ext>
-            </a:extLst>
-          </p:cNvPr>
+            <a:endParaRPr lang="en-US"/>
+          </a:p>
+        </p:txBody>
+      </p:sp>
+      <p:sp>
+        <p:nvSpPr>
+          <p:cNvPr id="9" name="Slide Number Placeholder 8"/>
           <p:cNvSpPr>
             <a:spLocks noGrp="1"/>
           </p:cNvSpPr>
@@ -1868,18 +4448,18 @@
           <a:bodyPr/>
           <a:lstStyle/>
           <a:p>
-            <a:fld id="{DC9A25D7-4362-44B0-A555-D90F9CDD7899}" type="slidenum">
-              <a:rPr lang="zh-TW" altLang="en-US" smtClean="0"/>
+            <a:fld id="{C1FF6DA9-008F-8B48-92A6-B652298478BF}" type="slidenum">
+              <a:rPr lang="en-US" smtClean="0"/>
               <a:t>‹#›</a:t>
             </a:fld>
-            <a:endParaRPr lang="zh-TW" altLang="en-US"/>
+            <a:endParaRPr lang="en-US"/>
           </a:p>
         </p:txBody>
       </p:sp>
     </p:spTree>
     <p:extLst>
       <p:ext uri="{BB962C8B-B14F-4D97-AF65-F5344CB8AC3E}">
-        <p14:creationId xmlns:p14="http://schemas.microsoft.com/office/powerpoint/2010/main" val="3600196551"/>
+        <p14:creationId xmlns:p14="http://schemas.microsoft.com/office/powerpoint/2010/main" val="3497364593"/>
       </p:ext>
     </p:extLst>
   </p:cSld>
@@ -1906,15 +4486,40 @@
           <a:chExt cx="0" cy="0"/>
         </a:xfrm>
       </p:grpSpPr>
-      <p:sp>
-        <p:nvSpPr>
-          <p:cNvPr id="2" name="標題 1">
-            <a:extLst>
-              <a:ext uri="{FF2B5EF4-FFF2-40B4-BE49-F238E27FC236}">
-                <a16:creationId xmlns:a16="http://schemas.microsoft.com/office/drawing/2014/main" id="{E539413C-DF68-91F0-2DE2-8251BEFAD320}"/>
-              </a:ext>
-            </a:extLst>
-          </p:cNvPr>
+      <p:cxnSp>
+        <p:nvCxnSpPr>
+          <p:cNvPr id="32" name="Straight Connector 31"/>
+          <p:cNvCxnSpPr/>
+          <p:nvPr/>
+        </p:nvCxnSpPr>
+        <p:spPr>
+          <a:xfrm>
+            <a:off x="1443491" y="1847088"/>
+            <a:ext cx="6571343" cy="0"/>
+          </a:xfrm>
+          <a:prstGeom prst="line">
+            <a:avLst/>
+          </a:prstGeom>
+          <a:ln w="31750"/>
+        </p:spPr>
+        <p:style>
+          <a:lnRef idx="3">
+            <a:schemeClr val="accent1"/>
+          </a:lnRef>
+          <a:fillRef idx="0">
+            <a:schemeClr val="accent1"/>
+          </a:fillRef>
+          <a:effectRef idx="2">
+            <a:schemeClr val="accent1"/>
+          </a:effectRef>
+          <a:fontRef idx="minor">
+            <a:schemeClr val="tx1"/>
+          </a:fontRef>
+        </p:style>
+      </p:cxnSp>
+      <p:sp>
+        <p:nvSpPr>
+          <p:cNvPr id="2" name="Title 1"/>
           <p:cNvSpPr>
             <a:spLocks noGrp="1"/>
           </p:cNvSpPr>
@@ -1931,18 +4536,13 @@
               <a:rPr lang="zh-TW" altLang="en-US"/>
               <a:t>按一下以編輯母片標題樣式</a:t>
             </a:r>
-          </a:p>
-        </p:txBody>
-      </p:sp>
-      <p:sp>
-        <p:nvSpPr>
-          <p:cNvPr id="3" name="日期版面配置區 2">
-            <a:extLst>
-              <a:ext uri="{FF2B5EF4-FFF2-40B4-BE49-F238E27FC236}">
-                <a16:creationId xmlns:a16="http://schemas.microsoft.com/office/drawing/2014/main" id="{C56C90C5-FF0B-B20B-3A78-02F2A754E87C}"/>
-              </a:ext>
-            </a:extLst>
-          </p:cNvPr>
+            <a:endParaRPr lang="en-US" dirty="0"/>
+          </a:p>
+        </p:txBody>
+      </p:sp>
+      <p:sp>
+        <p:nvSpPr>
+          <p:cNvPr id="3" name="Date Placeholder 2"/>
           <p:cNvSpPr>
             <a:spLocks noGrp="1"/>
           </p:cNvSpPr>
@@ -1955,23 +4555,17 @@
           <a:bodyPr/>
           <a:lstStyle/>
           <a:p>
-            <a:fld id="{2BB06109-5618-412E-B2EE-D2F35E34DA82}" type="datetimeFigureOut">
-              <a:rPr lang="zh-TW" altLang="en-US" smtClean="0"/>
-              <a:t>2025/11/17</a:t>
+            <a:fld id="{5BCAD085-E8A6-8845-BD4E-CB4CCA059FC4}" type="datetimeFigureOut">
+              <a:rPr lang="en-US" smtClean="0"/>
+              <a:t>12/8/2025</a:t>
             </a:fld>
-            <a:endParaRPr lang="zh-TW" altLang="en-US"/>
-          </a:p>
-        </p:txBody>
-      </p:sp>
-      <p:sp>
-        <p:nvSpPr>
-          <p:cNvPr id="4" name="頁尾版面配置區 3">
-            <a:extLst>
-              <a:ext uri="{FF2B5EF4-FFF2-40B4-BE49-F238E27FC236}">
-                <a16:creationId xmlns:a16="http://schemas.microsoft.com/office/drawing/2014/main" id="{B1732B0B-9279-448B-0143-A53ED37D8320}"/>
-              </a:ext>
-            </a:extLst>
-          </p:cNvPr>
+            <a:endParaRPr lang="en-US"/>
+          </a:p>
+        </p:txBody>
+      </p:sp>
+      <p:sp>
+        <p:nvSpPr>
+          <p:cNvPr id="4" name="Footer Placeholder 3"/>
           <p:cNvSpPr>
             <a:spLocks noGrp="1"/>
           </p:cNvSpPr>
@@ -1984,19 +4578,13 @@
           <a:bodyPr/>
           <a:lstStyle/>
           <a:p>
-            <a:endParaRPr lang="zh-TW" altLang="en-US"/>
-          </a:p>
-        </p:txBody>
-      </p:sp>
-      <p:sp>
-        <p:nvSpPr>
-          <p:cNvPr id="5" name="投影片編號版面配置區 4">
-            <a:extLst>
-              <a:ext uri="{FF2B5EF4-FFF2-40B4-BE49-F238E27FC236}">
-                <a16:creationId xmlns:a16="http://schemas.microsoft.com/office/drawing/2014/main" id="{DD25F05A-BB44-7B74-EC43-B19A3D457CC4}"/>
-              </a:ext>
-            </a:extLst>
-          </p:cNvPr>
+            <a:endParaRPr lang="en-US"/>
+          </a:p>
+        </p:txBody>
+      </p:sp>
+      <p:sp>
+        <p:nvSpPr>
+          <p:cNvPr id="5" name="Slide Number Placeholder 4"/>
           <p:cNvSpPr>
             <a:spLocks noGrp="1"/>
           </p:cNvSpPr>
@@ -2009,18 +4597,18 @@
           <a:bodyPr/>
           <a:lstStyle/>
           <a:p>
-            <a:fld id="{DC9A25D7-4362-44B0-A555-D90F9CDD7899}" type="slidenum">
-              <a:rPr lang="zh-TW" altLang="en-US" smtClean="0"/>
+            <a:fld id="{C1FF6DA9-008F-8B48-92A6-B652298478BF}" type="slidenum">
+              <a:rPr lang="en-US" smtClean="0"/>
               <a:t>‹#›</a:t>
             </a:fld>
-            <a:endParaRPr lang="zh-TW" altLang="en-US"/>
+            <a:endParaRPr lang="en-US"/>
           </a:p>
         </p:txBody>
       </p:sp>
     </p:spTree>
     <p:extLst>
       <p:ext uri="{BB962C8B-B14F-4D97-AF65-F5344CB8AC3E}">
-        <p14:creationId xmlns:p14="http://schemas.microsoft.com/office/powerpoint/2010/main" val="859628656"/>
+        <p14:creationId xmlns:p14="http://schemas.microsoft.com/office/powerpoint/2010/main" val="1448143596"/>
       </p:ext>
     </p:extLst>
   </p:cSld>
@@ -2049,13 +4637,7 @@
       </p:grpSpPr>
       <p:sp>
         <p:nvSpPr>
-          <p:cNvPr id="2" name="日期版面配置區 1">
-            <a:extLst>
-              <a:ext uri="{FF2B5EF4-FFF2-40B4-BE49-F238E27FC236}">
-                <a16:creationId xmlns:a16="http://schemas.microsoft.com/office/drawing/2014/main" id="{60E9C8EE-CDAB-3B56-7855-F4FD9A3535CE}"/>
-              </a:ext>
-            </a:extLst>
-          </p:cNvPr>
+          <p:cNvPr id="2" name="Date Placeholder 1"/>
           <p:cNvSpPr>
             <a:spLocks noGrp="1"/>
           </p:cNvSpPr>
@@ -2068,23 +4650,17 @@
           <a:bodyPr/>
           <a:lstStyle/>
           <a:p>
-            <a:fld id="{2BB06109-5618-412E-B2EE-D2F35E34DA82}" type="datetimeFigureOut">
-              <a:rPr lang="zh-TW" altLang="en-US" smtClean="0"/>
-              <a:t>2025/11/17</a:t>
+            <a:fld id="{5BCAD085-E8A6-8845-BD4E-CB4CCA059FC4}" type="datetimeFigureOut">
+              <a:rPr lang="en-US" smtClean="0"/>
+              <a:t>12/8/2025</a:t>
             </a:fld>
-            <a:endParaRPr lang="zh-TW" altLang="en-US"/>
-          </a:p>
-        </p:txBody>
-      </p:sp>
-      <p:sp>
-        <p:nvSpPr>
-          <p:cNvPr id="3" name="頁尾版面配置區 2">
-            <a:extLst>
-              <a:ext uri="{FF2B5EF4-FFF2-40B4-BE49-F238E27FC236}">
-                <a16:creationId xmlns:a16="http://schemas.microsoft.com/office/drawing/2014/main" id="{85E6FDC8-A8AF-CE1C-44A9-A0B8997B2178}"/>
-              </a:ext>
-            </a:extLst>
-          </p:cNvPr>
+            <a:endParaRPr lang="en-US"/>
+          </a:p>
+        </p:txBody>
+      </p:sp>
+      <p:sp>
+        <p:nvSpPr>
+          <p:cNvPr id="3" name="Footer Placeholder 2"/>
           <p:cNvSpPr>
             <a:spLocks noGrp="1"/>
           </p:cNvSpPr>
@@ -2097,19 +4673,13 @@
           <a:bodyPr/>
           <a:lstStyle/>
           <a:p>
-            <a:endParaRPr lang="zh-TW" altLang="en-US"/>
-          </a:p>
-        </p:txBody>
-      </p:sp>
-      <p:sp>
-        <p:nvSpPr>
-          <p:cNvPr id="4" name="投影片編號版面配置區 3">
-            <a:extLst>
-              <a:ext uri="{FF2B5EF4-FFF2-40B4-BE49-F238E27FC236}">
-                <a16:creationId xmlns:a16="http://schemas.microsoft.com/office/drawing/2014/main" id="{1C070171-9978-EACE-ABD2-1BBBFAA85946}"/>
-              </a:ext>
-            </a:extLst>
-          </p:cNvPr>
+            <a:endParaRPr lang="en-US"/>
+          </a:p>
+        </p:txBody>
+      </p:sp>
+      <p:sp>
+        <p:nvSpPr>
+          <p:cNvPr id="4" name="Slide Number Placeholder 3"/>
           <p:cNvSpPr>
             <a:spLocks noGrp="1"/>
           </p:cNvSpPr>
@@ -2122,18 +4692,18 @@
           <a:bodyPr/>
           <a:lstStyle/>
           <a:p>
-            <a:fld id="{DC9A25D7-4362-44B0-A555-D90F9CDD7899}" type="slidenum">
-              <a:rPr lang="zh-TW" altLang="en-US" smtClean="0"/>
+            <a:fld id="{C1FF6DA9-008F-8B48-92A6-B652298478BF}" type="slidenum">
+              <a:rPr lang="en-US" smtClean="0"/>
               <a:t>‹#›</a:t>
             </a:fld>
-            <a:endParaRPr lang="zh-TW" altLang="en-US"/>
+            <a:endParaRPr lang="en-US"/>
           </a:p>
         </p:txBody>
       </p:sp>
     </p:spTree>
     <p:extLst>
       <p:ext uri="{BB962C8B-B14F-4D97-AF65-F5344CB8AC3E}">
-        <p14:creationId xmlns:p14="http://schemas.microsoft.com/office/powerpoint/2010/main" val="1226000512"/>
+        <p14:creationId xmlns:p14="http://schemas.microsoft.com/office/powerpoint/2010/main" val="877373547"/>
       </p:ext>
     </p:extLst>
   </p:cSld>
@@ -2162,13 +4732,7 @@
       </p:grpSpPr>
       <p:sp>
         <p:nvSpPr>
-          <p:cNvPr id="2" name="標題 1">
-            <a:extLst>
-              <a:ext uri="{FF2B5EF4-FFF2-40B4-BE49-F238E27FC236}">
-                <a16:creationId xmlns:a16="http://schemas.microsoft.com/office/drawing/2014/main" id="{AABC050B-0C7B-0041-82D9-C7A5BCB91B1C}"/>
-              </a:ext>
-            </a:extLst>
-          </p:cNvPr>
+          <p:cNvPr id="2" name="Title 1"/>
           <p:cNvSpPr>
             <a:spLocks noGrp="1"/>
           </p:cNvSpPr>
@@ -2178,15 +4742,17 @@
         </p:nvSpPr>
         <p:spPr>
           <a:xfrm>
-            <a:off x="839788" y="457200"/>
-            <a:ext cx="3932237" cy="1600200"/>
+            <a:off x="1439042" y="798973"/>
+            <a:ext cx="2425950" cy="2247117"/>
           </a:xfrm>
         </p:spPr>
         <p:txBody>
-          <a:bodyPr anchor="b"/>
+          <a:bodyPr anchor="b">
+            <a:normAutofit/>
+          </a:bodyPr>
           <a:lstStyle>
-            <a:lvl1pPr>
-              <a:defRPr sz="3200"/>
+            <a:lvl1pPr algn="l">
+              <a:defRPr sz="2400"/>
             </a:lvl1pPr>
           </a:lstStyle>
           <a:p>
@@ -2194,18 +4760,13 @@
               <a:rPr lang="zh-TW" altLang="en-US"/>
               <a:t>按一下以編輯母片標題樣式</a:t>
             </a:r>
-          </a:p>
-        </p:txBody>
-      </p:sp>
-      <p:sp>
-        <p:nvSpPr>
-          <p:cNvPr id="3" name="內容版面配置區 2">
-            <a:extLst>
-              <a:ext uri="{FF2B5EF4-FFF2-40B4-BE49-F238E27FC236}">
-                <a16:creationId xmlns:a16="http://schemas.microsoft.com/office/drawing/2014/main" id="{7F891CD5-2F72-1949-0B4F-A3E017ACB768}"/>
-              </a:ext>
-            </a:extLst>
-          </p:cNvPr>
+            <a:endParaRPr lang="en-US" dirty="0"/>
+          </a:p>
+        </p:txBody>
+      </p:sp>
+      <p:sp>
+        <p:nvSpPr>
+          <p:cNvPr id="3" name="Content Placeholder 2"/>
           <p:cNvSpPr>
             <a:spLocks noGrp="1"/>
           </p:cNvSpPr>
@@ -2215,41 +4776,13 @@
         </p:nvSpPr>
         <p:spPr>
           <a:xfrm>
-            <a:off x="5183188" y="987425"/>
-            <a:ext cx="6172200" cy="4873625"/>
+            <a:off x="4186656" y="798974"/>
+            <a:ext cx="3828178" cy="4658826"/>
           </a:xfrm>
         </p:spPr>
         <p:txBody>
-          <a:bodyPr/>
-          <a:lstStyle>
-            <a:lvl1pPr>
-              <a:defRPr sz="3200"/>
-            </a:lvl1pPr>
-            <a:lvl2pPr>
-              <a:defRPr sz="2800"/>
-            </a:lvl2pPr>
-            <a:lvl3pPr>
-              <a:defRPr sz="2400"/>
-            </a:lvl3pPr>
-            <a:lvl4pPr>
-              <a:defRPr sz="2000"/>
-            </a:lvl4pPr>
-            <a:lvl5pPr>
-              <a:defRPr sz="2000"/>
-            </a:lvl5pPr>
-            <a:lvl6pPr>
-              <a:defRPr sz="2000"/>
-            </a:lvl6pPr>
-            <a:lvl7pPr>
-              <a:defRPr sz="2000"/>
-            </a:lvl7pPr>
-            <a:lvl8pPr>
-              <a:defRPr sz="2000"/>
-            </a:lvl8pPr>
-            <a:lvl9pPr>
-              <a:defRPr sz="2000"/>
-            </a:lvl9pPr>
-          </a:lstStyle>
+          <a:bodyPr anchor="ctr"/>
+          <a:lstStyle/>
           <a:p>
             <a:pPr lvl="0"/>
             <a:r>
@@ -2284,18 +4817,13 @@
               <a:rPr lang="zh-TW" altLang="en-US"/>
               <a:t>第五層</a:t>
             </a:r>
-          </a:p>
-        </p:txBody>
-      </p:sp>
-      <p:sp>
-        <p:nvSpPr>
-          <p:cNvPr id="4" name="文字版面配置區 3">
-            <a:extLst>
-              <a:ext uri="{FF2B5EF4-FFF2-40B4-BE49-F238E27FC236}">
-                <a16:creationId xmlns:a16="http://schemas.microsoft.com/office/drawing/2014/main" id="{7EE04AE0-2275-F276-C2C1-DBAB7AD231C6}"/>
-              </a:ext>
-            </a:extLst>
-          </p:cNvPr>
+            <a:endParaRPr lang="en-US" dirty="0"/>
+          </a:p>
+        </p:txBody>
+      </p:sp>
+      <p:sp>
+        <p:nvSpPr>
+          <p:cNvPr id="4" name="Text Placeholder 3"/>
           <p:cNvSpPr>
             <a:spLocks noGrp="1"/>
           </p:cNvSpPr>
@@ -2305,48 +4833,50 @@
         </p:nvSpPr>
         <p:spPr>
           <a:xfrm>
-            <a:off x="839788" y="2057400"/>
-            <a:ext cx="3932237" cy="3811588"/>
+            <a:off x="1439042" y="3205492"/>
+            <a:ext cx="2427369" cy="2248181"/>
           </a:xfrm>
         </p:spPr>
         <p:txBody>
-          <a:bodyPr/>
+          <a:bodyPr>
+            <a:normAutofit/>
+          </a:bodyPr>
           <a:lstStyle>
-            <a:lvl1pPr marL="0" indent="0">
+            <a:lvl1pPr marL="0" indent="0" algn="l">
               <a:buNone/>
               <a:defRPr sz="1600"/>
             </a:lvl1pPr>
-            <a:lvl2pPr marL="457200" indent="0">
+            <a:lvl2pPr marL="342900" indent="0">
               <a:buNone/>
-              <a:defRPr sz="1400"/>
+              <a:defRPr sz="1050"/>
             </a:lvl2pPr>
-            <a:lvl3pPr marL="914400" indent="0">
+            <a:lvl3pPr marL="685800" indent="0">
               <a:buNone/>
-              <a:defRPr sz="1200"/>
+              <a:defRPr sz="900"/>
             </a:lvl3pPr>
-            <a:lvl4pPr marL="1371600" indent="0">
+            <a:lvl4pPr marL="1028700" indent="0">
               <a:buNone/>
-              <a:defRPr sz="1000"/>
+              <a:defRPr sz="750"/>
             </a:lvl4pPr>
-            <a:lvl5pPr marL="1828800" indent="0">
+            <a:lvl5pPr marL="1371600" indent="0">
               <a:buNone/>
-              <a:defRPr sz="1000"/>
+              <a:defRPr sz="750"/>
             </a:lvl5pPr>
-            <a:lvl6pPr marL="2286000" indent="0">
+            <a:lvl6pPr marL="1714500" indent="0">
               <a:buNone/>
-              <a:defRPr sz="1000"/>
+              <a:defRPr sz="750"/>
             </a:lvl6pPr>
-            <a:lvl7pPr marL="2743200" indent="0">
+            <a:lvl7pPr marL="2057400" indent="0">
               <a:buNone/>
-              <a:defRPr sz="1000"/>
+              <a:defRPr sz="750"/>
             </a:lvl7pPr>
-            <a:lvl8pPr marL="3200400" indent="0">
+            <a:lvl8pPr marL="2400300" indent="0">
               <a:buNone/>
-              <a:defRPr sz="1000"/>
+              <a:defRPr sz="750"/>
             </a:lvl8pPr>
-            <a:lvl9pPr marL="3657600" indent="0">
+            <a:lvl9pPr marL="2743200" indent="0">
               <a:buNone/>
-              <a:defRPr sz="1000"/>
+              <a:defRPr sz="750"/>
             </a:lvl9pPr>
           </a:lstStyle>
           <a:p>
@@ -2360,13 +4890,7 @@
       </p:sp>
       <p:sp>
         <p:nvSpPr>
-          <p:cNvPr id="5" name="日期版面配置區 4">
-            <a:extLst>
-              <a:ext uri="{FF2B5EF4-FFF2-40B4-BE49-F238E27FC236}">
-                <a16:creationId xmlns:a16="http://schemas.microsoft.com/office/drawing/2014/main" id="{A15620B9-FBEC-3EB9-607D-DFD8DC2BE247}"/>
-              </a:ext>
-            </a:extLst>
-          </p:cNvPr>
+          <p:cNvPr id="5" name="Date Placeholder 4"/>
           <p:cNvSpPr>
             <a:spLocks noGrp="1"/>
           </p:cNvSpPr>
@@ -2379,23 +4903,17 @@
           <a:bodyPr/>
           <a:lstStyle/>
           <a:p>
-            <a:fld id="{2BB06109-5618-412E-B2EE-D2F35E34DA82}" type="datetimeFigureOut">
-              <a:rPr lang="zh-TW" altLang="en-US" smtClean="0"/>
-              <a:t>2025/11/17</a:t>
+            <a:fld id="{5BCAD085-E8A6-8845-BD4E-CB4CCA059FC4}" type="datetimeFigureOut">
+              <a:rPr lang="en-US" smtClean="0"/>
+              <a:t>12/8/2025</a:t>
             </a:fld>
-            <a:endParaRPr lang="zh-TW" altLang="en-US"/>
-          </a:p>
-        </p:txBody>
-      </p:sp>
-      <p:sp>
-        <p:nvSpPr>
-          <p:cNvPr id="6" name="頁尾版面配置區 5">
-            <a:extLst>
-              <a:ext uri="{FF2B5EF4-FFF2-40B4-BE49-F238E27FC236}">
-                <a16:creationId xmlns:a16="http://schemas.microsoft.com/office/drawing/2014/main" id="{D14975E8-FFC2-5188-E93E-009F21CDCFA7}"/>
-              </a:ext>
-            </a:extLst>
-          </p:cNvPr>
+            <a:endParaRPr lang="en-US"/>
+          </a:p>
+        </p:txBody>
+      </p:sp>
+      <p:sp>
+        <p:nvSpPr>
+          <p:cNvPr id="6" name="Footer Placeholder 5"/>
           <p:cNvSpPr>
             <a:spLocks noGrp="1"/>
           </p:cNvSpPr>
@@ -2408,19 +4926,13 @@
           <a:bodyPr/>
           <a:lstStyle/>
           <a:p>
-            <a:endParaRPr lang="zh-TW" altLang="en-US"/>
-          </a:p>
-        </p:txBody>
-      </p:sp>
-      <p:sp>
-        <p:nvSpPr>
-          <p:cNvPr id="7" name="投影片編號版面配置區 6">
-            <a:extLst>
-              <a:ext uri="{FF2B5EF4-FFF2-40B4-BE49-F238E27FC236}">
-                <a16:creationId xmlns:a16="http://schemas.microsoft.com/office/drawing/2014/main" id="{3862FB78-AECD-A243-E127-DB56D05B9948}"/>
-              </a:ext>
-            </a:extLst>
-          </p:cNvPr>
+            <a:endParaRPr lang="en-US"/>
+          </a:p>
+        </p:txBody>
+      </p:sp>
+      <p:sp>
+        <p:nvSpPr>
+          <p:cNvPr id="7" name="Slide Number Placeholder 6"/>
           <p:cNvSpPr>
             <a:spLocks noGrp="1"/>
           </p:cNvSpPr>
@@ -2433,18 +4945,49 @@
           <a:bodyPr/>
           <a:lstStyle/>
           <a:p>
-            <a:fld id="{DC9A25D7-4362-44B0-A555-D90F9CDD7899}" type="slidenum">
-              <a:rPr lang="zh-TW" altLang="en-US" smtClean="0"/>
+            <a:fld id="{C1FF6DA9-008F-8B48-92A6-B652298478BF}" type="slidenum">
+              <a:rPr lang="en-US" smtClean="0"/>
               <a:t>‹#›</a:t>
             </a:fld>
-            <a:endParaRPr lang="zh-TW" altLang="en-US"/>
-          </a:p>
-        </p:txBody>
-      </p:sp>
+            <a:endParaRPr lang="en-US"/>
+          </a:p>
+        </p:txBody>
+      </p:sp>
+      <p:cxnSp>
+        <p:nvCxnSpPr>
+          <p:cNvPr id="17" name="Straight Connector 16"/>
+          <p:cNvCxnSpPr/>
+          <p:nvPr/>
+        </p:nvCxnSpPr>
+        <p:spPr>
+          <a:xfrm>
+            <a:off x="1441748" y="3205491"/>
+            <a:ext cx="2423276" cy="0"/>
+          </a:xfrm>
+          <a:prstGeom prst="line">
+            <a:avLst/>
+          </a:prstGeom>
+          <a:ln w="31750"/>
+        </p:spPr>
+        <p:style>
+          <a:lnRef idx="3">
+            <a:schemeClr val="accent1"/>
+          </a:lnRef>
+          <a:fillRef idx="0">
+            <a:schemeClr val="accent1"/>
+          </a:fillRef>
+          <a:effectRef idx="2">
+            <a:schemeClr val="accent1"/>
+          </a:effectRef>
+          <a:fontRef idx="minor">
+            <a:schemeClr val="tx1"/>
+          </a:fontRef>
+        </p:style>
+      </p:cxnSp>
     </p:spTree>
     <p:extLst>
       <p:ext uri="{BB962C8B-B14F-4D97-AF65-F5344CB8AC3E}">
-        <p14:creationId xmlns:p14="http://schemas.microsoft.com/office/powerpoint/2010/main" val="2689144921"/>
+        <p14:creationId xmlns:p14="http://schemas.microsoft.com/office/powerpoint/2010/main" val="3325881386"/>
       </p:ext>
     </p:extLst>
   </p:cSld>
@@ -2471,15 +5014,143 @@
           <a:chExt cx="0" cy="0"/>
         </a:xfrm>
       </p:grpSpPr>
-      <p:sp>
-        <p:nvSpPr>
-          <p:cNvPr id="2" name="標題 1">
-            <a:extLst>
-              <a:ext uri="{FF2B5EF4-FFF2-40B4-BE49-F238E27FC236}">
-                <a16:creationId xmlns:a16="http://schemas.microsoft.com/office/drawing/2014/main" id="{A11CB48F-F016-D627-940D-01FA3FC61E03}"/>
-              </a:ext>
-            </a:extLst>
-          </p:cNvPr>
+      <p:grpSp>
+        <p:nvGrpSpPr>
+          <p:cNvPr id="13" name="Group 12"/>
+          <p:cNvGrpSpPr/>
+          <p:nvPr/>
+        </p:nvGrpSpPr>
+        <p:grpSpPr>
+          <a:xfrm>
+            <a:off x="4996501" y="482171"/>
+            <a:ext cx="3511387" cy="5149101"/>
+            <a:chOff x="6852919" y="583365"/>
+            <a:chExt cx="4681849" cy="5181928"/>
+          </a:xfrm>
+        </p:grpSpPr>
+        <p:sp>
+          <p:nvSpPr>
+            <p:cNvPr id="14" name="Rectangle 13"/>
+            <p:cNvSpPr/>
+            <p:nvPr/>
+          </p:nvSpPr>
+          <p:spPr>
+            <a:xfrm>
+              <a:off x="6852919" y="583365"/>
+              <a:ext cx="4681849" cy="5181928"/>
+            </a:xfrm>
+            <a:prstGeom prst="rect">
+              <a:avLst/>
+            </a:prstGeom>
+            <a:gradFill>
+              <a:gsLst>
+                <a:gs pos="0">
+                  <a:srgbClr val="000001"/>
+                </a:gs>
+                <a:gs pos="100000">
+                  <a:srgbClr val="191919"/>
+                </a:gs>
+              </a:gsLst>
+            </a:gradFill>
+            <a:ln w="76200" cmpd="sng">
+              <a:noFill/>
+              <a:miter lim="800000"/>
+            </a:ln>
+            <a:effectLst>
+              <a:outerShdw blurRad="127000" dist="228600" dir="4740000" sx="98000" sy="98000" algn="tl" rotWithShape="0">
+                <a:srgbClr val="000000">
+                  <a:alpha val="34000"/>
+                </a:srgbClr>
+              </a:outerShdw>
+            </a:effectLst>
+            <a:scene3d>
+              <a:camera prst="orthographicFront"/>
+              <a:lightRig rig="threePt" dir="t"/>
+            </a:scene3d>
+            <a:sp3d>
+              <a:bevelT w="152400" h="50800" prst="softRound"/>
+            </a:sp3d>
+          </p:spPr>
+          <p:style>
+            <a:lnRef idx="1">
+              <a:schemeClr val="accent1"/>
+            </a:lnRef>
+            <a:fillRef idx="3">
+              <a:schemeClr val="accent1"/>
+            </a:fillRef>
+            <a:effectRef idx="2">
+              <a:schemeClr val="accent1"/>
+            </a:effectRef>
+            <a:fontRef idx="minor">
+              <a:schemeClr val="lt1"/>
+            </a:fontRef>
+          </p:style>
+        </p:sp>
+        <p:sp>
+          <p:nvSpPr>
+            <p:cNvPr id="15" name="Rectangle 14"/>
+            <p:cNvSpPr/>
+            <p:nvPr/>
+          </p:nvSpPr>
+          <p:spPr>
+            <a:xfrm>
+              <a:off x="7273787" y="915806"/>
+              <a:ext cx="3844017" cy="4507918"/>
+            </a:xfrm>
+            <a:prstGeom prst="rect">
+              <a:avLst/>
+            </a:prstGeom>
+            <a:gradFill>
+              <a:gsLst>
+                <a:gs pos="0">
+                  <a:srgbClr val="DADADA"/>
+                </a:gs>
+                <a:gs pos="100000">
+                  <a:srgbClr val="FFFFFE"/>
+                </a:gs>
+              </a:gsLst>
+              <a:lin ang="16200000" scaled="0"/>
+            </a:gradFill>
+            <a:ln w="50800" cmpd="sng">
+              <a:solidFill>
+                <a:srgbClr val="191919"/>
+              </a:solidFill>
+              <a:miter lim="800000"/>
+            </a:ln>
+            <a:effectLst>
+              <a:innerShdw blurRad="63500" dist="88900" dir="14100000">
+                <a:srgbClr val="000000">
+                  <a:alpha val="30000"/>
+                </a:srgbClr>
+              </a:innerShdw>
+            </a:effectLst>
+            <a:scene3d>
+              <a:camera prst="orthographicFront"/>
+              <a:lightRig rig="threePt" dir="t"/>
+            </a:scene3d>
+            <a:sp3d>
+              <a:bevelT prst="relaxedInset"/>
+            </a:sp3d>
+          </p:spPr>
+          <p:style>
+            <a:lnRef idx="1">
+              <a:schemeClr val="accent1"/>
+            </a:lnRef>
+            <a:fillRef idx="3">
+              <a:schemeClr val="accent1"/>
+            </a:fillRef>
+            <a:effectRef idx="2">
+              <a:schemeClr val="accent1"/>
+            </a:effectRef>
+            <a:fontRef idx="minor">
+              <a:schemeClr val="lt1"/>
+            </a:fontRef>
+          </p:style>
+        </p:sp>
+      </p:grpSp>
+      <p:sp>
+        <p:nvSpPr>
+          <p:cNvPr id="2" name="Title 1"/>
           <p:cNvSpPr>
             <a:spLocks noGrp="1"/>
           </p:cNvSpPr>
@@ -2489,12 +5160,14 @@
         </p:nvSpPr>
         <p:spPr>
           <a:xfrm>
-            <a:off x="839788" y="457200"/>
-            <a:ext cx="3932237" cy="1600200"/>
+            <a:off x="1444148" y="1129513"/>
+            <a:ext cx="3244935" cy="1830584"/>
           </a:xfrm>
         </p:spPr>
         <p:txBody>
-          <a:bodyPr anchor="b"/>
+          <a:bodyPr anchor="b">
+            <a:normAutofit/>
+          </a:bodyPr>
           <a:lstStyle>
             <a:lvl1pPr>
               <a:defRPr sz="3200"/>
@@ -2505,20 +5178,15 @@
               <a:rPr lang="zh-TW" altLang="en-US"/>
               <a:t>按一下以編輯母片標題樣式</a:t>
             </a:r>
-          </a:p>
-        </p:txBody>
-      </p:sp>
-      <p:sp>
-        <p:nvSpPr>
-          <p:cNvPr id="3" name="圖片版面配置區 2">
-            <a:extLst>
-              <a:ext uri="{FF2B5EF4-FFF2-40B4-BE49-F238E27FC236}">
-                <a16:creationId xmlns:a16="http://schemas.microsoft.com/office/drawing/2014/main" id="{526617EF-C8F0-D640-6020-3E733C0B4F58}"/>
-              </a:ext>
-            </a:extLst>
-          </p:cNvPr>
-          <p:cNvSpPr>
-            <a:spLocks noGrp="1"/>
+            <a:endParaRPr lang="en-US" dirty="0"/>
+          </a:p>
+        </p:txBody>
+      </p:sp>
+      <p:sp>
+        <p:nvSpPr>
+          <p:cNvPr id="3" name="Picture Placeholder 2"/>
+          <p:cNvSpPr>
+            <a:spLocks noGrp="1" noChangeAspect="1"/>
           </p:cNvSpPr>
           <p:nvPr>
             <p:ph type="pic" idx="1"/>
@@ -2526,140 +5194,200 @@
         </p:nvSpPr>
         <p:spPr>
           <a:xfrm>
-            <a:off x="5183188" y="987425"/>
-            <a:ext cx="6172200" cy="4873625"/>
+            <a:off x="5640128" y="1122543"/>
+            <a:ext cx="2234998" cy="3866327"/>
+          </a:xfrm>
+          <a:solidFill>
+            <a:schemeClr val="bg1">
+              <a:lumMod val="85000"/>
+            </a:schemeClr>
+          </a:solidFill>
+          <a:ln w="9525" cap="sq">
+            <a:noFill/>
+            <a:miter lim="800000"/>
+          </a:ln>
+          <a:effectLst/>
+        </p:spPr>
+        <p:txBody>
+          <a:bodyPr anchor="t"/>
+          <a:lstStyle>
+            <a:lvl1pPr marL="0" indent="0" algn="ctr">
+              <a:buNone/>
+              <a:defRPr sz="2400"/>
+            </a:lvl1pPr>
+            <a:lvl2pPr marL="342900" indent="0">
+              <a:buNone/>
+              <a:defRPr sz="2100"/>
+            </a:lvl2pPr>
+            <a:lvl3pPr marL="685800" indent="0">
+              <a:buNone/>
+              <a:defRPr sz="1800"/>
+            </a:lvl3pPr>
+            <a:lvl4pPr marL="1028700" indent="0">
+              <a:buNone/>
+              <a:defRPr sz="1500"/>
+            </a:lvl4pPr>
+            <a:lvl5pPr marL="1371600" indent="0">
+              <a:buNone/>
+              <a:defRPr sz="1500"/>
+            </a:lvl5pPr>
+            <a:lvl6pPr marL="1714500" indent="0">
+              <a:buNone/>
+              <a:defRPr sz="1500"/>
+            </a:lvl6pPr>
+            <a:lvl7pPr marL="2057400" indent="0">
+              <a:buNone/>
+              <a:defRPr sz="1500"/>
+            </a:lvl7pPr>
+            <a:lvl8pPr marL="2400300" indent="0">
+              <a:buNone/>
+              <a:defRPr sz="1500"/>
+            </a:lvl8pPr>
+            <a:lvl9pPr marL="2743200" indent="0">
+              <a:buNone/>
+              <a:defRPr sz="1500"/>
+            </a:lvl9pPr>
+          </a:lstStyle>
+          <a:p>
+            <a:r>
+              <a:rPr lang="zh-TW" altLang="en-US"/>
+              <a:t>按一下圖示以新增圖片</a:t>
+            </a:r>
+            <a:endParaRPr lang="en-US" dirty="0"/>
+          </a:p>
+        </p:txBody>
+      </p:sp>
+      <p:sp>
+        <p:nvSpPr>
+          <p:cNvPr id="4" name="Text Placeholder 3"/>
+          <p:cNvSpPr>
+            <a:spLocks noGrp="1"/>
+          </p:cNvSpPr>
+          <p:nvPr>
+            <p:ph type="body" sz="half" idx="2"/>
+          </p:nvPr>
+        </p:nvSpPr>
+        <p:spPr>
+          <a:xfrm>
+            <a:off x="1443492" y="3145992"/>
+            <a:ext cx="3240286" cy="2003742"/>
           </a:xfrm>
         </p:spPr>
         <p:txBody>
+          <a:bodyPr>
+            <a:normAutofit/>
+          </a:bodyPr>
+          <a:lstStyle>
+            <a:lvl1pPr marL="0" indent="0" algn="l">
+              <a:buNone/>
+              <a:defRPr sz="1800"/>
+            </a:lvl1pPr>
+            <a:lvl2pPr marL="342900" indent="0">
+              <a:buNone/>
+              <a:defRPr sz="1050"/>
+            </a:lvl2pPr>
+            <a:lvl3pPr marL="685800" indent="0">
+              <a:buNone/>
+              <a:defRPr sz="900"/>
+            </a:lvl3pPr>
+            <a:lvl4pPr marL="1028700" indent="0">
+              <a:buNone/>
+              <a:defRPr sz="750"/>
+            </a:lvl4pPr>
+            <a:lvl5pPr marL="1371600" indent="0">
+              <a:buNone/>
+              <a:defRPr sz="750"/>
+            </a:lvl5pPr>
+            <a:lvl6pPr marL="1714500" indent="0">
+              <a:buNone/>
+              <a:defRPr sz="750"/>
+            </a:lvl6pPr>
+            <a:lvl7pPr marL="2057400" indent="0">
+              <a:buNone/>
+              <a:defRPr sz="750"/>
+            </a:lvl7pPr>
+            <a:lvl8pPr marL="2400300" indent="0">
+              <a:buNone/>
+              <a:defRPr sz="750"/>
+            </a:lvl8pPr>
+            <a:lvl9pPr marL="2743200" indent="0">
+              <a:buNone/>
+              <a:defRPr sz="750"/>
+            </a:lvl9pPr>
+          </a:lstStyle>
+          <a:p>
+            <a:pPr lvl="0"/>
+            <a:r>
+              <a:rPr lang="zh-TW" altLang="en-US"/>
+              <a:t>按一下以編輯母片文字樣式</a:t>
+            </a:r>
+          </a:p>
+        </p:txBody>
+      </p:sp>
+      <p:sp>
+        <p:nvSpPr>
+          <p:cNvPr id="5" name="Date Placeholder 4"/>
+          <p:cNvSpPr>
+            <a:spLocks noGrp="1"/>
+          </p:cNvSpPr>
+          <p:nvPr>
+            <p:ph type="dt" sz="half" idx="10"/>
+          </p:nvPr>
+        </p:nvSpPr>
+        <p:spPr>
+          <a:xfrm>
+            <a:off x="1436664" y="5469857"/>
+            <a:ext cx="3252420" cy="320123"/>
+          </a:xfrm>
+        </p:spPr>
+        <p:txBody>
           <a:bodyPr/>
           <a:lstStyle>
-            <a:lvl1pPr marL="0" indent="0">
-              <a:buNone/>
-              <a:defRPr sz="3200"/>
+            <a:lvl1pPr algn="l">
+              <a:defRPr/>
             </a:lvl1pPr>
-            <a:lvl2pPr marL="457200" indent="0">
-              <a:buNone/>
-              <a:defRPr sz="2800"/>
-            </a:lvl2pPr>
-            <a:lvl3pPr marL="914400" indent="0">
-              <a:buNone/>
-              <a:defRPr sz="2400"/>
-            </a:lvl3pPr>
-            <a:lvl4pPr marL="1371600" indent="0">
-              <a:buNone/>
-              <a:defRPr sz="2000"/>
-            </a:lvl4pPr>
-            <a:lvl5pPr marL="1828800" indent="0">
-              <a:buNone/>
-              <a:defRPr sz="2000"/>
-            </a:lvl5pPr>
-            <a:lvl6pPr marL="2286000" indent="0">
-              <a:buNone/>
-              <a:defRPr sz="2000"/>
-            </a:lvl6pPr>
-            <a:lvl7pPr marL="2743200" indent="0">
-              <a:buNone/>
-              <a:defRPr sz="2000"/>
-            </a:lvl7pPr>
-            <a:lvl8pPr marL="3200400" indent="0">
-              <a:buNone/>
-              <a:defRPr sz="2000"/>
-            </a:lvl8pPr>
-            <a:lvl9pPr marL="3657600" indent="0">
-              <a:buNone/>
-              <a:defRPr sz="2000"/>
-            </a:lvl9pPr>
           </a:lstStyle>
           <a:p>
-            <a:endParaRPr lang="zh-TW" altLang="en-US"/>
-          </a:p>
-        </p:txBody>
-      </p:sp>
-      <p:sp>
-        <p:nvSpPr>
-          <p:cNvPr id="4" name="文字版面配置區 3">
-            <a:extLst>
-              <a:ext uri="{FF2B5EF4-FFF2-40B4-BE49-F238E27FC236}">
-                <a16:creationId xmlns:a16="http://schemas.microsoft.com/office/drawing/2014/main" id="{37B619B7-765B-3390-E519-644655E04B36}"/>
-              </a:ext>
-            </a:extLst>
-          </p:cNvPr>
-          <p:cNvSpPr>
-            <a:spLocks noGrp="1"/>
-          </p:cNvSpPr>
-          <p:nvPr>
-            <p:ph type="body" sz="half" idx="2"/>
+            <a:fld id="{5BCAD085-E8A6-8845-BD4E-CB4CCA059FC4}" type="datetimeFigureOut">
+              <a:rPr lang="en-US" smtClean="0"/>
+              <a:t>12/8/2025</a:t>
+            </a:fld>
+            <a:endParaRPr lang="en-US"/>
+          </a:p>
+        </p:txBody>
+      </p:sp>
+      <p:sp>
+        <p:nvSpPr>
+          <p:cNvPr id="6" name="Footer Placeholder 5"/>
+          <p:cNvSpPr>
+            <a:spLocks noGrp="1"/>
+          </p:cNvSpPr>
+          <p:nvPr>
+            <p:ph type="ftr" sz="quarter" idx="11"/>
           </p:nvPr>
         </p:nvSpPr>
         <p:spPr>
           <a:xfrm>
-            <a:off x="839788" y="2057400"/>
-            <a:ext cx="3932237" cy="3811588"/>
+            <a:off x="1437530" y="318641"/>
+            <a:ext cx="3251553" cy="320931"/>
           </a:xfrm>
         </p:spPr>
         <p:txBody>
           <a:bodyPr/>
-          <a:lstStyle>
-            <a:lvl1pPr marL="0" indent="0">
-              <a:buNone/>
-              <a:defRPr sz="1600"/>
-            </a:lvl1pPr>
-            <a:lvl2pPr marL="457200" indent="0">
-              <a:buNone/>
-              <a:defRPr sz="1400"/>
-            </a:lvl2pPr>
-            <a:lvl3pPr marL="914400" indent="0">
-              <a:buNone/>
-              <a:defRPr sz="1200"/>
-            </a:lvl3pPr>
-            <a:lvl4pPr marL="1371600" indent="0">
-              <a:buNone/>
-              <a:defRPr sz="1000"/>
-            </a:lvl4pPr>
-            <a:lvl5pPr marL="1828800" indent="0">
-              <a:buNone/>
-              <a:defRPr sz="1000"/>
-            </a:lvl5pPr>
-            <a:lvl6pPr marL="2286000" indent="0">
-              <a:buNone/>
-              <a:defRPr sz="1000"/>
-            </a:lvl6pPr>
-            <a:lvl7pPr marL="2743200" indent="0">
-              <a:buNone/>
-              <a:defRPr sz="1000"/>
-            </a:lvl7pPr>
-            <a:lvl8pPr marL="3200400" indent="0">
-              <a:buNone/>
-              <a:defRPr sz="1000"/>
-            </a:lvl8pPr>
-            <a:lvl9pPr marL="3657600" indent="0">
-              <a:buNone/>
-              <a:defRPr sz="1000"/>
-            </a:lvl9pPr>
-          </a:lstStyle>
-          <a:p>
-            <a:pPr lvl="0"/>
-            <a:r>
-              <a:rPr lang="zh-TW" altLang="en-US"/>
-              <a:t>按一下以編輯母片文字樣式</a:t>
-            </a:r>
-          </a:p>
-        </p:txBody>
-      </p:sp>
-      <p:sp>
-        <p:nvSpPr>
-          <p:cNvPr id="5" name="日期版面配置區 4">
-            <a:extLst>
-              <a:ext uri="{FF2B5EF4-FFF2-40B4-BE49-F238E27FC236}">
-                <a16:creationId xmlns:a16="http://schemas.microsoft.com/office/drawing/2014/main" id="{4B5E4B12-3C54-752D-F01C-AE931122E202}"/>
-              </a:ext>
-            </a:extLst>
-          </p:cNvPr>
-          <p:cNvSpPr>
-            <a:spLocks noGrp="1"/>
-          </p:cNvSpPr>
-          <p:nvPr>
-            <p:ph type="dt" sz="half" idx="10"/>
+          <a:lstStyle/>
+          <a:p>
+            <a:endParaRPr lang="en-US"/>
+          </a:p>
+        </p:txBody>
+      </p:sp>
+      <p:sp>
+        <p:nvSpPr>
+          <p:cNvPr id="7" name="Slide Number Placeholder 6"/>
+          <p:cNvSpPr>
+            <a:spLocks noGrp="1"/>
+          </p:cNvSpPr>
+          <p:nvPr>
+            <p:ph type="sldNum" sz="quarter" idx="12"/>
           </p:nvPr>
         </p:nvSpPr>
         <p:spPr/>
@@ -2667,72 +5395,49 @@
           <a:bodyPr/>
           <a:lstStyle/>
           <a:p>
-            <a:fld id="{2BB06109-5618-412E-B2EE-D2F35E34DA82}" type="datetimeFigureOut">
-              <a:rPr lang="zh-TW" altLang="en-US" smtClean="0"/>
-              <a:t>2025/11/17</a:t>
-            </a:fld>
-            <a:endParaRPr lang="zh-TW" altLang="en-US"/>
-          </a:p>
-        </p:txBody>
-      </p:sp>
-      <p:sp>
-        <p:nvSpPr>
-          <p:cNvPr id="6" name="頁尾版面配置區 5">
-            <a:extLst>
-              <a:ext uri="{FF2B5EF4-FFF2-40B4-BE49-F238E27FC236}">
-                <a16:creationId xmlns:a16="http://schemas.microsoft.com/office/drawing/2014/main" id="{BCF65ABC-2DE8-FBDD-3C67-B271234F15F9}"/>
-              </a:ext>
-            </a:extLst>
-          </p:cNvPr>
-          <p:cNvSpPr>
-            <a:spLocks noGrp="1"/>
-          </p:cNvSpPr>
-          <p:nvPr>
-            <p:ph type="ftr" sz="quarter" idx="11"/>
-          </p:nvPr>
-        </p:nvSpPr>
-        <p:spPr/>
-        <p:txBody>
-          <a:bodyPr/>
-          <a:lstStyle/>
-          <a:p>
-            <a:endParaRPr lang="zh-TW" altLang="en-US"/>
-          </a:p>
-        </p:txBody>
-      </p:sp>
-      <p:sp>
-        <p:nvSpPr>
-          <p:cNvPr id="7" name="投影片編號版面配置區 6">
-            <a:extLst>
-              <a:ext uri="{FF2B5EF4-FFF2-40B4-BE49-F238E27FC236}">
-                <a16:creationId xmlns:a16="http://schemas.microsoft.com/office/drawing/2014/main" id="{42F75C4D-692A-3B80-643A-DD015A01E2BA}"/>
-              </a:ext>
-            </a:extLst>
-          </p:cNvPr>
-          <p:cNvSpPr>
-            <a:spLocks noGrp="1"/>
-          </p:cNvSpPr>
-          <p:nvPr>
-            <p:ph type="sldNum" sz="quarter" idx="12"/>
-          </p:nvPr>
-        </p:nvSpPr>
-        <p:spPr/>
-        <p:txBody>
-          <a:bodyPr/>
-          <a:lstStyle/>
-          <a:p>
-            <a:fld id="{DC9A25D7-4362-44B0-A555-D90F9CDD7899}" type="slidenum">
-              <a:rPr lang="zh-TW" altLang="en-US" smtClean="0"/>
+            <a:fld id="{C1FF6DA9-008F-8B48-92A6-B652298478BF}" type="slidenum">
+              <a:rPr lang="en-US" smtClean="0"/>
               <a:t>‹#›</a:t>
             </a:fld>
-            <a:endParaRPr lang="zh-TW" altLang="en-US"/>
-          </a:p>
-        </p:txBody>
-      </p:sp>
+            <a:endParaRPr lang="en-US"/>
+          </a:p>
+        </p:txBody>
+      </p:sp>
+      <p:cxnSp>
+        <p:nvCxnSpPr>
+          <p:cNvPr id="31" name="Straight Connector 30"/>
+          <p:cNvCxnSpPr/>
+          <p:nvPr/>
+        </p:nvCxnSpPr>
+        <p:spPr>
+          <a:xfrm>
+            <a:off x="1441281" y="3143605"/>
+            <a:ext cx="3242014" cy="0"/>
+          </a:xfrm>
+          <a:prstGeom prst="line">
+            <a:avLst/>
+          </a:prstGeom>
+          <a:ln w="31750"/>
+        </p:spPr>
+        <p:style>
+          <a:lnRef idx="3">
+            <a:schemeClr val="accent1"/>
+          </a:lnRef>
+          <a:fillRef idx="0">
+            <a:schemeClr val="accent1"/>
+          </a:fillRef>
+          <a:effectRef idx="2">
+            <a:schemeClr val="accent1"/>
+          </a:effectRef>
+          <a:fontRef idx="minor">
+            <a:schemeClr val="tx1"/>
+          </a:fontRef>
+        </p:style>
+      </p:cxnSp>
     </p:spTree>
     <p:extLst>
       <p:ext uri="{BB962C8B-B14F-4D97-AF65-F5344CB8AC3E}">
-        <p14:creationId xmlns:p14="http://schemas.microsoft.com/office/powerpoint/2010/main" val="2453163561"/>
+        <p14:creationId xmlns:p14="http://schemas.microsoft.com/office/powerpoint/2010/main" val="2239448106"/>
       </p:ext>
     </p:extLst>
   </p:cSld>
@@ -2746,8 +5451,8 @@
 <p:sldMaster xmlns:a="http://schemas.openxmlformats.org/drawingml/2006/main" xmlns:r="http://schemas.openxmlformats.org/officeDocument/2006/relationships" xmlns:p="http://schemas.openxmlformats.org/presentationml/2006/main">
   <p:cSld>
     <p:bg>
-      <p:bgRef idx="1001">
-        <a:schemeClr val="bg1"/>
+      <p:bgRef idx="1003">
+        <a:schemeClr val="bg2"/>
       </p:bgRef>
     </p:bg>
     <p:spTree>
@@ -2766,165 +5471,265 @@
       </p:grpSpPr>
       <p:sp>
         <p:nvSpPr>
-          <p:cNvPr id="2" name="標題版面配置區 1">
+          <p:cNvPr id="10" name="Rectangle 9"/>
+          <p:cNvSpPr/>
+          <p:nvPr/>
+        </p:nvSpPr>
+        <p:spPr>
+          <a:xfrm>
+            <a:off x="0" y="2015734"/>
+            <a:ext cx="9144000" cy="4079520"/>
+          </a:xfrm>
+          <a:prstGeom prst="rect">
+            <a:avLst/>
+          </a:prstGeom>
+          <a:gradFill flip="none" rotWithShape="1">
+            <a:gsLst>
+              <a:gs pos="0">
+                <a:schemeClr val="bg2">
+                  <a:alpha val="0"/>
+                </a:schemeClr>
+              </a:gs>
+              <a:gs pos="100000">
+                <a:schemeClr val="bg2"/>
+              </a:gs>
+            </a:gsLst>
+            <a:lin ang="5400000" scaled="0"/>
+            <a:tileRect/>
+          </a:gradFill>
+          <a:ln>
+            <a:noFill/>
+          </a:ln>
+        </p:spPr>
+        <p:style>
+          <a:lnRef idx="2">
+            <a:schemeClr val="accent1">
+              <a:shade val="50000"/>
+            </a:schemeClr>
+          </a:lnRef>
+          <a:fillRef idx="1">
+            <a:schemeClr val="accent1"/>
+          </a:fillRef>
+          <a:effectRef idx="0">
+            <a:schemeClr val="accent1"/>
+          </a:effectRef>
+          <a:fontRef idx="minor">
+            <a:schemeClr val="lt1"/>
+          </a:fontRef>
+        </p:style>
+        <p:txBody>
+          <a:bodyPr/>
+          <a:lstStyle/>
+          <a:p>
+            <a:endParaRPr lang="zh-TW" altLang="en-US"/>
+          </a:p>
+        </p:txBody>
+      </p:sp>
+      <p:pic>
+        <p:nvPicPr>
+          <p:cNvPr id="12" name="Picture 11"/>
+          <p:cNvPicPr>
+            <a:picLocks noChangeAspect="1"/>
+          </p:cNvPicPr>
+          <p:nvPr/>
+        </p:nvPicPr>
+        <p:blipFill rotWithShape="1">
+          <a:blip r:embed="rId13">
             <a:extLst>
-              <a:ext uri="{FF2B5EF4-FFF2-40B4-BE49-F238E27FC236}">
-                <a16:creationId xmlns:a16="http://schemas.microsoft.com/office/drawing/2014/main" id="{88331DBB-166B-E2B8-CEE3-3AC9633E3687}"/>
+              <a:ext uri="{28A0092B-C50C-407E-A947-70E740481C1C}">
+                <a14:useLocalDpi xmlns:a14="http://schemas.microsoft.com/office/drawing/2010/main" val="0"/>
               </a:ext>
             </a:extLst>
-          </p:cNvPr>
-          <p:cNvSpPr>
-            <a:spLocks noGrp="1"/>
-          </p:cNvSpPr>
-          <p:nvPr>
-            <p:ph type="title"/>
-          </p:nvPr>
-        </p:nvSpPr>
+          </a:blip>
+          <a:srcRect l="12500" t="1538" r="12500" b="-1538"/>
+          <a:stretch/>
+        </p:blipFill>
         <p:spPr>
           <a:xfrm>
-            <a:off x="838200" y="365125"/>
-            <a:ext cx="10515600" cy="1325563"/>
+            <a:off x="-1" y="6095253"/>
+            <a:ext cx="9144001" cy="774727"/>
           </a:xfrm>
           <a:prstGeom prst="rect">
             <a:avLst/>
           </a:prstGeom>
         </p:spPr>
-        <p:txBody>
-          <a:bodyPr vert="horz" lIns="91440" tIns="45720" rIns="91440" bIns="45720" rtlCol="0" anchor="ctr">
-            <a:normAutofit/>
-          </a:bodyPr>
-          <a:lstStyle/>
-          <a:p>
-            <a:r>
-              <a:rPr lang="zh-TW" altLang="en-US"/>
-              <a:t>按一下以編輯母片標題樣式</a:t>
-            </a:r>
-          </a:p>
-        </p:txBody>
-      </p:sp>
-      <p:sp>
-        <p:nvSpPr>
-          <p:cNvPr id="3" name="文字版面配置區 2">
-            <a:extLst>
-              <a:ext uri="{FF2B5EF4-FFF2-40B4-BE49-F238E27FC236}">
-                <a16:creationId xmlns:a16="http://schemas.microsoft.com/office/drawing/2014/main" id="{88431F3D-70B0-E0CF-5609-FF2688358DEE}"/>
-              </a:ext>
-            </a:extLst>
-          </p:cNvPr>
-          <p:cNvSpPr>
-            <a:spLocks noGrp="1"/>
-          </p:cNvSpPr>
-          <p:nvPr>
-            <p:ph type="body" idx="1"/>
-          </p:nvPr>
-        </p:nvSpPr>
+      </p:pic>
+      <p:cxnSp>
+        <p:nvCxnSpPr>
+          <p:cNvPr id="13" name="Straight Connector 12"/>
+          <p:cNvCxnSpPr/>
+          <p:nvPr/>
+        </p:nvCxnSpPr>
         <p:spPr>
           <a:xfrm>
-            <a:off x="838200" y="1825625"/>
-            <a:ext cx="10515600" cy="4351338"/>
+            <a:off x="0" y="6101127"/>
+            <a:ext cx="9144000" cy="0"/>
+          </a:xfrm>
+          <a:prstGeom prst="line">
+            <a:avLst/>
+          </a:prstGeom>
+          <a:ln w="12700">
+            <a:solidFill>
+              <a:srgbClr val="000001">
+                <a:alpha val="20000"/>
+              </a:srgbClr>
+            </a:solidFill>
+          </a:ln>
+        </p:spPr>
+        <p:style>
+          <a:lnRef idx="1">
+            <a:schemeClr val="accent1"/>
+          </a:lnRef>
+          <a:fillRef idx="0">
+            <a:schemeClr val="accent1"/>
+          </a:fillRef>
+          <a:effectRef idx="0">
+            <a:schemeClr val="accent1"/>
+          </a:effectRef>
+          <a:fontRef idx="minor">
+            <a:schemeClr val="tx1"/>
+          </a:fontRef>
+        </p:style>
+      </p:cxnSp>
+      <p:sp>
+        <p:nvSpPr>
+          <p:cNvPr id="2" name="Title Placeholder 1"/>
+          <p:cNvSpPr>
+            <a:spLocks noGrp="1"/>
+          </p:cNvSpPr>
+          <p:nvPr>
+            <p:ph type="title"/>
+          </p:nvPr>
+        </p:nvSpPr>
+        <p:spPr>
+          <a:xfrm>
+            <a:off x="1443491" y="804520"/>
+            <a:ext cx="6571343" cy="1049235"/>
           </a:xfrm>
           <a:prstGeom prst="rect">
             <a:avLst/>
           </a:prstGeom>
         </p:spPr>
         <p:txBody>
-          <a:bodyPr vert="horz" lIns="91440" tIns="45720" rIns="91440" bIns="45720" rtlCol="0">
+          <a:bodyPr vert="horz" lIns="91440" tIns="45720" rIns="91440" bIns="45720" rtlCol="0" anchor="t">
             <a:normAutofit/>
           </a:bodyPr>
           <a:lstStyle/>
           <a:p>
-            <a:pPr lvl="0"/>
             <a:r>
               <a:rPr lang="zh-TW" altLang="en-US"/>
-              <a:t>按一下以編輯母片文字樣式</a:t>
-            </a:r>
-          </a:p>
-          <a:p>
-            <a:pPr lvl="1"/>
-            <a:r>
-              <a:rPr lang="zh-TW" altLang="en-US"/>
-              <a:t>第二層</a:t>
-            </a:r>
-          </a:p>
-          <a:p>
-            <a:pPr lvl="2"/>
-            <a:r>
-              <a:rPr lang="zh-TW" altLang="en-US"/>
-              <a:t>第三層</a:t>
-            </a:r>
-          </a:p>
-          <a:p>
-            <a:pPr lvl="3"/>
-            <a:r>
-              <a:rPr lang="zh-TW" altLang="en-US"/>
-              <a:t>第四層</a:t>
-            </a:r>
-          </a:p>
-          <a:p>
-            <a:pPr lvl="4"/>
-            <a:r>
-              <a:rPr lang="zh-TW" altLang="en-US"/>
-              <a:t>第五層</a:t>
-            </a:r>
-          </a:p>
-        </p:txBody>
-      </p:sp>
-      <p:sp>
-        <p:nvSpPr>
-          <p:cNvPr id="4" name="日期版面配置區 3">
-            <a:extLst>
-              <a:ext uri="{FF2B5EF4-FFF2-40B4-BE49-F238E27FC236}">
-                <a16:creationId xmlns:a16="http://schemas.microsoft.com/office/drawing/2014/main" id="{9F5B78AC-0C45-E9D1-C51A-AE852D0DAD72}"/>
-              </a:ext>
-            </a:extLst>
-          </p:cNvPr>
-          <p:cNvSpPr>
-            <a:spLocks noGrp="1"/>
-          </p:cNvSpPr>
-          <p:nvPr>
-            <p:ph type="dt" sz="half" idx="2"/>
+              <a:t>按一下以編輯母片標題樣式</a:t>
+            </a:r>
+            <a:endParaRPr lang="en-US" dirty="0"/>
+          </a:p>
+        </p:txBody>
+      </p:sp>
+      <p:sp>
+        <p:nvSpPr>
+          <p:cNvPr id="3" name="Text Placeholder 2"/>
+          <p:cNvSpPr>
+            <a:spLocks noGrp="1"/>
+          </p:cNvSpPr>
+          <p:nvPr>
+            <p:ph type="body" idx="1"/>
           </p:nvPr>
         </p:nvSpPr>
         <p:spPr>
           <a:xfrm>
-            <a:off x="838200" y="6356350"/>
-            <a:ext cx="2743200" cy="365125"/>
+            <a:off x="1443491" y="2015733"/>
+            <a:ext cx="6571343" cy="3450613"/>
           </a:xfrm>
           <a:prstGeom prst="rect">
             <a:avLst/>
           </a:prstGeom>
         </p:spPr>
         <p:txBody>
+          <a:bodyPr vert="horz" lIns="91440" tIns="45720" rIns="91440" bIns="45720" rtlCol="0">
+            <a:normAutofit/>
+          </a:bodyPr>
+          <a:lstStyle/>
+          <a:p>
+            <a:pPr lvl="0"/>
+            <a:r>
+              <a:rPr lang="zh-TW" altLang="en-US"/>
+              <a:t>按一下以編輯母片文字樣式</a:t>
+            </a:r>
+          </a:p>
+          <a:p>
+            <a:pPr lvl="1"/>
+            <a:r>
+              <a:rPr lang="zh-TW" altLang="en-US"/>
+              <a:t>第二層</a:t>
+            </a:r>
+          </a:p>
+          <a:p>
+            <a:pPr lvl="2"/>
+            <a:r>
+              <a:rPr lang="zh-TW" altLang="en-US"/>
+              <a:t>第三層</a:t>
+            </a:r>
+          </a:p>
+          <a:p>
+            <a:pPr lvl="3"/>
+            <a:r>
+              <a:rPr lang="zh-TW" altLang="en-US"/>
+              <a:t>第四層</a:t>
+            </a:r>
+          </a:p>
+          <a:p>
+            <a:pPr lvl="4"/>
+            <a:r>
+              <a:rPr lang="zh-TW" altLang="en-US"/>
+              <a:t>第五層</a:t>
+            </a:r>
+            <a:endParaRPr lang="en-US" dirty="0"/>
+          </a:p>
+        </p:txBody>
+      </p:sp>
+      <p:sp>
+        <p:nvSpPr>
+          <p:cNvPr id="4" name="Date Placeholder 3"/>
+          <p:cNvSpPr>
+            <a:spLocks noGrp="1"/>
+          </p:cNvSpPr>
+          <p:nvPr>
+            <p:ph type="dt" sz="half" idx="2"/>
+          </p:nvPr>
+        </p:nvSpPr>
+        <p:spPr>
+          <a:xfrm>
+            <a:off x="5646542" y="330370"/>
+            <a:ext cx="2368292" cy="309201"/>
+          </a:xfrm>
+          <a:prstGeom prst="rect">
+            <a:avLst/>
+          </a:prstGeom>
+        </p:spPr>
+        <p:txBody>
           <a:bodyPr vert="horz" lIns="91440" tIns="45720" rIns="91440" bIns="45720" rtlCol="0" anchor="ctr"/>
           <a:lstStyle>
-            <a:lvl1pPr algn="l">
-              <a:defRPr sz="1200">
+            <a:lvl1pPr algn="r">
+              <a:defRPr sz="1000">
                 <a:solidFill>
                   <a:schemeClr val="tx1">
-                    <a:tint val="82000"/>
+                    <a:tint val="75000"/>
                   </a:schemeClr>
                 </a:solidFill>
               </a:defRPr>
             </a:lvl1pPr>
           </a:lstStyle>
           <a:p>
-            <a:fld id="{2BB06109-5618-412E-B2EE-D2F35E34DA82}" type="datetimeFigureOut">
-              <a:rPr lang="zh-TW" altLang="en-US" smtClean="0"/>
-              <a:t>2025/11/17</a:t>
+            <a:fld id="{5BCAD085-E8A6-8845-BD4E-CB4CCA059FC4}" type="datetimeFigureOut">
+              <a:rPr lang="en-US" smtClean="0"/>
+              <a:t>12/8/2025</a:t>
             </a:fld>
-            <a:endParaRPr lang="zh-TW" altLang="en-US"/>
-          </a:p>
-        </p:txBody>
-      </p:sp>
-      <p:sp>
-        <p:nvSpPr>
-          <p:cNvPr id="5" name="頁尾版面配置區 4">
-            <a:extLst>
-              <a:ext uri="{FF2B5EF4-FFF2-40B4-BE49-F238E27FC236}">
-                <a16:creationId xmlns:a16="http://schemas.microsoft.com/office/drawing/2014/main" id="{E2330173-91FE-D095-27F1-32971FFA82BC}"/>
-              </a:ext>
-            </a:extLst>
-          </p:cNvPr>
+            <a:endParaRPr lang="en-US"/>
+          </a:p>
+        </p:txBody>
+      </p:sp>
+      <p:sp>
+        <p:nvSpPr>
+          <p:cNvPr id="5" name="Footer Placeholder 4"/>
           <p:cNvSpPr>
             <a:spLocks noGrp="1"/>
           </p:cNvSpPr>
@@ -2934,8 +5739,8 @@
         </p:nvSpPr>
         <p:spPr>
           <a:xfrm>
-            <a:off x="4038600" y="6356350"/>
-            <a:ext cx="4114800" cy="365125"/>
+            <a:off x="1443491" y="329308"/>
+            <a:ext cx="4034004" cy="309201"/>
           </a:xfrm>
           <a:prstGeom prst="rect">
             <a:avLst/>
@@ -2944,30 +5749,24 @@
         <p:txBody>
           <a:bodyPr vert="horz" lIns="91440" tIns="45720" rIns="91440" bIns="45720" rtlCol="0" anchor="ctr"/>
           <a:lstStyle>
-            <a:lvl1pPr algn="ctr">
-              <a:defRPr sz="1200">
+            <a:lvl1pPr algn="l">
+              <a:defRPr sz="1000">
                 <a:solidFill>
                   <a:schemeClr val="tx1">
-                    <a:tint val="82000"/>
+                    <a:tint val="75000"/>
                   </a:schemeClr>
                 </a:solidFill>
               </a:defRPr>
             </a:lvl1pPr>
           </a:lstStyle>
           <a:p>
-            <a:endParaRPr lang="zh-TW" altLang="en-US"/>
-          </a:p>
-        </p:txBody>
-      </p:sp>
-      <p:sp>
-        <p:nvSpPr>
-          <p:cNvPr id="6" name="投影片編號版面配置區 5">
-            <a:extLst>
-              <a:ext uri="{FF2B5EF4-FFF2-40B4-BE49-F238E27FC236}">
-                <a16:creationId xmlns:a16="http://schemas.microsoft.com/office/drawing/2014/main" id="{BF57F850-6B94-97BD-1386-EB6258909870}"/>
-              </a:ext>
-            </a:extLst>
-          </p:cNvPr>
+            <a:endParaRPr lang="en-US"/>
+          </a:p>
+        </p:txBody>
+      </p:sp>
+      <p:sp>
+        <p:nvSpPr>
+          <p:cNvPr id="6" name="Slide Number Placeholder 5"/>
           <p:cNvSpPr>
             <a:spLocks noGrp="1"/>
           </p:cNvSpPr>
@@ -2977,59 +5776,57 @@
         </p:nvSpPr>
         <p:spPr>
           <a:xfrm>
-            <a:off x="8610600" y="6356350"/>
-            <a:ext cx="2743200" cy="365125"/>
+            <a:off x="487725" y="798973"/>
+            <a:ext cx="795746" cy="503578"/>
           </a:xfrm>
           <a:prstGeom prst="rect">
             <a:avLst/>
           </a:prstGeom>
         </p:spPr>
         <p:txBody>
-          <a:bodyPr vert="horz" lIns="91440" tIns="45720" rIns="91440" bIns="45720" rtlCol="0" anchor="ctr"/>
+          <a:bodyPr vert="horz" lIns="91440" tIns="45720" rIns="91440" bIns="45720" rtlCol="0" anchor="t"/>
           <a:lstStyle>
             <a:lvl1pPr algn="r">
-              <a:defRPr sz="1200">
+              <a:defRPr sz="2800">
                 <a:solidFill>
-                  <a:schemeClr val="tx1">
-                    <a:tint val="82000"/>
-                  </a:schemeClr>
+                  <a:schemeClr val="accent1"/>
                 </a:solidFill>
               </a:defRPr>
             </a:lvl1pPr>
           </a:lstStyle>
           <a:p>
-            <a:fld id="{DC9A25D7-4362-44B0-A555-D90F9CDD7899}" type="slidenum">
-              <a:rPr lang="zh-TW" altLang="en-US" smtClean="0"/>
+            <a:fld id="{C1FF6DA9-008F-8B48-92A6-B652298478BF}" type="slidenum">
+              <a:rPr lang="en-US" smtClean="0"/>
               <a:t>‹#›</a:t>
             </a:fld>
-            <a:endParaRPr lang="zh-TW" altLang="en-US"/>
+            <a:endParaRPr lang="en-US"/>
           </a:p>
         </p:txBody>
       </p:sp>
     </p:spTree>
     <p:extLst>
       <p:ext uri="{BB962C8B-B14F-4D97-AF65-F5344CB8AC3E}">
-        <p14:creationId xmlns:p14="http://schemas.microsoft.com/office/powerpoint/2010/main" val="4154776863"/>
+        <p14:creationId xmlns:p14="http://schemas.microsoft.com/office/powerpoint/2010/main" val="2745124322"/>
       </p:ext>
     </p:extLst>
   </p:cSld>
   <p:clrMap bg1="lt1" tx1="dk1" bg2="lt2" tx2="dk2" accent1="accent1" accent2="accent2" accent3="accent3" accent4="accent4" accent5="accent5" accent6="accent6" hlink="hlink" folHlink="folHlink"/>
   <p:sldLayoutIdLst>
-    <p:sldLayoutId id="2147483649" r:id="rId1"/>
-    <p:sldLayoutId id="2147483650" r:id="rId2"/>
-    <p:sldLayoutId id="2147483651" r:id="rId3"/>
-    <p:sldLayoutId id="2147483652" r:id="rId4"/>
-    <p:sldLayoutId id="2147483653" r:id="rId5"/>
-    <p:sldLayoutId id="2147483654" r:id="rId6"/>
-    <p:sldLayoutId id="2147483655" r:id="rId7"/>
-    <p:sldLayoutId id="2147483656" r:id="rId8"/>
-    <p:sldLayoutId id="2147483657" r:id="rId9"/>
-    <p:sldLayoutId id="2147483658" r:id="rId10"/>
-    <p:sldLayoutId id="2147483659" r:id="rId11"/>
+    <p:sldLayoutId id="2147483792" r:id="rId1"/>
+    <p:sldLayoutId id="2147483793" r:id="rId2"/>
+    <p:sldLayoutId id="2147483794" r:id="rId3"/>
+    <p:sldLayoutId id="2147483795" r:id="rId4"/>
+    <p:sldLayoutId id="2147483796" r:id="rId5"/>
+    <p:sldLayoutId id="2147483797" r:id="rId6"/>
+    <p:sldLayoutId id="2147483798" r:id="rId7"/>
+    <p:sldLayoutId id="2147483799" r:id="rId8"/>
+    <p:sldLayoutId id="2147483800" r:id="rId9"/>
+    <p:sldLayoutId id="2147483801" r:id="rId10"/>
+    <p:sldLayoutId id="2147483802" r:id="rId11"/>
   </p:sldLayoutIdLst>
   <p:txStyles>
     <p:titleStyle>
-      <a:lvl1pPr algn="l" defTabSz="914400" rtl="0" eaLnBrk="1" latinLnBrk="0" hangingPunct="1">
+      <a:lvl1pPr algn="l" defTabSz="685800" rtl="0" eaLnBrk="1" latinLnBrk="0" hangingPunct="1">
         <a:lnSpc>
           <a:spcPct val="90000"/>
         </a:lnSpc>
@@ -3037,10 +5834,11 @@
           <a:spcPct val="0"/>
         </a:spcBef>
         <a:buNone/>
-        <a:defRPr sz="4400" kern="1200">
+        <a:defRPr sz="3200" b="0" i="0" kern="1200" cap="all">
           <a:solidFill>
             <a:schemeClr val="tx1"/>
           </a:solidFill>
+          <a:effectLst/>
           <a:latin typeface="+mj-lt"/>
           <a:ea typeface="+mj-ea"/>
           <a:cs typeface="+mj-cs"/>
@@ -3048,16 +5846,220 @@
       </a:lvl1pPr>
     </p:titleStyle>
     <p:bodyStyle>
-      <a:lvl1pPr marL="228600" indent="-228600" algn="l" defTabSz="914400" rtl="0" eaLnBrk="1" latinLnBrk="0" hangingPunct="1">
+      <a:lvl1pPr marL="228600" indent="-228600" algn="l" defTabSz="685800" rtl="0" eaLnBrk="1" latinLnBrk="0" hangingPunct="1">
         <a:lnSpc>
-          <a:spcPct val="90000"/>
+          <a:spcPct val="120000"/>
         </a:lnSpc>
         <a:spcBef>
           <a:spcPts val="1000"/>
         </a:spcBef>
+        <a:buClr>
+          <a:schemeClr val="accent1"/>
+        </a:buClr>
+        <a:buSzPct val="100000"/>
         <a:buFont typeface="Arial" panose="020B0604020202020204" pitchFamily="34" charset="0"/>
         <a:buChar char="•"/>
-        <a:defRPr sz="2800" kern="1200">
+        <a:defRPr sz="2000" kern="1200" cap="none">
+          <a:solidFill>
+            <a:schemeClr val="tx1"/>
+          </a:solidFill>
+          <a:effectLst/>
+          <a:latin typeface="+mn-lt"/>
+          <a:ea typeface="+mn-ea"/>
+          <a:cs typeface="+mn-cs"/>
+        </a:defRPr>
+      </a:lvl1pPr>
+      <a:lvl2pPr marL="685800" indent="-228600" algn="l" defTabSz="685800" rtl="0" eaLnBrk="1" latinLnBrk="0" hangingPunct="1">
+        <a:lnSpc>
+          <a:spcPct val="120000"/>
+        </a:lnSpc>
+        <a:spcBef>
+          <a:spcPts val="500"/>
+        </a:spcBef>
+        <a:buClr>
+          <a:schemeClr val="accent1"/>
+        </a:buClr>
+        <a:buSzPct val="100000"/>
+        <a:buFont typeface="Arial" panose="020B0604020202020204" pitchFamily="34" charset="0"/>
+        <a:buChar char="•"/>
+        <a:defRPr sz="1600" kern="1200" cap="none" baseline="0">
+          <a:solidFill>
+            <a:schemeClr val="tx1"/>
+          </a:solidFill>
+          <a:effectLst/>
+          <a:latin typeface="+mn-lt"/>
+          <a:ea typeface="+mn-ea"/>
+          <a:cs typeface="+mn-cs"/>
+        </a:defRPr>
+      </a:lvl2pPr>
+      <a:lvl3pPr marL="1143000" indent="-228600" algn="l" defTabSz="685800" rtl="0" eaLnBrk="1" latinLnBrk="0" hangingPunct="1">
+        <a:lnSpc>
+          <a:spcPct val="120000"/>
+        </a:lnSpc>
+        <a:spcBef>
+          <a:spcPts val="500"/>
+        </a:spcBef>
+        <a:buClr>
+          <a:schemeClr val="accent1"/>
+        </a:buClr>
+        <a:buSzPct val="100000"/>
+        <a:buFont typeface="Arial" panose="020B0604020202020204" pitchFamily="34" charset="0"/>
+        <a:buChar char="•"/>
+        <a:defRPr sz="1600" kern="1200" cap="none">
+          <a:solidFill>
+            <a:schemeClr val="tx1"/>
+          </a:solidFill>
+          <a:effectLst/>
+          <a:latin typeface="+mn-lt"/>
+          <a:ea typeface="+mn-ea"/>
+          <a:cs typeface="+mn-cs"/>
+        </a:defRPr>
+      </a:lvl3pPr>
+      <a:lvl4pPr marL="1600200" indent="-228600" algn="l" defTabSz="685800" rtl="0" eaLnBrk="1" latinLnBrk="0" hangingPunct="1">
+        <a:lnSpc>
+          <a:spcPct val="120000"/>
+        </a:lnSpc>
+        <a:spcBef>
+          <a:spcPts val="500"/>
+        </a:spcBef>
+        <a:buClr>
+          <a:schemeClr val="accent1"/>
+        </a:buClr>
+        <a:buSzPct val="100000"/>
+        <a:buFont typeface="Arial" panose="020B0604020202020204" pitchFamily="34" charset="0"/>
+        <a:buChar char="•"/>
+        <a:defRPr sz="1400" kern="1200" cap="none" baseline="0">
+          <a:solidFill>
+            <a:schemeClr val="tx1"/>
+          </a:solidFill>
+          <a:effectLst/>
+          <a:latin typeface="+mn-lt"/>
+          <a:ea typeface="+mn-ea"/>
+          <a:cs typeface="+mn-cs"/>
+        </a:defRPr>
+      </a:lvl4pPr>
+      <a:lvl5pPr marL="2057400" indent="-228600" algn="l" defTabSz="685800" rtl="0" eaLnBrk="1" latinLnBrk="0" hangingPunct="1">
+        <a:lnSpc>
+          <a:spcPct val="120000"/>
+        </a:lnSpc>
+        <a:spcBef>
+          <a:spcPts val="500"/>
+        </a:spcBef>
+        <a:buClr>
+          <a:schemeClr val="accent1"/>
+        </a:buClr>
+        <a:buSzPct val="100000"/>
+        <a:buFont typeface="Arial" panose="020B0604020202020204" pitchFamily="34" charset="0"/>
+        <a:buChar char="•"/>
+        <a:defRPr sz="1200" kern="1200" cap="none">
+          <a:solidFill>
+            <a:schemeClr val="tx1"/>
+          </a:solidFill>
+          <a:effectLst/>
+          <a:latin typeface="+mn-lt"/>
+          <a:ea typeface="+mn-ea"/>
+          <a:cs typeface="+mn-cs"/>
+        </a:defRPr>
+      </a:lvl5pPr>
+      <a:lvl6pPr marL="2514600" indent="-228600" algn="l" defTabSz="914400" rtl="0" eaLnBrk="1" latinLnBrk="0" hangingPunct="1">
+        <a:lnSpc>
+          <a:spcPct val="120000"/>
+        </a:lnSpc>
+        <a:spcBef>
+          <a:spcPts val="500"/>
+        </a:spcBef>
+        <a:buClr>
+          <a:schemeClr val="accent1"/>
+        </a:buClr>
+        <a:buSzPct val="100000"/>
+        <a:buFont typeface="Arial" panose="020B0604020202020204" pitchFamily="34" charset="0"/>
+        <a:buChar char="•"/>
+        <a:defRPr sz="1200" kern="1200">
+          <a:solidFill>
+            <a:schemeClr val="tx1"/>
+          </a:solidFill>
+          <a:effectLst/>
+          <a:latin typeface="+mn-lt"/>
+          <a:ea typeface="+mn-ea"/>
+          <a:cs typeface="+mn-cs"/>
+        </a:defRPr>
+      </a:lvl6pPr>
+      <a:lvl7pPr marL="2971800" indent="-228600" algn="l" defTabSz="914400" rtl="0" eaLnBrk="1" latinLnBrk="0" hangingPunct="1">
+        <a:lnSpc>
+          <a:spcPct val="120000"/>
+        </a:lnSpc>
+        <a:spcBef>
+          <a:spcPts val="500"/>
+        </a:spcBef>
+        <a:buClr>
+          <a:schemeClr val="accent1"/>
+        </a:buClr>
+        <a:buSzPct val="100000"/>
+        <a:buFont typeface="Arial" panose="020B0604020202020204" pitchFamily="34" charset="0"/>
+        <a:buChar char="•"/>
+        <a:defRPr sz="1200" kern="1200">
+          <a:solidFill>
+            <a:schemeClr val="tx1"/>
+          </a:solidFill>
+          <a:effectLst/>
+          <a:latin typeface="+mn-lt"/>
+          <a:ea typeface="+mn-ea"/>
+          <a:cs typeface="+mn-cs"/>
+        </a:defRPr>
+      </a:lvl7pPr>
+      <a:lvl8pPr marL="3429000" indent="-228600" algn="l" defTabSz="914400" rtl="0" eaLnBrk="1" latinLnBrk="0" hangingPunct="1">
+        <a:lnSpc>
+          <a:spcPct val="120000"/>
+        </a:lnSpc>
+        <a:spcBef>
+          <a:spcPts val="500"/>
+        </a:spcBef>
+        <a:buClr>
+          <a:schemeClr val="accent1"/>
+        </a:buClr>
+        <a:buSzPct val="100000"/>
+        <a:buFont typeface="Arial" panose="020B0604020202020204" pitchFamily="34" charset="0"/>
+        <a:buChar char="•"/>
+        <a:defRPr sz="1200" kern="1200" baseline="0">
+          <a:solidFill>
+            <a:schemeClr val="tx1"/>
+          </a:solidFill>
+          <a:effectLst/>
+          <a:latin typeface="+mn-lt"/>
+          <a:ea typeface="+mn-ea"/>
+          <a:cs typeface="+mn-cs"/>
+        </a:defRPr>
+      </a:lvl8pPr>
+      <a:lvl9pPr marL="3886200" indent="-228600" algn="l" defTabSz="914400" rtl="0" eaLnBrk="1" latinLnBrk="0" hangingPunct="1">
+        <a:lnSpc>
+          <a:spcPct val="120000"/>
+        </a:lnSpc>
+        <a:spcBef>
+          <a:spcPts val="500"/>
+        </a:spcBef>
+        <a:buClr>
+          <a:schemeClr val="accent1"/>
+        </a:buClr>
+        <a:buSzPct val="100000"/>
+        <a:buFont typeface="Arial" panose="020B0604020202020204" pitchFamily="34" charset="0"/>
+        <a:buChar char="•"/>
+        <a:defRPr sz="1200" kern="1200" baseline="0">
+          <a:solidFill>
+            <a:schemeClr val="tx1"/>
+          </a:solidFill>
+          <a:effectLst/>
+          <a:latin typeface="+mn-lt"/>
+          <a:ea typeface="+mn-ea"/>
+          <a:cs typeface="+mn-cs"/>
+        </a:defRPr>
+      </a:lvl9pPr>
+    </p:bodyStyle>
+    <p:otherStyle>
+      <a:defPPr>
+        <a:defRPr lang="en-US"/>
+      </a:defPPr>
+      <a:lvl1pPr marL="0" algn="l" defTabSz="685800" rtl="0" eaLnBrk="1" latinLnBrk="0" hangingPunct="1">
+        <a:defRPr sz="1350" kern="1200">
           <a:solidFill>
             <a:schemeClr val="tx1"/>
           </a:solidFill>
@@ -3066,16 +6068,8 @@
           <a:cs typeface="+mn-cs"/>
         </a:defRPr>
       </a:lvl1pPr>
-      <a:lvl2pPr marL="685800" indent="-228600" algn="l" defTabSz="914400" rtl="0" eaLnBrk="1" latinLnBrk="0" hangingPunct="1">
-        <a:lnSpc>
-          <a:spcPct val="90000"/>
-        </a:lnSpc>
-        <a:spcBef>
-          <a:spcPts val="500"/>
-        </a:spcBef>
-        <a:buFont typeface="Arial" panose="020B0604020202020204" pitchFamily="34" charset="0"/>
-        <a:buChar char="•"/>
-        <a:defRPr sz="2400" kern="1200">
+      <a:lvl2pPr marL="342900" algn="l" defTabSz="685800" rtl="0" eaLnBrk="1" latinLnBrk="0" hangingPunct="1">
+        <a:defRPr sz="1350" kern="1200">
           <a:solidFill>
             <a:schemeClr val="tx1"/>
           </a:solidFill>
@@ -3084,16 +6078,8 @@
           <a:cs typeface="+mn-cs"/>
         </a:defRPr>
       </a:lvl2pPr>
-      <a:lvl3pPr marL="1143000" indent="-228600" algn="l" defTabSz="914400" rtl="0" eaLnBrk="1" latinLnBrk="0" hangingPunct="1">
-        <a:lnSpc>
-          <a:spcPct val="90000"/>
-        </a:lnSpc>
-        <a:spcBef>
-          <a:spcPts val="500"/>
-        </a:spcBef>
-        <a:buFont typeface="Arial" panose="020B0604020202020204" pitchFamily="34" charset="0"/>
-        <a:buChar char="•"/>
-        <a:defRPr sz="2000" kern="1200">
+      <a:lvl3pPr marL="685800" algn="l" defTabSz="685800" rtl="0" eaLnBrk="1" latinLnBrk="0" hangingPunct="1">
+        <a:defRPr sz="1350" kern="1200">
           <a:solidFill>
             <a:schemeClr val="tx1"/>
           </a:solidFill>
@@ -3102,16 +6088,8 @@
           <a:cs typeface="+mn-cs"/>
         </a:defRPr>
       </a:lvl3pPr>
-      <a:lvl4pPr marL="1600200" indent="-228600" algn="l" defTabSz="914400" rtl="0" eaLnBrk="1" latinLnBrk="0" hangingPunct="1">
-        <a:lnSpc>
-          <a:spcPct val="90000"/>
-        </a:lnSpc>
-        <a:spcBef>
-          <a:spcPts val="500"/>
-        </a:spcBef>
-        <a:buFont typeface="Arial" panose="020B0604020202020204" pitchFamily="34" charset="0"/>
-        <a:buChar char="•"/>
-        <a:defRPr sz="1800" kern="1200">
+      <a:lvl4pPr marL="1028700" algn="l" defTabSz="685800" rtl="0" eaLnBrk="1" latinLnBrk="0" hangingPunct="1">
+        <a:defRPr sz="1350" kern="1200">
           <a:solidFill>
             <a:schemeClr val="tx1"/>
           </a:solidFill>
@@ -3120,16 +6098,8 @@
           <a:cs typeface="+mn-cs"/>
         </a:defRPr>
       </a:lvl4pPr>
-      <a:lvl5pPr marL="2057400" indent="-228600" algn="l" defTabSz="914400" rtl="0" eaLnBrk="1" latinLnBrk="0" hangingPunct="1">
-        <a:lnSpc>
-          <a:spcPct val="90000"/>
-        </a:lnSpc>
-        <a:spcBef>
-          <a:spcPts val="500"/>
-        </a:spcBef>
-        <a:buFont typeface="Arial" panose="020B0604020202020204" pitchFamily="34" charset="0"/>
-        <a:buChar char="•"/>
-        <a:defRPr sz="1800" kern="1200">
+      <a:lvl5pPr marL="1371600" algn="l" defTabSz="685800" rtl="0" eaLnBrk="1" latinLnBrk="0" hangingPunct="1">
+        <a:defRPr sz="1350" kern="1200">
           <a:solidFill>
             <a:schemeClr val="tx1"/>
           </a:solidFill>
@@ -3138,16 +6108,8 @@
           <a:cs typeface="+mn-cs"/>
         </a:defRPr>
       </a:lvl5pPr>
-      <a:lvl6pPr marL="2514600" indent="-228600" algn="l" defTabSz="914400" rtl="0" eaLnBrk="1" latinLnBrk="0" hangingPunct="1">
-        <a:lnSpc>
-          <a:spcPct val="90000"/>
-        </a:lnSpc>
-        <a:spcBef>
-          <a:spcPts val="500"/>
-        </a:spcBef>
-        <a:buFont typeface="Arial" panose="020B0604020202020204" pitchFamily="34" charset="0"/>
-        <a:buChar char="•"/>
-        <a:defRPr sz="1800" kern="1200">
+      <a:lvl6pPr marL="1714500" algn="l" defTabSz="685800" rtl="0" eaLnBrk="1" latinLnBrk="0" hangingPunct="1">
+        <a:defRPr sz="1350" kern="1200">
           <a:solidFill>
             <a:schemeClr val="tx1"/>
           </a:solidFill>
@@ -3156,16 +6118,8 @@
           <a:cs typeface="+mn-cs"/>
         </a:defRPr>
       </a:lvl6pPr>
-      <a:lvl7pPr marL="2971800" indent="-228600" algn="l" defTabSz="914400" rtl="0" eaLnBrk="1" latinLnBrk="0" hangingPunct="1">
-        <a:lnSpc>
-          <a:spcPct val="90000"/>
-        </a:lnSpc>
-        <a:spcBef>
-          <a:spcPts val="500"/>
-        </a:spcBef>
-        <a:buFont typeface="Arial" panose="020B0604020202020204" pitchFamily="34" charset="0"/>
-        <a:buChar char="•"/>
-        <a:defRPr sz="1800" kern="1200">
+      <a:lvl7pPr marL="2057400" algn="l" defTabSz="685800" rtl="0" eaLnBrk="1" latinLnBrk="0" hangingPunct="1">
+        <a:defRPr sz="1350" kern="1200">
           <a:solidFill>
             <a:schemeClr val="tx1"/>
           </a:solidFill>
@@ -3174,16 +6128,8 @@
           <a:cs typeface="+mn-cs"/>
         </a:defRPr>
       </a:lvl7pPr>
-      <a:lvl8pPr marL="3429000" indent="-228600" algn="l" defTabSz="914400" rtl="0" eaLnBrk="1" latinLnBrk="0" hangingPunct="1">
-        <a:lnSpc>
-          <a:spcPct val="90000"/>
-        </a:lnSpc>
-        <a:spcBef>
-          <a:spcPts val="500"/>
-        </a:spcBef>
-        <a:buFont typeface="Arial" panose="020B0604020202020204" pitchFamily="34" charset="0"/>
-        <a:buChar char="•"/>
-        <a:defRPr sz="1800" kern="1200">
+      <a:lvl8pPr marL="2400300" algn="l" defTabSz="685800" rtl="0" eaLnBrk="1" latinLnBrk="0" hangingPunct="1">
+        <a:defRPr sz="1350" kern="1200">
           <a:solidFill>
             <a:schemeClr val="tx1"/>
           </a:solidFill>
@@ -3192,111 +6138,8 @@
           <a:cs typeface="+mn-cs"/>
         </a:defRPr>
       </a:lvl8pPr>
-      <a:lvl9pPr marL="3886200" indent="-228600" algn="l" defTabSz="914400" rtl="0" eaLnBrk="1" latinLnBrk="0" hangingPunct="1">
-        <a:lnSpc>
-          <a:spcPct val="90000"/>
-        </a:lnSpc>
-        <a:spcBef>
-          <a:spcPts val="500"/>
-        </a:spcBef>
-        <a:buFont typeface="Arial" panose="020B0604020202020204" pitchFamily="34" charset="0"/>
-        <a:buChar char="•"/>
-        <a:defRPr sz="1800" kern="1200">
-          <a:solidFill>
-            <a:schemeClr val="tx1"/>
-          </a:solidFill>
-          <a:latin typeface="+mn-lt"/>
-          <a:ea typeface="+mn-ea"/>
-          <a:cs typeface="+mn-cs"/>
-        </a:defRPr>
-      </a:lvl9pPr>
-    </p:bodyStyle>
-    <p:otherStyle>
-      <a:defPPr>
-        <a:defRPr lang="zh-TW"/>
-      </a:defPPr>
-      <a:lvl1pPr marL="0" algn="l" defTabSz="914400" rtl="0" eaLnBrk="1" latinLnBrk="0" hangingPunct="1">
-        <a:defRPr sz="1800" kern="1200">
-          <a:solidFill>
-            <a:schemeClr val="tx1"/>
-          </a:solidFill>
-          <a:latin typeface="+mn-lt"/>
-          <a:ea typeface="+mn-ea"/>
-          <a:cs typeface="+mn-cs"/>
-        </a:defRPr>
-      </a:lvl1pPr>
-      <a:lvl2pPr marL="457200" algn="l" defTabSz="914400" rtl="0" eaLnBrk="1" latinLnBrk="0" hangingPunct="1">
-        <a:defRPr sz="1800" kern="1200">
-          <a:solidFill>
-            <a:schemeClr val="tx1"/>
-          </a:solidFill>
-          <a:latin typeface="+mn-lt"/>
-          <a:ea typeface="+mn-ea"/>
-          <a:cs typeface="+mn-cs"/>
-        </a:defRPr>
-      </a:lvl2pPr>
-      <a:lvl3pPr marL="914400" algn="l" defTabSz="914400" rtl="0" eaLnBrk="1" latinLnBrk="0" hangingPunct="1">
-        <a:defRPr sz="1800" kern="1200">
-          <a:solidFill>
-            <a:schemeClr val="tx1"/>
-          </a:solidFill>
-          <a:latin typeface="+mn-lt"/>
-          <a:ea typeface="+mn-ea"/>
-          <a:cs typeface="+mn-cs"/>
-        </a:defRPr>
-      </a:lvl3pPr>
-      <a:lvl4pPr marL="1371600" algn="l" defTabSz="914400" rtl="0" eaLnBrk="1" latinLnBrk="0" hangingPunct="1">
-        <a:defRPr sz="1800" kern="1200">
-          <a:solidFill>
-            <a:schemeClr val="tx1"/>
-          </a:solidFill>
-          <a:latin typeface="+mn-lt"/>
-          <a:ea typeface="+mn-ea"/>
-          <a:cs typeface="+mn-cs"/>
-        </a:defRPr>
-      </a:lvl4pPr>
-      <a:lvl5pPr marL="1828800" algn="l" defTabSz="914400" rtl="0" eaLnBrk="1" latinLnBrk="0" hangingPunct="1">
-        <a:defRPr sz="1800" kern="1200">
-          <a:solidFill>
-            <a:schemeClr val="tx1"/>
-          </a:solidFill>
-          <a:latin typeface="+mn-lt"/>
-          <a:ea typeface="+mn-ea"/>
-          <a:cs typeface="+mn-cs"/>
-        </a:defRPr>
-      </a:lvl5pPr>
-      <a:lvl6pPr marL="2286000" algn="l" defTabSz="914400" rtl="0" eaLnBrk="1" latinLnBrk="0" hangingPunct="1">
-        <a:defRPr sz="1800" kern="1200">
-          <a:solidFill>
-            <a:schemeClr val="tx1"/>
-          </a:solidFill>
-          <a:latin typeface="+mn-lt"/>
-          <a:ea typeface="+mn-ea"/>
-          <a:cs typeface="+mn-cs"/>
-        </a:defRPr>
-      </a:lvl6pPr>
-      <a:lvl7pPr marL="2743200" algn="l" defTabSz="914400" rtl="0" eaLnBrk="1" latinLnBrk="0" hangingPunct="1">
-        <a:defRPr sz="1800" kern="1200">
-          <a:solidFill>
-            <a:schemeClr val="tx1"/>
-          </a:solidFill>
-          <a:latin typeface="+mn-lt"/>
-          <a:ea typeface="+mn-ea"/>
-          <a:cs typeface="+mn-cs"/>
-        </a:defRPr>
-      </a:lvl7pPr>
-      <a:lvl8pPr marL="3200400" algn="l" defTabSz="914400" rtl="0" eaLnBrk="1" latinLnBrk="0" hangingPunct="1">
-        <a:defRPr sz="1800" kern="1200">
-          <a:solidFill>
-            <a:schemeClr val="tx1"/>
-          </a:solidFill>
-          <a:latin typeface="+mn-lt"/>
-          <a:ea typeface="+mn-ea"/>
-          <a:cs typeface="+mn-cs"/>
-        </a:defRPr>
-      </a:lvl8pPr>
-      <a:lvl9pPr marL="3657600" algn="l" defTabSz="914400" rtl="0" eaLnBrk="1" latinLnBrk="0" hangingPunct="1">
-        <a:defRPr sz="1800" kern="1200">
+      <a:lvl9pPr marL="2743200" algn="l" defTabSz="685800" rtl="0" eaLnBrk="1" latinLnBrk="0" hangingPunct="1">
+        <a:defRPr sz="1350" kern="1200">
           <a:solidFill>
             <a:schemeClr val="tx1"/>
           </a:solidFill>
@@ -3329,62 +6172,377 @@
       </p:grpSpPr>
       <p:sp>
         <p:nvSpPr>
-          <p:cNvPr id="2" name="標題 1">
+          <p:cNvPr id="2" name="Title 1"/>
+          <p:cNvSpPr>
+            <a:spLocks noGrp="1"/>
+          </p:cNvSpPr>
+          <p:nvPr>
+            <p:ph type="title"/>
+          </p:nvPr>
+        </p:nvSpPr>
+        <p:spPr>
+          <a:xfrm>
+            <a:off x="990345" y="839233"/>
+            <a:ext cx="7654264" cy="1143000"/>
+          </a:xfrm>
+        </p:spPr>
+        <p:txBody>
+          <a:bodyPr>
+            <a:normAutofit/>
+          </a:bodyPr>
+          <a:lstStyle/>
+          <a:p>
+            <a:r>
+              <a:rPr lang="en-US" altLang="zh-TW" dirty="0"/>
+              <a:t>Measuring GitHub Copilot’s Impact on Productivity</a:t>
+            </a:r>
+            <a:endParaRPr dirty="0"/>
+          </a:p>
+        </p:txBody>
+      </p:sp>
+      <p:sp>
+        <p:nvSpPr>
+          <p:cNvPr id="3" name="Content Placeholder 2"/>
+          <p:cNvSpPr>
+            <a:spLocks noGrp="1"/>
+          </p:cNvSpPr>
+          <p:nvPr>
+            <p:ph idx="1"/>
+          </p:nvPr>
+        </p:nvSpPr>
+        <p:spPr>
+          <a:xfrm>
+            <a:off x="702677" y="3197338"/>
+            <a:ext cx="8229600" cy="2160188"/>
+          </a:xfrm>
+        </p:spPr>
+        <p:txBody>
+          <a:bodyPr/>
+          <a:lstStyle/>
+          <a:p>
+            <a:r>
+              <a:rPr dirty="0">
+                <a:latin typeface="Times New Roman" panose="02020603050405020304" pitchFamily="18" charset="0"/>
+                <a:cs typeface="Times New Roman" panose="02020603050405020304" pitchFamily="18" charset="0"/>
+              </a:rPr>
+              <a:t>GitHub Copilot </a:t>
+            </a:r>
+            <a:r>
+              <a:rPr dirty="0" err="1">
+                <a:latin typeface="Times New Roman" panose="02020603050405020304" pitchFamily="18" charset="0"/>
+                <a:cs typeface="Times New Roman" panose="02020603050405020304" pitchFamily="18" charset="0"/>
+              </a:rPr>
+              <a:t>補全行為</a:t>
+            </a:r>
+            <a:r>
+              <a:rPr dirty="0">
+                <a:latin typeface="Times New Roman" panose="02020603050405020304" pitchFamily="18" charset="0"/>
+                <a:cs typeface="Times New Roman" panose="02020603050405020304" pitchFamily="18" charset="0"/>
+              </a:rPr>
+              <a:t> vs </a:t>
+            </a:r>
+            <a:r>
+              <a:rPr dirty="0" err="1">
+                <a:latin typeface="Times New Roman" panose="02020603050405020304" pitchFamily="18" charset="0"/>
+                <a:cs typeface="Times New Roman" panose="02020603050405020304" pitchFamily="18" charset="0"/>
+              </a:rPr>
+              <a:t>生產力研究</a:t>
+            </a:r>
+            <a:endParaRPr dirty="0">
+              <a:latin typeface="Times New Roman" panose="02020603050405020304" pitchFamily="18" charset="0"/>
+              <a:cs typeface="Times New Roman" panose="02020603050405020304" pitchFamily="18" charset="0"/>
+            </a:endParaRPr>
+          </a:p>
+          <a:p>
+            <a:r>
+              <a:rPr dirty="0" err="1">
+                <a:latin typeface="Times New Roman" panose="02020603050405020304" pitchFamily="18" charset="0"/>
+                <a:cs typeface="Times New Roman" panose="02020603050405020304" pitchFamily="18" charset="0"/>
+              </a:rPr>
+              <a:t>報告者</a:t>
+            </a:r>
+            <a:r>
+              <a:rPr dirty="0">
+                <a:latin typeface="Times New Roman" panose="02020603050405020304" pitchFamily="18" charset="0"/>
+                <a:cs typeface="Times New Roman" panose="02020603050405020304" pitchFamily="18" charset="0"/>
+              </a:rPr>
+              <a:t>：</a:t>
+            </a:r>
+            <a:r>
+              <a:rPr lang="zh-TW" altLang="en-US" dirty="0">
+                <a:latin typeface="Times New Roman" panose="02020603050405020304" pitchFamily="18" charset="0"/>
+                <a:cs typeface="Times New Roman" panose="02020603050405020304" pitchFamily="18" charset="0"/>
+              </a:rPr>
+              <a:t>陳冠閔</a:t>
+            </a:r>
+            <a:endParaRPr dirty="0">
+              <a:latin typeface="Times New Roman" panose="02020603050405020304" pitchFamily="18" charset="0"/>
+              <a:cs typeface="Times New Roman" panose="02020603050405020304" pitchFamily="18" charset="0"/>
+            </a:endParaRPr>
+          </a:p>
+          <a:p>
+            <a:r>
+              <a:rPr dirty="0">
+                <a:latin typeface="Times New Roman" panose="02020603050405020304" pitchFamily="18" charset="0"/>
+                <a:cs typeface="Times New Roman" panose="02020603050405020304" pitchFamily="18" charset="0"/>
+              </a:rPr>
+              <a:t>日期：</a:t>
+            </a:r>
+            <a:r>
+              <a:rPr lang="en-US" altLang="zh-TW" dirty="0">
+                <a:latin typeface="Times New Roman" panose="02020603050405020304" pitchFamily="18" charset="0"/>
+                <a:cs typeface="Times New Roman" panose="02020603050405020304" pitchFamily="18" charset="0"/>
+              </a:rPr>
+              <a:t>2025</a:t>
+            </a:r>
+            <a:r>
+              <a:rPr dirty="0">
+                <a:latin typeface="Times New Roman" panose="02020603050405020304" pitchFamily="18" charset="0"/>
+                <a:cs typeface="Times New Roman" panose="02020603050405020304" pitchFamily="18" charset="0"/>
+              </a:rPr>
+              <a:t>/</a:t>
+            </a:r>
+            <a:r>
+              <a:rPr lang="en-US" altLang="zh-TW" dirty="0">
+                <a:latin typeface="Times New Roman" panose="02020603050405020304" pitchFamily="18" charset="0"/>
+                <a:cs typeface="Times New Roman" panose="02020603050405020304" pitchFamily="18" charset="0"/>
+              </a:rPr>
+              <a:t>12</a:t>
+            </a:r>
+            <a:r>
+              <a:rPr dirty="0">
+                <a:latin typeface="Times New Roman" panose="02020603050405020304" pitchFamily="18" charset="0"/>
+                <a:cs typeface="Times New Roman" panose="02020603050405020304" pitchFamily="18" charset="0"/>
+              </a:rPr>
+              <a:t>/</a:t>
+            </a:r>
+            <a:r>
+              <a:rPr lang="en-US" altLang="zh-TW" dirty="0">
+                <a:latin typeface="Times New Roman" panose="02020603050405020304" pitchFamily="18" charset="0"/>
+                <a:cs typeface="Times New Roman" panose="02020603050405020304" pitchFamily="18" charset="0"/>
+              </a:rPr>
+              <a:t>09</a:t>
+            </a:r>
+            <a:endParaRPr dirty="0">
+              <a:latin typeface="Times New Roman" panose="02020603050405020304" pitchFamily="18" charset="0"/>
+              <a:cs typeface="Times New Roman" panose="02020603050405020304" pitchFamily="18" charset="0"/>
+            </a:endParaRPr>
+          </a:p>
+        </p:txBody>
+      </p:sp>
+    </p:spTree>
+  </p:cSld>
+  <p:clrMapOvr>
+    <a:masterClrMapping/>
+  </p:clrMapOvr>
+</p:sld>
+</file>
+
+<file path=ppt/slides/slide10.xml><?xml version="1.0" encoding="utf-8"?>
+<p:sld xmlns:a="http://schemas.openxmlformats.org/drawingml/2006/main" xmlns:r="http://schemas.openxmlformats.org/officeDocument/2006/relationships" xmlns:p="http://schemas.openxmlformats.org/presentationml/2006/main">
+  <p:cSld>
+    <p:spTree>
+      <p:nvGrpSpPr>
+        <p:cNvPr id="1" name=""/>
+        <p:cNvGrpSpPr/>
+        <p:nvPr/>
+      </p:nvGrpSpPr>
+      <p:grpSpPr>
+        <a:xfrm>
+          <a:off x="0" y="0"/>
+          <a:ext cx="0" cy="0"/>
+          <a:chOff x="0" y="0"/>
+          <a:chExt cx="0" cy="0"/>
+        </a:xfrm>
+      </p:grpSpPr>
+      <p:sp>
+        <p:nvSpPr>
+          <p:cNvPr id="2" name="Title 1"/>
+          <p:cNvSpPr>
+            <a:spLocks noGrp="1"/>
+          </p:cNvSpPr>
+          <p:nvPr>
+            <p:ph type="title"/>
+          </p:nvPr>
+        </p:nvSpPr>
+        <p:spPr>
+          <a:xfrm>
+            <a:off x="3774680" y="127352"/>
+            <a:ext cx="1905512" cy="529298"/>
+          </a:xfrm>
+        </p:spPr>
+        <p:txBody>
+          <a:bodyPr>
+            <a:noAutofit/>
+          </a:bodyPr>
+          <a:lstStyle/>
+          <a:p>
+            <a:r>
+              <a:rPr dirty="0" err="1"/>
+              <a:t>族群差異</a:t>
+            </a:r>
+            <a:endParaRPr dirty="0"/>
+          </a:p>
+        </p:txBody>
+      </p:sp>
+      <p:pic>
+        <p:nvPicPr>
+          <p:cNvPr id="5" name="圖片 4">
             <a:extLst>
               <a:ext uri="{FF2B5EF4-FFF2-40B4-BE49-F238E27FC236}">
-                <a16:creationId xmlns:a16="http://schemas.microsoft.com/office/drawing/2014/main" id="{7BB52DC5-040E-BD5C-7D21-28A42FF4F3FC}"/>
+                <a16:creationId xmlns:a16="http://schemas.microsoft.com/office/drawing/2014/main" id="{ADA32723-CFF4-7561-56FB-25F264BEAEAC}"/>
               </a:ext>
             </a:extLst>
           </p:cNvPr>
-          <p:cNvSpPr>
-            <a:spLocks noGrp="1"/>
-          </p:cNvSpPr>
-          <p:nvPr>
-            <p:ph type="ctrTitle"/>
-          </p:nvPr>
-        </p:nvSpPr>
-        <p:spPr/>
-        <p:txBody>
-          <a:bodyPr>
-            <a:normAutofit/>
-          </a:bodyPr>
-          <a:lstStyle/>
-          <a:p>
-            <a:r>
-              <a:rPr lang="en-US" altLang="zh-TW" b="1" dirty="0">
-                <a:latin typeface="標楷體" panose="03000509000000000000" pitchFamily="65" charset="-120"/>
-                <a:ea typeface="標楷體" panose="03000509000000000000" pitchFamily="65" charset="-120"/>
-              </a:rPr>
-              <a:t>AI </a:t>
-            </a:r>
-            <a:r>
-              <a:rPr lang="zh-TW" altLang="en-US" b="1" dirty="0">
-                <a:latin typeface="標楷體" panose="03000509000000000000" pitchFamily="65" charset="-120"/>
-                <a:ea typeface="標楷體" panose="03000509000000000000" pitchFamily="65" charset="-120"/>
-              </a:rPr>
-              <a:t>輔助程式開發</a:t>
-            </a:r>
-            <a:endParaRPr lang="zh-TW" altLang="en-US" dirty="0">
-              <a:latin typeface="標楷體" panose="03000509000000000000" pitchFamily="65" charset="-120"/>
-              <a:ea typeface="標楷體" panose="03000509000000000000" pitchFamily="65" charset="-120"/>
-            </a:endParaRPr>
-          </a:p>
-        </p:txBody>
-      </p:sp>
-      <p:sp>
-        <p:nvSpPr>
-          <p:cNvPr id="3" name="副標題 2">
+          <p:cNvPicPr>
+            <a:picLocks noChangeAspect="1"/>
+          </p:cNvPicPr>
+          <p:nvPr/>
+        </p:nvPicPr>
+        <p:blipFill>
+          <a:blip r:embed="rId3"/>
+          <a:stretch>
+            <a:fillRect/>
+          </a:stretch>
+        </p:blipFill>
+        <p:spPr>
+          <a:xfrm>
+            <a:off x="1354148" y="612935"/>
+            <a:ext cx="6746577" cy="5929014"/>
+          </a:xfrm>
+          <a:prstGeom prst="rect">
+            <a:avLst/>
+          </a:prstGeom>
+        </p:spPr>
+      </p:pic>
+    </p:spTree>
+  </p:cSld>
+  <p:clrMapOvr>
+    <a:masterClrMapping/>
+  </p:clrMapOvr>
+</p:sld>
+</file>
+
+<file path=ppt/slides/slide11.xml><?xml version="1.0" encoding="utf-8"?>
+<p:sld xmlns:a="http://schemas.openxmlformats.org/drawingml/2006/main" xmlns:r="http://schemas.openxmlformats.org/officeDocument/2006/relationships" xmlns:p="http://schemas.openxmlformats.org/presentationml/2006/main">
+  <p:cSld>
+    <p:spTree>
+      <p:nvGrpSpPr>
+        <p:cNvPr id="1" name=""/>
+        <p:cNvGrpSpPr/>
+        <p:nvPr/>
+      </p:nvGrpSpPr>
+      <p:grpSpPr>
+        <a:xfrm>
+          <a:off x="0" y="0"/>
+          <a:ext cx="0" cy="0"/>
+          <a:chOff x="0" y="0"/>
+          <a:chExt cx="0" cy="0"/>
+        </a:xfrm>
+      </p:grpSpPr>
+      <p:sp>
+        <p:nvSpPr>
+          <p:cNvPr id="2" name="Title 1"/>
+          <p:cNvSpPr>
+            <a:spLocks noGrp="1"/>
+          </p:cNvSpPr>
+          <p:nvPr>
+            <p:ph type="title"/>
+          </p:nvPr>
+        </p:nvSpPr>
+        <p:spPr>
+          <a:xfrm>
+            <a:off x="3665269" y="122691"/>
+            <a:ext cx="1813459" cy="537387"/>
+          </a:xfrm>
+        </p:spPr>
+        <p:txBody>
+          <a:bodyPr/>
+          <a:lstStyle/>
+          <a:p>
+            <a:r>
+              <a:rPr dirty="0" err="1"/>
+              <a:t>時間週期</a:t>
+            </a:r>
+            <a:endParaRPr dirty="0"/>
+          </a:p>
+        </p:txBody>
+      </p:sp>
+      <p:pic>
+        <p:nvPicPr>
+          <p:cNvPr id="7" name="圖片 6">
             <a:extLst>
               <a:ext uri="{FF2B5EF4-FFF2-40B4-BE49-F238E27FC236}">
-                <a16:creationId xmlns:a16="http://schemas.microsoft.com/office/drawing/2014/main" id="{7A0BBDF9-3C5B-239C-A0E3-56B82F1A4FD1}"/>
+                <a16:creationId xmlns:a16="http://schemas.microsoft.com/office/drawing/2014/main" id="{A664CBD2-A970-6255-E7C8-DB013FDE370A}"/>
               </a:ext>
             </a:extLst>
           </p:cNvPr>
-          <p:cNvSpPr>
-            <a:spLocks noGrp="1"/>
-          </p:cNvSpPr>
-          <p:nvPr>
-            <p:ph type="subTitle" idx="1"/>
+          <p:cNvPicPr>
+            <a:picLocks noChangeAspect="1"/>
+          </p:cNvPicPr>
+          <p:nvPr/>
+        </p:nvPicPr>
+        <p:blipFill>
+          <a:blip r:embed="rId3"/>
+          <a:stretch>
+            <a:fillRect/>
+          </a:stretch>
+        </p:blipFill>
+        <p:spPr>
+          <a:xfrm>
+            <a:off x="1102739" y="657416"/>
+            <a:ext cx="6938521" cy="6019952"/>
+          </a:xfrm>
+          <a:prstGeom prst="rect">
+            <a:avLst/>
+          </a:prstGeom>
+        </p:spPr>
+      </p:pic>
+    </p:spTree>
+  </p:cSld>
+  <p:clrMapOvr>
+    <a:masterClrMapping/>
+  </p:clrMapOvr>
+</p:sld>
+</file>
+
+<file path=ppt/slides/slide12.xml><?xml version="1.0" encoding="utf-8"?>
+<p:sld xmlns:a="http://schemas.openxmlformats.org/drawingml/2006/main" xmlns:r="http://schemas.openxmlformats.org/officeDocument/2006/relationships" xmlns:p="http://schemas.openxmlformats.org/presentationml/2006/main">
+  <p:cSld>
+    <p:spTree>
+      <p:nvGrpSpPr>
+        <p:cNvPr id="1" name="">
+          <a:extLst>
+            <a:ext uri="{FF2B5EF4-FFF2-40B4-BE49-F238E27FC236}">
+              <a16:creationId xmlns:a16="http://schemas.microsoft.com/office/drawing/2014/main" id="{4F67426B-B51B-F87F-B0BE-DA7830BFAE74}"/>
+            </a:ext>
+          </a:extLst>
+        </p:cNvPr>
+        <p:cNvGrpSpPr/>
+        <p:nvPr/>
+      </p:nvGrpSpPr>
+      <p:grpSpPr>
+        <a:xfrm>
+          <a:off x="0" y="0"/>
+          <a:ext cx="0" cy="0"/>
+          <a:chOff x="0" y="0"/>
+          <a:chExt cx="0" cy="0"/>
+        </a:xfrm>
+      </p:grpSpPr>
+      <p:sp>
+        <p:nvSpPr>
+          <p:cNvPr id="2" name="Title 1">
+            <a:extLst>
+              <a:ext uri="{FF2B5EF4-FFF2-40B4-BE49-F238E27FC236}">
+                <a16:creationId xmlns:a16="http://schemas.microsoft.com/office/drawing/2014/main" id="{3B91EB0A-8543-D81B-2521-0167CEB5B633}"/>
+              </a:ext>
+            </a:extLst>
+          </p:cNvPr>
+          <p:cNvSpPr>
+            <a:spLocks noGrp="1"/>
+          </p:cNvSpPr>
+          <p:nvPr>
+            <p:ph type="title"/>
           </p:nvPr>
         </p:nvSpPr>
         <p:spPr/>
@@ -3393,11 +6551,52 @@
           <a:lstStyle/>
           <a:p>
             <a:r>
-              <a:rPr lang="zh-TW" altLang="en-US" dirty="0">
-                <a:latin typeface="標楷體" panose="03000509000000000000" pitchFamily="65" charset="-120"/>
-                <a:ea typeface="標楷體" panose="03000509000000000000" pitchFamily="65" charset="-120"/>
+              <a:rPr dirty="0" err="1">
+                <a:latin typeface="Times New Roman" panose="02020603050405020304" pitchFamily="18" charset="0"/>
+                <a:cs typeface="Times New Roman" panose="02020603050405020304" pitchFamily="18" charset="0"/>
               </a:rPr>
-              <a:t>講者：陳冠閔</a:t>
+              <a:t>討論</a:t>
+            </a:r>
+            <a:endParaRPr dirty="0">
+              <a:latin typeface="Times New Roman" panose="02020603050405020304" pitchFamily="18" charset="0"/>
+              <a:cs typeface="Times New Roman" panose="02020603050405020304" pitchFamily="18" charset="0"/>
+            </a:endParaRPr>
+          </a:p>
+        </p:txBody>
+      </p:sp>
+      <p:sp>
+        <p:nvSpPr>
+          <p:cNvPr id="3" name="Content Placeholder 2">
+            <a:extLst>
+              <a:ext uri="{FF2B5EF4-FFF2-40B4-BE49-F238E27FC236}">
+                <a16:creationId xmlns:a16="http://schemas.microsoft.com/office/drawing/2014/main" id="{C311343C-D970-D6D2-F58B-DCCCEC51946D}"/>
+              </a:ext>
+            </a:extLst>
+          </p:cNvPr>
+          <p:cNvSpPr>
+            <a:spLocks noGrp="1"/>
+          </p:cNvSpPr>
+          <p:nvPr>
+            <p:ph idx="1"/>
+          </p:nvPr>
+        </p:nvSpPr>
+        <p:spPr/>
+        <p:txBody>
+          <a:bodyPr/>
+          <a:lstStyle/>
+          <a:p>
+            <a:r>
+              <a:t>1. 品質比數量重要</a:t>
+            </a:r>
+          </a:p>
+          <a:p>
+            <a:r>
+              <a:t>2. 效果因人而異</a:t>
+            </a:r>
+          </a:p>
+          <a:p>
+            <a:r>
+              <a:t>3. 情境影響接受度</a:t>
             </a:r>
           </a:p>
         </p:txBody>
@@ -3405,9 +6604,295 @@
     </p:spTree>
     <p:extLst>
       <p:ext uri="{BB962C8B-B14F-4D97-AF65-F5344CB8AC3E}">
-        <p14:creationId xmlns:p14="http://schemas.microsoft.com/office/powerpoint/2010/main" val="1645997267"/>
+        <p14:creationId xmlns:p14="http://schemas.microsoft.com/office/powerpoint/2010/main" val="2644910364"/>
       </p:ext>
     </p:extLst>
+  </p:cSld>
+  <p:clrMapOvr>
+    <a:masterClrMapping/>
+  </p:clrMapOvr>
+</p:sld>
+</file>
+
+<file path=ppt/slides/slide13.xml><?xml version="1.0" encoding="utf-8"?>
+<p:sld xmlns:a="http://schemas.openxmlformats.org/drawingml/2006/main" xmlns:r="http://schemas.openxmlformats.org/officeDocument/2006/relationships" xmlns:p="http://schemas.openxmlformats.org/presentationml/2006/main">
+  <p:cSld>
+    <p:spTree>
+      <p:nvGrpSpPr>
+        <p:cNvPr id="1" name=""/>
+        <p:cNvGrpSpPr/>
+        <p:nvPr/>
+      </p:nvGrpSpPr>
+      <p:grpSpPr>
+        <a:xfrm>
+          <a:off x="0" y="0"/>
+          <a:ext cx="0" cy="0"/>
+          <a:chOff x="0" y="0"/>
+          <a:chExt cx="0" cy="0"/>
+        </a:xfrm>
+      </p:grpSpPr>
+      <p:sp>
+        <p:nvSpPr>
+          <p:cNvPr id="2" name="Title 1"/>
+          <p:cNvSpPr>
+            <a:spLocks noGrp="1"/>
+          </p:cNvSpPr>
+          <p:nvPr>
+            <p:ph type="title"/>
+          </p:nvPr>
+        </p:nvSpPr>
+        <p:spPr/>
+        <p:txBody>
+          <a:bodyPr/>
+          <a:lstStyle/>
+          <a:p>
+            <a:r>
+              <a:rPr lang="zh-TW" altLang="en-US" dirty="0">
+                <a:latin typeface="Times New Roman" panose="02020603050405020304" pitchFamily="18" charset="0"/>
+                <a:cs typeface="Times New Roman" panose="02020603050405020304" pitchFamily="18" charset="0"/>
+              </a:rPr>
+              <a:t>研究貢獻</a:t>
+            </a:r>
+            <a:endParaRPr dirty="0">
+              <a:latin typeface="Times New Roman" panose="02020603050405020304" pitchFamily="18" charset="0"/>
+              <a:cs typeface="Times New Roman" panose="02020603050405020304" pitchFamily="18" charset="0"/>
+            </a:endParaRPr>
+          </a:p>
+        </p:txBody>
+      </p:sp>
+      <p:sp>
+        <p:nvSpPr>
+          <p:cNvPr id="6" name="內容版面配置區 5">
+            <a:extLst>
+              <a:ext uri="{FF2B5EF4-FFF2-40B4-BE49-F238E27FC236}">
+                <a16:creationId xmlns:a16="http://schemas.microsoft.com/office/drawing/2014/main" id="{3A114CE3-6F2D-1629-9B1B-F74D7CC63ED1}"/>
+              </a:ext>
+            </a:extLst>
+          </p:cNvPr>
+          <p:cNvSpPr>
+            <a:spLocks noGrp="1"/>
+          </p:cNvSpPr>
+          <p:nvPr>
+            <p:ph idx="1"/>
+          </p:nvPr>
+        </p:nvSpPr>
+        <p:spPr>
+          <a:xfrm>
+            <a:off x="1259907" y="2037014"/>
+            <a:ext cx="6938509" cy="3450613"/>
+          </a:xfrm>
+        </p:spPr>
+        <p:txBody>
+          <a:bodyPr/>
+          <a:lstStyle/>
+          <a:p>
+            <a:r>
+              <a:rPr lang="zh-TW" altLang="en-US" b="1" dirty="0"/>
+              <a:t>首次明確量化「使用行為」與「生產力感受」之間的連結。</a:t>
+            </a:r>
+            <a:br>
+              <a:rPr lang="zh-TW" altLang="en-US" dirty="0"/>
+            </a:br>
+            <a:r>
+              <a:rPr lang="zh-TW" altLang="en-US" dirty="0"/>
+              <a:t>→ </a:t>
+            </a:r>
+            <a:r>
+              <a:rPr lang="en-US" altLang="zh-TW" dirty="0"/>
+              <a:t>Acceptance rate </a:t>
+            </a:r>
+            <a:r>
+              <a:rPr lang="zh-TW" altLang="en-US" dirty="0"/>
+              <a:t>能預測 </a:t>
+            </a:r>
+            <a:r>
+              <a:rPr lang="en-US" altLang="zh-TW" dirty="0"/>
+              <a:t>perceived productivity</a:t>
+            </a:r>
+            <a:r>
+              <a:rPr lang="zh-TW" altLang="en-US" dirty="0"/>
+              <a:t>。</a:t>
+            </a:r>
+            <a:endParaRPr lang="en-US" altLang="zh-TW" dirty="0"/>
+          </a:p>
+          <a:p>
+            <a:r>
+              <a:rPr lang="zh-TW" altLang="en-US" b="1" dirty="0"/>
+              <a:t>證明補全的「品質」比「數量」更重要。</a:t>
+            </a:r>
+            <a:br>
+              <a:rPr lang="zh-TW" altLang="en-US" dirty="0"/>
+            </a:br>
+            <a:r>
+              <a:rPr lang="zh-TW" altLang="en-US" dirty="0"/>
+              <a:t>→ </a:t>
+            </a:r>
+            <a:r>
+              <a:rPr lang="en-US" altLang="zh-TW" dirty="0"/>
+              <a:t>Persistence </a:t>
+            </a:r>
+            <a:r>
+              <a:rPr lang="zh-TW" altLang="en-US" dirty="0"/>
+              <a:t>不如 </a:t>
+            </a:r>
+            <a:r>
+              <a:rPr lang="en-US" altLang="zh-TW" dirty="0"/>
+              <a:t>acceptance rate </a:t>
+            </a:r>
+            <a:r>
+              <a:rPr lang="zh-TW" altLang="en-US" dirty="0"/>
+              <a:t>有預測力。</a:t>
+            </a:r>
+            <a:endParaRPr lang="en-US" altLang="zh-TW" dirty="0"/>
+          </a:p>
+          <a:p>
+            <a:r>
+              <a:rPr lang="zh-TW" altLang="en-US" b="1" dirty="0"/>
+              <a:t>揭露不同族群、不同時間的使用差異。</a:t>
+            </a:r>
+            <a:br>
+              <a:rPr lang="zh-TW" altLang="en-US" dirty="0"/>
+            </a:br>
+            <a:r>
+              <a:rPr lang="zh-TW" altLang="en-US" dirty="0"/>
+              <a:t>→ 新手效益大、</a:t>
+            </a:r>
+            <a:r>
+              <a:rPr lang="en-US" altLang="zh-TW" dirty="0"/>
+              <a:t>JS/TS </a:t>
+            </a:r>
+            <a:r>
+              <a:rPr lang="zh-TW" altLang="en-US" dirty="0"/>
+              <a:t>使用者較高、晚上與週末 </a:t>
+            </a:r>
+            <a:r>
+              <a:rPr lang="en-US" altLang="zh-TW" dirty="0"/>
+              <a:t>acceptance rate </a:t>
+            </a:r>
+            <a:r>
+              <a:rPr lang="zh-TW" altLang="en-US" dirty="0"/>
+              <a:t>上升。</a:t>
+            </a:r>
+            <a:endParaRPr lang="en-US" altLang="zh-TW" dirty="0"/>
+          </a:p>
+          <a:p>
+            <a:endParaRPr lang="en-US" altLang="zh-TW" dirty="0"/>
+          </a:p>
+          <a:p>
+            <a:endParaRPr lang="en-US" altLang="zh-TW" dirty="0"/>
+          </a:p>
+          <a:p>
+            <a:endParaRPr lang="en-US" altLang="zh-TW" dirty="0"/>
+          </a:p>
+          <a:p>
+            <a:endParaRPr lang="zh-TW" altLang="en-US" dirty="0"/>
+          </a:p>
+        </p:txBody>
+      </p:sp>
+    </p:spTree>
+  </p:cSld>
+  <p:clrMapOvr>
+    <a:masterClrMapping/>
+  </p:clrMapOvr>
+</p:sld>
+</file>
+
+<file path=ppt/slides/slide14.xml><?xml version="1.0" encoding="utf-8"?>
+<p:sld xmlns:a="http://schemas.openxmlformats.org/drawingml/2006/main" xmlns:r="http://schemas.openxmlformats.org/officeDocument/2006/relationships" xmlns:p="http://schemas.openxmlformats.org/presentationml/2006/main">
+  <p:cSld>
+    <p:spTree>
+      <p:nvGrpSpPr>
+        <p:cNvPr id="1" name=""/>
+        <p:cNvGrpSpPr/>
+        <p:nvPr/>
+      </p:nvGrpSpPr>
+      <p:grpSpPr>
+        <a:xfrm>
+          <a:off x="0" y="0"/>
+          <a:ext cx="0" cy="0"/>
+          <a:chOff x="0" y="0"/>
+          <a:chExt cx="0" cy="0"/>
+        </a:xfrm>
+      </p:grpSpPr>
+      <p:sp>
+        <p:nvSpPr>
+          <p:cNvPr id="2" name="Title 1"/>
+          <p:cNvSpPr>
+            <a:spLocks noGrp="1"/>
+          </p:cNvSpPr>
+          <p:nvPr>
+            <p:ph type="title"/>
+          </p:nvPr>
+        </p:nvSpPr>
+        <p:spPr/>
+        <p:txBody>
+          <a:bodyPr/>
+          <a:lstStyle/>
+          <a:p>
+            <a:r>
+              <a:rPr dirty="0" err="1">
+                <a:latin typeface="Times New Roman" panose="02020603050405020304" pitchFamily="18" charset="0"/>
+                <a:cs typeface="Times New Roman" panose="02020603050405020304" pitchFamily="18" charset="0"/>
+              </a:rPr>
+              <a:t>結論</a:t>
+            </a:r>
+            <a:endParaRPr dirty="0">
+              <a:latin typeface="Times New Roman" panose="02020603050405020304" pitchFamily="18" charset="0"/>
+              <a:cs typeface="Times New Roman" panose="02020603050405020304" pitchFamily="18" charset="0"/>
+            </a:endParaRPr>
+          </a:p>
+        </p:txBody>
+      </p:sp>
+      <p:sp>
+        <p:nvSpPr>
+          <p:cNvPr id="3" name="Content Placeholder 2"/>
+          <p:cNvSpPr>
+            <a:spLocks noGrp="1"/>
+          </p:cNvSpPr>
+          <p:nvPr>
+            <p:ph idx="1"/>
+          </p:nvPr>
+        </p:nvSpPr>
+        <p:spPr/>
+        <p:txBody>
+          <a:bodyPr/>
+          <a:lstStyle/>
+          <a:p>
+            <a:r>
+              <a:rPr dirty="0"/>
+              <a:t>AI </a:t>
+            </a:r>
+            <a:r>
+              <a:rPr dirty="0" err="1"/>
+              <a:t>補全提升屬小而穩定</a:t>
+            </a:r>
+            <a:endParaRPr dirty="0"/>
+          </a:p>
+          <a:p>
+            <a:r>
+              <a:rPr dirty="0" err="1"/>
+              <a:t>被接受並保留的補全最有價值</a:t>
+            </a:r>
+            <a:endParaRPr dirty="0"/>
+          </a:p>
+          <a:p>
+            <a:r>
+              <a:rPr dirty="0" err="1"/>
+              <a:t>中階工程師與</a:t>
+            </a:r>
+            <a:r>
+              <a:rPr dirty="0"/>
+              <a:t> JS </a:t>
+            </a:r>
+            <a:r>
+              <a:rPr dirty="0" err="1"/>
+              <a:t>使用者最受益</a:t>
+            </a:r>
+            <a:endParaRPr dirty="0"/>
+          </a:p>
+        </p:txBody>
+      </p:sp>
+    </p:spTree>
   </p:cSld>
   <p:clrMapOvr>
     <a:masterClrMapping/>
@@ -3434,10 +6919,497 @@
       </p:grpSpPr>
       <p:sp>
         <p:nvSpPr>
-          <p:cNvPr id="2" name="標題 1">
+          <p:cNvPr id="2" name="Title 1"/>
+          <p:cNvSpPr>
+            <a:spLocks noGrp="1"/>
+          </p:cNvSpPr>
+          <p:nvPr>
+            <p:ph type="title"/>
+          </p:nvPr>
+        </p:nvSpPr>
+        <p:spPr>
+          <a:xfrm>
+            <a:off x="1422343" y="1024523"/>
+            <a:ext cx="4591831" cy="766177"/>
+          </a:xfrm>
+        </p:spPr>
+        <p:txBody>
+          <a:bodyPr>
+            <a:normAutofit/>
+          </a:bodyPr>
+          <a:lstStyle/>
+          <a:p>
+            <a:r>
+              <a:rPr sz="4800" dirty="0" err="1">
+                <a:latin typeface="Times New Roman" panose="02020603050405020304" pitchFamily="18" charset="0"/>
+                <a:cs typeface="Times New Roman" panose="02020603050405020304" pitchFamily="18" charset="0"/>
+              </a:rPr>
+              <a:t>研究</a:t>
+            </a:r>
+            <a:r>
+              <a:rPr lang="zh-TW" altLang="en-US" sz="4800" dirty="0">
+                <a:latin typeface="Times New Roman" panose="02020603050405020304" pitchFamily="18" charset="0"/>
+                <a:cs typeface="Times New Roman" panose="02020603050405020304" pitchFamily="18" charset="0"/>
+              </a:rPr>
+              <a:t>背景與</a:t>
+            </a:r>
+            <a:r>
+              <a:rPr sz="4800" dirty="0" err="1">
+                <a:latin typeface="Times New Roman" panose="02020603050405020304" pitchFamily="18" charset="0"/>
+                <a:cs typeface="Times New Roman" panose="02020603050405020304" pitchFamily="18" charset="0"/>
+              </a:rPr>
+              <a:t>動機</a:t>
+            </a:r>
+            <a:endParaRPr sz="4800" dirty="0">
+              <a:latin typeface="Times New Roman" panose="02020603050405020304" pitchFamily="18" charset="0"/>
+              <a:cs typeface="Times New Roman" panose="02020603050405020304" pitchFamily="18" charset="0"/>
+            </a:endParaRPr>
+          </a:p>
+        </p:txBody>
+      </p:sp>
+      <p:sp>
+        <p:nvSpPr>
+          <p:cNvPr id="3" name="Content Placeholder 2"/>
+          <p:cNvSpPr>
+            <a:spLocks noGrp="1"/>
+          </p:cNvSpPr>
+          <p:nvPr>
+            <p:ph idx="1"/>
+          </p:nvPr>
+        </p:nvSpPr>
+        <p:spPr>
+          <a:xfrm>
+            <a:off x="844592" y="2145617"/>
+            <a:ext cx="7454815" cy="4088718"/>
+          </a:xfrm>
+        </p:spPr>
+        <p:txBody>
+          <a:bodyPr>
+            <a:normAutofit/>
+          </a:bodyPr>
+          <a:lstStyle/>
+          <a:p>
+            <a:pPr marL="0" lvl="0" indent="0" defTabSz="914400" eaLnBrk="0" fontAlgn="base" hangingPunct="0">
+              <a:lnSpc>
+                <a:spcPct val="100000"/>
+              </a:lnSpc>
+              <a:spcBef>
+                <a:spcPct val="0"/>
+              </a:spcBef>
+              <a:spcAft>
+                <a:spcPct val="0"/>
+              </a:spcAft>
+              <a:buClrTx/>
+              <a:buSzTx/>
+              <a:buNone/>
+            </a:pPr>
+            <a:r>
+              <a:rPr dirty="0">
+                <a:latin typeface="Times New Roman" panose="02020603050405020304" pitchFamily="18" charset="0"/>
+                <a:cs typeface="Times New Roman" panose="02020603050405020304" pitchFamily="18" charset="0"/>
+              </a:rPr>
+              <a:t>-</a:t>
+            </a:r>
+            <a:r>
+              <a:rPr lang="zh-TW" altLang="zh-TW" dirty="0">
+                <a:latin typeface="Times New Roman" panose="02020603050405020304" pitchFamily="18" charset="0"/>
+                <a:cs typeface="Times New Roman" panose="02020603050405020304" pitchFamily="18" charset="0"/>
+              </a:rPr>
+              <a:t>隨著AI技術的快速發展，像是GitHub Copilot這類AI輔助程式設計工具逐漸成為開發者的常用幫手。</a:t>
+            </a:r>
+          </a:p>
+          <a:p>
+            <a:pPr marL="0" indent="0">
+              <a:buNone/>
+            </a:pPr>
+            <a:endParaRPr lang="en-US" dirty="0">
+              <a:latin typeface="Times New Roman" panose="02020603050405020304" pitchFamily="18" charset="0"/>
+              <a:cs typeface="Times New Roman" panose="02020603050405020304" pitchFamily="18" charset="0"/>
+            </a:endParaRPr>
+          </a:p>
+          <a:p>
+            <a:pPr marL="0" indent="0">
+              <a:buNone/>
+            </a:pPr>
+            <a:r>
+              <a:rPr dirty="0">
+                <a:latin typeface="Times New Roman" panose="02020603050405020304" pitchFamily="18" charset="0"/>
+                <a:cs typeface="Times New Roman" panose="02020603050405020304" pitchFamily="18" charset="0"/>
+              </a:rPr>
+              <a:t>-</a:t>
+            </a:r>
+            <a:r>
+              <a:rPr lang="zh-TW" altLang="zh-TW" dirty="0">
+                <a:latin typeface="Times New Roman" panose="02020603050405020304" pitchFamily="18" charset="0"/>
+                <a:cs typeface="Times New Roman" panose="02020603050405020304" pitchFamily="18" charset="0"/>
+              </a:rPr>
+              <a:t>雖然有人認為這些工具能提升開發效率，但實證研究較少。本報告旨在了解AI工具（特別是Copilot）對開發者 Productivity（生產力）的實際影響。</a:t>
+            </a:r>
+          </a:p>
+          <a:p>
+            <a:pPr marL="0" indent="0">
+              <a:buNone/>
+            </a:pPr>
+            <a:endParaRPr dirty="0">
+              <a:latin typeface="Times New Roman" panose="02020603050405020304" pitchFamily="18" charset="0"/>
+              <a:cs typeface="Times New Roman" panose="02020603050405020304" pitchFamily="18" charset="0"/>
+            </a:endParaRPr>
+          </a:p>
+        </p:txBody>
+      </p:sp>
+    </p:spTree>
+  </p:cSld>
+  <p:clrMapOvr>
+    <a:masterClrMapping/>
+  </p:clrMapOvr>
+</p:sld>
+</file>
+
+<file path=ppt/slides/slide3.xml><?xml version="1.0" encoding="utf-8"?>
+<p:sld xmlns:a="http://schemas.openxmlformats.org/drawingml/2006/main" xmlns:r="http://schemas.openxmlformats.org/officeDocument/2006/relationships" xmlns:p="http://schemas.openxmlformats.org/presentationml/2006/main">
+  <p:cSld>
+    <p:spTree>
+      <p:nvGrpSpPr>
+        <p:cNvPr id="1" name=""/>
+        <p:cNvGrpSpPr/>
+        <p:nvPr/>
+      </p:nvGrpSpPr>
+      <p:grpSpPr>
+        <a:xfrm>
+          <a:off x="0" y="0"/>
+          <a:ext cx="0" cy="0"/>
+          <a:chOff x="0" y="0"/>
+          <a:chExt cx="0" cy="0"/>
+        </a:xfrm>
+      </p:grpSpPr>
+      <p:sp>
+        <p:nvSpPr>
+          <p:cNvPr id="2" name="Title 1"/>
+          <p:cNvSpPr>
+            <a:spLocks noGrp="1"/>
+          </p:cNvSpPr>
+          <p:nvPr>
+            <p:ph type="title"/>
+          </p:nvPr>
+        </p:nvSpPr>
+        <p:spPr>
+          <a:xfrm>
+            <a:off x="1375985" y="945669"/>
+            <a:ext cx="2735748" cy="772667"/>
+          </a:xfrm>
+        </p:spPr>
+        <p:txBody>
+          <a:bodyPr>
+            <a:normAutofit/>
+          </a:bodyPr>
+          <a:lstStyle/>
+          <a:p>
+            <a:r>
+              <a:rPr lang="zh-TW" altLang="en-US" sz="4800">
+                <a:latin typeface="Times New Roman" panose="02020603050405020304" pitchFamily="18" charset="0"/>
+                <a:cs typeface="Times New Roman" panose="02020603050405020304" pitchFamily="18" charset="0"/>
+              </a:rPr>
+              <a:t>研究問題</a:t>
+            </a:r>
+            <a:endParaRPr lang="zh-TW" altLang="en-US" sz="4800" dirty="0">
+              <a:latin typeface="Times New Roman" panose="02020603050405020304" pitchFamily="18" charset="0"/>
+              <a:cs typeface="Times New Roman" panose="02020603050405020304" pitchFamily="18" charset="0"/>
+            </a:endParaRPr>
+          </a:p>
+        </p:txBody>
+      </p:sp>
+      <p:sp>
+        <p:nvSpPr>
+          <p:cNvPr id="3" name="Content Placeholder 2"/>
+          <p:cNvSpPr>
+            <a:spLocks noGrp="1"/>
+          </p:cNvSpPr>
+          <p:nvPr>
+            <p:ph idx="1"/>
+          </p:nvPr>
+        </p:nvSpPr>
+        <p:spPr>
+          <a:xfrm>
+            <a:off x="1228053" y="2138715"/>
+            <a:ext cx="8229600" cy="4525963"/>
+          </a:xfrm>
+        </p:spPr>
+        <p:txBody>
+          <a:bodyPr>
+            <a:normAutofit/>
+          </a:bodyPr>
+          <a:lstStyle/>
+          <a:p>
+            <a:r>
+              <a:rPr lang="en-US" altLang="zh-TW" sz="2400" dirty="0"/>
+              <a:t>1. </a:t>
+            </a:r>
+            <a:r>
+              <a:rPr lang="zh-TW" altLang="en-US" sz="2400" dirty="0"/>
+              <a:t>哪些補全提升生產力？</a:t>
+            </a:r>
+          </a:p>
+          <a:p>
+            <a:r>
+              <a:rPr lang="en-US" altLang="zh-TW" sz="2400" dirty="0"/>
+              <a:t>2. </a:t>
+            </a:r>
+            <a:r>
+              <a:rPr lang="zh-TW" altLang="en-US" sz="2400" dirty="0"/>
+              <a:t>補全數量是否有用？</a:t>
+            </a:r>
+          </a:p>
+          <a:p>
+            <a:r>
+              <a:rPr lang="en-US" altLang="zh-TW" sz="2400" dirty="0"/>
+              <a:t>3. </a:t>
+            </a:r>
+            <a:r>
+              <a:rPr lang="zh-TW" altLang="en-US" sz="2400" dirty="0"/>
+              <a:t>哪些族群受益？</a:t>
+            </a:r>
+          </a:p>
+          <a:p>
+            <a:r>
+              <a:rPr lang="en-US" altLang="zh-TW" sz="2400" dirty="0"/>
+              <a:t>4. </a:t>
+            </a:r>
+            <a:r>
+              <a:rPr lang="zh-TW" altLang="en-US" sz="2400" dirty="0"/>
+              <a:t>情境是否影響接受程度？</a:t>
+            </a:r>
+          </a:p>
+        </p:txBody>
+      </p:sp>
+    </p:spTree>
+  </p:cSld>
+  <p:clrMapOvr>
+    <a:masterClrMapping/>
+  </p:clrMapOvr>
+</p:sld>
+</file>
+
+<file path=ppt/slides/slide4.xml><?xml version="1.0" encoding="utf-8"?>
+<p:sld xmlns:a="http://schemas.openxmlformats.org/drawingml/2006/main" xmlns:r="http://schemas.openxmlformats.org/officeDocument/2006/relationships" xmlns:p="http://schemas.openxmlformats.org/presentationml/2006/main">
+  <p:cSld>
+    <p:spTree>
+      <p:nvGrpSpPr>
+        <p:cNvPr id="1" name=""/>
+        <p:cNvGrpSpPr/>
+        <p:nvPr/>
+      </p:nvGrpSpPr>
+      <p:grpSpPr>
+        <a:xfrm>
+          <a:off x="0" y="0"/>
+          <a:ext cx="0" cy="0"/>
+          <a:chOff x="0" y="0"/>
+          <a:chExt cx="0" cy="0"/>
+        </a:xfrm>
+      </p:grpSpPr>
+      <p:sp>
+        <p:nvSpPr>
+          <p:cNvPr id="2" name="Title 1"/>
+          <p:cNvSpPr>
+            <a:spLocks noGrp="1"/>
+          </p:cNvSpPr>
+          <p:nvPr>
+            <p:ph type="title"/>
+          </p:nvPr>
+        </p:nvSpPr>
+        <p:spPr/>
+        <p:txBody>
+          <a:bodyPr>
+            <a:normAutofit/>
+          </a:bodyPr>
+          <a:lstStyle/>
+          <a:p>
+            <a:r>
+              <a:rPr sz="4800" dirty="0" err="1"/>
+              <a:t>研究方法概述</a:t>
+            </a:r>
+            <a:endParaRPr sz="4800" dirty="0"/>
+          </a:p>
+        </p:txBody>
+      </p:sp>
+      <p:sp>
+        <p:nvSpPr>
+          <p:cNvPr id="3" name="Content Placeholder 2"/>
+          <p:cNvSpPr>
+            <a:spLocks noGrp="1"/>
+          </p:cNvSpPr>
+          <p:nvPr>
+            <p:ph idx="1"/>
+          </p:nvPr>
+        </p:nvSpPr>
+        <p:spPr/>
+        <p:txBody>
+          <a:bodyPr/>
+          <a:lstStyle/>
+          <a:p>
+            <a:r>
+              <a:rPr dirty="0">
+                <a:latin typeface="Times New Roman" panose="02020603050405020304" pitchFamily="18" charset="0"/>
+                <a:cs typeface="Times New Roman" panose="02020603050405020304" pitchFamily="18" charset="0"/>
+              </a:rPr>
+              <a:t>- IDE </a:t>
+            </a:r>
+            <a:r>
+              <a:rPr lang="zh-TW" altLang="en-US" dirty="0">
+                <a:latin typeface="Times New Roman" panose="02020603050405020304" pitchFamily="18" charset="0"/>
+                <a:cs typeface="Times New Roman" panose="02020603050405020304" pitchFamily="18" charset="0"/>
+              </a:rPr>
+              <a:t>數據</a:t>
+            </a:r>
+            <a:r>
+              <a:rPr dirty="0">
+                <a:latin typeface="Times New Roman" panose="02020603050405020304" pitchFamily="18" charset="0"/>
+                <a:cs typeface="Times New Roman" panose="02020603050405020304" pitchFamily="18" charset="0"/>
+              </a:rPr>
+              <a:t>+ </a:t>
+            </a:r>
+            <a:r>
+              <a:rPr lang="zh-TW" altLang="en-US" dirty="0">
+                <a:latin typeface="Times New Roman" panose="02020603050405020304" pitchFamily="18" charset="0"/>
+                <a:cs typeface="Times New Roman" panose="02020603050405020304" pitchFamily="18" charset="0"/>
+              </a:rPr>
+              <a:t>個人體驗</a:t>
+            </a:r>
+            <a:r>
+              <a:rPr dirty="0" err="1">
+                <a:latin typeface="Times New Roman" panose="02020603050405020304" pitchFamily="18" charset="0"/>
+                <a:cs typeface="Times New Roman" panose="02020603050405020304" pitchFamily="18" charset="0"/>
+              </a:rPr>
+              <a:t>問卷</a:t>
+            </a:r>
+            <a:endParaRPr dirty="0">
+              <a:latin typeface="Times New Roman" panose="02020603050405020304" pitchFamily="18" charset="0"/>
+              <a:cs typeface="Times New Roman" panose="02020603050405020304" pitchFamily="18" charset="0"/>
+            </a:endParaRPr>
+          </a:p>
+          <a:p>
+            <a:r>
+              <a:rPr dirty="0">
+                <a:latin typeface="Times New Roman" panose="02020603050405020304" pitchFamily="18" charset="0"/>
+                <a:cs typeface="Times New Roman" panose="02020603050405020304" pitchFamily="18" charset="0"/>
+              </a:rPr>
+              <a:t>- </a:t>
+            </a:r>
+            <a:r>
+              <a:rPr dirty="0" err="1">
+                <a:latin typeface="Times New Roman" panose="02020603050405020304" pitchFamily="18" charset="0"/>
+                <a:cs typeface="Times New Roman" panose="02020603050405020304" pitchFamily="18" charset="0"/>
+              </a:rPr>
+              <a:t>指標：shown</a:t>
+            </a:r>
+            <a:r>
+              <a:rPr dirty="0">
+                <a:latin typeface="Times New Roman" panose="02020603050405020304" pitchFamily="18" charset="0"/>
+                <a:cs typeface="Times New Roman" panose="02020603050405020304" pitchFamily="18" charset="0"/>
+              </a:rPr>
+              <a:t>/accepted/persistence/contribution</a:t>
+            </a:r>
+          </a:p>
+          <a:p>
+            <a:r>
+              <a:rPr dirty="0">
+                <a:latin typeface="Times New Roman" panose="02020603050405020304" pitchFamily="18" charset="0"/>
+                <a:cs typeface="Times New Roman" panose="02020603050405020304" pitchFamily="18" charset="0"/>
+              </a:rPr>
+              <a:t>- </a:t>
+            </a:r>
+            <a:r>
+              <a:rPr dirty="0" err="1">
+                <a:latin typeface="Times New Roman" panose="02020603050405020304" pitchFamily="18" charset="0"/>
+                <a:cs typeface="Times New Roman" panose="02020603050405020304" pitchFamily="18" charset="0"/>
+              </a:rPr>
+              <a:t>分析：相關</a:t>
+            </a:r>
+            <a:r>
+              <a:rPr dirty="0">
+                <a:latin typeface="Times New Roman" panose="02020603050405020304" pitchFamily="18" charset="0"/>
+                <a:cs typeface="Times New Roman" panose="02020603050405020304" pitchFamily="18" charset="0"/>
+              </a:rPr>
+              <a:t>/</a:t>
+            </a:r>
+            <a:r>
+              <a:rPr dirty="0" err="1">
+                <a:latin typeface="Times New Roman" panose="02020603050405020304" pitchFamily="18" charset="0"/>
+                <a:cs typeface="Times New Roman" panose="02020603050405020304" pitchFamily="18" charset="0"/>
+              </a:rPr>
+              <a:t>降維</a:t>
+            </a:r>
+            <a:r>
+              <a:rPr dirty="0">
+                <a:latin typeface="Times New Roman" panose="02020603050405020304" pitchFamily="18" charset="0"/>
+                <a:cs typeface="Times New Roman" panose="02020603050405020304" pitchFamily="18" charset="0"/>
+              </a:rPr>
+              <a:t>/</a:t>
+            </a:r>
+            <a:r>
+              <a:rPr dirty="0" err="1">
+                <a:latin typeface="Times New Roman" panose="02020603050405020304" pitchFamily="18" charset="0"/>
+                <a:cs typeface="Times New Roman" panose="02020603050405020304" pitchFamily="18" charset="0"/>
+              </a:rPr>
+              <a:t>回歸</a:t>
+            </a:r>
+            <a:r>
+              <a:rPr dirty="0">
+                <a:latin typeface="Times New Roman" panose="02020603050405020304" pitchFamily="18" charset="0"/>
+                <a:cs typeface="Times New Roman" panose="02020603050405020304" pitchFamily="18" charset="0"/>
+              </a:rPr>
+              <a:t>/</a:t>
+            </a:r>
+            <a:r>
+              <a:rPr dirty="0" err="1">
+                <a:latin typeface="Times New Roman" panose="02020603050405020304" pitchFamily="18" charset="0"/>
+                <a:cs typeface="Times New Roman" panose="02020603050405020304" pitchFamily="18" charset="0"/>
+              </a:rPr>
+              <a:t>時間週期</a:t>
+            </a:r>
+            <a:endParaRPr dirty="0">
+              <a:latin typeface="Times New Roman" panose="02020603050405020304" pitchFamily="18" charset="0"/>
+              <a:cs typeface="Times New Roman" panose="02020603050405020304" pitchFamily="18" charset="0"/>
+            </a:endParaRPr>
+          </a:p>
+        </p:txBody>
+      </p:sp>
+    </p:spTree>
+  </p:cSld>
+  <p:clrMapOvr>
+    <a:masterClrMapping/>
+  </p:clrMapOvr>
+</p:sld>
+</file>
+
+<file path=ppt/slides/slide5.xml><?xml version="1.0" encoding="utf-8"?>
+<p:sld xmlns:a="http://schemas.openxmlformats.org/drawingml/2006/main" xmlns:r="http://schemas.openxmlformats.org/officeDocument/2006/relationships" xmlns:p="http://schemas.openxmlformats.org/presentationml/2006/main">
+  <p:cSld>
+    <p:spTree>
+      <p:nvGrpSpPr>
+        <p:cNvPr id="1" name="">
+          <a:extLst>
+            <a:ext uri="{FF2B5EF4-FFF2-40B4-BE49-F238E27FC236}">
+              <a16:creationId xmlns:a16="http://schemas.microsoft.com/office/drawing/2014/main" id="{4A5EC3D9-F33B-9FAC-04C0-9D2CA59ACB32}"/>
+            </a:ext>
+          </a:extLst>
+        </p:cNvPr>
+        <p:cNvGrpSpPr/>
+        <p:nvPr/>
+      </p:nvGrpSpPr>
+      <p:grpSpPr>
+        <a:xfrm>
+          <a:off x="0" y="0"/>
+          <a:ext cx="0" cy="0"/>
+          <a:chOff x="0" y="0"/>
+          <a:chExt cx="0" cy="0"/>
+        </a:xfrm>
+      </p:grpSpPr>
+      <p:sp>
+        <p:nvSpPr>
+          <p:cNvPr id="2" name="Title 1">
             <a:extLst>
               <a:ext uri="{FF2B5EF4-FFF2-40B4-BE49-F238E27FC236}">
-                <a16:creationId xmlns:a16="http://schemas.microsoft.com/office/drawing/2014/main" id="{23B79ABA-B482-04DF-0A14-1E8CF098A962}"/>
+                <a16:creationId xmlns:a16="http://schemas.microsoft.com/office/drawing/2014/main" id="{F395222A-08E5-0CE5-D12E-7BE77D6D5A70}"/>
               </a:ext>
             </a:extLst>
           </p:cNvPr>
@@ -3448,25 +7420,66 @@
             <p:ph type="title"/>
           </p:nvPr>
         </p:nvSpPr>
-        <p:spPr/>
-        <p:txBody>
-          <a:bodyPr/>
+        <p:spPr>
+          <a:xfrm>
+            <a:off x="3718201" y="138871"/>
+            <a:ext cx="1928526" cy="566119"/>
+          </a:xfrm>
+        </p:spPr>
+        <p:txBody>
+          <a:bodyPr>
+            <a:normAutofit/>
+          </a:bodyPr>
           <a:lstStyle/>
           <a:p>
             <a:r>
               <a:rPr lang="zh-TW" altLang="en-US" dirty="0">
-                <a:latin typeface="標楷體" panose="03000509000000000000" pitchFamily="65" charset="-120"/>
-                <a:ea typeface="標楷體" panose="03000509000000000000" pitchFamily="65" charset="-120"/>
+                <a:latin typeface="Times New Roman" panose="02020603050405020304" pitchFamily="18" charset="0"/>
+                <a:cs typeface="Times New Roman" panose="02020603050405020304" pitchFamily="18" charset="0"/>
               </a:rPr>
-              <a:t>第一頁</a:t>
-            </a:r>
-          </a:p>
-        </p:txBody>
-      </p:sp>
+              <a:t>研究對象</a:t>
+            </a:r>
+            <a:endParaRPr dirty="0">
+              <a:latin typeface="Times New Roman" panose="02020603050405020304" pitchFamily="18" charset="0"/>
+              <a:cs typeface="Times New Roman" panose="02020603050405020304" pitchFamily="18" charset="0"/>
+            </a:endParaRPr>
+          </a:p>
+        </p:txBody>
+      </p:sp>
+      <p:pic>
+        <p:nvPicPr>
+          <p:cNvPr id="4" name="圖片 3">
+            <a:extLst>
+              <a:ext uri="{FF2B5EF4-FFF2-40B4-BE49-F238E27FC236}">
+                <a16:creationId xmlns:a16="http://schemas.microsoft.com/office/drawing/2014/main" id="{831B0F42-078C-19F8-066D-C71A369E6BB9}"/>
+              </a:ext>
+            </a:extLst>
+          </p:cNvPr>
+          <p:cNvPicPr>
+            <a:picLocks noChangeAspect="1"/>
+          </p:cNvPicPr>
+          <p:nvPr/>
+        </p:nvPicPr>
+        <p:blipFill>
+          <a:blip r:embed="rId3"/>
+          <a:stretch>
+            <a:fillRect/>
+          </a:stretch>
+        </p:blipFill>
+        <p:spPr>
+          <a:xfrm>
+            <a:off x="1220029" y="802951"/>
+            <a:ext cx="6924871" cy="5497575"/>
+          </a:xfrm>
+          <a:prstGeom prst="rect">
+            <a:avLst/>
+          </a:prstGeom>
+        </p:spPr>
+      </p:pic>
     </p:spTree>
     <p:extLst>
       <p:ext uri="{BB962C8B-B14F-4D97-AF65-F5344CB8AC3E}">
-        <p14:creationId xmlns:p14="http://schemas.microsoft.com/office/powerpoint/2010/main" val="4274161762"/>
+        <p14:creationId xmlns:p14="http://schemas.microsoft.com/office/powerpoint/2010/main" val="1084074448"/>
       </p:ext>
     </p:extLst>
   </p:cSld>
@@ -3476,7 +7489,787 @@
 </p:sld>
 </file>
 
+<file path=ppt/slides/slide6.xml><?xml version="1.0" encoding="utf-8"?>
+<p:sld xmlns:a="http://schemas.openxmlformats.org/drawingml/2006/main" xmlns:r="http://schemas.openxmlformats.org/officeDocument/2006/relationships" xmlns:p="http://schemas.openxmlformats.org/presentationml/2006/main">
+  <p:cSld>
+    <p:spTree>
+      <p:nvGrpSpPr>
+        <p:cNvPr id="1" name=""/>
+        <p:cNvGrpSpPr/>
+        <p:nvPr/>
+      </p:nvGrpSpPr>
+      <p:grpSpPr>
+        <a:xfrm>
+          <a:off x="0" y="0"/>
+          <a:ext cx="0" cy="0"/>
+          <a:chOff x="0" y="0"/>
+          <a:chExt cx="0" cy="0"/>
+        </a:xfrm>
+      </p:grpSpPr>
+      <p:sp>
+        <p:nvSpPr>
+          <p:cNvPr id="2" name="Title 1"/>
+          <p:cNvSpPr>
+            <a:spLocks noGrp="1"/>
+          </p:cNvSpPr>
+          <p:nvPr>
+            <p:ph type="title"/>
+          </p:nvPr>
+        </p:nvSpPr>
+        <p:spPr>
+          <a:xfrm>
+            <a:off x="2753938" y="9996"/>
+            <a:ext cx="3863187" cy="566119"/>
+          </a:xfrm>
+        </p:spPr>
+        <p:txBody>
+          <a:bodyPr/>
+          <a:lstStyle/>
+          <a:p>
+            <a:r>
+              <a:rPr lang="zh-TW" altLang="en-US" dirty="0">
+                <a:latin typeface="Times New Roman" panose="02020603050405020304" pitchFamily="18" charset="0"/>
+                <a:cs typeface="Times New Roman" panose="02020603050405020304" pitchFamily="18" charset="0"/>
+              </a:rPr>
+              <a:t>程式碼補全流程階梯</a:t>
+            </a:r>
+            <a:endParaRPr dirty="0">
+              <a:latin typeface="Times New Roman" panose="02020603050405020304" pitchFamily="18" charset="0"/>
+              <a:cs typeface="Times New Roman" panose="02020603050405020304" pitchFamily="18" charset="0"/>
+            </a:endParaRPr>
+          </a:p>
+        </p:txBody>
+      </p:sp>
+      <p:pic>
+        <p:nvPicPr>
+          <p:cNvPr id="7" name="圖片 6">
+            <a:extLst>
+              <a:ext uri="{FF2B5EF4-FFF2-40B4-BE49-F238E27FC236}">
+                <a16:creationId xmlns:a16="http://schemas.microsoft.com/office/drawing/2014/main" id="{8A211C53-0830-699B-4257-53DF14DBFBCB}"/>
+              </a:ext>
+            </a:extLst>
+          </p:cNvPr>
+          <p:cNvPicPr>
+            <a:picLocks noChangeAspect="1"/>
+          </p:cNvPicPr>
+          <p:nvPr/>
+        </p:nvPicPr>
+        <p:blipFill>
+          <a:blip r:embed="rId3"/>
+          <a:stretch>
+            <a:fillRect/>
+          </a:stretch>
+        </p:blipFill>
+        <p:spPr>
+          <a:xfrm>
+            <a:off x="1233519" y="569978"/>
+            <a:ext cx="6904027" cy="5929014"/>
+          </a:xfrm>
+          <a:prstGeom prst="rect">
+            <a:avLst/>
+          </a:prstGeom>
+        </p:spPr>
+      </p:pic>
+    </p:spTree>
+  </p:cSld>
+  <p:clrMapOvr>
+    <a:masterClrMapping/>
+  </p:clrMapOvr>
+</p:sld>
+</file>
+
+<file path=ppt/slides/slide7.xml><?xml version="1.0" encoding="utf-8"?>
+<p:sld xmlns:a="http://schemas.openxmlformats.org/drawingml/2006/main" xmlns:r="http://schemas.openxmlformats.org/officeDocument/2006/relationships" xmlns:p="http://schemas.openxmlformats.org/presentationml/2006/main">
+  <p:cSld>
+    <p:spTree>
+      <p:nvGrpSpPr>
+        <p:cNvPr id="1" name=""/>
+        <p:cNvGrpSpPr/>
+        <p:nvPr/>
+      </p:nvGrpSpPr>
+      <p:grpSpPr>
+        <a:xfrm>
+          <a:off x="0" y="0"/>
+          <a:ext cx="0" cy="0"/>
+          <a:chOff x="0" y="0"/>
+          <a:chExt cx="0" cy="0"/>
+        </a:xfrm>
+      </p:grpSpPr>
+      <p:sp>
+        <p:nvSpPr>
+          <p:cNvPr id="2" name="Title 1"/>
+          <p:cNvSpPr>
+            <a:spLocks noGrp="1"/>
+          </p:cNvSpPr>
+          <p:nvPr>
+            <p:ph type="title"/>
+          </p:nvPr>
+        </p:nvSpPr>
+        <p:spPr>
+          <a:xfrm>
+            <a:off x="3629510" y="391239"/>
+            <a:ext cx="1884980" cy="578393"/>
+          </a:xfrm>
+        </p:spPr>
+        <p:txBody>
+          <a:bodyPr/>
+          <a:lstStyle/>
+          <a:p>
+            <a:r>
+              <a:rPr dirty="0" err="1">
+                <a:latin typeface="Times New Roman" panose="02020603050405020304" pitchFamily="18" charset="0"/>
+                <a:cs typeface="Times New Roman" panose="02020603050405020304" pitchFamily="18" charset="0"/>
+              </a:rPr>
+              <a:t>行為指標</a:t>
+            </a:r>
+            <a:endParaRPr dirty="0">
+              <a:latin typeface="Times New Roman" panose="02020603050405020304" pitchFamily="18" charset="0"/>
+              <a:cs typeface="Times New Roman" panose="02020603050405020304" pitchFamily="18" charset="0"/>
+            </a:endParaRPr>
+          </a:p>
+        </p:txBody>
+      </p:sp>
+      <p:pic>
+        <p:nvPicPr>
+          <p:cNvPr id="5" name="圖片 4">
+            <a:extLst>
+              <a:ext uri="{FF2B5EF4-FFF2-40B4-BE49-F238E27FC236}">
+                <a16:creationId xmlns:a16="http://schemas.microsoft.com/office/drawing/2014/main" id="{F7A0D4AE-77FD-E0B2-584E-E6D0E1EDC2AC}"/>
+              </a:ext>
+            </a:extLst>
+          </p:cNvPr>
+          <p:cNvPicPr>
+            <a:picLocks noChangeAspect="1"/>
+          </p:cNvPicPr>
+          <p:nvPr/>
+        </p:nvPicPr>
+        <p:blipFill>
+          <a:blip r:embed="rId3"/>
+          <a:stretch>
+            <a:fillRect/>
+          </a:stretch>
+        </p:blipFill>
+        <p:spPr>
+          <a:xfrm>
+            <a:off x="858220" y="1105798"/>
+            <a:ext cx="7427559" cy="5238224"/>
+          </a:xfrm>
+          <a:prstGeom prst="rect">
+            <a:avLst/>
+          </a:prstGeom>
+        </p:spPr>
+      </p:pic>
+      <p:cxnSp>
+        <p:nvCxnSpPr>
+          <p:cNvPr id="4" name="直線接點 3">
+            <a:extLst>
+              <a:ext uri="{FF2B5EF4-FFF2-40B4-BE49-F238E27FC236}">
+                <a16:creationId xmlns:a16="http://schemas.microsoft.com/office/drawing/2014/main" id="{BF89F4D8-819F-31F7-8763-C80A92C07740}"/>
+              </a:ext>
+            </a:extLst>
+          </p:cNvPr>
+          <p:cNvCxnSpPr>
+            <a:cxnSpLocks/>
+          </p:cNvCxnSpPr>
+          <p:nvPr/>
+        </p:nvCxnSpPr>
+        <p:spPr>
+          <a:xfrm>
+            <a:off x="1159877" y="2190878"/>
+            <a:ext cx="957358" cy="0"/>
+          </a:xfrm>
+          <a:prstGeom prst="line">
+            <a:avLst/>
+          </a:prstGeom>
+          <a:ln w="28575"/>
+        </p:spPr>
+        <p:style>
+          <a:lnRef idx="1">
+            <a:schemeClr val="accent1"/>
+          </a:lnRef>
+          <a:fillRef idx="0">
+            <a:schemeClr val="accent1"/>
+          </a:fillRef>
+          <a:effectRef idx="0">
+            <a:schemeClr val="accent1"/>
+          </a:effectRef>
+          <a:fontRef idx="minor">
+            <a:schemeClr val="tx1"/>
+          </a:fontRef>
+        </p:style>
+      </p:cxnSp>
+      <p:cxnSp>
+        <p:nvCxnSpPr>
+          <p:cNvPr id="7" name="直線接點 6">
+            <a:extLst>
+              <a:ext uri="{FF2B5EF4-FFF2-40B4-BE49-F238E27FC236}">
+                <a16:creationId xmlns:a16="http://schemas.microsoft.com/office/drawing/2014/main" id="{08230EA2-681D-9989-F317-8089A0D79E2B}"/>
+              </a:ext>
+            </a:extLst>
+          </p:cNvPr>
+          <p:cNvCxnSpPr>
+            <a:cxnSpLocks/>
+          </p:cNvCxnSpPr>
+          <p:nvPr/>
+        </p:nvCxnSpPr>
+        <p:spPr>
+          <a:xfrm>
+            <a:off x="1116919" y="2668535"/>
+            <a:ext cx="1184424" cy="0"/>
+          </a:xfrm>
+          <a:prstGeom prst="line">
+            <a:avLst/>
+          </a:prstGeom>
+          <a:ln w="28575"/>
+        </p:spPr>
+        <p:style>
+          <a:lnRef idx="1">
+            <a:schemeClr val="accent1"/>
+          </a:lnRef>
+          <a:fillRef idx="0">
+            <a:schemeClr val="accent1"/>
+          </a:fillRef>
+          <a:effectRef idx="0">
+            <a:schemeClr val="accent1"/>
+          </a:effectRef>
+          <a:fontRef idx="minor">
+            <a:schemeClr val="tx1"/>
+          </a:fontRef>
+        </p:style>
+      </p:cxnSp>
+      <p:cxnSp>
+        <p:nvCxnSpPr>
+          <p:cNvPr id="10" name="直線接點 9">
+            <a:extLst>
+              <a:ext uri="{FF2B5EF4-FFF2-40B4-BE49-F238E27FC236}">
+                <a16:creationId xmlns:a16="http://schemas.microsoft.com/office/drawing/2014/main" id="{6D253946-69A8-A5CC-0F07-6FAA701419F5}"/>
+              </a:ext>
+            </a:extLst>
+          </p:cNvPr>
+          <p:cNvCxnSpPr>
+            <a:cxnSpLocks/>
+          </p:cNvCxnSpPr>
+          <p:nvPr/>
+        </p:nvCxnSpPr>
+        <p:spPr>
+          <a:xfrm>
+            <a:off x="1159877" y="4477901"/>
+            <a:ext cx="1294888" cy="0"/>
+          </a:xfrm>
+          <a:prstGeom prst="line">
+            <a:avLst/>
+          </a:prstGeom>
+          <a:ln w="28575"/>
+        </p:spPr>
+        <p:style>
+          <a:lnRef idx="1">
+            <a:schemeClr val="accent1"/>
+          </a:lnRef>
+          <a:fillRef idx="0">
+            <a:schemeClr val="accent1"/>
+          </a:fillRef>
+          <a:effectRef idx="0">
+            <a:schemeClr val="accent1"/>
+          </a:effectRef>
+          <a:fontRef idx="minor">
+            <a:schemeClr val="tx1"/>
+          </a:fontRef>
+        </p:style>
+      </p:cxnSp>
+      <p:cxnSp>
+        <p:nvCxnSpPr>
+          <p:cNvPr id="15" name="直線接點 14">
+            <a:extLst>
+              <a:ext uri="{FF2B5EF4-FFF2-40B4-BE49-F238E27FC236}">
+                <a16:creationId xmlns:a16="http://schemas.microsoft.com/office/drawing/2014/main" id="{1C1A6668-966E-5035-78F7-3CBA3B76C3FB}"/>
+              </a:ext>
+            </a:extLst>
+          </p:cNvPr>
+          <p:cNvCxnSpPr>
+            <a:cxnSpLocks/>
+          </p:cNvCxnSpPr>
+          <p:nvPr/>
+        </p:nvCxnSpPr>
+        <p:spPr>
+          <a:xfrm>
+            <a:off x="1159877" y="4759177"/>
+            <a:ext cx="1571049" cy="0"/>
+          </a:xfrm>
+          <a:prstGeom prst="line">
+            <a:avLst/>
+          </a:prstGeom>
+          <a:ln w="28575"/>
+        </p:spPr>
+        <p:style>
+          <a:lnRef idx="1">
+            <a:schemeClr val="accent1"/>
+          </a:lnRef>
+          <a:fillRef idx="0">
+            <a:schemeClr val="accent1"/>
+          </a:fillRef>
+          <a:effectRef idx="0">
+            <a:schemeClr val="accent1"/>
+          </a:effectRef>
+          <a:fontRef idx="minor">
+            <a:schemeClr val="tx1"/>
+          </a:fontRef>
+        </p:style>
+      </p:cxnSp>
+    </p:spTree>
+  </p:cSld>
+  <p:clrMapOvr>
+    <a:masterClrMapping/>
+  </p:clrMapOvr>
+</p:sld>
+</file>
+
+<file path=ppt/slides/slide8.xml><?xml version="1.0" encoding="utf-8"?>
+<p:sld xmlns:a="http://schemas.openxmlformats.org/drawingml/2006/main" xmlns:r="http://schemas.openxmlformats.org/officeDocument/2006/relationships" xmlns:p="http://schemas.openxmlformats.org/presentationml/2006/main">
+  <p:cSld>
+    <p:spTree>
+      <p:nvGrpSpPr>
+        <p:cNvPr id="1" name="">
+          <a:extLst>
+            <a:ext uri="{FF2B5EF4-FFF2-40B4-BE49-F238E27FC236}">
+              <a16:creationId xmlns:a16="http://schemas.microsoft.com/office/drawing/2014/main" id="{16F8F89E-D7C0-CC57-2557-02624C7E472D}"/>
+            </a:ext>
+          </a:extLst>
+        </p:cNvPr>
+        <p:cNvGrpSpPr/>
+        <p:nvPr/>
+      </p:nvGrpSpPr>
+      <p:grpSpPr>
+        <a:xfrm>
+          <a:off x="0" y="0"/>
+          <a:ext cx="0" cy="0"/>
+          <a:chOff x="0" y="0"/>
+          <a:chExt cx="0" cy="0"/>
+        </a:xfrm>
+      </p:grpSpPr>
+      <p:sp>
+        <p:nvSpPr>
+          <p:cNvPr id="2" name="Title 1">
+            <a:extLst>
+              <a:ext uri="{FF2B5EF4-FFF2-40B4-BE49-F238E27FC236}">
+                <a16:creationId xmlns:a16="http://schemas.microsoft.com/office/drawing/2014/main" id="{6B235372-3B91-0780-2D14-B5FC72DE3C32}"/>
+              </a:ext>
+            </a:extLst>
+          </p:cNvPr>
+          <p:cNvSpPr>
+            <a:spLocks noGrp="1"/>
+          </p:cNvSpPr>
+          <p:nvPr>
+            <p:ph type="title"/>
+          </p:nvPr>
+        </p:nvSpPr>
+        <p:spPr>
+          <a:xfrm>
+            <a:off x="3657200" y="34376"/>
+            <a:ext cx="1829600" cy="558460"/>
+          </a:xfrm>
+        </p:spPr>
+        <p:txBody>
+          <a:bodyPr>
+            <a:normAutofit/>
+          </a:bodyPr>
+          <a:lstStyle/>
+          <a:p>
+            <a:r>
+              <a:rPr lang="zh-TW" altLang="en-US" dirty="0">
+                <a:latin typeface="Times New Roman" panose="02020603050405020304" pitchFamily="18" charset="0"/>
+                <a:cs typeface="Times New Roman" panose="02020603050405020304" pitchFamily="18" charset="0"/>
+              </a:rPr>
+              <a:t>相關矩陣</a:t>
+            </a:r>
+            <a:endParaRPr dirty="0">
+              <a:latin typeface="Times New Roman" panose="02020603050405020304" pitchFamily="18" charset="0"/>
+              <a:cs typeface="Times New Roman" panose="02020603050405020304" pitchFamily="18" charset="0"/>
+            </a:endParaRPr>
+          </a:p>
+        </p:txBody>
+      </p:sp>
+      <p:pic>
+        <p:nvPicPr>
+          <p:cNvPr id="4" name="圖片 3">
+            <a:extLst>
+              <a:ext uri="{FF2B5EF4-FFF2-40B4-BE49-F238E27FC236}">
+                <a16:creationId xmlns:a16="http://schemas.microsoft.com/office/drawing/2014/main" id="{18DBA637-9A99-A123-79AA-3E3A90F3BF61}"/>
+              </a:ext>
+            </a:extLst>
+          </p:cNvPr>
+          <p:cNvPicPr>
+            <a:picLocks noChangeAspect="1"/>
+          </p:cNvPicPr>
+          <p:nvPr/>
+        </p:nvPicPr>
+        <p:blipFill>
+          <a:blip r:embed="rId3"/>
+          <a:stretch>
+            <a:fillRect/>
+          </a:stretch>
+        </p:blipFill>
+        <p:spPr>
+          <a:xfrm>
+            <a:off x="1132261" y="558460"/>
+            <a:ext cx="6879478" cy="6014174"/>
+          </a:xfrm>
+          <a:prstGeom prst="rect">
+            <a:avLst/>
+          </a:prstGeom>
+        </p:spPr>
+      </p:pic>
+    </p:spTree>
+    <p:extLst>
+      <p:ext uri="{BB962C8B-B14F-4D97-AF65-F5344CB8AC3E}">
+        <p14:creationId xmlns:p14="http://schemas.microsoft.com/office/powerpoint/2010/main" val="3257297219"/>
+      </p:ext>
+    </p:extLst>
+  </p:cSld>
+  <p:clrMapOvr>
+    <a:masterClrMapping/>
+  </p:clrMapOvr>
+</p:sld>
+</file>
+
+<file path=ppt/slides/slide9.xml><?xml version="1.0" encoding="utf-8"?>
+<p:sld xmlns:a="http://schemas.openxmlformats.org/drawingml/2006/main" xmlns:r="http://schemas.openxmlformats.org/officeDocument/2006/relationships" xmlns:p="http://schemas.openxmlformats.org/presentationml/2006/main">
+  <p:cSld>
+    <p:spTree>
+      <p:nvGrpSpPr>
+        <p:cNvPr id="1" name=""/>
+        <p:cNvGrpSpPr/>
+        <p:nvPr/>
+      </p:nvGrpSpPr>
+      <p:grpSpPr>
+        <a:xfrm>
+          <a:off x="0" y="0"/>
+          <a:ext cx="0" cy="0"/>
+          <a:chOff x="0" y="0"/>
+          <a:chExt cx="0" cy="0"/>
+        </a:xfrm>
+      </p:grpSpPr>
+      <p:sp>
+        <p:nvSpPr>
+          <p:cNvPr id="2" name="Title 1"/>
+          <p:cNvSpPr>
+            <a:spLocks noGrp="1"/>
+          </p:cNvSpPr>
+          <p:nvPr>
+            <p:ph type="title"/>
+          </p:nvPr>
+        </p:nvSpPr>
+        <p:spPr>
+          <a:xfrm>
+            <a:off x="3366289" y="65328"/>
+            <a:ext cx="2699857" cy="521638"/>
+          </a:xfrm>
+        </p:spPr>
+        <p:txBody>
+          <a:bodyPr>
+            <a:noAutofit/>
+          </a:bodyPr>
+          <a:lstStyle/>
+          <a:p>
+            <a:r>
+              <a:rPr lang="zh-TW" altLang="en-US" dirty="0"/>
+              <a:t>指標降維結果</a:t>
+            </a:r>
+            <a:endParaRPr dirty="0"/>
+          </a:p>
+        </p:txBody>
+      </p:sp>
+      <p:pic>
+        <p:nvPicPr>
+          <p:cNvPr id="5" name="圖片 4">
+            <a:extLst>
+              <a:ext uri="{FF2B5EF4-FFF2-40B4-BE49-F238E27FC236}">
+                <a16:creationId xmlns:a16="http://schemas.microsoft.com/office/drawing/2014/main" id="{20135E3F-FFF6-9A82-D571-73E423E5C9A9}"/>
+              </a:ext>
+            </a:extLst>
+          </p:cNvPr>
+          <p:cNvPicPr>
+            <a:picLocks noChangeAspect="1"/>
+          </p:cNvPicPr>
+          <p:nvPr/>
+        </p:nvPicPr>
+        <p:blipFill>
+          <a:blip r:embed="rId3"/>
+          <a:stretch>
+            <a:fillRect/>
+          </a:stretch>
+        </p:blipFill>
+        <p:spPr>
+          <a:xfrm>
+            <a:off x="1362396" y="593102"/>
+            <a:ext cx="6707644" cy="6112601"/>
+          </a:xfrm>
+          <a:prstGeom prst="rect">
+            <a:avLst/>
+          </a:prstGeom>
+        </p:spPr>
+      </p:pic>
+    </p:spTree>
+  </p:cSld>
+  <p:clrMapOvr>
+    <a:masterClrMapping/>
+  </p:clrMapOvr>
+</p:sld>
+</file>
+
 <file path=ppt/theme/theme1.xml><?xml version="1.0" encoding="utf-8"?>
+<a:theme xmlns:a="http://schemas.openxmlformats.org/drawingml/2006/main" name="圖庫">
+  <a:themeElements>
+    <a:clrScheme name="圖庫">
+      <a:dk1>
+        <a:sysClr val="windowText" lastClr="000000"/>
+      </a:dk1>
+      <a:lt1>
+        <a:sysClr val="window" lastClr="FFFFFF"/>
+      </a:lt1>
+      <a:dk2>
+        <a:srgbClr val="454545"/>
+      </a:dk2>
+      <a:lt2>
+        <a:srgbClr val="DFDBD5"/>
+      </a:lt2>
+      <a:accent1>
+        <a:srgbClr val="B71E42"/>
+      </a:accent1>
+      <a:accent2>
+        <a:srgbClr val="DE478E"/>
+      </a:accent2>
+      <a:accent3>
+        <a:srgbClr val="BC72F0"/>
+      </a:accent3>
+      <a:accent4>
+        <a:srgbClr val="795FAF"/>
+      </a:accent4>
+      <a:accent5>
+        <a:srgbClr val="586EA6"/>
+      </a:accent5>
+      <a:accent6>
+        <a:srgbClr val="6892A0"/>
+      </a:accent6>
+      <a:hlink>
+        <a:srgbClr val="FA2B5C"/>
+      </a:hlink>
+      <a:folHlink>
+        <a:srgbClr val="BC658E"/>
+      </a:folHlink>
+    </a:clrScheme>
+    <a:fontScheme name="圖庫">
+      <a:majorFont>
+        <a:latin typeface="Gill Sans MT" panose="020B0502020104020203"/>
+        <a:ea typeface=""/>
+        <a:cs typeface=""/>
+        <a:font script="Jpan" typeface="游ゴシック Light"/>
+        <a:font script="Hang" typeface="맑은 고딕"/>
+        <a:font script="Hans" typeface="等线 Light"/>
+        <a:font script="Hant" typeface="新細明體"/>
+        <a:font script="Arab" typeface="Times New Roman"/>
+        <a:font script="Hebr" typeface="Times New Roman"/>
+        <a:font script="Thai" typeface="Angsana New"/>
+        <a:font script="Ethi" typeface="Nyala"/>
+        <a:font script="Beng" typeface="Vrinda"/>
+        <a:font script="Gujr" typeface="Shruti"/>
+        <a:font script="Khmr" typeface="MoolBoran"/>
+        <a:font script="Knda" typeface="Tunga"/>
+        <a:font script="Guru" typeface="Raavi"/>
+        <a:font script="Cans" typeface="Euphemia"/>
+        <a:font script="Cher" typeface="Plantagenet Cherokee"/>
+        <a:font script="Yiii" typeface="Microsoft Yi Baiti"/>
+        <a:font script="Tibt" typeface="Microsoft Himalaya"/>
+        <a:font script="Thaa" typeface="MV Boli"/>
+        <a:font script="Deva" typeface="Mangal"/>
+        <a:font script="Telu" typeface="Gautami"/>
+        <a:font script="Taml" typeface="Latha"/>
+        <a:font script="Syrc" typeface="Estrangelo Edessa"/>
+        <a:font script="Orya" typeface="Kalinga"/>
+        <a:font script="Mlym" typeface="Kartika"/>
+        <a:font script="Laoo" typeface="DokChampa"/>
+        <a:font script="Sinh" typeface="Iskoola Pota"/>
+        <a:font script="Mong" typeface="Mongolian Baiti"/>
+        <a:font script="Viet" typeface="Times New Roman"/>
+        <a:font script="Uigh" typeface="Microsoft Uighur"/>
+        <a:font script="Geor" typeface="Sylfaen"/>
+      </a:majorFont>
+      <a:minorFont>
+        <a:latin typeface="Gill Sans MT" panose="020B0502020104020203"/>
+        <a:ea typeface=""/>
+        <a:cs typeface=""/>
+        <a:font script="Jpan" typeface="游ゴシック"/>
+        <a:font script="Hang" typeface="맑은 고딕"/>
+        <a:font script="Hans" typeface="等线"/>
+        <a:font script="Hant" typeface="新細明體"/>
+        <a:font script="Arab" typeface="Arial"/>
+        <a:font script="Hebr" typeface="Arial"/>
+        <a:font script="Thai" typeface="Cordia New"/>
+        <a:font script="Ethi" typeface="Nyala"/>
+        <a:font script="Beng" typeface="Vrinda"/>
+        <a:font script="Gujr" typeface="Shruti"/>
+        <a:font script="Khmr" typeface="DaunPenh"/>
+        <a:font script="Knda" typeface="Tunga"/>
+        <a:font script="Guru" typeface="Raavi"/>
+        <a:font script="Cans" typeface="Euphemia"/>
+        <a:font script="Cher" typeface="Plantagenet Cherokee"/>
+        <a:font script="Yiii" typeface="Microsoft Yi Baiti"/>
+        <a:font script="Tibt" typeface="Microsoft Himalaya"/>
+        <a:font script="Thaa" typeface="MV Boli"/>
+        <a:font script="Deva" typeface="Mangal"/>
+        <a:font script="Telu" typeface="Gautami"/>
+        <a:font script="Taml" typeface="Latha"/>
+        <a:font script="Syrc" typeface="Estrangelo Edessa"/>
+        <a:font script="Orya" typeface="Kalinga"/>
+        <a:font script="Mlym" typeface="Kartika"/>
+        <a:font script="Laoo" typeface="DokChampa"/>
+        <a:font script="Sinh" typeface="Iskoola Pota"/>
+        <a:font script="Mong" typeface="Mongolian Baiti"/>
+        <a:font script="Viet" typeface="Arial"/>
+        <a:font script="Uigh" typeface="Microsoft Uighur"/>
+        <a:font script="Geor" typeface="Sylfaen"/>
+      </a:minorFont>
+    </a:fontScheme>
+    <a:fmtScheme name="圖庫">
+      <a:fillStyleLst>
+        <a:solidFill>
+          <a:schemeClr val="phClr"/>
+        </a:solidFill>
+        <a:gradFill rotWithShape="1">
+          <a:gsLst>
+            <a:gs pos="0">
+              <a:schemeClr val="phClr">
+                <a:tint val="54000"/>
+                <a:alpha val="100000"/>
+                <a:satMod val="105000"/>
+                <a:lumMod val="110000"/>
+              </a:schemeClr>
+            </a:gs>
+            <a:gs pos="100000">
+              <a:schemeClr val="phClr">
+                <a:tint val="78000"/>
+                <a:alpha val="92000"/>
+                <a:satMod val="109000"/>
+                <a:lumMod val="100000"/>
+              </a:schemeClr>
+            </a:gs>
+          </a:gsLst>
+          <a:lin ang="5400000" scaled="0"/>
+        </a:gradFill>
+        <a:gradFill rotWithShape="1">
+          <a:gsLst>
+            <a:gs pos="0">
+              <a:schemeClr val="phClr">
+                <a:tint val="98000"/>
+                <a:satMod val="110000"/>
+                <a:lumMod val="104000"/>
+              </a:schemeClr>
+            </a:gs>
+            <a:gs pos="69000">
+              <a:schemeClr val="phClr">
+                <a:shade val="88000"/>
+                <a:satMod val="130000"/>
+                <a:lumMod val="92000"/>
+              </a:schemeClr>
+            </a:gs>
+            <a:gs pos="100000">
+              <a:schemeClr val="phClr">
+                <a:shade val="78000"/>
+                <a:satMod val="130000"/>
+                <a:lumMod val="92000"/>
+              </a:schemeClr>
+            </a:gs>
+          </a:gsLst>
+          <a:lin ang="5400000" scaled="0"/>
+        </a:gradFill>
+      </a:fillStyleLst>
+      <a:lnStyleLst>
+        <a:ln w="9525" cap="flat" cmpd="sng" algn="ctr">
+          <a:solidFill>
+            <a:schemeClr val="phClr"/>
+          </a:solidFill>
+          <a:prstDash val="solid"/>
+        </a:ln>
+        <a:ln w="15875" cap="flat" cmpd="sng" algn="ctr">
+          <a:solidFill>
+            <a:schemeClr val="phClr"/>
+          </a:solidFill>
+          <a:prstDash val="solid"/>
+        </a:ln>
+        <a:ln w="22225" cap="flat" cmpd="sng" algn="ctr">
+          <a:solidFill>
+            <a:schemeClr val="phClr"/>
+          </a:solidFill>
+          <a:prstDash val="solid"/>
+        </a:ln>
+      </a:lnStyleLst>
+      <a:effectStyleLst>
+        <a:effectStyle>
+          <a:effectLst/>
+        </a:effectStyle>
+        <a:effectStyle>
+          <a:effectLst/>
+        </a:effectStyle>
+        <a:effectStyle>
+          <a:effectLst>
+            <a:outerShdw blurRad="50800" dist="50800" dir="5400000" sx="96000" sy="96000" rotWithShape="0">
+              <a:srgbClr val="000000">
+                <a:alpha val="48000"/>
+              </a:srgbClr>
+            </a:outerShdw>
+          </a:effectLst>
+          <a:scene3d>
+            <a:camera prst="orthographicFront">
+              <a:rot lat="0" lon="0" rev="0"/>
+            </a:camera>
+            <a:lightRig rig="balanced" dir="t">
+              <a:rot lat="0" lon="0" rev="1080000"/>
+            </a:lightRig>
+          </a:scene3d>
+          <a:sp3d>
+            <a:bevelT w="38100" h="12700" prst="softRound"/>
+          </a:sp3d>
+        </a:effectStyle>
+      </a:effectStyleLst>
+      <a:bgFillStyleLst>
+        <a:solidFill>
+          <a:schemeClr val="phClr"/>
+        </a:solidFill>
+        <a:solidFill>
+          <a:schemeClr val="phClr"/>
+        </a:solidFill>
+        <a:gradFill rotWithShape="1">
+          <a:gsLst>
+            <a:gs pos="0">
+              <a:schemeClr val="phClr">
+                <a:tint val="94000"/>
+                <a:satMod val="80000"/>
+                <a:lumMod val="106000"/>
+              </a:schemeClr>
+            </a:gs>
+            <a:gs pos="100000">
+              <a:schemeClr val="phClr">
+                <a:shade val="80000"/>
+              </a:schemeClr>
+            </a:gs>
+          </a:gsLst>
+          <a:path path="circle">
+            <a:fillToRect l="50000" t="50000" r="50000" b="50000"/>
+          </a:path>
+        </a:gradFill>
+      </a:bgFillStyleLst>
+    </a:fmtScheme>
+  </a:themeElements>
+  <a:objectDefaults/>
+  <a:extraClrSchemeLst/>
+  <a:extLst>
+    <a:ext uri="{05A4C25C-085E-4340-85A3-A5531E510DB2}">
+      <thm15:themeFamily xmlns:thm15="http://schemas.microsoft.com/office/thememl/2012/main" name="Gallery" id="{BBFCD31E-59A1-489D-B089-A3EAD7CAE12E}" vid="{F5E91637-A7B6-4E27-B710-77DA7014EE1E}"/>
+    </a:ext>
+  </a:extLst>
+</a:theme>
+</file>
+
+<file path=ppt/theme/theme2.xml><?xml version="1.0" encoding="utf-8"?>
 <a:theme xmlns:a="http://schemas.openxmlformats.org/drawingml/2006/main" name="Office 佈景主題">
   <a:themeElements>
     <a:clrScheme name="Office">

--- a/slides/speaker2.pptx
+++ b/slides/speaker2.pptx
@@ -221,7 +221,7 @@
           <a:p>
             <a:fld id="{1413806B-076E-41F8-8013-5FD802C59FD7}" type="datetimeFigureOut">
               <a:rPr lang="zh-TW" altLang="en-US" smtClean="0"/>
-              <a:t>2025/12/8</a:t>
+              <a:t>2025/12/9</a:t>
             </a:fld>
             <a:endParaRPr lang="zh-TW" altLang="en-US"/>
           </a:p>
@@ -532,54 +532,6 @@
           <a:bodyPr/>
           <a:lstStyle/>
           <a:p>
-            <a:r>
-              <a:rPr lang="zh-TW" altLang="en-US" dirty="0"/>
-              <a:t>大家好，我是陳冠閔。</a:t>
-            </a:r>
-            <a:br>
-              <a:rPr lang="zh-TW" altLang="en-US" dirty="0"/>
-            </a:br>
-            <a:r>
-              <a:rPr lang="zh-TW" altLang="en-US" dirty="0"/>
-              <a:t>今天要分享的主題是 </a:t>
-            </a:r>
-            <a:r>
-              <a:rPr lang="en-US" altLang="zh-TW" dirty="0"/>
-              <a:t>GitHub Copilot </a:t>
-            </a:r>
-            <a:r>
-              <a:rPr lang="zh-TW" altLang="en-US" dirty="0"/>
-              <a:t>補全行為與開發者生產力之間的關係。</a:t>
-            </a:r>
-          </a:p>
-          <a:p>
-            <a:r>
-              <a:rPr lang="zh-TW" altLang="en-US" dirty="0"/>
-              <a:t>其實現在很多工程師都在用 </a:t>
-            </a:r>
-            <a:r>
-              <a:rPr lang="en-US" altLang="zh-TW" dirty="0"/>
-              <a:t>Copilot</a:t>
-            </a:r>
-            <a:r>
-              <a:rPr lang="zh-TW" altLang="en-US" dirty="0"/>
-              <a:t>，但它到底有沒有真的幫助我們寫程式？</a:t>
-            </a:r>
-            <a:br>
-              <a:rPr lang="zh-TW" altLang="en-US" dirty="0"/>
-            </a:br>
-            <a:r>
-              <a:rPr lang="zh-TW" altLang="en-US" dirty="0"/>
-              <a:t>什麼補全有用、什麼補全沒用、誰最受益、又在什麼情境下最有效？</a:t>
-            </a:r>
-          </a:p>
-          <a:p>
-            <a:r>
-              <a:rPr lang="zh-TW" altLang="en-US" dirty="0"/>
-              <a:t>這些問題一直都沒有很好的答案，因此今天就透過最新的實證研究來做分享。</a:t>
-            </a:r>
-          </a:p>
-          <a:p>
             <a:endParaRPr lang="zh-TW" altLang="en-US" dirty="0"/>
           </a:p>
         </p:txBody>
@@ -664,103 +616,6 @@
           <a:bodyPr/>
           <a:lstStyle/>
           <a:p>
-            <a:r>
-              <a:rPr lang="zh-TW" altLang="en-US" dirty="0"/>
-              <a:t>不同族群的使用者，其實受益程度也不太一樣。</a:t>
-            </a:r>
-          </a:p>
-          <a:p>
-            <a:r>
-              <a:rPr lang="zh-TW" altLang="en-US" dirty="0"/>
-              <a:t>例如：</a:t>
-            </a:r>
-          </a:p>
-          <a:p>
-            <a:r>
-              <a:rPr lang="zh-TW" altLang="en-US" b="1" dirty="0"/>
-              <a:t>新手工程師</a:t>
-            </a:r>
-            <a:r>
-              <a:rPr lang="zh-TW" altLang="en-US" dirty="0"/>
-              <a:t>：補全接受率高、生產力提升感也高</a:t>
-            </a:r>
-          </a:p>
-          <a:p>
-            <a:r>
-              <a:rPr lang="en-US" altLang="zh-TW" b="1" dirty="0"/>
-              <a:t>3–10 </a:t>
-            </a:r>
-            <a:r>
-              <a:rPr lang="zh-TW" altLang="en-US" b="1" dirty="0"/>
-              <a:t>年經驗的中階工程師</a:t>
-            </a:r>
-            <a:r>
-              <a:rPr lang="zh-TW" altLang="en-US" dirty="0"/>
-              <a:t>：是最受益的一群，因為熟悉語法但又要大量寫樣板</a:t>
-            </a:r>
-          </a:p>
-          <a:p>
-            <a:r>
-              <a:rPr lang="zh-TW" altLang="en-US" b="1" dirty="0"/>
-              <a:t>高年資工程師</a:t>
-            </a:r>
-            <a:r>
-              <a:rPr lang="zh-TW" altLang="en-US" dirty="0"/>
-              <a:t>：效果相對比較弱</a:t>
-            </a:r>
-          </a:p>
-          <a:p>
-            <a:r>
-              <a:rPr lang="zh-TW" altLang="en-US" b="1" dirty="0"/>
-              <a:t>語言面向：</a:t>
-            </a:r>
-            <a:r>
-              <a:rPr lang="en-US" altLang="zh-TW" b="1" dirty="0"/>
-              <a:t>JS </a:t>
-            </a:r>
-            <a:r>
-              <a:rPr lang="zh-TW" altLang="en-US" b="1" dirty="0"/>
-              <a:t>和 </a:t>
-            </a:r>
-            <a:r>
-              <a:rPr lang="en-US" altLang="zh-TW" b="1" dirty="0"/>
-              <a:t>TS </a:t>
-            </a:r>
-            <a:r>
-              <a:rPr lang="zh-TW" altLang="en-US" b="1" dirty="0"/>
-              <a:t>使用者提升最多</a:t>
-            </a:r>
-            <a:br>
-              <a:rPr lang="zh-TW" altLang="en-US" dirty="0"/>
-            </a:br>
-            <a:r>
-              <a:rPr lang="zh-TW" altLang="en-US" dirty="0"/>
-              <a:t>→ 可能因為前端開發樣板多，</a:t>
-            </a:r>
-            <a:r>
-              <a:rPr lang="en-US" altLang="zh-TW" dirty="0"/>
-              <a:t>Copilot </a:t>
-            </a:r>
-            <a:r>
-              <a:rPr lang="zh-TW" altLang="en-US" dirty="0"/>
-              <a:t>的補全容易命中需求</a:t>
-            </a:r>
-          </a:p>
-          <a:p>
-            <a:r>
-              <a:rPr lang="zh-TW" altLang="en-US" dirty="0"/>
-              <a:t>簡單來說，越常寫重複性語法的人，越容易從 </a:t>
-            </a:r>
-            <a:r>
-              <a:rPr lang="en-US" altLang="zh-TW" dirty="0"/>
-              <a:t>Copilot </a:t>
-            </a:r>
-            <a:r>
-              <a:rPr lang="zh-TW" altLang="en-US" dirty="0"/>
-              <a:t>中獲得幫助。</a:t>
-            </a:r>
-          </a:p>
-          <a:p>
             <a:endParaRPr lang="zh-TW" altLang="en-US" dirty="0"/>
           </a:p>
         </p:txBody>
@@ -845,91 +700,6 @@
           <a:bodyPr/>
           <a:lstStyle/>
           <a:p>
-            <a:r>
-              <a:rPr lang="en-US" altLang="zh-TW" dirty="0"/>
-              <a:t>Copilot </a:t>
-            </a:r>
-            <a:r>
-              <a:rPr lang="zh-TW" altLang="en-US" dirty="0"/>
-              <a:t>的補全行為也會受到「時間」影響。</a:t>
-            </a:r>
-          </a:p>
-          <a:p>
-            <a:r>
-              <a:rPr lang="zh-TW" altLang="en-US" dirty="0"/>
-              <a:t>研究發現：</a:t>
-            </a:r>
-          </a:p>
-          <a:p>
-            <a:r>
-              <a:rPr lang="zh-TW" altLang="en-US" b="1" dirty="0"/>
-              <a:t>週末的接受率最高</a:t>
-            </a:r>
-            <a:br>
-              <a:rPr lang="zh-TW" altLang="en-US" dirty="0"/>
-            </a:br>
-            <a:r>
-              <a:rPr lang="zh-TW" altLang="en-US" dirty="0"/>
-              <a:t>可能因為寫 </a:t>
-            </a:r>
-            <a:r>
-              <a:rPr lang="en-US" altLang="zh-TW" dirty="0"/>
-              <a:t>side project</a:t>
-            </a:r>
-            <a:r>
-              <a:rPr lang="zh-TW" altLang="en-US" dirty="0"/>
-              <a:t>，比較放鬆、比較願意採用 </a:t>
-            </a:r>
-            <a:r>
-              <a:rPr lang="en-US" altLang="zh-TW" dirty="0"/>
-              <a:t>AI </a:t>
-            </a:r>
-            <a:r>
-              <a:rPr lang="zh-TW" altLang="en-US" dirty="0"/>
-              <a:t>建議</a:t>
-            </a:r>
-          </a:p>
-          <a:p>
-            <a:r>
-              <a:rPr lang="zh-TW" altLang="en-US" b="1" dirty="0"/>
-              <a:t>下班時間（下午四點後）也偏高</a:t>
-            </a:r>
-            <a:br>
-              <a:rPr lang="zh-TW" altLang="en-US" dirty="0"/>
-            </a:br>
-            <a:r>
-              <a:rPr lang="zh-TW" altLang="en-US" dirty="0"/>
-              <a:t>開發者通常比較有彈性，接受補全的意願稍微增加</a:t>
-            </a:r>
-          </a:p>
-          <a:p>
-            <a:r>
-              <a:rPr lang="zh-TW" altLang="en-US" b="1" dirty="0"/>
-              <a:t>上班時間最低</a:t>
-            </a:r>
-            <a:br>
-              <a:rPr lang="zh-TW" altLang="en-US" dirty="0"/>
-            </a:br>
-            <a:r>
-              <a:rPr lang="zh-TW" altLang="en-US" dirty="0"/>
-              <a:t>可能因為正式開發情境比較要求精準，開發者採用補全會更謹慎</a:t>
-            </a:r>
-          </a:p>
-          <a:p>
-            <a:r>
-              <a:rPr lang="zh-TW" altLang="en-US" dirty="0"/>
-              <a:t>這顯示 </a:t>
-            </a:r>
-            <a:r>
-              <a:rPr lang="en-US" altLang="zh-TW" dirty="0"/>
-              <a:t>Copilot </a:t>
-            </a:r>
-            <a:r>
-              <a:rPr lang="zh-TW" altLang="en-US" dirty="0"/>
-              <a:t>是一個受情境影響很大的工具，也讓我們了解工程師的行為模式。</a:t>
-            </a:r>
-          </a:p>
-          <a:p>
             <a:endParaRPr lang="zh-TW" altLang="en-US" dirty="0"/>
           </a:p>
         </p:txBody>
@@ -1014,79 +784,6 @@
           <a:bodyPr/>
           <a:lstStyle/>
           <a:p>
-            <a:r>
-              <a:rPr lang="zh-TW" altLang="en-US" dirty="0"/>
-              <a:t>基於上述分析，研究整理了三個重要討論點：</a:t>
-            </a:r>
-          </a:p>
-          <a:p>
-            <a:r>
-              <a:rPr lang="zh-TW" altLang="en-US" dirty="0"/>
-              <a:t>第一，</a:t>
-            </a:r>
-            <a:r>
-              <a:rPr lang="zh-TW" altLang="en-US" b="1" dirty="0"/>
-              <a:t>補全的品質比數量更重要。</a:t>
-            </a:r>
-            <a:br>
-              <a:rPr lang="zh-TW" altLang="en-US" dirty="0"/>
-            </a:br>
-            <a:r>
-              <a:rPr lang="zh-TW" altLang="en-US" dirty="0"/>
-              <a:t>重點不在於 </a:t>
-            </a:r>
-            <a:r>
-              <a:rPr lang="en-US" altLang="zh-TW" dirty="0"/>
-              <a:t>Copilot </a:t>
-            </a:r>
-            <a:r>
-              <a:rPr lang="zh-TW" altLang="en-US" dirty="0"/>
-              <a:t>能補多少，而是使用者願意採用多少。</a:t>
-            </a:r>
-          </a:p>
-          <a:p>
-            <a:r>
-              <a:rPr lang="zh-TW" altLang="en-US" dirty="0"/>
-              <a:t>第二，</a:t>
-            </a:r>
-            <a:r>
-              <a:rPr lang="zh-TW" altLang="en-US" b="1" dirty="0"/>
-              <a:t>效果因人而異。</a:t>
-            </a:r>
-            <a:br>
-              <a:rPr lang="zh-TW" altLang="en-US" dirty="0"/>
-            </a:br>
-            <a:r>
-              <a:rPr lang="zh-TW" altLang="en-US" dirty="0"/>
-              <a:t>尤其是新手與中階工程師，通常會感受到最大的生產力提升。</a:t>
-            </a:r>
-          </a:p>
-          <a:p>
-            <a:r>
-              <a:rPr lang="zh-TW" altLang="en-US" dirty="0"/>
-              <a:t>第三，</a:t>
-            </a:r>
-            <a:r>
-              <a:rPr lang="zh-TW" altLang="en-US" b="1" dirty="0"/>
-              <a:t>使用情境會影響效果。</a:t>
-            </a:r>
-            <a:br>
-              <a:rPr lang="zh-TW" altLang="en-US" dirty="0"/>
-            </a:br>
-            <a:r>
-              <a:rPr lang="zh-TW" altLang="en-US" dirty="0"/>
-              <a:t>例如非工作時段，使用者比較願意接受補全，代表 </a:t>
-            </a:r>
-            <a:r>
-              <a:rPr lang="en-US" altLang="zh-TW" dirty="0"/>
-              <a:t>Copilot </a:t>
-            </a:r>
-            <a:r>
-              <a:rPr lang="zh-TW" altLang="en-US" dirty="0"/>
-              <a:t>的設計可考慮更動態、情境化的建議方式。</a:t>
-            </a:r>
-          </a:p>
-          <a:p>
             <a:endParaRPr lang="zh-TW" altLang="en-US" dirty="0"/>
           </a:p>
         </p:txBody>
@@ -1171,79 +868,6 @@
           <a:bodyPr/>
           <a:lstStyle/>
           <a:p>
-            <a:r>
-              <a:rPr lang="zh-TW" altLang="en-US" dirty="0"/>
-              <a:t>這篇研究的貢獻有三個：</a:t>
-            </a:r>
-          </a:p>
-          <a:p>
-            <a:r>
-              <a:rPr lang="zh-TW" altLang="en-US" dirty="0"/>
-              <a:t>第一，</a:t>
-            </a:r>
-            <a:r>
-              <a:rPr lang="zh-TW" altLang="en-US" b="1" dirty="0"/>
-              <a:t>首次建立「補全行為 → 生產力感受」的量化連結。</a:t>
-            </a:r>
-            <a:br>
-              <a:rPr lang="zh-TW" altLang="en-US" dirty="0"/>
-            </a:br>
-            <a:r>
-              <a:rPr lang="zh-TW" altLang="en-US" dirty="0"/>
-              <a:t>這讓 </a:t>
-            </a:r>
-            <a:r>
-              <a:rPr lang="en-US" altLang="zh-TW" dirty="0"/>
-              <a:t>Copilot </a:t>
-            </a:r>
-            <a:r>
-              <a:rPr lang="zh-TW" altLang="en-US" dirty="0"/>
-              <a:t>的效益不再只是主觀感覺，而是可被量化。</a:t>
-            </a:r>
-          </a:p>
-          <a:p>
-            <a:r>
-              <a:rPr lang="zh-TW" altLang="en-US" dirty="0"/>
-              <a:t>第二，</a:t>
-            </a:r>
-            <a:r>
-              <a:rPr lang="zh-TW" altLang="en-US" b="1" dirty="0"/>
-              <a:t>提出一個新的補全設計觀點：可採用性比正確性更重要。</a:t>
-            </a:r>
-            <a:br>
-              <a:rPr lang="zh-TW" altLang="en-US" dirty="0"/>
-            </a:br>
-            <a:r>
-              <a:rPr lang="zh-TW" altLang="en-US" dirty="0"/>
-              <a:t>這對未來 </a:t>
-            </a:r>
-            <a:r>
-              <a:rPr lang="en-US" altLang="zh-TW" dirty="0"/>
-              <a:t>AI </a:t>
-            </a:r>
-            <a:r>
-              <a:rPr lang="zh-TW" altLang="en-US" dirty="0"/>
-              <a:t>開發工具的設計非常有意義。</a:t>
-            </a:r>
-          </a:p>
-          <a:p>
-            <a:r>
-              <a:rPr lang="zh-TW" altLang="en-US" dirty="0"/>
-              <a:t>第三，</a:t>
-            </a:r>
-            <a:r>
-              <a:rPr lang="zh-TW" altLang="en-US" b="1" dirty="0"/>
-              <a:t>揭示族群、語言與時間的差異。</a:t>
-            </a:r>
-            <a:br>
-              <a:rPr lang="zh-TW" altLang="en-US" dirty="0"/>
-            </a:br>
-            <a:r>
-              <a:rPr lang="zh-TW" altLang="en-US" dirty="0"/>
-              <a:t>這讓我們知道補全工具應該更個人化，不能所有使用者一視同仁。</a:t>
-            </a:r>
-          </a:p>
-          <a:p>
             <a:endParaRPr lang="zh-TW" altLang="en-US" dirty="0"/>
           </a:p>
         </p:txBody>
@@ -1328,60 +952,6 @@
           <a:bodyPr/>
           <a:lstStyle/>
           <a:p>
-            <a:r>
-              <a:rPr lang="zh-TW" altLang="en-US" dirty="0"/>
-              <a:t>最後做個總結：</a:t>
-            </a:r>
-          </a:p>
-          <a:p>
-            <a:r>
-              <a:rPr lang="zh-TW" altLang="en-US" dirty="0"/>
-              <a:t>整體來說，</a:t>
-            </a:r>
-            <a:r>
-              <a:rPr lang="en-US" altLang="zh-TW" dirty="0"/>
-              <a:t>Copilot </a:t>
-            </a:r>
-            <a:r>
-              <a:rPr lang="zh-TW" altLang="en-US" dirty="0"/>
-              <a:t>能為開發者帶來「小但穩定」的生產力提升。</a:t>
-            </a:r>
-            <a:br>
-              <a:rPr lang="zh-TW" altLang="en-US" dirty="0"/>
-            </a:br>
-            <a:r>
-              <a:rPr lang="zh-TW" altLang="en-US" dirty="0"/>
-              <a:t>真正有價值的不是補全的數量，而是那些能被接受、能減少思考負擔的補全。</a:t>
-            </a:r>
-          </a:p>
-          <a:p>
-            <a:r>
-              <a:rPr lang="zh-TW" altLang="en-US" dirty="0"/>
-              <a:t>研究也發現，中階工程師、</a:t>
-            </a:r>
-            <a:r>
-              <a:rPr lang="en-US" altLang="zh-TW" dirty="0"/>
-              <a:t>JS/TS </a:t>
-            </a:r>
-            <a:r>
-              <a:rPr lang="zh-TW" altLang="en-US" dirty="0"/>
-              <a:t>使用者是最明顯的受益族群。</a:t>
-            </a:r>
-            <a:br>
-              <a:rPr lang="zh-TW" altLang="en-US" dirty="0"/>
-            </a:br>
-            <a:r>
-              <a:rPr lang="zh-TW" altLang="en-US" dirty="0"/>
-              <a:t>而補全的效果會隨使用情境而改變，這也是未來工具開發時值得考慮的方向。</a:t>
-            </a:r>
-          </a:p>
-          <a:p>
-            <a:r>
-              <a:rPr lang="zh-TW" altLang="en-US" dirty="0"/>
-              <a:t>以上就是我的報告，謝謝大家。</a:t>
-            </a:r>
-          </a:p>
-          <a:p>
             <a:endParaRPr lang="zh-TW" altLang="en-US" dirty="0"/>
           </a:p>
         </p:txBody>
@@ -1466,82 +1036,6 @@
           <a:bodyPr/>
           <a:lstStyle/>
           <a:p>
-            <a:r>
-              <a:rPr lang="zh-TW" altLang="en-US" dirty="0"/>
-              <a:t>接下來是研究背景與動機。</a:t>
-            </a:r>
-          </a:p>
-          <a:p>
-            <a:r>
-              <a:rPr lang="zh-TW" altLang="en-US" dirty="0"/>
-              <a:t>主要是因為現在 </a:t>
-            </a:r>
-            <a:r>
-              <a:rPr lang="en-US" altLang="zh-TW" dirty="0"/>
-              <a:t>AI </a:t>
-            </a:r>
-            <a:r>
-              <a:rPr lang="zh-TW" altLang="en-US" dirty="0"/>
-              <a:t>技術發展非常快，</a:t>
-            </a:r>
-            <a:r>
-              <a:rPr lang="en-US" altLang="zh-TW" dirty="0"/>
-              <a:t>Copilot </a:t>
-            </a:r>
-            <a:r>
-              <a:rPr lang="zh-TW" altLang="en-US" dirty="0"/>
-              <a:t>基本上已經變成很多工程師寫程式時的日常工具。</a:t>
-            </a:r>
-            <a:br>
-              <a:rPr lang="zh-TW" altLang="en-US" dirty="0"/>
-            </a:br>
-            <a:r>
-              <a:rPr lang="zh-TW" altLang="en-US" dirty="0"/>
-              <a:t>不管你是寫前端、後端、資料科學，甚至寫文件，都會看到它跳出來給你建議。</a:t>
-            </a:r>
-          </a:p>
-          <a:p>
-            <a:r>
-              <a:rPr lang="zh-TW" altLang="en-US" dirty="0"/>
-              <a:t>但主要的核心問題是</a:t>
-            </a:r>
-            <a:br>
-              <a:rPr lang="en-US" altLang="zh-TW" dirty="0"/>
-            </a:br>
-            <a:r>
-              <a:rPr lang="zh-TW" altLang="en-US" dirty="0"/>
-              <a:t>「這些補全真的有提升生產力嗎？」</a:t>
-            </a:r>
-            <a:br>
-              <a:rPr lang="zh-TW" altLang="en-US" dirty="0"/>
-            </a:br>
-            <a:r>
-              <a:rPr lang="zh-TW" altLang="en-US" dirty="0"/>
-              <a:t>「那我們覺得有這些補全讓我們的速度更快，這是心理作用，還是真的更快？」</a:t>
-            </a:r>
-          </a:p>
-          <a:p>
-            <a:r>
-              <a:rPr lang="zh-TW" altLang="en-US" dirty="0"/>
-              <a:t>其實過去的研究很少把「補全行為」跟「開發者自己感受到的生產力」做連結。</a:t>
-            </a:r>
-            <a:br>
-              <a:rPr lang="zh-TW" altLang="en-US" dirty="0"/>
-            </a:br>
-            <a:r>
-              <a:rPr lang="zh-TW" altLang="en-US" dirty="0"/>
-              <a:t>因此這篇研究就想用大量 </a:t>
-            </a:r>
-            <a:r>
-              <a:rPr lang="en-US" altLang="zh-TW" dirty="0"/>
-              <a:t>IDE </a:t>
-            </a:r>
-            <a:r>
-              <a:rPr lang="zh-TW" altLang="en-US" dirty="0"/>
-              <a:t>數據加上問卷，來真正回答這件事情。</a:t>
-            </a:r>
-          </a:p>
-          <a:p>
             <a:endParaRPr lang="zh-TW" altLang="en-US" dirty="0"/>
           </a:p>
         </p:txBody>
@@ -1626,53 +1120,6 @@
           <a:bodyPr/>
           <a:lstStyle/>
           <a:p>
-            <a:r>
-              <a:rPr lang="zh-TW" altLang="en-US" dirty="0"/>
-              <a:t>這篇研究主要想回答四個問題：</a:t>
-            </a:r>
-          </a:p>
-          <a:p>
-            <a:r>
-              <a:rPr lang="zh-TW" altLang="en-US" dirty="0"/>
-              <a:t>第一，什麼樣的補全會提升開發者的生產力？</a:t>
-            </a:r>
-            <a:br>
-              <a:rPr lang="zh-TW" altLang="en-US" dirty="0"/>
-            </a:br>
-            <a:r>
-              <a:rPr lang="zh-TW" altLang="en-US" dirty="0"/>
-              <a:t>第二，補全越多是不是代表效率越高？</a:t>
-            </a:r>
-            <a:br>
-              <a:rPr lang="zh-TW" altLang="en-US" dirty="0"/>
-            </a:br>
-            <a:r>
-              <a:rPr lang="zh-TW" altLang="en-US" dirty="0"/>
-              <a:t>第三，哪些族群最能受益？新手？老手？還是某些語言使用者？</a:t>
-            </a:r>
-            <a:br>
-              <a:rPr lang="zh-TW" altLang="en-US" dirty="0"/>
-            </a:br>
-            <a:r>
-              <a:rPr lang="zh-TW" altLang="en-US" dirty="0"/>
-              <a:t>第四，補全效果會不會因為「使用情境」不同而改變，例如上班或下班？</a:t>
-            </a:r>
-          </a:p>
-          <a:p>
-            <a:r>
-              <a:rPr lang="zh-TW" altLang="en-US" dirty="0"/>
-              <a:t>這四個問題基本上涵蓋了 </a:t>
-            </a:r>
-            <a:r>
-              <a:rPr lang="en-US" altLang="zh-TW" dirty="0"/>
-              <a:t>Copilot </a:t>
-            </a:r>
-            <a:r>
-              <a:rPr lang="zh-TW" altLang="en-US" dirty="0"/>
-              <a:t>真實使用的不同面向。</a:t>
-            </a:r>
-          </a:p>
-          <a:p>
             <a:endParaRPr lang="zh-TW" altLang="en-US" dirty="0"/>
           </a:p>
         </p:txBody>
@@ -1757,96 +1204,7 @@
           <a:bodyPr/>
           <a:lstStyle/>
           <a:p>
-            <a:r>
-              <a:rPr lang="zh-TW" altLang="en-US" dirty="0"/>
-              <a:t>「這篇研究的研究方法主要分成兩個部分。</a:t>
-            </a:r>
-          </a:p>
-          <a:p>
-            <a:r>
-              <a:rPr lang="zh-TW" altLang="en-US" dirty="0"/>
-              <a:t>第一部分是 </a:t>
-            </a:r>
-            <a:r>
-              <a:rPr lang="zh-TW" altLang="en-US" b="1" dirty="0"/>
-              <a:t>從開發環境收集到的行為數據</a:t>
-            </a:r>
-            <a:r>
-              <a:rPr lang="zh-TW" altLang="en-US" dirty="0"/>
-              <a:t>。</a:t>
-            </a:r>
-            <a:br>
-              <a:rPr lang="zh-TW" altLang="en-US" dirty="0"/>
-            </a:br>
-            <a:r>
-              <a:rPr lang="zh-TW" altLang="en-US" dirty="0"/>
-              <a:t>也就是使用者在寫程式時，</a:t>
-            </a:r>
-            <a:r>
-              <a:rPr lang="en-US" altLang="zh-TW" dirty="0"/>
-              <a:t>Copilot </a:t>
-            </a:r>
-            <a:r>
-              <a:rPr lang="zh-TW" altLang="en-US" dirty="0"/>
-              <a:t>出現了哪些補全、哪些被顯示出來、哪些被使用者採用，以及哪些在後續的程式碼編輯中被保留下來。</a:t>
-            </a:r>
-            <a:br>
-              <a:rPr lang="zh-TW" altLang="en-US" dirty="0"/>
-            </a:br>
-            <a:r>
-              <a:rPr lang="zh-TW" altLang="en-US" dirty="0"/>
-              <a:t>這一部分可以讓我們客觀地觀察使用者實際的開發行為。</a:t>
-            </a:r>
-          </a:p>
-          <a:p>
-            <a:r>
-              <a:rPr lang="zh-TW" altLang="en-US" dirty="0"/>
-              <a:t>第二部分是 </a:t>
-            </a:r>
-            <a:r>
-              <a:rPr lang="zh-TW" altLang="en-US" b="1" dirty="0"/>
-              <a:t>使用者問卷資料</a:t>
-            </a:r>
-            <a:r>
-              <a:rPr lang="zh-TW" altLang="en-US" dirty="0"/>
-              <a:t>。</a:t>
-            </a:r>
-            <a:br>
-              <a:rPr lang="zh-TW" altLang="en-US" dirty="0"/>
-            </a:br>
-            <a:r>
-              <a:rPr lang="zh-TW" altLang="en-US" dirty="0"/>
-              <a:t>問卷的設計是參考 </a:t>
-            </a:r>
-            <a:r>
-              <a:rPr lang="en-US" altLang="zh-TW" dirty="0"/>
-              <a:t>SPACE </a:t>
-            </a:r>
-            <a:r>
-              <a:rPr lang="zh-TW" altLang="en-US" dirty="0"/>
-              <a:t>框架，主要分成滿意度、效率、協作、效能等面向，讓我們能夠量化開發者主觀的使用感受。</a:t>
-            </a:r>
-            <a:endParaRPr lang="en-US" altLang="zh-TW" dirty="0"/>
-          </a:p>
-          <a:p>
-            <a:r>
-              <a:rPr lang="zh-TW" altLang="en-US" dirty="0"/>
-              <a:t>用到的主要指標有 顯示率 接受率 持久率 以及 貢獻度。</a:t>
-            </a:r>
-          </a:p>
-          <a:p>
-            <a:r>
-              <a:rPr lang="zh-TW" altLang="en-US" dirty="0"/>
-              <a:t>在分析方法的部分，研究使用了相關分析、降維分析、回歸分析，同時也比較了不同時間週期的使用行為，去觀察開發者在長期使用 </a:t>
-            </a:r>
-            <a:r>
-              <a:rPr lang="en-US" altLang="zh-TW" dirty="0"/>
-              <a:t>Copilot </a:t>
-            </a:r>
-            <a:r>
-              <a:rPr lang="zh-TW" altLang="en-US" dirty="0"/>
-              <a:t>時是否有行為上的變化。」</a:t>
-            </a:r>
+            <a:endParaRPr lang="zh-TW" altLang="en-US" dirty="0"/>
           </a:p>
         </p:txBody>
       </p:sp>
@@ -1930,10 +1288,7 @@
           <a:bodyPr/>
           <a:lstStyle/>
           <a:p>
-            <a:r>
-              <a:rPr lang="zh-TW" altLang="en-US" dirty="0"/>
-              <a:t>那這一張圖就是根據族群去區分的人數比例圖，整體的</a:t>
-            </a:r>
+            <a:endParaRPr lang="zh-TW" altLang="en-US" dirty="0"/>
           </a:p>
         </p:txBody>
       </p:sp>
@@ -2017,64 +1372,6 @@
           <a:bodyPr/>
           <a:lstStyle/>
           <a:p>
-            <a:r>
-              <a:rPr lang="zh-TW" altLang="en-US" dirty="0"/>
-              <a:t>這張圖非常重要，他是程式碼補全流程階梯圖，它顯示出補全從「有機會補」到「被展示」到「被接受」的整個流程。</a:t>
-            </a:r>
-            <a:endParaRPr lang="en-US" altLang="zh-TW" dirty="0"/>
-          </a:p>
-          <a:p>
-            <a:r>
-              <a:rPr lang="zh-TW" altLang="en-US" dirty="0"/>
-              <a:t>首先，補全機會這邊意思是說，只要你在編輯器打了一些程式，不一定要很長，那</a:t>
-            </a:r>
-            <a:r>
-              <a:rPr lang="en-US" altLang="zh-TW" dirty="0"/>
-              <a:t>AI</a:t>
-            </a:r>
-            <a:r>
-              <a:rPr lang="zh-TW" altLang="en-US" dirty="0"/>
-              <a:t>就會去觀察你的上下文邏輯，然後去試圖生成一個對你來說可能可用的補全，那每當他出現了一次這種想法，在這邊就算一次的補全機會，所以可以看到這張表格，幾乎每分鐘出現</a:t>
-            </a:r>
-            <a:r>
-              <a:rPr lang="en-US" altLang="zh-TW" dirty="0"/>
-              <a:t>2~3</a:t>
-            </a:r>
-            <a:r>
-              <a:rPr lang="zh-TW" altLang="en-US" dirty="0"/>
-              <a:t>個程式碼補全，由此可知</a:t>
-            </a:r>
-            <a:r>
-              <a:rPr lang="en-US" altLang="zh-TW" dirty="0"/>
-              <a:t>AI</a:t>
-            </a:r>
-            <a:r>
-              <a:rPr lang="zh-TW" altLang="en-US" dirty="0"/>
-              <a:t>是真的無時無刻在替你思考，但最終能不能真正顯示出來，還是需要當時的情境來判斷。</a:t>
-            </a:r>
-          </a:p>
-          <a:p>
-            <a:r>
-              <a:rPr lang="zh-TW" altLang="en-US" dirty="0"/>
-              <a:t>再往後看我們其實可以看到也不是顯示出來的補全都會被採用，平均下來，採用率大概是 </a:t>
-            </a:r>
-            <a:r>
-              <a:rPr lang="en-US" altLang="zh-TW" dirty="0"/>
-              <a:t>27%</a:t>
-            </a:r>
-            <a:r>
-              <a:rPr lang="zh-TW" altLang="en-US" dirty="0"/>
-              <a:t>，也就是說每四個補全只有一個會被真正用到。</a:t>
-            </a:r>
-            <a:br>
-              <a:rPr lang="zh-TW" altLang="en-US" dirty="0"/>
-            </a:br>
-            <a:r>
-              <a:rPr lang="zh-TW" altLang="en-US" dirty="0"/>
-              <a:t>所以這邊可以觀察到的是補得多不代表有效，重點是「被採用的補全」。</a:t>
-            </a:r>
-          </a:p>
-          <a:p>
             <a:endParaRPr lang="zh-TW" altLang="en-US" dirty="0"/>
           </a:p>
         </p:txBody>
@@ -2159,87 +1456,6 @@
           <a:bodyPr/>
           <a:lstStyle/>
           <a:p>
-            <a:r>
-              <a:rPr lang="zh-TW" altLang="en-US" dirty="0"/>
-              <a:t>那這項研究設計了幾個非常關鍵的主要指標，紅色標示處是這篇論文的主軸：</a:t>
-            </a:r>
-          </a:p>
-          <a:p>
-            <a:r>
-              <a:rPr lang="zh-TW" altLang="en-US" b="1" dirty="0"/>
-              <a:t>第一個是顯示率</a:t>
-            </a:r>
-            <a:r>
-              <a:rPr lang="zh-TW" altLang="en-US" dirty="0"/>
-              <a:t>：</a:t>
-            </a:r>
-            <a:r>
-              <a:rPr lang="en-US" altLang="zh-TW" dirty="0"/>
-              <a:t>Copilot </a:t>
-            </a:r>
-            <a:r>
-              <a:rPr lang="zh-TW" altLang="en-US" dirty="0"/>
-              <a:t>顯示了多少補全</a:t>
-            </a:r>
-          </a:p>
-          <a:p>
-            <a:r>
-              <a:rPr lang="zh-TW" altLang="en-US" b="1" dirty="0"/>
-              <a:t>第二個是接受率</a:t>
-            </a:r>
-            <a:r>
-              <a:rPr lang="zh-TW" altLang="en-US" dirty="0"/>
-              <a:t>：使用者接受了多少</a:t>
-            </a:r>
-          </a:p>
-          <a:p>
-            <a:r>
-              <a:rPr lang="zh-TW" altLang="en-US" b="1" dirty="0"/>
-              <a:t>第三個是持久率</a:t>
-            </a:r>
-            <a:r>
-              <a:rPr lang="zh-TW" altLang="en-US" dirty="0"/>
-              <a:t>：接受後的補全，有多久留在程式碼裡沒有被刪掉或改掉</a:t>
-            </a:r>
-          </a:p>
-          <a:p>
-            <a:r>
-              <a:rPr lang="zh-TW" altLang="en-US" dirty="0"/>
-              <a:t>那持久率</a:t>
-            </a:r>
-            <a:r>
-              <a:rPr lang="en-US" altLang="zh-TW" dirty="0"/>
-              <a:t> </a:t>
-            </a:r>
-            <a:r>
-              <a:rPr lang="zh-TW" altLang="en-US" dirty="0"/>
-              <a:t>是一個很有趣的概念，如果使用者接受補全但馬上刪掉，代表那個補全其實沒有價值，</a:t>
-            </a:r>
-            <a:br>
-              <a:rPr lang="zh-TW" altLang="en-US" dirty="0"/>
-            </a:br>
-            <a:r>
-              <a:rPr lang="zh-TW" altLang="en-US" dirty="0"/>
-              <a:t>但如果補全能存在 </a:t>
-            </a:r>
-            <a:r>
-              <a:rPr lang="en-US" altLang="zh-TW" dirty="0"/>
-              <a:t>30 </a:t>
-            </a:r>
-            <a:r>
-              <a:rPr lang="zh-TW" altLang="en-US" dirty="0"/>
-              <a:t>秒、甚至 </a:t>
-            </a:r>
-            <a:r>
-              <a:rPr lang="en-US" altLang="zh-TW" dirty="0"/>
-              <a:t>5 </a:t>
-            </a:r>
-            <a:r>
-              <a:rPr lang="zh-TW" altLang="en-US" dirty="0"/>
-              <a:t>分鐘或更久，代表確實減少了工作量。</a:t>
-            </a:r>
-          </a:p>
-          <a:p>
             <a:endParaRPr lang="zh-TW" altLang="en-US" dirty="0"/>
           </a:p>
         </p:txBody>
@@ -2324,131 +1540,6 @@
           <a:bodyPr/>
           <a:lstStyle/>
           <a:p>
-            <a:r>
-              <a:rPr lang="zh-TW" altLang="en-US" dirty="0"/>
-              <a:t>這張相關矩陣主要想看的是：</a:t>
-            </a:r>
-            <a:br>
-              <a:rPr lang="zh-TW" altLang="en-US" dirty="0"/>
-            </a:br>
-            <a:r>
-              <a:rPr lang="en-US" altLang="zh-TW" b="1" dirty="0"/>
-              <a:t>Copilot </a:t>
-            </a:r>
-            <a:r>
-              <a:rPr lang="zh-TW" altLang="en-US" b="1" dirty="0"/>
-              <a:t>的哪些行為指標，和開發者的生產力感受最有關聯。</a:t>
-            </a:r>
-            <a:endParaRPr lang="zh-TW" altLang="en-US" dirty="0"/>
-          </a:p>
-          <a:p>
-            <a:r>
-              <a:rPr lang="zh-TW" altLang="en-US" dirty="0"/>
-              <a:t>從這張圖我們可以看到：</a:t>
-            </a:r>
-          </a:p>
-          <a:p>
-            <a:r>
-              <a:rPr lang="zh-TW" altLang="en-US" dirty="0"/>
-              <a:t>第一，</a:t>
-            </a:r>
-            <a:r>
-              <a:rPr lang="en-US" altLang="zh-TW" b="1" dirty="0"/>
-              <a:t>acceptance rate</a:t>
-            </a:r>
-            <a:r>
-              <a:rPr lang="zh-TW" altLang="en-US" b="1" dirty="0"/>
-              <a:t>（</a:t>
-            </a:r>
-            <a:r>
-              <a:rPr lang="en-US" altLang="zh-TW" b="1" dirty="0" err="1"/>
-              <a:t>accepted_per_shown</a:t>
-            </a:r>
-            <a:r>
-              <a:rPr lang="zh-TW" altLang="en-US" b="1" dirty="0"/>
-              <a:t>）跟大多數 </a:t>
-            </a:r>
-            <a:r>
-              <a:rPr lang="en-US" altLang="zh-TW" b="1" dirty="0"/>
-              <a:t>productivity </a:t>
-            </a:r>
-            <a:r>
-              <a:rPr lang="zh-TW" altLang="en-US" b="1" dirty="0"/>
-              <a:t>問項呈現最強正相關。</a:t>
-            </a:r>
-            <a:br>
-              <a:rPr lang="zh-TW" altLang="en-US" dirty="0"/>
-            </a:br>
-            <a:r>
-              <a:rPr lang="zh-TW" altLang="en-US" dirty="0"/>
-              <a:t>包含完成任務速度、減少搜尋時間、降低挫折感等。</a:t>
-            </a:r>
-          </a:p>
-          <a:p>
-            <a:r>
-              <a:rPr lang="zh-TW" altLang="en-US" dirty="0"/>
-              <a:t>第二，</a:t>
-            </a:r>
-            <a:r>
-              <a:rPr lang="en-US" altLang="zh-TW" b="1" dirty="0"/>
-              <a:t>shown</a:t>
-            </a:r>
-            <a:r>
-              <a:rPr lang="zh-TW" altLang="en-US" b="1" dirty="0"/>
-              <a:t>（也就是補全被展示的次數）本身的相關度很低。</a:t>
-            </a:r>
-            <a:br>
-              <a:rPr lang="zh-TW" altLang="en-US" dirty="0"/>
-            </a:br>
-            <a:r>
-              <a:rPr lang="zh-TW" altLang="en-US" dirty="0"/>
-              <a:t>表示補得多不等於有用，重點在於「補全有沒有被採用」。</a:t>
-            </a:r>
-          </a:p>
-          <a:p>
-            <a:r>
-              <a:rPr lang="zh-TW" altLang="en-US" dirty="0"/>
-              <a:t>第三，能看到 </a:t>
-            </a:r>
-            <a:r>
-              <a:rPr lang="en-US" altLang="zh-TW" dirty="0"/>
-              <a:t>productivity </a:t>
-            </a:r>
-            <a:r>
-              <a:rPr lang="zh-TW" altLang="en-US" dirty="0"/>
-              <a:t>問項彼此之間高度相關。</a:t>
-            </a:r>
-            <a:br>
-              <a:rPr lang="zh-TW" altLang="en-US" dirty="0"/>
-            </a:br>
-            <a:r>
-              <a:rPr lang="zh-TW" altLang="en-US" dirty="0"/>
-              <a:t>這代表生產力其實是一個整體心流體驗，而不是單一行為可以解釋。</a:t>
-            </a:r>
-          </a:p>
-          <a:p>
-            <a:r>
-              <a:rPr lang="zh-TW" altLang="en-US" dirty="0"/>
-              <a:t>這一頁的核心 </a:t>
-            </a:r>
-            <a:r>
-              <a:rPr lang="en-US" altLang="zh-TW" dirty="0"/>
-              <a:t>takeaway </a:t>
-            </a:r>
-            <a:r>
-              <a:rPr lang="zh-TW" altLang="en-US" dirty="0"/>
-              <a:t>就是：</a:t>
-            </a:r>
-            <a:br>
-              <a:rPr lang="zh-TW" altLang="en-US" dirty="0"/>
-            </a:br>
-            <a:r>
-              <a:rPr lang="zh-TW" altLang="en-US" b="1" dirty="0"/>
-              <a:t>補全的數量不是關鍵，補全被採用的比例才是最能反映生產力的指標。</a:t>
-            </a:r>
-            <a:endParaRPr lang="zh-TW" altLang="en-US" dirty="0"/>
-          </a:p>
-          <a:p>
             <a:endParaRPr lang="zh-TW" altLang="en-US" dirty="0"/>
           </a:p>
         </p:txBody>
@@ -2532,81 +1623,6 @@
         <p:txBody>
           <a:bodyPr/>
           <a:lstStyle/>
-          <a:p>
-            <a:r>
-              <a:rPr lang="zh-TW" altLang="en-US" dirty="0"/>
-              <a:t>透過 </a:t>
-            </a:r>
-            <a:r>
-              <a:rPr lang="en-US" altLang="zh-TW" dirty="0"/>
-              <a:t>PLS </a:t>
-            </a:r>
-            <a:r>
-              <a:rPr lang="zh-TW" altLang="en-US" dirty="0"/>
-              <a:t>的降維結果，我們可以更清楚看到哪些指標真正主導開發者的生產力。</a:t>
-            </a:r>
-          </a:p>
-          <a:p>
-            <a:r>
-              <a:rPr lang="zh-TW" altLang="en-US" dirty="0"/>
-              <a:t>結果非常明顯：</a:t>
-            </a:r>
-            <a:br>
-              <a:rPr lang="zh-TW" altLang="en-US" dirty="0"/>
-            </a:br>
-            <a:r>
-              <a:rPr lang="zh-TW" altLang="en-US" b="1" dirty="0"/>
-              <a:t>接受率在第一主成分中權重最高。</a:t>
-            </a:r>
-            <a:endParaRPr lang="zh-TW" altLang="en-US" dirty="0"/>
-          </a:p>
-          <a:p>
-            <a:r>
-              <a:rPr lang="zh-TW" altLang="en-US" dirty="0"/>
-              <a:t>其他指標像 </a:t>
-            </a:r>
-            <a:r>
-              <a:rPr lang="en-US" altLang="zh-TW" dirty="0"/>
-              <a:t>persistence </a:t>
-            </a:r>
-            <a:r>
-              <a:rPr lang="zh-TW" altLang="en-US" dirty="0"/>
-              <a:t>或補全的字數貢獻，都只是次要角色。</a:t>
-            </a:r>
-          </a:p>
-          <a:p>
-            <a:r>
-              <a:rPr lang="zh-TW" altLang="en-US" dirty="0"/>
-              <a:t>這再次驗證了研究想傳達的核心觀念</a:t>
-            </a:r>
-            <a:r>
-              <a:rPr lang="en-US" altLang="zh-TW" dirty="0"/>
-              <a:t>——</a:t>
-            </a:r>
-            <a:br>
-              <a:rPr lang="en-US" altLang="zh-TW" dirty="0"/>
-            </a:br>
-            <a:r>
-              <a:rPr lang="zh-TW" altLang="en-US" dirty="0"/>
-              <a:t>「補全不是越多越好，而是越</a:t>
-            </a:r>
-            <a:r>
-              <a:rPr lang="en-US" altLang="zh-TW" dirty="0"/>
-              <a:t>『</a:t>
-            </a:r>
-            <a:r>
-              <a:rPr lang="zh-TW" altLang="en-US" dirty="0"/>
-              <a:t>可採用</a:t>
-            </a:r>
-            <a:r>
-              <a:rPr lang="en-US" altLang="zh-TW" dirty="0"/>
-              <a:t>』</a:t>
-            </a:r>
-            <a:r>
-              <a:rPr lang="zh-TW" altLang="en-US" dirty="0"/>
-              <a:t>越好。」</a:t>
-            </a:r>
-          </a:p>
           <a:p>
             <a:endParaRPr lang="zh-TW" altLang="en-US" dirty="0"/>
           </a:p>
@@ -2787,7 +1803,7 @@
           <a:p>
             <a:fld id="{5BCAD085-E8A6-8845-BD4E-CB4CCA059FC4}" type="datetimeFigureOut">
               <a:rPr lang="en-US" smtClean="0"/>
-              <a:t>12/8/2025</a:t>
+              <a:t>12/9/2025</a:t>
             </a:fld>
             <a:endParaRPr lang="en-US"/>
           </a:p>
@@ -3029,7 +2045,7 @@
           <a:p>
             <a:fld id="{5BCAD085-E8A6-8845-BD4E-CB4CCA059FC4}" type="datetimeFigureOut">
               <a:rPr lang="en-US" smtClean="0"/>
-              <a:t>12/8/2025</a:t>
+              <a:t>12/9/2025</a:t>
             </a:fld>
             <a:endParaRPr lang="en-US"/>
           </a:p>
@@ -3213,7 +2229,7 @@
           <a:p>
             <a:fld id="{5BCAD085-E8A6-8845-BD4E-CB4CCA059FC4}" type="datetimeFigureOut">
               <a:rPr lang="en-US" smtClean="0"/>
-              <a:t>12/8/2025</a:t>
+              <a:t>12/9/2025</a:t>
             </a:fld>
             <a:endParaRPr lang="en-US"/>
           </a:p>
@@ -3414,7 +2430,7 @@
           <a:p>
             <a:fld id="{5BCAD085-E8A6-8845-BD4E-CB4CCA059FC4}" type="datetimeFigureOut">
               <a:rPr lang="en-US" smtClean="0"/>
-              <a:t>12/8/2025</a:t>
+              <a:t>12/9/2025</a:t>
             </a:fld>
             <a:endParaRPr lang="en-US"/>
           </a:p>
@@ -3693,7 +2709,7 @@
           <a:p>
             <a:fld id="{5BCAD085-E8A6-8845-BD4E-CB4CCA059FC4}" type="datetimeFigureOut">
               <a:rPr lang="en-US" smtClean="0"/>
-              <a:t>12/8/2025</a:t>
+              <a:t>12/9/2025</a:t>
             </a:fld>
             <a:endParaRPr lang="en-US"/>
           </a:p>
@@ -3961,7 +2977,7 @@
           <a:p>
             <a:fld id="{5BCAD085-E8A6-8845-BD4E-CB4CCA059FC4}" type="datetimeFigureOut">
               <a:rPr lang="en-US" smtClean="0"/>
-              <a:t>12/8/2025</a:t>
+              <a:t>12/9/2025</a:t>
             </a:fld>
             <a:endParaRPr lang="en-US"/>
           </a:p>
@@ -4408,7 +3424,7 @@
           <a:p>
             <a:fld id="{5BCAD085-E8A6-8845-BD4E-CB4CCA059FC4}" type="datetimeFigureOut">
               <a:rPr lang="en-US" smtClean="0"/>
-              <a:t>12/8/2025</a:t>
+              <a:t>12/9/2025</a:t>
             </a:fld>
             <a:endParaRPr lang="en-US"/>
           </a:p>
@@ -4557,7 +3573,7 @@
           <a:p>
             <a:fld id="{5BCAD085-E8A6-8845-BD4E-CB4CCA059FC4}" type="datetimeFigureOut">
               <a:rPr lang="en-US" smtClean="0"/>
-              <a:t>12/8/2025</a:t>
+              <a:t>12/9/2025</a:t>
             </a:fld>
             <a:endParaRPr lang="en-US"/>
           </a:p>
@@ -4652,7 +3668,7 @@
           <a:p>
             <a:fld id="{5BCAD085-E8A6-8845-BD4E-CB4CCA059FC4}" type="datetimeFigureOut">
               <a:rPr lang="en-US" smtClean="0"/>
-              <a:t>12/8/2025</a:t>
+              <a:t>12/9/2025</a:t>
             </a:fld>
             <a:endParaRPr lang="en-US"/>
           </a:p>
@@ -4905,7 +3921,7 @@
           <a:p>
             <a:fld id="{5BCAD085-E8A6-8845-BD4E-CB4CCA059FC4}" type="datetimeFigureOut">
               <a:rPr lang="en-US" smtClean="0"/>
-              <a:t>12/8/2025</a:t>
+              <a:t>12/9/2025</a:t>
             </a:fld>
             <a:endParaRPr lang="en-US"/>
           </a:p>
@@ -5350,7 +4366,7 @@
           <a:p>
             <a:fld id="{5BCAD085-E8A6-8845-BD4E-CB4CCA059FC4}" type="datetimeFigureOut">
               <a:rPr lang="en-US" smtClean="0"/>
-              <a:t>12/8/2025</a:t>
+              <a:t>12/9/2025</a:t>
             </a:fld>
             <a:endParaRPr lang="en-US"/>
           </a:p>
@@ -5721,7 +4737,7 @@
           <a:p>
             <a:fld id="{5BCAD085-E8A6-8845-BD4E-CB4CCA059FC4}" type="datetimeFigureOut">
               <a:rPr lang="en-US" smtClean="0"/>
-              <a:t>12/8/2025</a:t>
+              <a:t>12/9/2025</a:t>
             </a:fld>
             <a:endParaRPr lang="en-US"/>
           </a:p>

--- a/slides/speaker2.pptx
+++ b/slides/speaker2.pptx
@@ -13,8 +13,8 @@
     <p:sldId id="258" r:id="rId4"/>
     <p:sldId id="259" r:id="rId5"/>
     <p:sldId id="269" r:id="rId6"/>
-    <p:sldId id="260" r:id="rId7"/>
-    <p:sldId id="261" r:id="rId8"/>
+    <p:sldId id="261" r:id="rId7"/>
+    <p:sldId id="260" r:id="rId8"/>
     <p:sldId id="268" r:id="rId9"/>
     <p:sldId id="263" r:id="rId10"/>
     <p:sldId id="264" r:id="rId11"/>
@@ -1402,7 +1402,7 @@
     </p:spTree>
     <p:extLst>
       <p:ext uri="{BB962C8B-B14F-4D97-AF65-F5344CB8AC3E}">
-        <p14:creationId xmlns:p14="http://schemas.microsoft.com/office/powerpoint/2010/main" val="2708874292"/>
+        <p14:creationId xmlns:p14="http://schemas.microsoft.com/office/powerpoint/2010/main" val="704507610"/>
       </p:ext>
     </p:extLst>
   </p:cSld>
@@ -1486,7 +1486,7 @@
     </p:spTree>
     <p:extLst>
       <p:ext uri="{BB962C8B-B14F-4D97-AF65-F5344CB8AC3E}">
-        <p14:creationId xmlns:p14="http://schemas.microsoft.com/office/powerpoint/2010/main" val="704507610"/>
+        <p14:creationId xmlns:p14="http://schemas.microsoft.com/office/powerpoint/2010/main" val="2708874292"/>
       </p:ext>
     </p:extLst>
   </p:cSld>
@@ -5198,8 +5198,8 @@
         </p:nvSpPr>
         <p:spPr>
           <a:xfrm>
-            <a:off x="990345" y="839233"/>
-            <a:ext cx="7654264" cy="1143000"/>
+            <a:off x="805086" y="1106944"/>
+            <a:ext cx="8024781" cy="1143000"/>
           </a:xfrm>
         </p:spPr>
         <p:txBody>
@@ -5209,10 +5209,10 @@
           <a:lstStyle/>
           <a:p>
             <a:r>
-              <a:rPr lang="en-US" altLang="zh-TW" dirty="0"/>
-              <a:t>Measuring GitHub Copilot’s Impact on Productivity</a:t>
-            </a:r>
-            <a:endParaRPr dirty="0"/>
+              <a:rPr lang="zh-TW" altLang="en-US" sz="3600" dirty="0"/>
+              <a:t>補全行為與開發者生產力之間的關係</a:t>
+            </a:r>
+            <a:endParaRPr sz="3600" dirty="0"/>
           </a:p>
         </p:txBody>
       </p:sp>
@@ -5703,7 +5703,7 @@
           <a:lstStyle/>
           <a:p>
             <a:r>
-              <a:rPr lang="zh-TW" altLang="en-US" b="1" dirty="0"/>
+              <a:rPr lang="zh-TW" altLang="en-US" dirty="0"/>
               <a:t>首次明確量化「使用行為」與「生產力感受」之間的連結。</a:t>
             </a:r>
             <a:br>
@@ -5711,29 +5711,13 @@
             </a:br>
             <a:r>
               <a:rPr lang="zh-TW" altLang="en-US" dirty="0"/>
-              <a:t>→ </a:t>
-            </a:r>
-            <a:r>
-              <a:rPr lang="en-US" altLang="zh-TW" dirty="0"/>
-              <a:t>Acceptance rate </a:t>
-            </a:r>
+              <a:t>→ 接受率能預測感知生產力。</a:t>
+            </a:r>
+            <a:endParaRPr lang="en-US" altLang="zh-TW" dirty="0"/>
+          </a:p>
+          <a:p>
             <a:r>
               <a:rPr lang="zh-TW" altLang="en-US" dirty="0"/>
-              <a:t>能預測 </a:t>
-            </a:r>
-            <a:r>
-              <a:rPr lang="en-US" altLang="zh-TW" dirty="0"/>
-              <a:t>perceived productivity</a:t>
-            </a:r>
-            <a:r>
-              <a:rPr lang="zh-TW" altLang="en-US" dirty="0"/>
-              <a:t>。</a:t>
-            </a:r>
-            <a:endParaRPr lang="en-US" altLang="zh-TW" dirty="0"/>
-          </a:p>
-          <a:p>
-            <a:r>
-              <a:rPr lang="zh-TW" altLang="en-US" b="1" dirty="0"/>
               <a:t>證明補全的「品質」比「數量」更重要。</a:t>
             </a:r>
             <a:br>
@@ -5741,29 +5725,13 @@
             </a:br>
             <a:r>
               <a:rPr lang="zh-TW" altLang="en-US" dirty="0"/>
-              <a:t>→ </a:t>
-            </a:r>
-            <a:r>
-              <a:rPr lang="en-US" altLang="zh-TW" dirty="0"/>
-              <a:t>Persistence </a:t>
-            </a:r>
+              <a:t>→ 持久率不如接受率有預測力。</a:t>
+            </a:r>
+            <a:endParaRPr lang="en-US" altLang="zh-TW" dirty="0"/>
+          </a:p>
+          <a:p>
             <a:r>
               <a:rPr lang="zh-TW" altLang="en-US" dirty="0"/>
-              <a:t>不如 </a:t>
-            </a:r>
-            <a:r>
-              <a:rPr lang="en-US" altLang="zh-TW" dirty="0"/>
-              <a:t>acceptance rate </a:t>
-            </a:r>
-            <a:r>
-              <a:rPr lang="zh-TW" altLang="en-US" dirty="0"/>
-              <a:t>有預測力。</a:t>
-            </a:r>
-            <a:endParaRPr lang="en-US" altLang="zh-TW" dirty="0"/>
-          </a:p>
-          <a:p>
-            <a:r>
-              <a:rPr lang="zh-TW" altLang="en-US" b="1" dirty="0"/>
               <a:t>揭露不同族群、不同時間的使用差異。</a:t>
             </a:r>
             <a:br>
@@ -5779,15 +5747,7 @@
             </a:r>
             <a:r>
               <a:rPr lang="zh-TW" altLang="en-US" dirty="0"/>
-              <a:t>使用者較高、晚上與週末 </a:t>
-            </a:r>
-            <a:r>
-              <a:rPr lang="en-US" altLang="zh-TW" dirty="0"/>
-              <a:t>acceptance rate </a:t>
-            </a:r>
-            <a:r>
-              <a:rPr lang="zh-TW" altLang="en-US" dirty="0"/>
-              <a:t>上升。</a:t>
+              <a:t>使用者較高、晚上與週末接受率上升。</a:t>
             </a:r>
             <a:endParaRPr lang="en-US" altLang="zh-TW" dirty="0"/>
           </a:p>
@@ -5871,40 +5831,27 @@
         </p:nvSpPr>
         <p:spPr/>
         <p:txBody>
-          <a:bodyPr/>
-          <a:lstStyle/>
-          <a:p>
-            <a:r>
-              <a:rPr dirty="0"/>
+          <a:bodyPr>
+            <a:normAutofit/>
+          </a:bodyPr>
+          <a:lstStyle/>
+          <a:p>
+            <a:r>
+              <a:rPr sz="2400" dirty="0"/>
               <a:t>AI </a:t>
             </a:r>
             <a:r>
-              <a:rPr dirty="0" err="1"/>
+              <a:rPr sz="2400" dirty="0" err="1"/>
               <a:t>補全提升屬小而穩定</a:t>
             </a:r>
-            <a:endParaRPr dirty="0"/>
-          </a:p>
-          <a:p>
-            <a:r>
-              <a:rPr dirty="0" err="1"/>
+            <a:endParaRPr sz="2400" dirty="0"/>
+          </a:p>
+          <a:p>
+            <a:r>
+              <a:rPr sz="2400" dirty="0" err="1"/>
               <a:t>被接受並保留的補全最有價值</a:t>
             </a:r>
-            <a:endParaRPr dirty="0"/>
-          </a:p>
-          <a:p>
-            <a:r>
-              <a:rPr dirty="0" err="1"/>
-              <a:t>中階工程師與</a:t>
-            </a:r>
-            <a:r>
-              <a:rPr dirty="0"/>
-              <a:t> JS </a:t>
-            </a:r>
-            <a:r>
-              <a:rPr dirty="0" err="1"/>
-              <a:t>使用者最受益</a:t>
-            </a:r>
-            <a:endParaRPr dirty="0"/>
+            <a:endParaRPr sz="2400" dirty="0"/>
           </a:p>
         </p:txBody>
       </p:sp>
@@ -6506,95 +6453,6 @@
 </file>
 
 <file path=ppt/slides/slide6.xml><?xml version="1.0" encoding="utf-8"?>
-<p:sld xmlns:a="http://schemas.openxmlformats.org/drawingml/2006/main" xmlns:r="http://schemas.openxmlformats.org/officeDocument/2006/relationships" xmlns:p="http://schemas.openxmlformats.org/presentationml/2006/main">
-  <p:cSld>
-    <p:spTree>
-      <p:nvGrpSpPr>
-        <p:cNvPr id="1" name=""/>
-        <p:cNvGrpSpPr/>
-        <p:nvPr/>
-      </p:nvGrpSpPr>
-      <p:grpSpPr>
-        <a:xfrm>
-          <a:off x="0" y="0"/>
-          <a:ext cx="0" cy="0"/>
-          <a:chOff x="0" y="0"/>
-          <a:chExt cx="0" cy="0"/>
-        </a:xfrm>
-      </p:grpSpPr>
-      <p:sp>
-        <p:nvSpPr>
-          <p:cNvPr id="2" name="Title 1"/>
-          <p:cNvSpPr>
-            <a:spLocks noGrp="1"/>
-          </p:cNvSpPr>
-          <p:nvPr>
-            <p:ph type="title"/>
-          </p:nvPr>
-        </p:nvSpPr>
-        <p:spPr>
-          <a:xfrm>
-            <a:off x="2753938" y="9996"/>
-            <a:ext cx="3863187" cy="566119"/>
-          </a:xfrm>
-        </p:spPr>
-        <p:txBody>
-          <a:bodyPr/>
-          <a:lstStyle/>
-          <a:p>
-            <a:r>
-              <a:rPr lang="zh-TW" altLang="en-US" dirty="0">
-                <a:latin typeface="Times New Roman" panose="02020603050405020304" pitchFamily="18" charset="0"/>
-                <a:cs typeface="Times New Roman" panose="02020603050405020304" pitchFamily="18" charset="0"/>
-              </a:rPr>
-              <a:t>程式碼補全流程階梯</a:t>
-            </a:r>
-            <a:endParaRPr dirty="0">
-              <a:latin typeface="Times New Roman" panose="02020603050405020304" pitchFamily="18" charset="0"/>
-              <a:cs typeface="Times New Roman" panose="02020603050405020304" pitchFamily="18" charset="0"/>
-            </a:endParaRPr>
-          </a:p>
-        </p:txBody>
-      </p:sp>
-      <p:pic>
-        <p:nvPicPr>
-          <p:cNvPr id="7" name="圖片 6">
-            <a:extLst>
-              <a:ext uri="{FF2B5EF4-FFF2-40B4-BE49-F238E27FC236}">
-                <a16:creationId xmlns:a16="http://schemas.microsoft.com/office/drawing/2014/main" id="{8A211C53-0830-699B-4257-53DF14DBFBCB}"/>
-              </a:ext>
-            </a:extLst>
-          </p:cNvPr>
-          <p:cNvPicPr>
-            <a:picLocks noChangeAspect="1"/>
-          </p:cNvPicPr>
-          <p:nvPr/>
-        </p:nvPicPr>
-        <p:blipFill>
-          <a:blip r:embed="rId3"/>
-          <a:stretch>
-            <a:fillRect/>
-          </a:stretch>
-        </p:blipFill>
-        <p:spPr>
-          <a:xfrm>
-            <a:off x="1233519" y="569978"/>
-            <a:ext cx="6904027" cy="5929014"/>
-          </a:xfrm>
-          <a:prstGeom prst="rect">
-            <a:avLst/>
-          </a:prstGeom>
-        </p:spPr>
-      </p:pic>
-    </p:spTree>
-  </p:cSld>
-  <p:clrMapOvr>
-    <a:masterClrMapping/>
-  </p:clrMapOvr>
-</p:sld>
-</file>
-
-<file path=ppt/slides/slide7.xml><?xml version="1.0" encoding="utf-8"?>
 <p:sld xmlns:a="http://schemas.openxmlformats.org/drawingml/2006/main" xmlns:r="http://schemas.openxmlformats.org/officeDocument/2006/relationships" xmlns:p="http://schemas.openxmlformats.org/presentationml/2006/main">
   <p:cSld>
     <p:spTree>
@@ -6755,10 +6613,10 @@
       </p:cxnSp>
       <p:cxnSp>
         <p:nvCxnSpPr>
-          <p:cNvPr id="10" name="直線接點 9">
+          <p:cNvPr id="3" name="直線接點 2">
             <a:extLst>
               <a:ext uri="{FF2B5EF4-FFF2-40B4-BE49-F238E27FC236}">
-                <a16:creationId xmlns:a16="http://schemas.microsoft.com/office/drawing/2014/main" id="{6D253946-69A8-A5CC-0F07-6FAA701419F5}"/>
+                <a16:creationId xmlns:a16="http://schemas.microsoft.com/office/drawing/2014/main" id="{80FF0CCC-4952-1C4A-E785-8A0857C5FCF8}"/>
               </a:ext>
             </a:extLst>
           </p:cNvPr>
@@ -6769,7 +6627,7 @@
         </p:nvCxnSpPr>
         <p:spPr>
           <a:xfrm>
-            <a:off x="1159877" y="4477901"/>
+            <a:off x="1116919" y="2979472"/>
             <a:ext cx="1294888" cy="0"/>
           </a:xfrm>
           <a:prstGeom prst="line">
@@ -6792,45 +6650,95 @@
           </a:fontRef>
         </p:style>
       </p:cxnSp>
-      <p:cxnSp>
-        <p:nvCxnSpPr>
-          <p:cNvPr id="15" name="直線接點 14">
+    </p:spTree>
+  </p:cSld>
+  <p:clrMapOvr>
+    <a:masterClrMapping/>
+  </p:clrMapOvr>
+</p:sld>
+</file>
+
+<file path=ppt/slides/slide7.xml><?xml version="1.0" encoding="utf-8"?>
+<p:sld xmlns:a="http://schemas.openxmlformats.org/drawingml/2006/main" xmlns:r="http://schemas.openxmlformats.org/officeDocument/2006/relationships" xmlns:p="http://schemas.openxmlformats.org/presentationml/2006/main">
+  <p:cSld>
+    <p:spTree>
+      <p:nvGrpSpPr>
+        <p:cNvPr id="1" name=""/>
+        <p:cNvGrpSpPr/>
+        <p:nvPr/>
+      </p:nvGrpSpPr>
+      <p:grpSpPr>
+        <a:xfrm>
+          <a:off x="0" y="0"/>
+          <a:ext cx="0" cy="0"/>
+          <a:chOff x="0" y="0"/>
+          <a:chExt cx="0" cy="0"/>
+        </a:xfrm>
+      </p:grpSpPr>
+      <p:sp>
+        <p:nvSpPr>
+          <p:cNvPr id="2" name="Title 1"/>
+          <p:cNvSpPr>
+            <a:spLocks noGrp="1"/>
+          </p:cNvSpPr>
+          <p:nvPr>
+            <p:ph type="title"/>
+          </p:nvPr>
+        </p:nvSpPr>
+        <p:spPr>
+          <a:xfrm>
+            <a:off x="2753938" y="9996"/>
+            <a:ext cx="3863187" cy="566119"/>
+          </a:xfrm>
+        </p:spPr>
+        <p:txBody>
+          <a:bodyPr/>
+          <a:lstStyle/>
+          <a:p>
+            <a:r>
+              <a:rPr lang="zh-TW" altLang="en-US" dirty="0">
+                <a:latin typeface="Times New Roman" panose="02020603050405020304" pitchFamily="18" charset="0"/>
+                <a:cs typeface="Times New Roman" panose="02020603050405020304" pitchFamily="18" charset="0"/>
+              </a:rPr>
+              <a:t>程式碼補全流程階梯</a:t>
+            </a:r>
+            <a:endParaRPr dirty="0">
+              <a:latin typeface="Times New Roman" panose="02020603050405020304" pitchFamily="18" charset="0"/>
+              <a:cs typeface="Times New Roman" panose="02020603050405020304" pitchFamily="18" charset="0"/>
+            </a:endParaRPr>
+          </a:p>
+        </p:txBody>
+      </p:sp>
+      <p:pic>
+        <p:nvPicPr>
+          <p:cNvPr id="7" name="圖片 6">
             <a:extLst>
               <a:ext uri="{FF2B5EF4-FFF2-40B4-BE49-F238E27FC236}">
-                <a16:creationId xmlns:a16="http://schemas.microsoft.com/office/drawing/2014/main" id="{1C1A6668-966E-5035-78F7-3CBA3B76C3FB}"/>
+                <a16:creationId xmlns:a16="http://schemas.microsoft.com/office/drawing/2014/main" id="{8A211C53-0830-699B-4257-53DF14DBFBCB}"/>
               </a:ext>
             </a:extLst>
           </p:cNvPr>
-          <p:cNvCxnSpPr>
-            <a:cxnSpLocks/>
-          </p:cNvCxnSpPr>
+          <p:cNvPicPr>
+            <a:picLocks noChangeAspect="1"/>
+          </p:cNvPicPr>
           <p:nvPr/>
-        </p:nvCxnSpPr>
+        </p:nvPicPr>
+        <p:blipFill>
+          <a:blip r:embed="rId3"/>
+          <a:stretch>
+            <a:fillRect/>
+          </a:stretch>
+        </p:blipFill>
         <p:spPr>
           <a:xfrm>
-            <a:off x="1159877" y="4759177"/>
-            <a:ext cx="1571049" cy="0"/>
+            <a:off x="1233519" y="569978"/>
+            <a:ext cx="6904027" cy="5929014"/>
           </a:xfrm>
-          <a:prstGeom prst="line">
+          <a:prstGeom prst="rect">
             <a:avLst/>
           </a:prstGeom>
-          <a:ln w="28575"/>
         </p:spPr>
-        <p:style>
-          <a:lnRef idx="1">
-            <a:schemeClr val="accent1"/>
-          </a:lnRef>
-          <a:fillRef idx="0">
-            <a:schemeClr val="accent1"/>
-          </a:fillRef>
-          <a:effectRef idx="0">
-            <a:schemeClr val="accent1"/>
-          </a:effectRef>
-          <a:fontRef idx="minor">
-            <a:schemeClr val="tx1"/>
-          </a:fontRef>
-        </p:style>
-      </p:cxnSp>
+      </p:pic>
     </p:spTree>
   </p:cSld>
   <p:clrMapOvr>
@@ -7016,8 +6924,8 @@
         </p:blipFill>
         <p:spPr>
           <a:xfrm>
-            <a:off x="1362396" y="593102"/>
-            <a:ext cx="6707644" cy="6112601"/>
+            <a:off x="1362313" y="586966"/>
+            <a:ext cx="6701589" cy="6107083"/>
           </a:xfrm>
           <a:prstGeom prst="rect">
             <a:avLst/>
